--- a/projects/drug-information-practical/slides/ch03-study-designs.pptx
+++ b/projects/drug-information-practical/slides/ch03-study-designs.pptx
@@ -28,6 +28,7 @@
     <p:sldId id="276" r:id="rId28"/>
     <p:sldId id="277" r:id="rId29"/>
     <p:sldId id="278" r:id="rId30"/>
+    <p:sldId id="279" r:id="rId31"/>
   </p:sldIdLst>
   <p:sldSz cx="12191695" cy="6858000" type="screen4x3"/>
   <p:notesSz cx="6858000" cy="9144000"/>
@@ -594,7 +595,7 @@
           <a:lstStyle/>
           <a:p>
             <a:r>
-              <a:t>Answer B: It starts from the outcome (liver failure) and looks back at exposure. A goes forward, C randomises, D measures one time point.</a:t>
+              <a:t>Discuss with the class: what would you ask, check and say?</a:t>
             </a:r>
           </a:p>
         </p:txBody>
@@ -664,7 +665,7 @@
           <a:lstStyle/>
           <a:p>
             <a:r>
-              <a:t>Answer C: The researcher assigns the treatment. A, B and D only observe.</a:t>
+              <a:t>Answer B: It starts from the outcome (liver failure) and looks back at exposure. A goes forward, C randomises, D measures one time point.</a:t>
             </a:r>
           </a:p>
         </p:txBody>
@@ -734,7 +735,7 @@
           <a:lstStyle/>
           <a:p>
             <a:r>
-              <a:t>Answer A: Pooled good RCTs give the strongest evidence. B, C and D are lower.</a:t>
+              <a:t>Answer C: The researcher assigns the treatment. A, B and D only observe.</a:t>
             </a:r>
           </a:p>
         </p:txBody>
@@ -804,7 +805,7 @@
           <a:lstStyle/>
           <a:p>
             <a:r>
-              <a:t>Answer D: ARR = 10% − 5% = 5% = 0.05; NNT = 1 ÷ 0.05 = 20. A, B and C are miscalculations.</a:t>
+              <a:t>Answer A: Pooled good RCTs give the strongest evidence. B, C and D are lower.</a:t>
             </a:r>
           </a:p>
         </p:txBody>
@@ -874,7 +875,7 @@
           <a:lstStyle/>
           <a:p>
             <a:r>
-              <a:t>Answer A: Case-control studies suit rare outcomes. B would need huge numbers, C shows prevalence, D cannot compare.</a:t>
+              <a:t>Answer D: ARR = 10% − 5% = 5% = 0.05; NNT = 1 ÷ 0.05 = 20. A, B and C are miscalculations.</a:t>
             </a:r>
           </a:p>
         </p:txBody>
@@ -944,6 +945,76 @@
           <a:lstStyle/>
           <a:p>
             <a:r>
+              <a:t>Answer A: Case-control studies suit rare outcomes. B would need huge numbers, C shows prevalence, D cannot compare.</a:t>
+            </a:r>
+          </a:p>
+        </p:txBody>
+      </p:sp>
+      <p:sp>
+        <p:nvSpPr>
+          <p:cNvPr id="4" name="Slide Number Placeholder 3"/>
+          <p:cNvSpPr>
+            <a:spLocks noGrp="1"/>
+          </p:cNvSpPr>
+          <p:nvPr>
+            <p:ph type="sldNum" idx="5" sz="quarter"/>
+          </p:nvPr>
+        </p:nvSpPr>
+        <p:spPr/>
+      </p:sp>
+    </p:spTree>
+  </p:cSld>
+  <p:clrMapOvr>
+    <a:masterClrMapping/>
+  </p:clrMapOvr>
+</p:notes>
+</file>
+
+<file path=ppt/notesSlides/notesSlide16.xml><?xml version="1.0" encoding="utf-8"?>
+<p:notes xmlns:a="http://schemas.openxmlformats.org/drawingml/2006/main" xmlns:p="http://schemas.openxmlformats.org/presentationml/2006/main" xmlns:r="http://schemas.openxmlformats.org/officeDocument/2006/relationships">
+  <p:cSld>
+    <p:spTree>
+      <p:nvGrpSpPr>
+        <p:cNvPr id="1" name=""/>
+        <p:cNvGrpSpPr/>
+        <p:nvPr/>
+      </p:nvGrpSpPr>
+      <p:grpSpPr>
+        <a:xfrm>
+          <a:off x="0" y="0"/>
+          <a:ext cx="0" cy="0"/>
+          <a:chOff x="0" y="0"/>
+          <a:chExt cx="0" cy="0"/>
+        </a:xfrm>
+      </p:grpSpPr>
+      <p:sp>
+        <p:nvSpPr>
+          <p:cNvPr id="2" name="Slide Image Placeholder 1"/>
+          <p:cNvSpPr>
+            <a:spLocks noGrp="1"/>
+          </p:cNvSpPr>
+          <p:nvPr>
+            <p:ph type="sldImg" idx="2"/>
+          </p:nvPr>
+        </p:nvSpPr>
+        <p:spPr/>
+      </p:sp>
+      <p:sp>
+        <p:nvSpPr>
+          <p:cNvPr id="3" name="Notes Placeholder 2"/>
+          <p:cNvSpPr>
+            <a:spLocks noGrp="1"/>
+          </p:cNvSpPr>
+          <p:nvPr>
+            <p:ph type="body" idx="3" sz="quarter"/>
+          </p:nvPr>
+        </p:nvSpPr>
+        <p:spPr/>
+        <p:txBody>
+          <a:bodyPr/>
+          <a:lstStyle/>
+          <a:p>
+            <a:r>
               <a:t>Model answer: (a) An RCT against metformin: randomisation removes confounding. (b) A case-control study (or reports to pharmacovigilance first): pancreatitis is rare. (c) A cohort study or a long outcome trial: it follows patients forward in time.</a:t>
             </a:r>
           </a:p>
@@ -1294,7 +1365,7 @@
           <a:lstStyle/>
           <a:p>
             <a:r>
-              <a:t>Stronger designs control bias better. From weakest to strongest: Bias is a systematic error that pushes results away from the truth. Three types appear again and again: When you read a study, ask which bias could explain the result. If one could, trust the result less. The pyramid is a guide, not a law. A large, well-run cohort study can be more useful than a small, poor RCT. Quality matters as much as design.</a:t>
+              <a:t>A value of 1 for OR or RR means no difference. Values below 1 mean lower risk with the exposure. Relative numbers can sound impressive when absolute numbers are small. A drug that cuts risk from 2% to 1% halves the risk (RR 0.5), but the ARR is only 1% and the NNT is 100. Always ask for the absolute numbers before you judge a benefit, and explain them to patients in the same plain way.</a:t>
             </a:r>
           </a:p>
         </p:txBody>
@@ -1504,7 +1575,7 @@
           <a:lstStyle/>
           <a:p>
             <a:r>
-              <a:t>Discuss with the class: what would you ask, check and say?</a:t>
+              <a:t>Stronger designs control bias better. From weakest to strongest: Bias is a systematic error that pushes results away from the truth. Three types appear again and again: When you read a study, ask which bias could explain the result. If one could, trust the result less. The pyramid is a guide, not a law. A large, well-run cohort study can be more useful than a small, poor RCT. Quality matters as much as design.</a:t>
             </a:r>
           </a:p>
         </p:txBody>
@@ -4544,7 +4615,7 @@
             <a:r>
               <a:rPr sz="28000" i="0" b="1">
                 <a:solidFill>
-                  <a:srgbClr val="8C3A22"/>
+                  <a:srgbClr val="8B3C25"/>
                 </a:solidFill>
                 <a:latin typeface="Cambria"/>
               </a:rPr>
@@ -4637,7 +4708,7 @@
             <a:r>
               <a:rPr sz="1200" i="0" b="1" spc="200">
                 <a:solidFill>
-                  <a:srgbClr val="F3E6D8"/>
+                  <a:srgbClr val="F2E5E1"/>
                 </a:solidFill>
                 <a:latin typeface="Calibri"/>
               </a:rPr>
@@ -4671,7 +4742,7 @@
             <a:r>
               <a:rPr sz="1400" i="0" b="1" spc="200">
                 <a:solidFill>
-                  <a:srgbClr val="F3E6D8"/>
+                  <a:srgbClr val="F2E5E1"/>
                 </a:solidFill>
                 <a:latin typeface="Calibri"/>
               </a:rPr>
@@ -4703,7 +4774,7 @@
             <a:r>
               <a:rPr sz="2000" i="1" b="0">
                 <a:solidFill>
-                  <a:srgbClr val="F3E6D8"/>
+                  <a:srgbClr val="F2E5E1"/>
                 </a:solidFill>
                 <a:latin typeface="Cambria"/>
               </a:rPr>
@@ -4737,11 +4808,11 @@
             <a:r>
               <a:rPr sz="1300" i="0" b="0">
                 <a:solidFill>
-                  <a:srgbClr val="F3E6D8"/>
-                </a:solidFill>
-                <a:latin typeface="Calibri"/>
-              </a:rPr>
-              <a:t>45-minute practical section  ·  5 questions  ·  1 practice case</a:t>
+                  <a:srgbClr val="F2E5E1"/>
+                </a:solidFill>
+                <a:latin typeface="Calibri"/>
+              </a:rPr>
+              <a:t>45 minutes  ·  5 questions  ·  1 practice case</a:t>
             </a:r>
           </a:p>
         </p:txBody>
@@ -4809,7 +4880,7 @@
           </a:fontRef>
         </p:style>
         <p:txBody>
-          <a:bodyPr rtlCol="0" anchor="ctr" lIns="0" rIns="0"/>
+          <a:bodyPr rtlCol="0" anchor="ctr" lIns="0" rIns="0" tIns="0" bIns="0"/>
           <a:lstStyle/>
           <a:p>
             <a:pPr algn="ctr"/>
@@ -4888,7 +4959,7 @@
                 </a:solidFill>
                 <a:latin typeface="Cambria"/>
               </a:rPr>
-              <a:t>Choosing the Design</a:t>
+              <a:t>Bias in one line each</a:t>
             </a:r>
           </a:p>
         </p:txBody>
@@ -4958,6 +5029,614 @@
                 <a:latin typeface="Calibri"/>
               </a:rPr>
               <a:t>10</a:t>
+            </a:r>
+          </a:p>
+        </p:txBody>
+      </p:sp>
+      <p:pic>
+        <p:nvPicPr>
+          <p:cNvPr id="7" name="Picture 6" descr="faculty-of-pharmacy.png"/>
+          <p:cNvPicPr>
+            <a:picLocks noChangeAspect="1"/>
+          </p:cNvPicPr>
+          <p:nvPr/>
+        </p:nvPicPr>
+        <p:blipFill>
+          <a:blip r:embed="rId3"/>
+          <a:stretch>
+            <a:fillRect/>
+          </a:stretch>
+        </p:blipFill>
+        <p:spPr>
+          <a:xfrm>
+            <a:off x="11247120" y="6309360"/>
+            <a:ext cx="384048" cy="384048"/>
+          </a:xfrm>
+          <a:prstGeom prst="rect">
+            <a:avLst/>
+          </a:prstGeom>
+        </p:spPr>
+      </p:pic>
+      <p:sp>
+        <p:nvSpPr>
+          <p:cNvPr id="8" name="TextBox 7"/>
+          <p:cNvSpPr txBox="1"/>
+          <p:nvPr/>
+        </p:nvSpPr>
+        <p:spPr>
+          <a:xfrm>
+            <a:off x="548640" y="1554480"/>
+            <a:ext cx="4480560" cy="4617720"/>
+          </a:xfrm>
+          <a:prstGeom prst="rect">
+            <a:avLst/>
+          </a:prstGeom>
+          <a:noFill/>
+        </p:spPr>
+        <p:txBody>
+          <a:bodyPr wrap="square" anchor="t" lIns="0" rIns="0" tIns="0" bIns="0">
+            <a:spAutoFit/>
+          </a:bodyPr>
+          <a:lstStyle/>
+          <a:p>
+            <a:pPr>
+              <a:spcAft>
+                <a:spcPts val="800"/>
+              </a:spcAft>
+            </a:pPr>
+            <a:r>
+              <a:rPr sz="1700" i="0" b="1">
+                <a:solidFill>
+                  <a:srgbClr val="2B211C"/>
+                </a:solidFill>
+                <a:latin typeface="Calibri"/>
+              </a:rPr>
+              <a:t>Bias</a:t>
+            </a:r>
+            <a:r>
+              <a:rPr sz="1700" i="0" b="0">
+                <a:solidFill>
+                  <a:srgbClr val="2B211C"/>
+                </a:solidFill>
+                <a:latin typeface="Calibri"/>
+              </a:rPr>
+              <a:t> is a systematic error that pushes results away from the truth. Three types appear again and again:</a:t>
+            </a:r>
+          </a:p>
+          <a:p>
+            <a:pPr>
+              <a:spcAft>
+                <a:spcPts val="800"/>
+              </a:spcAft>
+            </a:pPr>
+            <a:r>
+              <a:rPr sz="1700" i="0" b="0">
+                <a:solidFill>
+                  <a:srgbClr val="2B211C"/>
+                </a:solidFill>
+                <a:latin typeface="Calibri"/>
+              </a:rPr>
+              <a:t>When you read a study, ask which bias could explain the result. If one could, trust the result less.</a:t>
+            </a:r>
+          </a:p>
+          <a:p>
+            <a:pPr>
+              <a:spcAft>
+                <a:spcPts val="800"/>
+              </a:spcAft>
+            </a:pPr>
+            <a:r>
+              <a:rPr sz="1700" i="0" b="0">
+                <a:solidFill>
+                  <a:srgbClr val="2B211C"/>
+                </a:solidFill>
+                <a:latin typeface="Calibri"/>
+              </a:rPr>
+              <a:t>The pyramid is a guide, not a law. A large, well-run cohort study can be more useful than a small, poor RCT. Quality matters as much as design.</a:t>
+            </a:r>
+          </a:p>
+        </p:txBody>
+      </p:sp>
+      <p:sp>
+        <p:nvSpPr>
+          <p:cNvPr id="9" name="Oval 8"/>
+          <p:cNvSpPr/>
+          <p:nvPr/>
+        </p:nvSpPr>
+        <p:spPr>
+          <a:xfrm>
+            <a:off x="5394959" y="1572768"/>
+            <a:ext cx="402336" cy="402336"/>
+          </a:xfrm>
+          <a:prstGeom prst="ellipse">
+            <a:avLst/>
+          </a:prstGeom>
+          <a:solidFill>
+            <a:srgbClr val="E6EEEF"/>
+          </a:solidFill>
+          <a:ln>
+            <a:noFill/>
+          </a:ln>
+          <a:effectLst/>
+        </p:spPr>
+        <p:style>
+          <a:lnRef idx="1">
+            <a:schemeClr val="accent1"/>
+          </a:lnRef>
+          <a:fillRef idx="3">
+            <a:schemeClr val="accent1"/>
+          </a:fillRef>
+          <a:effectRef idx="2">
+            <a:schemeClr val="accent1"/>
+          </a:effectRef>
+          <a:fontRef idx="minor">
+            <a:schemeClr val="lt1"/>
+          </a:fontRef>
+        </p:style>
+        <p:txBody>
+          <a:bodyPr rtlCol="0" anchor="ctr" lIns="0" rIns="0" tIns="0" bIns="0"/>
+          <a:lstStyle/>
+          <a:p>
+            <a:pPr algn="ctr"/>
+            <a:r>
+              <a:rPr sz="1300" i="0" b="1">
+                <a:solidFill>
+                  <a:srgbClr val="2F6F7A"/>
+                </a:solidFill>
+                <a:latin typeface="Calibri"/>
+              </a:rPr>
+              <a:t>1</a:t>
+            </a:r>
+          </a:p>
+        </p:txBody>
+      </p:sp>
+      <p:sp>
+        <p:nvSpPr>
+          <p:cNvPr id="10" name="TextBox 9"/>
+          <p:cNvSpPr txBox="1"/>
+          <p:nvPr/>
+        </p:nvSpPr>
+        <p:spPr>
+          <a:xfrm>
+            <a:off x="5989320" y="1591056"/>
+            <a:ext cx="5653735" cy="1475612"/>
+          </a:xfrm>
+          <a:prstGeom prst="rect">
+            <a:avLst/>
+          </a:prstGeom>
+          <a:noFill/>
+        </p:spPr>
+        <p:txBody>
+          <a:bodyPr wrap="square" anchor="t" lIns="0" rIns="0" tIns="0" bIns="0">
+            <a:spAutoFit/>
+          </a:bodyPr>
+          <a:lstStyle/>
+          <a:p>
+            <a:r>
+              <a:rPr sz="2100" i="0" b="1">
+                <a:solidFill>
+                  <a:srgbClr val="2B211C"/>
+                </a:solidFill>
+                <a:latin typeface="Calibri"/>
+              </a:rPr>
+              <a:t>Selection bias:</a:t>
+            </a:r>
+            <a:r>
+              <a:rPr sz="2100" i="0" b="0">
+                <a:solidFill>
+                  <a:srgbClr val="2B211C"/>
+                </a:solidFill>
+                <a:latin typeface="Calibri"/>
+              </a:rPr>
+              <a:t> the groups differ before the study starts. Randomisation prevents it.</a:t>
+            </a:r>
+          </a:p>
+        </p:txBody>
+      </p:sp>
+      <p:sp>
+        <p:nvSpPr>
+          <p:cNvPr id="11" name="Oval 10"/>
+          <p:cNvSpPr/>
+          <p:nvPr/>
+        </p:nvSpPr>
+        <p:spPr>
+          <a:xfrm>
+            <a:off x="5394959" y="3094100"/>
+            <a:ext cx="402336" cy="402336"/>
+          </a:xfrm>
+          <a:prstGeom prst="ellipse">
+            <a:avLst/>
+          </a:prstGeom>
+          <a:solidFill>
+            <a:srgbClr val="E6EEEF"/>
+          </a:solidFill>
+          <a:ln>
+            <a:noFill/>
+          </a:ln>
+          <a:effectLst/>
+        </p:spPr>
+        <p:style>
+          <a:lnRef idx="1">
+            <a:schemeClr val="accent1"/>
+          </a:lnRef>
+          <a:fillRef idx="3">
+            <a:schemeClr val="accent1"/>
+          </a:fillRef>
+          <a:effectRef idx="2">
+            <a:schemeClr val="accent1"/>
+          </a:effectRef>
+          <a:fontRef idx="minor">
+            <a:schemeClr val="lt1"/>
+          </a:fontRef>
+        </p:style>
+        <p:txBody>
+          <a:bodyPr rtlCol="0" anchor="ctr" lIns="0" rIns="0" tIns="0" bIns="0"/>
+          <a:lstStyle/>
+          <a:p>
+            <a:pPr algn="ctr"/>
+            <a:r>
+              <a:rPr sz="1300" i="0" b="1">
+                <a:solidFill>
+                  <a:srgbClr val="2F6F7A"/>
+                </a:solidFill>
+                <a:latin typeface="Calibri"/>
+              </a:rPr>
+              <a:t>2</a:t>
+            </a:r>
+          </a:p>
+        </p:txBody>
+      </p:sp>
+      <p:sp>
+        <p:nvSpPr>
+          <p:cNvPr id="12" name="TextBox 11"/>
+          <p:cNvSpPr txBox="1"/>
+          <p:nvPr/>
+        </p:nvSpPr>
+        <p:spPr>
+          <a:xfrm>
+            <a:off x="5989320" y="3112388"/>
+            <a:ext cx="5653735" cy="1475612"/>
+          </a:xfrm>
+          <a:prstGeom prst="rect">
+            <a:avLst/>
+          </a:prstGeom>
+          <a:noFill/>
+        </p:spPr>
+        <p:txBody>
+          <a:bodyPr wrap="square" anchor="t" lIns="0" rIns="0" tIns="0" bIns="0">
+            <a:spAutoFit/>
+          </a:bodyPr>
+          <a:lstStyle/>
+          <a:p>
+            <a:r>
+              <a:rPr sz="2100" i="0" b="1">
+                <a:solidFill>
+                  <a:srgbClr val="2B211C"/>
+                </a:solidFill>
+                <a:latin typeface="Calibri"/>
+              </a:rPr>
+              <a:t>Recall bias:</a:t>
+            </a:r>
+            <a:r>
+              <a:rPr sz="2100" i="0" b="0">
+                <a:solidFill>
+                  <a:srgbClr val="2B211C"/>
+                </a:solidFill>
+                <a:latin typeface="Calibri"/>
+              </a:rPr>
+              <a:t> people with a disease remember past exposures better than healthy people. It affects case-control studies.</a:t>
+            </a:r>
+          </a:p>
+        </p:txBody>
+      </p:sp>
+      <p:sp>
+        <p:nvSpPr>
+          <p:cNvPr id="13" name="Oval 12"/>
+          <p:cNvSpPr/>
+          <p:nvPr/>
+        </p:nvSpPr>
+        <p:spPr>
+          <a:xfrm>
+            <a:off x="5394959" y="4615433"/>
+            <a:ext cx="402336" cy="402336"/>
+          </a:xfrm>
+          <a:prstGeom prst="ellipse">
+            <a:avLst/>
+          </a:prstGeom>
+          <a:solidFill>
+            <a:srgbClr val="E6EEEF"/>
+          </a:solidFill>
+          <a:ln>
+            <a:noFill/>
+          </a:ln>
+          <a:effectLst/>
+        </p:spPr>
+        <p:style>
+          <a:lnRef idx="1">
+            <a:schemeClr val="accent1"/>
+          </a:lnRef>
+          <a:fillRef idx="3">
+            <a:schemeClr val="accent1"/>
+          </a:fillRef>
+          <a:effectRef idx="2">
+            <a:schemeClr val="accent1"/>
+          </a:effectRef>
+          <a:fontRef idx="minor">
+            <a:schemeClr val="lt1"/>
+          </a:fontRef>
+        </p:style>
+        <p:txBody>
+          <a:bodyPr rtlCol="0" anchor="ctr" lIns="0" rIns="0" tIns="0" bIns="0"/>
+          <a:lstStyle/>
+          <a:p>
+            <a:pPr algn="ctr"/>
+            <a:r>
+              <a:rPr sz="1300" i="0" b="1">
+                <a:solidFill>
+                  <a:srgbClr val="2F6F7A"/>
+                </a:solidFill>
+                <a:latin typeface="Calibri"/>
+              </a:rPr>
+              <a:t>3</a:t>
+            </a:r>
+          </a:p>
+        </p:txBody>
+      </p:sp>
+      <p:sp>
+        <p:nvSpPr>
+          <p:cNvPr id="14" name="TextBox 13"/>
+          <p:cNvSpPr txBox="1"/>
+          <p:nvPr/>
+        </p:nvSpPr>
+        <p:spPr>
+          <a:xfrm>
+            <a:off x="5989320" y="4633722"/>
+            <a:ext cx="5653735" cy="1475612"/>
+          </a:xfrm>
+          <a:prstGeom prst="rect">
+            <a:avLst/>
+          </a:prstGeom>
+          <a:noFill/>
+        </p:spPr>
+        <p:txBody>
+          <a:bodyPr wrap="square" anchor="t" lIns="0" rIns="0" tIns="0" bIns="0">
+            <a:spAutoFit/>
+          </a:bodyPr>
+          <a:lstStyle/>
+          <a:p>
+            <a:r>
+              <a:rPr sz="2100" i="0" b="1">
+                <a:solidFill>
+                  <a:srgbClr val="2B211C"/>
+                </a:solidFill>
+                <a:latin typeface="Calibri"/>
+              </a:rPr>
+              <a:t>Confounding:</a:t>
+            </a:r>
+            <a:r>
+              <a:rPr sz="2100" i="0" b="0">
+                <a:solidFill>
+                  <a:srgbClr val="2B211C"/>
+                </a:solidFill>
+                <a:latin typeface="Calibri"/>
+              </a:rPr>
+              <a:t> a third factor explains the result. Matching, adjustment and randomisation reduce it.</a:t>
+            </a:r>
+          </a:p>
+        </p:txBody>
+      </p:sp>
+    </p:spTree>
+  </p:cSld>
+  <p:clrMapOvr>
+    <a:masterClrMapping/>
+  </p:clrMapOvr>
+</p:sld>
+</file>
+
+<file path=ppt/slides/slide11.xml><?xml version="1.0" encoding="utf-8"?>
+<p:sld xmlns:a="http://schemas.openxmlformats.org/drawingml/2006/main" xmlns:p="http://schemas.openxmlformats.org/presentationml/2006/main" xmlns:r="http://schemas.openxmlformats.org/officeDocument/2006/relationships">
+  <p:cSld>
+    <p:bg>
+      <p:bgPr>
+        <a:solidFill>
+          <a:srgbClr val="FFFFFF"/>
+        </a:solidFill>
+        <a:effectLst/>
+      </p:bgPr>
+    </p:bg>
+    <p:spTree>
+      <p:nvGrpSpPr>
+        <p:cNvPr id="1" name=""/>
+        <p:cNvGrpSpPr/>
+        <p:nvPr/>
+      </p:nvGrpSpPr>
+      <p:grpSpPr/>
+      <p:sp>
+        <p:nvSpPr>
+          <p:cNvPr id="2" name="Oval 1"/>
+          <p:cNvSpPr/>
+          <p:nvPr/>
+        </p:nvSpPr>
+        <p:spPr>
+          <a:xfrm>
+            <a:off x="548640" y="475488"/>
+            <a:ext cx="658368" cy="658368"/>
+          </a:xfrm>
+          <a:prstGeom prst="ellipse">
+            <a:avLst/>
+          </a:prstGeom>
+          <a:solidFill>
+            <a:srgbClr val="2F6F7A"/>
+          </a:solidFill>
+          <a:ln>
+            <a:noFill/>
+          </a:ln>
+          <a:effectLst/>
+        </p:spPr>
+        <p:style>
+          <a:lnRef idx="1">
+            <a:schemeClr val="accent1"/>
+          </a:lnRef>
+          <a:fillRef idx="3">
+            <a:schemeClr val="accent1"/>
+          </a:fillRef>
+          <a:effectRef idx="2">
+            <a:schemeClr val="accent1"/>
+          </a:effectRef>
+          <a:fontRef idx="minor">
+            <a:schemeClr val="lt1"/>
+          </a:fontRef>
+        </p:style>
+        <p:txBody>
+          <a:bodyPr rtlCol="0" anchor="ctr" lIns="0" rIns="0" tIns="0" bIns="0"/>
+          <a:lstStyle/>
+          <a:p>
+            <a:pPr algn="ctr"/>
+            <a:r>
+              <a:rPr sz="1800" i="0" b="1">
+                <a:solidFill>
+                  <a:srgbClr val="FFFFFF"/>
+                </a:solidFill>
+                <a:latin typeface="Cambria"/>
+              </a:rPr>
+              <a:t>03</a:t>
+            </a:r>
+          </a:p>
+        </p:txBody>
+      </p:sp>
+      <p:sp>
+        <p:nvSpPr>
+          <p:cNvPr id="3" name="TextBox 2"/>
+          <p:cNvSpPr txBox="1"/>
+          <p:nvPr/>
+        </p:nvSpPr>
+        <p:spPr>
+          <a:xfrm>
+            <a:off x="1417319" y="438912"/>
+            <a:ext cx="10180015" cy="292608"/>
+          </a:xfrm>
+          <a:prstGeom prst="rect">
+            <a:avLst/>
+          </a:prstGeom>
+          <a:noFill/>
+        </p:spPr>
+        <p:txBody>
+          <a:bodyPr wrap="square" anchor="t" lIns="0" rIns="0" tIns="0" bIns="0">
+            <a:spAutoFit/>
+          </a:bodyPr>
+          <a:lstStyle/>
+          <a:p>
+            <a:r>
+              <a:rPr sz="1200" i="0" b="1" spc="150">
+                <a:solidFill>
+                  <a:srgbClr val="2F6F7A"/>
+                </a:solidFill>
+                <a:latin typeface="Calibri"/>
+              </a:rPr>
+              <a:t>SECTION 3</a:t>
+            </a:r>
+          </a:p>
+        </p:txBody>
+      </p:sp>
+      <p:sp>
+        <p:nvSpPr>
+          <p:cNvPr id="4" name="TextBox 3"/>
+          <p:cNvSpPr txBox="1"/>
+          <p:nvPr/>
+        </p:nvSpPr>
+        <p:spPr>
+          <a:xfrm>
+            <a:off x="1417319" y="676656"/>
+            <a:ext cx="10180015" cy="640080"/>
+          </a:xfrm>
+          <a:prstGeom prst="rect">
+            <a:avLst/>
+          </a:prstGeom>
+          <a:noFill/>
+        </p:spPr>
+        <p:txBody>
+          <a:bodyPr wrap="square" anchor="t" lIns="0" rIns="0" tIns="0" bIns="0">
+            <a:spAutoFit/>
+          </a:bodyPr>
+          <a:lstStyle/>
+          <a:p>
+            <a:r>
+              <a:rPr sz="3200" i="0" b="1">
+                <a:solidFill>
+                  <a:srgbClr val="2B211C"/>
+                </a:solidFill>
+                <a:latin typeface="Cambria"/>
+              </a:rPr>
+              <a:t>Choosing the Design</a:t>
+            </a:r>
+          </a:p>
+        </p:txBody>
+      </p:sp>
+      <p:sp>
+        <p:nvSpPr>
+          <p:cNvPr id="5" name="TextBox 4"/>
+          <p:cNvSpPr txBox="1"/>
+          <p:nvPr/>
+        </p:nvSpPr>
+        <p:spPr>
+          <a:xfrm>
+            <a:off x="548640" y="6419088"/>
+            <a:ext cx="8229600" cy="274320"/>
+          </a:xfrm>
+          <a:prstGeom prst="rect">
+            <a:avLst/>
+          </a:prstGeom>
+          <a:noFill/>
+        </p:spPr>
+        <p:txBody>
+          <a:bodyPr wrap="square" anchor="t" lIns="0" rIns="0" tIns="0" bIns="0">
+            <a:spAutoFit/>
+          </a:bodyPr>
+          <a:lstStyle/>
+          <a:p>
+            <a:r>
+              <a:rPr sz="1000" i="0" b="0">
+                <a:solidFill>
+                  <a:srgbClr val="6E625B"/>
+                </a:solidFill>
+                <a:latin typeface="Calibri"/>
+              </a:rPr>
+              <a:t>Drug Information  ·  Section 3  ·  Study Designs and Levels of Evidence</a:t>
+            </a:r>
+          </a:p>
+        </p:txBody>
+      </p:sp>
+      <p:sp>
+        <p:nvSpPr>
+          <p:cNvPr id="6" name="TextBox 5"/>
+          <p:cNvSpPr txBox="1"/>
+          <p:nvPr/>
+        </p:nvSpPr>
+        <p:spPr>
+          <a:xfrm>
+            <a:off x="10424160" y="6419088"/>
+            <a:ext cx="731520" cy="274320"/>
+          </a:xfrm>
+          <a:prstGeom prst="rect">
+            <a:avLst/>
+          </a:prstGeom>
+          <a:noFill/>
+        </p:spPr>
+        <p:txBody>
+          <a:bodyPr wrap="square" anchor="t" lIns="0" rIns="0" tIns="0" bIns="0">
+            <a:spAutoFit/>
+          </a:bodyPr>
+          <a:lstStyle/>
+          <a:p>
+            <a:pPr algn="r"/>
+            <a:r>
+              <a:rPr sz="1000" i="0" b="1">
+                <a:solidFill>
+                  <a:srgbClr val="6E625B"/>
+                </a:solidFill>
+                <a:latin typeface="Calibri"/>
+              </a:rPr>
+              <a:t>11</a:t>
             </a:r>
           </a:p>
         </p:txBody>
@@ -4995,8 +5674,8 @@
           <p:nvPr/>
         </p:nvGraphicFramePr>
         <p:xfrm>
-          <a:off x="548640" y="1600200"/>
-          <a:ext cx="11094414" cy="4526280"/>
+          <a:off x="548640" y="1554480"/>
+          <a:ext cx="11094414" cy="3840480"/>
         </p:xfrm>
         <a:graphic>
           <a:graphicData uri="http://schemas.openxmlformats.org/drawingml/2006/table">
@@ -5008,7 +5687,7 @@
                 <a:gridCol w="7944149"/>
                 <a:gridCol w="3150265"/>
               </a:tblGrid>
-              <a:tr h="754380">
+              <a:tr h="640080">
                 <a:tc>
                   <a:txBody>
                     <a:bodyPr/>
@@ -5054,7 +5733,7 @@
                   </a:tcPr>
                 </a:tc>
               </a:tr>
-              <a:tr h="754380">
+              <a:tr h="640080">
                 <a:tc>
                   <a:txBody>
                     <a:bodyPr/>
@@ -5100,7 +5779,7 @@
                   </a:tcPr>
                 </a:tc>
               </a:tr>
-              <a:tr h="754380">
+              <a:tr h="640080">
                 <a:tc>
                   <a:txBody>
                     <a:bodyPr/>
@@ -5119,7 +5798,7 @@
                   </a:txBody>
                   <a:tcPr marL="109728" marR="109728" marT="45720" marB="45720" anchor="ctr">
                     <a:solidFill>
-                      <a:srgbClr val="FBF3EE"/>
+                      <a:srgbClr val="FAF4F2"/>
                     </a:solidFill>
                   </a:tcPr>
                 </a:tc>
@@ -5141,12 +5820,12 @@
                   </a:txBody>
                   <a:tcPr marL="109728" marR="109728" marT="45720" marB="45720" anchor="ctr">
                     <a:solidFill>
-                      <a:srgbClr val="FBF3EE"/>
+                      <a:srgbClr val="FAF4F2"/>
                     </a:solidFill>
                   </a:tcPr>
                 </a:tc>
               </a:tr>
-              <a:tr h="754380">
+              <a:tr h="640080">
                 <a:tc>
                   <a:txBody>
                     <a:bodyPr/>
@@ -5192,7 +5871,7 @@
                   </a:tcPr>
                 </a:tc>
               </a:tr>
-              <a:tr h="754380">
+              <a:tr h="640080">
                 <a:tc>
                   <a:txBody>
                     <a:bodyPr/>
@@ -5211,7 +5890,7 @@
                   </a:txBody>
                   <a:tcPr marL="109728" marR="109728" marT="45720" marB="45720" anchor="ctr">
                     <a:solidFill>
-                      <a:srgbClr val="FBF3EE"/>
+                      <a:srgbClr val="FAF4F2"/>
                     </a:solidFill>
                   </a:tcPr>
                 </a:tc>
@@ -5233,12 +5912,12 @@
                   </a:txBody>
                   <a:tcPr marL="109728" marR="109728" marT="45720" marB="45720" anchor="ctr">
                     <a:solidFill>
-                      <a:srgbClr val="FBF3EE"/>
+                      <a:srgbClr val="FAF4F2"/>
                     </a:solidFill>
                   </a:tcPr>
                 </a:tc>
               </a:tr>
-              <a:tr h="754380">
+              <a:tr h="640080">
                 <a:tc>
                   <a:txBody>
                     <a:bodyPr/>
@@ -5296,319 +5975,6 @@
 </p:sld>
 </file>
 
-<file path=ppt/slides/slide11.xml><?xml version="1.0" encoding="utf-8"?>
-<p:sld xmlns:a="http://schemas.openxmlformats.org/drawingml/2006/main" xmlns:p="http://schemas.openxmlformats.org/presentationml/2006/main" xmlns:r="http://schemas.openxmlformats.org/officeDocument/2006/relationships">
-  <p:cSld>
-    <p:bg>
-      <p:bgPr>
-        <a:solidFill>
-          <a:srgbClr val="FFFFFF"/>
-        </a:solidFill>
-        <a:effectLst/>
-      </p:bgPr>
-    </p:bg>
-    <p:spTree>
-      <p:nvGrpSpPr>
-        <p:cNvPr id="1" name=""/>
-        <p:cNvGrpSpPr/>
-        <p:nvPr/>
-      </p:nvGrpSpPr>
-      <p:grpSpPr/>
-      <p:sp>
-        <p:nvSpPr>
-          <p:cNvPr id="2" name="Rectangle 1"/>
-          <p:cNvSpPr/>
-          <p:nvPr/>
-        </p:nvSpPr>
-        <p:spPr>
-          <a:xfrm>
-            <a:off x="0" y="0"/>
-            <a:ext cx="3931920" cy="6858000"/>
-          </a:xfrm>
-          <a:prstGeom prst="rect">
-            <a:avLst/>
-          </a:prstGeom>
-          <a:solidFill>
-            <a:srgbClr val="2F6F7A"/>
-          </a:solidFill>
-          <a:ln>
-            <a:noFill/>
-          </a:ln>
-          <a:effectLst/>
-        </p:spPr>
-        <p:style>
-          <a:lnRef idx="1">
-            <a:schemeClr val="accent1"/>
-          </a:lnRef>
-          <a:fillRef idx="3">
-            <a:schemeClr val="accent1"/>
-          </a:fillRef>
-          <a:effectRef idx="2">
-            <a:schemeClr val="accent1"/>
-          </a:effectRef>
-          <a:fontRef idx="minor">
-            <a:schemeClr val="lt1"/>
-          </a:fontRef>
-        </p:style>
-        <p:txBody>
-          <a:bodyPr rtlCol="0" anchor="ctr"/>
-          <a:lstStyle/>
-          <a:p>
-            <a:pPr algn="ctr"/>
-          </a:p>
-        </p:txBody>
-      </p:sp>
-      <p:sp>
-        <p:nvSpPr>
-          <p:cNvPr id="3" name="TextBox 2"/>
-          <p:cNvSpPr txBox="1"/>
-          <p:nvPr/>
-        </p:nvSpPr>
-        <p:spPr>
-          <a:xfrm>
-            <a:off x="548640" y="1188720"/>
-            <a:ext cx="2926080" cy="2377440"/>
-          </a:xfrm>
-          <a:prstGeom prst="rect">
-            <a:avLst/>
-          </a:prstGeom>
-          <a:noFill/>
-        </p:spPr>
-        <p:txBody>
-          <a:bodyPr wrap="square" anchor="t" lIns="0" rIns="0" tIns="0" bIns="0">
-            <a:spAutoFit/>
-          </a:bodyPr>
-          <a:lstStyle/>
-          <a:p>
-            <a:pPr algn="l"/>
-            <a:r>
-              <a:rPr sz="13000" i="0" b="1">
-                <a:solidFill>
-                  <a:srgbClr val="E0EEF0"/>
-                </a:solidFill>
-                <a:latin typeface="Cambria"/>
-              </a:rPr>
-              <a:t>℞</a:t>
-            </a:r>
-          </a:p>
-        </p:txBody>
-      </p:sp>
-      <p:sp>
-        <p:nvSpPr>
-          <p:cNvPr id="4" name="TextBox 3"/>
-          <p:cNvSpPr txBox="1"/>
-          <p:nvPr/>
-        </p:nvSpPr>
-        <p:spPr>
-          <a:xfrm>
-            <a:off x="548640" y="3977639"/>
-            <a:ext cx="3017520" cy="1280160"/>
-          </a:xfrm>
-          <a:prstGeom prst="rect">
-            <a:avLst/>
-          </a:prstGeom>
-          <a:noFill/>
-        </p:spPr>
-        <p:txBody>
-          <a:bodyPr wrap="square" anchor="t" lIns="0" rIns="0" tIns="0" bIns="0">
-            <a:spAutoFit/>
-          </a:bodyPr>
-          <a:lstStyle/>
-          <a:p>
-            <a:r>
-              <a:rPr sz="3000" i="0" b="1">
-                <a:solidFill>
-                  <a:srgbClr val="FFFFFF"/>
-                </a:solidFill>
-                <a:latin typeface="Cambria"/>
-              </a:rPr>
-              <a:t>At the Pharmacy</a:t>
-            </a:r>
-          </a:p>
-          <a:p>
-            <a:r>
-              <a:rPr sz="1400" i="0" b="1" spc="150">
-                <a:solidFill>
-                  <a:srgbClr val="E0EEF0"/>
-                </a:solidFill>
-                <a:latin typeface="Calibri"/>
-              </a:rPr>
-              <a:t>Section 3</a:t>
-            </a:r>
-          </a:p>
-        </p:txBody>
-      </p:sp>
-      <p:sp>
-        <p:nvSpPr>
-          <p:cNvPr id="5" name="TextBox 4"/>
-          <p:cNvSpPr txBox="1"/>
-          <p:nvPr/>
-        </p:nvSpPr>
-        <p:spPr>
-          <a:xfrm>
-            <a:off x="4526280" y="822960"/>
-            <a:ext cx="7132320" cy="5120640"/>
-          </a:xfrm>
-          <a:prstGeom prst="rect">
-            <a:avLst/>
-          </a:prstGeom>
-          <a:noFill/>
-        </p:spPr>
-        <p:txBody>
-          <a:bodyPr wrap="square" anchor="ctr" lIns="0" rIns="0" tIns="0" bIns="0">
-            <a:spAutoFit/>
-          </a:bodyPr>
-          <a:lstStyle/>
-          <a:p>
-            <a:r>
-              <a:rPr sz="2200" i="0" b="0">
-                <a:solidFill>
-                  <a:srgbClr val="2B211C"/>
-                </a:solidFill>
-                <a:latin typeface="Calibri"/>
-              </a:rPr>
-              <a:t>A patient reads online that a blood-pressure tablet "causes cancer". The claim comes from </a:t>
-            </a:r>
-            <a:r>
-              <a:rPr sz="2200" i="0" b="1">
-                <a:solidFill>
-                  <a:srgbClr val="2B211C"/>
-                </a:solidFill>
-                <a:latin typeface="Calibri"/>
-              </a:rPr>
-              <a:t>one case report</a:t>
-            </a:r>
-            <a:r>
-              <a:rPr sz="2200" i="0" b="0">
-                <a:solidFill>
-                  <a:srgbClr val="2B211C"/>
-                </a:solidFill>
-                <a:latin typeface="Calibri"/>
-              </a:rPr>
-              <a:t>. You explain that a single case cannot prove cause. You check for </a:t>
-            </a:r>
-            <a:r>
-              <a:rPr sz="2200" i="0" b="1">
-                <a:solidFill>
-                  <a:srgbClr val="2B211C"/>
-                </a:solidFill>
-                <a:latin typeface="Calibri"/>
-              </a:rPr>
-              <a:t>cohort studies or meta-analyses</a:t>
-            </a:r>
-            <a:r>
-              <a:rPr sz="2200" i="0" b="0">
-                <a:solidFill>
-                  <a:srgbClr val="2B211C"/>
-                </a:solidFill>
-                <a:latin typeface="Calibri"/>
-              </a:rPr>
-              <a:t> on the drug before advising, and you tell the patient not to stop the tablet without seeing the doctor.</a:t>
-            </a:r>
-          </a:p>
-        </p:txBody>
-      </p:sp>
-      <p:sp>
-        <p:nvSpPr>
-          <p:cNvPr id="6" name="TextBox 5"/>
-          <p:cNvSpPr txBox="1"/>
-          <p:nvPr/>
-        </p:nvSpPr>
-        <p:spPr>
-          <a:xfrm>
-            <a:off x="4526280" y="6419088"/>
-            <a:ext cx="5486400" cy="274320"/>
-          </a:xfrm>
-          <a:prstGeom prst="rect">
-            <a:avLst/>
-          </a:prstGeom>
-          <a:noFill/>
-        </p:spPr>
-        <p:txBody>
-          <a:bodyPr wrap="square" anchor="t" lIns="0" rIns="0" tIns="0" bIns="0">
-            <a:spAutoFit/>
-          </a:bodyPr>
-          <a:lstStyle/>
-          <a:p>
-            <a:r>
-              <a:rPr sz="1000" i="0" b="0">
-                <a:solidFill>
-                  <a:srgbClr val="6E625B"/>
-                </a:solidFill>
-                <a:latin typeface="Calibri"/>
-              </a:rPr>
-              <a:t>Drug Information  ·  Study Designs and Levels of Evidence</a:t>
-            </a:r>
-          </a:p>
-        </p:txBody>
-      </p:sp>
-      <p:sp>
-        <p:nvSpPr>
-          <p:cNvPr id="7" name="TextBox 6"/>
-          <p:cNvSpPr txBox="1"/>
-          <p:nvPr/>
-        </p:nvSpPr>
-        <p:spPr>
-          <a:xfrm>
-            <a:off x="10424160" y="6419088"/>
-            <a:ext cx="731520" cy="274320"/>
-          </a:xfrm>
-          <a:prstGeom prst="rect">
-            <a:avLst/>
-          </a:prstGeom>
-          <a:noFill/>
-        </p:spPr>
-        <p:txBody>
-          <a:bodyPr wrap="square" anchor="t" lIns="0" rIns="0" tIns="0" bIns="0">
-            <a:spAutoFit/>
-          </a:bodyPr>
-          <a:lstStyle/>
-          <a:p>
-            <a:pPr algn="r"/>
-            <a:r>
-              <a:rPr sz="1000" i="0" b="1">
-                <a:solidFill>
-                  <a:srgbClr val="6E625B"/>
-                </a:solidFill>
-                <a:latin typeface="Calibri"/>
-              </a:rPr>
-              <a:t>11</a:t>
-            </a:r>
-          </a:p>
-        </p:txBody>
-      </p:sp>
-      <p:pic>
-        <p:nvPicPr>
-          <p:cNvPr id="8" name="Picture 7" descr="faculty-of-pharmacy.png"/>
-          <p:cNvPicPr>
-            <a:picLocks noChangeAspect="1"/>
-          </p:cNvPicPr>
-          <p:nvPr/>
-        </p:nvPicPr>
-        <p:blipFill>
-          <a:blip r:embed="rId3"/>
-          <a:stretch>
-            <a:fillRect/>
-          </a:stretch>
-        </p:blipFill>
-        <p:spPr>
-          <a:xfrm>
-            <a:off x="11247120" y="6309360"/>
-            <a:ext cx="384048" cy="384048"/>
-          </a:xfrm>
-          <a:prstGeom prst="rect">
-            <a:avLst/>
-          </a:prstGeom>
-        </p:spPr>
-      </p:pic>
-    </p:spTree>
-  </p:cSld>
-  <p:clrMapOvr>
-    <a:masterClrMapping/>
-  </p:clrMapOvr>
-</p:sld>
-</file>
-
 <file path=ppt/slides/slide12.xml><?xml version="1.0" encoding="utf-8"?>
 <p:sld xmlns:a="http://schemas.openxmlformats.org/drawingml/2006/main" xmlns:p="http://schemas.openxmlformats.org/presentationml/2006/main" xmlns:r="http://schemas.openxmlformats.org/officeDocument/2006/relationships">
   <p:cSld>
@@ -5629,16 +5995,16 @@
       <p:grpSpPr/>
       <p:sp>
         <p:nvSpPr>
-          <p:cNvPr id="2" name="Oval 1"/>
+          <p:cNvPr id="2" name="Rectangle 1"/>
           <p:cNvSpPr/>
           <p:nvPr/>
         </p:nvSpPr>
         <p:spPr>
           <a:xfrm>
-            <a:off x="548640" y="475488"/>
-            <a:ext cx="658368" cy="658368"/>
-          </a:xfrm>
-          <a:prstGeom prst="ellipse">
+            <a:off x="0" y="0"/>
+            <a:ext cx="3931920" cy="6858000"/>
+          </a:xfrm>
+          <a:prstGeom prst="rect">
             <a:avLst/>
           </a:prstGeom>
           <a:solidFill>
@@ -5664,19 +6030,10 @@
           </a:fontRef>
         </p:style>
         <p:txBody>
-          <a:bodyPr rtlCol="0" anchor="ctr" lIns="0" rIns="0"/>
+          <a:bodyPr rtlCol="0" anchor="ctr"/>
           <a:lstStyle/>
           <a:p>
             <a:pPr algn="ctr"/>
-            <a:r>
-              <a:rPr sz="1800" i="0" b="1">
-                <a:solidFill>
-                  <a:srgbClr val="FFFFFF"/>
-                </a:solidFill>
-                <a:latin typeface="Cambria"/>
-              </a:rPr>
-              <a:t>03</a:t>
-            </a:r>
           </a:p>
         </p:txBody>
       </p:sp>
@@ -5688,8 +6045,8 @@
         </p:nvSpPr>
         <p:spPr>
           <a:xfrm>
-            <a:off x="1417319" y="438912"/>
-            <a:ext cx="10180015" cy="292608"/>
+            <a:off x="548640" y="1188720"/>
+            <a:ext cx="2926080" cy="2377440"/>
           </a:xfrm>
           <a:prstGeom prst="rect">
             <a:avLst/>
@@ -5703,13 +6060,13 @@
           <a:lstStyle/>
           <a:p>
             <a:r>
-              <a:rPr sz="1200" i="0" b="1" spc="150">
-                <a:solidFill>
-                  <a:srgbClr val="2F6F7A"/>
-                </a:solidFill>
-                <a:latin typeface="Calibri"/>
-              </a:rPr>
-              <a:t>SELF-ASSESSMENT  ·  QUESTION 1 OF 5</a:t>
+              <a:rPr sz="13000" i="0" b="1">
+                <a:solidFill>
+                  <a:srgbClr val="E6EEEF"/>
+                </a:solidFill>
+                <a:latin typeface="Cambria"/>
+              </a:rPr>
+              <a:t>℞</a:t>
             </a:r>
           </a:p>
         </p:txBody>
@@ -5722,8 +6079,8 @@
         </p:nvSpPr>
         <p:spPr>
           <a:xfrm>
-            <a:off x="1417319" y="676656"/>
-            <a:ext cx="10180015" cy="640080"/>
+            <a:off x="548640" y="3977639"/>
+            <a:ext cx="3017520" cy="1280160"/>
           </a:xfrm>
           <a:prstGeom prst="rect">
             <a:avLst/>
@@ -5737,13 +6094,24 @@
           <a:lstStyle/>
           <a:p>
             <a:r>
-              <a:rPr sz="3200" i="0" b="1">
-                <a:solidFill>
-                  <a:srgbClr val="2B211C"/>
+              <a:rPr sz="3000" i="0" b="1">
+                <a:solidFill>
+                  <a:srgbClr val="FFFFFF"/>
                 </a:solidFill>
                 <a:latin typeface="Cambria"/>
               </a:rPr>
-              <a:t>Your turn</a:t>
+              <a:t>At the Pharmacy</a:t>
+            </a:r>
+          </a:p>
+          <a:p>
+            <a:r>
+              <a:rPr sz="1400" i="0" b="1" spc="150">
+                <a:solidFill>
+                  <a:srgbClr val="E6EEEF"/>
+                </a:solidFill>
+                <a:latin typeface="Calibri"/>
+              </a:rPr>
+              <a:t>Section 3</a:t>
             </a:r>
           </a:p>
         </p:txBody>
@@ -5756,7 +6124,77 @@
         </p:nvSpPr>
         <p:spPr>
           <a:xfrm>
-            <a:off x="548640" y="6419088"/>
+            <a:off x="4526280" y="822960"/>
+            <a:ext cx="7132320" cy="5120640"/>
+          </a:xfrm>
+          <a:prstGeom prst="rect">
+            <a:avLst/>
+          </a:prstGeom>
+          <a:noFill/>
+        </p:spPr>
+        <p:txBody>
+          <a:bodyPr wrap="square" anchor="ctr" lIns="0" rIns="0" tIns="0" bIns="0">
+            <a:spAutoFit/>
+          </a:bodyPr>
+          <a:lstStyle/>
+          <a:p>
+            <a:r>
+              <a:rPr sz="2200" i="0" b="0">
+                <a:solidFill>
+                  <a:srgbClr val="2B211C"/>
+                </a:solidFill>
+                <a:latin typeface="Calibri"/>
+              </a:rPr>
+              <a:t>A patient reads online that a blood-pressure tablet "causes cancer". The claim comes from </a:t>
+            </a:r>
+            <a:r>
+              <a:rPr sz="2200" i="0" b="1">
+                <a:solidFill>
+                  <a:srgbClr val="2B211C"/>
+                </a:solidFill>
+                <a:latin typeface="Calibri"/>
+              </a:rPr>
+              <a:t>one case report</a:t>
+            </a:r>
+            <a:r>
+              <a:rPr sz="2200" i="0" b="0">
+                <a:solidFill>
+                  <a:srgbClr val="2B211C"/>
+                </a:solidFill>
+                <a:latin typeface="Calibri"/>
+              </a:rPr>
+              <a:t>. You explain that a single case cannot prove cause. You check for </a:t>
+            </a:r>
+            <a:r>
+              <a:rPr sz="2200" i="0" b="1">
+                <a:solidFill>
+                  <a:srgbClr val="2B211C"/>
+                </a:solidFill>
+                <a:latin typeface="Calibri"/>
+              </a:rPr>
+              <a:t>cohort studies or meta-analyses</a:t>
+            </a:r>
+            <a:r>
+              <a:rPr sz="2200" i="0" b="0">
+                <a:solidFill>
+                  <a:srgbClr val="2B211C"/>
+                </a:solidFill>
+                <a:latin typeface="Calibri"/>
+              </a:rPr>
+              <a:t> on the drug before advising, and you tell the patient not to stop the tablet without seeing the doctor.</a:t>
+            </a:r>
+          </a:p>
+        </p:txBody>
+      </p:sp>
+      <p:sp>
+        <p:nvSpPr>
+          <p:cNvPr id="6" name="TextBox 5"/>
+          <p:cNvSpPr txBox="1"/>
+          <p:nvPr/>
+        </p:nvSpPr>
+        <p:spPr>
+          <a:xfrm>
+            <a:off x="4526280" y="6419088"/>
             <a:ext cx="8229600" cy="274320"/>
           </a:xfrm>
           <a:prstGeom prst="rect">
@@ -5777,14 +6215,14 @@
                 </a:solidFill>
                 <a:latin typeface="Calibri"/>
               </a:rPr>
-              <a:t>Drug Information  ·  Section 3  ·  Study Designs and Levels of Evidence</a:t>
-            </a:r>
-          </a:p>
-        </p:txBody>
-      </p:sp>
-      <p:sp>
-        <p:nvSpPr>
-          <p:cNvPr id="6" name="TextBox 5"/>
+              <a:t>Drug Information  ·  Study Designs and Levels of Evidence</a:t>
+            </a:r>
+          </a:p>
+        </p:txBody>
+      </p:sp>
+      <p:sp>
+        <p:nvSpPr>
+          <p:cNvPr id="7" name="TextBox 6"/>
           <p:cNvSpPr txBox="1"/>
           <p:nvPr/>
         </p:nvSpPr>
@@ -5819,7 +6257,7 @@
       </p:sp>
       <p:pic>
         <p:nvPicPr>
-          <p:cNvPr id="7" name="Picture 6" descr="faculty-of-pharmacy.png"/>
+          <p:cNvPr id="8" name="Picture 7" descr="faculty-of-pharmacy.png"/>
           <p:cNvPicPr>
             <a:picLocks noChangeAspect="1"/>
           </p:cNvPicPr>
@@ -5841,572 +6279,6 @@
           </a:prstGeom>
         </p:spPr>
       </p:pic>
-      <p:sp>
-        <p:nvSpPr>
-          <p:cNvPr id="8" name="TextBox 7"/>
-          <p:cNvSpPr txBox="1"/>
-          <p:nvPr/>
-        </p:nvSpPr>
-        <p:spPr>
-          <a:xfrm>
-            <a:off x="548640" y="1554480"/>
-            <a:ext cx="11094415" cy="1005840"/>
-          </a:xfrm>
-          <a:prstGeom prst="rect">
-            <a:avLst/>
-          </a:prstGeom>
-          <a:noFill/>
-        </p:spPr>
-        <p:txBody>
-          <a:bodyPr wrap="square" anchor="t" lIns="0" rIns="0" tIns="0" bIns="0">
-            <a:spAutoFit/>
-          </a:bodyPr>
-          <a:lstStyle/>
-          <a:p>
-            <a:r>
-              <a:rPr sz="2400" i="0" b="1">
-                <a:solidFill>
-                  <a:srgbClr val="2B211C"/>
-                </a:solidFill>
-                <a:latin typeface="Calibri"/>
-              </a:rPr>
-              <a:t>Researchers compare past drug use in 200 patients with liver failure and 400 without. What design is this?</a:t>
-            </a:r>
-          </a:p>
-        </p:txBody>
-      </p:sp>
-      <p:sp>
-        <p:nvSpPr>
-          <p:cNvPr id="9" name="Rounded Rectangle 8"/>
-          <p:cNvSpPr/>
-          <p:nvPr/>
-        </p:nvSpPr>
-        <p:spPr>
-          <a:xfrm>
-            <a:off x="548640" y="2697480"/>
-            <a:ext cx="11094415" cy="640080"/>
-          </a:xfrm>
-          <a:prstGeom prst="roundRect">
-            <a:avLst>
-              <a:gd name="adj" fmla="val 18000"/>
-            </a:avLst>
-          </a:prstGeom>
-          <a:solidFill>
-            <a:srgbClr val="FBF3EE"/>
-          </a:solidFill>
-          <a:ln>
-            <a:noFill/>
-          </a:ln>
-          <a:effectLst/>
-        </p:spPr>
-        <p:style>
-          <a:lnRef idx="1">
-            <a:schemeClr val="accent1"/>
-          </a:lnRef>
-          <a:fillRef idx="3">
-            <a:schemeClr val="accent1"/>
-          </a:fillRef>
-          <a:effectRef idx="2">
-            <a:schemeClr val="accent1"/>
-          </a:effectRef>
-          <a:fontRef idx="minor">
-            <a:schemeClr val="lt1"/>
-          </a:fontRef>
-        </p:style>
-        <p:txBody>
-          <a:bodyPr rtlCol="0" anchor="ctr"/>
-          <a:lstStyle/>
-          <a:p>
-            <a:pPr algn="ctr"/>
-          </a:p>
-        </p:txBody>
-      </p:sp>
-      <p:sp>
-        <p:nvSpPr>
-          <p:cNvPr id="10" name="Oval 9"/>
-          <p:cNvSpPr/>
-          <p:nvPr/>
-        </p:nvSpPr>
-        <p:spPr>
-          <a:xfrm>
-            <a:off x="713232" y="2807208"/>
-            <a:ext cx="420624" cy="420624"/>
-          </a:xfrm>
-          <a:prstGeom prst="ellipse">
-            <a:avLst/>
-          </a:prstGeom>
-          <a:solidFill>
-            <a:srgbClr val="A4472B"/>
-          </a:solidFill>
-          <a:ln>
-            <a:noFill/>
-          </a:ln>
-          <a:effectLst/>
-        </p:spPr>
-        <p:style>
-          <a:lnRef idx="1">
-            <a:schemeClr val="accent1"/>
-          </a:lnRef>
-          <a:fillRef idx="3">
-            <a:schemeClr val="accent1"/>
-          </a:fillRef>
-          <a:effectRef idx="2">
-            <a:schemeClr val="accent1"/>
-          </a:effectRef>
-          <a:fontRef idx="minor">
-            <a:schemeClr val="lt1"/>
-          </a:fontRef>
-        </p:style>
-        <p:txBody>
-          <a:bodyPr rtlCol="0" anchor="ctr" lIns="0" rIns="0"/>
-          <a:lstStyle/>
-          <a:p>
-            <a:pPr algn="ctr"/>
-            <a:r>
-              <a:rPr sz="1500" i="0" b="1">
-                <a:solidFill>
-                  <a:srgbClr val="FFFFFF"/>
-                </a:solidFill>
-                <a:latin typeface="Calibri"/>
-              </a:rPr>
-              <a:t>A</a:t>
-            </a:r>
-          </a:p>
-        </p:txBody>
-      </p:sp>
-      <p:sp>
-        <p:nvSpPr>
-          <p:cNvPr id="11" name="TextBox 10"/>
-          <p:cNvSpPr txBox="1"/>
-          <p:nvPr/>
-        </p:nvSpPr>
-        <p:spPr>
-          <a:xfrm>
-            <a:off x="1371600" y="2697480"/>
-            <a:ext cx="10088575" cy="640080"/>
-          </a:xfrm>
-          <a:prstGeom prst="rect">
-            <a:avLst/>
-          </a:prstGeom>
-          <a:noFill/>
-        </p:spPr>
-        <p:txBody>
-          <a:bodyPr wrap="square" anchor="ctr" lIns="0" rIns="0" tIns="0" bIns="0">
-            <a:spAutoFit/>
-          </a:bodyPr>
-          <a:lstStyle/>
-          <a:p>
-            <a:r>
-              <a:rPr sz="1900" i="0" b="0">
-                <a:solidFill>
-                  <a:srgbClr val="2B211C"/>
-                </a:solidFill>
-                <a:latin typeface="Calibri"/>
-              </a:rPr>
-              <a:t>Cohort study</a:t>
-            </a:r>
-          </a:p>
-        </p:txBody>
-      </p:sp>
-      <p:sp>
-        <p:nvSpPr>
-          <p:cNvPr id="12" name="Rounded Rectangle 11"/>
-          <p:cNvSpPr/>
-          <p:nvPr/>
-        </p:nvSpPr>
-        <p:spPr>
-          <a:xfrm>
-            <a:off x="548640" y="3465576"/>
-            <a:ext cx="11094415" cy="640080"/>
-          </a:xfrm>
-          <a:prstGeom prst="roundRect">
-            <a:avLst>
-              <a:gd name="adj" fmla="val 18000"/>
-            </a:avLst>
-          </a:prstGeom>
-          <a:solidFill>
-            <a:srgbClr val="FBF3EE"/>
-          </a:solidFill>
-          <a:ln>
-            <a:noFill/>
-          </a:ln>
-          <a:effectLst/>
-        </p:spPr>
-        <p:style>
-          <a:lnRef idx="1">
-            <a:schemeClr val="accent1"/>
-          </a:lnRef>
-          <a:fillRef idx="3">
-            <a:schemeClr val="accent1"/>
-          </a:fillRef>
-          <a:effectRef idx="2">
-            <a:schemeClr val="accent1"/>
-          </a:effectRef>
-          <a:fontRef idx="minor">
-            <a:schemeClr val="lt1"/>
-          </a:fontRef>
-        </p:style>
-        <p:txBody>
-          <a:bodyPr rtlCol="0" anchor="ctr"/>
-          <a:lstStyle/>
-          <a:p>
-            <a:pPr algn="ctr"/>
-          </a:p>
-        </p:txBody>
-      </p:sp>
-      <p:sp>
-        <p:nvSpPr>
-          <p:cNvPr id="13" name="Oval 12"/>
-          <p:cNvSpPr/>
-          <p:nvPr/>
-        </p:nvSpPr>
-        <p:spPr>
-          <a:xfrm>
-            <a:off x="713232" y="3575304"/>
-            <a:ext cx="420624" cy="420624"/>
-          </a:xfrm>
-          <a:prstGeom prst="ellipse">
-            <a:avLst/>
-          </a:prstGeom>
-          <a:solidFill>
-            <a:srgbClr val="A4472B"/>
-          </a:solidFill>
-          <a:ln>
-            <a:noFill/>
-          </a:ln>
-          <a:effectLst/>
-        </p:spPr>
-        <p:style>
-          <a:lnRef idx="1">
-            <a:schemeClr val="accent1"/>
-          </a:lnRef>
-          <a:fillRef idx="3">
-            <a:schemeClr val="accent1"/>
-          </a:fillRef>
-          <a:effectRef idx="2">
-            <a:schemeClr val="accent1"/>
-          </a:effectRef>
-          <a:fontRef idx="minor">
-            <a:schemeClr val="lt1"/>
-          </a:fontRef>
-        </p:style>
-        <p:txBody>
-          <a:bodyPr rtlCol="0" anchor="ctr" lIns="0" rIns="0"/>
-          <a:lstStyle/>
-          <a:p>
-            <a:pPr algn="ctr"/>
-            <a:r>
-              <a:rPr sz="1500" i="0" b="1">
-                <a:solidFill>
-                  <a:srgbClr val="FFFFFF"/>
-                </a:solidFill>
-                <a:latin typeface="Calibri"/>
-              </a:rPr>
-              <a:t>B</a:t>
-            </a:r>
-          </a:p>
-        </p:txBody>
-      </p:sp>
-      <p:sp>
-        <p:nvSpPr>
-          <p:cNvPr id="14" name="TextBox 13"/>
-          <p:cNvSpPr txBox="1"/>
-          <p:nvPr/>
-        </p:nvSpPr>
-        <p:spPr>
-          <a:xfrm>
-            <a:off x="1371600" y="3465576"/>
-            <a:ext cx="10088575" cy="640080"/>
-          </a:xfrm>
-          <a:prstGeom prst="rect">
-            <a:avLst/>
-          </a:prstGeom>
-          <a:noFill/>
-        </p:spPr>
-        <p:txBody>
-          <a:bodyPr wrap="square" anchor="ctr" lIns="0" rIns="0" tIns="0" bIns="0">
-            <a:spAutoFit/>
-          </a:bodyPr>
-          <a:lstStyle/>
-          <a:p>
-            <a:r>
-              <a:rPr sz="1900" i="0" b="0">
-                <a:solidFill>
-                  <a:srgbClr val="2B211C"/>
-                </a:solidFill>
-                <a:latin typeface="Calibri"/>
-              </a:rPr>
-              <a:t>Case-control study</a:t>
-            </a:r>
-          </a:p>
-        </p:txBody>
-      </p:sp>
-      <p:sp>
-        <p:nvSpPr>
-          <p:cNvPr id="15" name="Rounded Rectangle 14"/>
-          <p:cNvSpPr/>
-          <p:nvPr/>
-        </p:nvSpPr>
-        <p:spPr>
-          <a:xfrm>
-            <a:off x="548640" y="4233672"/>
-            <a:ext cx="11094415" cy="640080"/>
-          </a:xfrm>
-          <a:prstGeom prst="roundRect">
-            <a:avLst>
-              <a:gd name="adj" fmla="val 18000"/>
-            </a:avLst>
-          </a:prstGeom>
-          <a:solidFill>
-            <a:srgbClr val="FBF3EE"/>
-          </a:solidFill>
-          <a:ln>
-            <a:noFill/>
-          </a:ln>
-          <a:effectLst/>
-        </p:spPr>
-        <p:style>
-          <a:lnRef idx="1">
-            <a:schemeClr val="accent1"/>
-          </a:lnRef>
-          <a:fillRef idx="3">
-            <a:schemeClr val="accent1"/>
-          </a:fillRef>
-          <a:effectRef idx="2">
-            <a:schemeClr val="accent1"/>
-          </a:effectRef>
-          <a:fontRef idx="minor">
-            <a:schemeClr val="lt1"/>
-          </a:fontRef>
-        </p:style>
-        <p:txBody>
-          <a:bodyPr rtlCol="0" anchor="ctr"/>
-          <a:lstStyle/>
-          <a:p>
-            <a:pPr algn="ctr"/>
-          </a:p>
-        </p:txBody>
-      </p:sp>
-      <p:sp>
-        <p:nvSpPr>
-          <p:cNvPr id="16" name="Oval 15"/>
-          <p:cNvSpPr/>
-          <p:nvPr/>
-        </p:nvSpPr>
-        <p:spPr>
-          <a:xfrm>
-            <a:off x="713232" y="4343400"/>
-            <a:ext cx="420624" cy="420624"/>
-          </a:xfrm>
-          <a:prstGeom prst="ellipse">
-            <a:avLst/>
-          </a:prstGeom>
-          <a:solidFill>
-            <a:srgbClr val="A4472B"/>
-          </a:solidFill>
-          <a:ln>
-            <a:noFill/>
-          </a:ln>
-          <a:effectLst/>
-        </p:spPr>
-        <p:style>
-          <a:lnRef idx="1">
-            <a:schemeClr val="accent1"/>
-          </a:lnRef>
-          <a:fillRef idx="3">
-            <a:schemeClr val="accent1"/>
-          </a:fillRef>
-          <a:effectRef idx="2">
-            <a:schemeClr val="accent1"/>
-          </a:effectRef>
-          <a:fontRef idx="minor">
-            <a:schemeClr val="lt1"/>
-          </a:fontRef>
-        </p:style>
-        <p:txBody>
-          <a:bodyPr rtlCol="0" anchor="ctr" lIns="0" rIns="0"/>
-          <a:lstStyle/>
-          <a:p>
-            <a:pPr algn="ctr"/>
-            <a:r>
-              <a:rPr sz="1500" i="0" b="1">
-                <a:solidFill>
-                  <a:srgbClr val="FFFFFF"/>
-                </a:solidFill>
-                <a:latin typeface="Calibri"/>
-              </a:rPr>
-              <a:t>C</a:t>
-            </a:r>
-          </a:p>
-        </p:txBody>
-      </p:sp>
-      <p:sp>
-        <p:nvSpPr>
-          <p:cNvPr id="17" name="TextBox 16"/>
-          <p:cNvSpPr txBox="1"/>
-          <p:nvPr/>
-        </p:nvSpPr>
-        <p:spPr>
-          <a:xfrm>
-            <a:off x="1371600" y="4233672"/>
-            <a:ext cx="10088575" cy="640080"/>
-          </a:xfrm>
-          <a:prstGeom prst="rect">
-            <a:avLst/>
-          </a:prstGeom>
-          <a:noFill/>
-        </p:spPr>
-        <p:txBody>
-          <a:bodyPr wrap="square" anchor="ctr" lIns="0" rIns="0" tIns="0" bIns="0">
-            <a:spAutoFit/>
-          </a:bodyPr>
-          <a:lstStyle/>
-          <a:p>
-            <a:r>
-              <a:rPr sz="1900" i="0" b="0">
-                <a:solidFill>
-                  <a:srgbClr val="2B211C"/>
-                </a:solidFill>
-                <a:latin typeface="Calibri"/>
-              </a:rPr>
-              <a:t>Randomised controlled trial</a:t>
-            </a:r>
-          </a:p>
-        </p:txBody>
-      </p:sp>
-      <p:sp>
-        <p:nvSpPr>
-          <p:cNvPr id="18" name="Rounded Rectangle 17"/>
-          <p:cNvSpPr/>
-          <p:nvPr/>
-        </p:nvSpPr>
-        <p:spPr>
-          <a:xfrm>
-            <a:off x="548640" y="5001768"/>
-            <a:ext cx="11094415" cy="640080"/>
-          </a:xfrm>
-          <a:prstGeom prst="roundRect">
-            <a:avLst>
-              <a:gd name="adj" fmla="val 18000"/>
-            </a:avLst>
-          </a:prstGeom>
-          <a:solidFill>
-            <a:srgbClr val="FBF3EE"/>
-          </a:solidFill>
-          <a:ln>
-            <a:noFill/>
-          </a:ln>
-          <a:effectLst/>
-        </p:spPr>
-        <p:style>
-          <a:lnRef idx="1">
-            <a:schemeClr val="accent1"/>
-          </a:lnRef>
-          <a:fillRef idx="3">
-            <a:schemeClr val="accent1"/>
-          </a:fillRef>
-          <a:effectRef idx="2">
-            <a:schemeClr val="accent1"/>
-          </a:effectRef>
-          <a:fontRef idx="minor">
-            <a:schemeClr val="lt1"/>
-          </a:fontRef>
-        </p:style>
-        <p:txBody>
-          <a:bodyPr rtlCol="0" anchor="ctr"/>
-          <a:lstStyle/>
-          <a:p>
-            <a:pPr algn="ctr"/>
-          </a:p>
-        </p:txBody>
-      </p:sp>
-      <p:sp>
-        <p:nvSpPr>
-          <p:cNvPr id="19" name="Oval 18"/>
-          <p:cNvSpPr/>
-          <p:nvPr/>
-        </p:nvSpPr>
-        <p:spPr>
-          <a:xfrm>
-            <a:off x="713232" y="5111496"/>
-            <a:ext cx="420624" cy="420624"/>
-          </a:xfrm>
-          <a:prstGeom prst="ellipse">
-            <a:avLst/>
-          </a:prstGeom>
-          <a:solidFill>
-            <a:srgbClr val="A4472B"/>
-          </a:solidFill>
-          <a:ln>
-            <a:noFill/>
-          </a:ln>
-          <a:effectLst/>
-        </p:spPr>
-        <p:style>
-          <a:lnRef idx="1">
-            <a:schemeClr val="accent1"/>
-          </a:lnRef>
-          <a:fillRef idx="3">
-            <a:schemeClr val="accent1"/>
-          </a:fillRef>
-          <a:effectRef idx="2">
-            <a:schemeClr val="accent1"/>
-          </a:effectRef>
-          <a:fontRef idx="minor">
-            <a:schemeClr val="lt1"/>
-          </a:fontRef>
-        </p:style>
-        <p:txBody>
-          <a:bodyPr rtlCol="0" anchor="ctr" lIns="0" rIns="0"/>
-          <a:lstStyle/>
-          <a:p>
-            <a:pPr algn="ctr"/>
-            <a:r>
-              <a:rPr sz="1500" i="0" b="1">
-                <a:solidFill>
-                  <a:srgbClr val="FFFFFF"/>
-                </a:solidFill>
-                <a:latin typeface="Calibri"/>
-              </a:rPr>
-              <a:t>D</a:t>
-            </a:r>
-          </a:p>
-        </p:txBody>
-      </p:sp>
-      <p:sp>
-        <p:nvSpPr>
-          <p:cNvPr id="20" name="TextBox 19"/>
-          <p:cNvSpPr txBox="1"/>
-          <p:nvPr/>
-        </p:nvSpPr>
-        <p:spPr>
-          <a:xfrm>
-            <a:off x="1371600" y="5001768"/>
-            <a:ext cx="10088575" cy="640080"/>
-          </a:xfrm>
-          <a:prstGeom prst="rect">
-            <a:avLst/>
-          </a:prstGeom>
-          <a:noFill/>
-        </p:spPr>
-        <p:txBody>
-          <a:bodyPr wrap="square" anchor="ctr" lIns="0" rIns="0" tIns="0" bIns="0">
-            <a:spAutoFit/>
-          </a:bodyPr>
-          <a:lstStyle/>
-          <a:p>
-            <a:r>
-              <a:rPr sz="1900" i="0" b="0">
-                <a:solidFill>
-                  <a:srgbClr val="2B211C"/>
-                </a:solidFill>
-                <a:latin typeface="Calibri"/>
-              </a:rPr>
-              <a:t>Cross-sectional study</a:t>
-            </a:r>
-          </a:p>
-        </p:txBody>
-      </p:sp>
     </p:spTree>
   </p:cSld>
   <p:clrMapOvr>
@@ -6470,7 +6342,7 @@
           </a:fontRef>
         </p:style>
         <p:txBody>
-          <a:bodyPr rtlCol="0" anchor="ctr" lIns="0" rIns="0"/>
+          <a:bodyPr rtlCol="0" anchor="ctr" lIns="0" rIns="0" tIns="0" bIns="0"/>
           <a:lstStyle/>
           <a:p>
             <a:pPr algn="ctr"/>
@@ -6515,7 +6387,7 @@
                 </a:solidFill>
                 <a:latin typeface="Calibri"/>
               </a:rPr>
-              <a:t>SELF-ASSESSMENT  ·  QUESTION 1 OF 5  ·  ANSWER</a:t>
+              <a:t>SECTION 3  ·  QUESTION 1 OF 5</a:t>
             </a:r>
           </a:p>
         </p:txBody>
@@ -6549,7 +6421,7 @@
                 </a:solidFill>
                 <a:latin typeface="Cambria"/>
               </a:rPr>
-              <a:t>Check your answer</a:t>
+              <a:t>Your turn</a:t>
             </a:r>
           </a:p>
         </p:txBody>
@@ -6632,7 +6504,7 @@
           <p:nvPr/>
         </p:nvPicPr>
         <p:blipFill>
-          <a:blip r:embed="rId2"/>
+          <a:blip r:embed="rId3"/>
           <a:stretch>
             <a:fillRect/>
           </a:stretch>
@@ -6689,8 +6561,8 @@
         </p:nvSpPr>
         <p:spPr>
           <a:xfrm>
-            <a:off x="548640" y="2606040"/>
-            <a:ext cx="11094415" cy="548640"/>
+            <a:off x="548640" y="2697480"/>
+            <a:ext cx="11094415" cy="640080"/>
           </a:xfrm>
           <a:prstGeom prst="roundRect">
             <a:avLst>
@@ -6698,7 +6570,7 @@
             </a:avLst>
           </a:prstGeom>
           <a:solidFill>
-            <a:srgbClr val="F7F4F2"/>
+            <a:srgbClr val="FAF4F2"/>
           </a:solidFill>
           <a:ln>
             <a:noFill/>
@@ -6735,14 +6607,14 @@
         </p:nvSpPr>
         <p:spPr>
           <a:xfrm>
-            <a:off x="713232" y="2670048"/>
+            <a:off x="713232" y="2807208"/>
             <a:ext cx="420624" cy="420624"/>
           </a:xfrm>
           <a:prstGeom prst="ellipse">
             <a:avLst/>
           </a:prstGeom>
           <a:solidFill>
-            <a:srgbClr val="E6DFDA"/>
+            <a:srgbClr val="A4472B"/>
           </a:solidFill>
           <a:ln>
             <a:noFill/>
@@ -6764,14 +6636,14 @@
           </a:fontRef>
         </p:style>
         <p:txBody>
-          <a:bodyPr rtlCol="0" anchor="ctr" lIns="0" rIns="0"/>
+          <a:bodyPr rtlCol="0" anchor="ctr" lIns="0" rIns="0" tIns="0" bIns="0"/>
           <a:lstStyle/>
           <a:p>
             <a:pPr algn="ctr"/>
             <a:r>
               <a:rPr sz="1500" i="0" b="1">
                 <a:solidFill>
-                  <a:srgbClr val="6E625B"/>
+                  <a:srgbClr val="FFFFFF"/>
                 </a:solidFill>
                 <a:latin typeface="Calibri"/>
               </a:rPr>
@@ -6788,8 +6660,8 @@
         </p:nvSpPr>
         <p:spPr>
           <a:xfrm>
-            <a:off x="1371600" y="2606040"/>
-            <a:ext cx="10088575" cy="548640"/>
+            <a:off x="1371600" y="2697480"/>
+            <a:ext cx="10088575" cy="640080"/>
           </a:xfrm>
           <a:prstGeom prst="rect">
             <a:avLst/>
@@ -6805,7 +6677,7 @@
             <a:r>
               <a:rPr sz="1900" i="0" b="0">
                 <a:solidFill>
-                  <a:srgbClr val="6E625B"/>
+                  <a:srgbClr val="2B211C"/>
                 </a:solidFill>
                 <a:latin typeface="Calibri"/>
               </a:rPr>
@@ -6822,8 +6694,8 @@
         </p:nvSpPr>
         <p:spPr>
           <a:xfrm>
-            <a:off x="548640" y="3282696"/>
-            <a:ext cx="11094415" cy="548640"/>
+            <a:off x="548640" y="3465576"/>
+            <a:ext cx="11094415" cy="640080"/>
           </a:xfrm>
           <a:prstGeom prst="roundRect">
             <a:avLst>
@@ -6831,7 +6703,7 @@
             </a:avLst>
           </a:prstGeom>
           <a:solidFill>
-            <a:srgbClr val="2F6F7A"/>
+            <a:srgbClr val="FAF4F2"/>
           </a:solidFill>
           <a:ln>
             <a:noFill/>
@@ -6868,14 +6740,14 @@
         </p:nvSpPr>
         <p:spPr>
           <a:xfrm>
-            <a:off x="713232" y="3346703"/>
+            <a:off x="713232" y="3575304"/>
             <a:ext cx="420624" cy="420624"/>
           </a:xfrm>
           <a:prstGeom prst="ellipse">
             <a:avLst/>
           </a:prstGeom>
           <a:solidFill>
-            <a:srgbClr val="FFFFFF"/>
+            <a:srgbClr val="A4472B"/>
           </a:solidFill>
           <a:ln>
             <a:noFill/>
@@ -6897,14 +6769,14 @@
           </a:fontRef>
         </p:style>
         <p:txBody>
-          <a:bodyPr rtlCol="0" anchor="ctr" lIns="0" rIns="0"/>
+          <a:bodyPr rtlCol="0" anchor="ctr" lIns="0" rIns="0" tIns="0" bIns="0"/>
           <a:lstStyle/>
           <a:p>
             <a:pPr algn="ctr"/>
             <a:r>
               <a:rPr sz="1500" i="0" b="1">
                 <a:solidFill>
-                  <a:srgbClr val="2F6F7A"/>
+                  <a:srgbClr val="FFFFFF"/>
                 </a:solidFill>
                 <a:latin typeface="Calibri"/>
               </a:rPr>
@@ -6921,8 +6793,8 @@
         </p:nvSpPr>
         <p:spPr>
           <a:xfrm>
-            <a:off x="1371600" y="3282696"/>
-            <a:ext cx="10088575" cy="548640"/>
+            <a:off x="1371600" y="3465576"/>
+            <a:ext cx="10088575" cy="640080"/>
           </a:xfrm>
           <a:prstGeom prst="rect">
             <a:avLst/>
@@ -6936,9 +6808,9 @@
           <a:lstStyle/>
           <a:p>
             <a:r>
-              <a:rPr sz="1900" i="0" b="1">
-                <a:solidFill>
-                  <a:srgbClr val="FFFFFF"/>
+              <a:rPr sz="1900" i="0" b="0">
+                <a:solidFill>
+                  <a:srgbClr val="2B211C"/>
                 </a:solidFill>
                 <a:latin typeface="Calibri"/>
               </a:rPr>
@@ -6955,8 +6827,8 @@
         </p:nvSpPr>
         <p:spPr>
           <a:xfrm>
-            <a:off x="548640" y="3959352"/>
-            <a:ext cx="11094415" cy="548640"/>
+            <a:off x="548640" y="4233672"/>
+            <a:ext cx="11094415" cy="640080"/>
           </a:xfrm>
           <a:prstGeom prst="roundRect">
             <a:avLst>
@@ -6964,7 +6836,7 @@
             </a:avLst>
           </a:prstGeom>
           <a:solidFill>
-            <a:srgbClr val="F7F4F2"/>
+            <a:srgbClr val="FAF4F2"/>
           </a:solidFill>
           <a:ln>
             <a:noFill/>
@@ -7001,14 +6873,14 @@
         </p:nvSpPr>
         <p:spPr>
           <a:xfrm>
-            <a:off x="713232" y="4023360"/>
+            <a:off x="713232" y="4343400"/>
             <a:ext cx="420624" cy="420624"/>
           </a:xfrm>
           <a:prstGeom prst="ellipse">
             <a:avLst/>
           </a:prstGeom>
           <a:solidFill>
-            <a:srgbClr val="E6DFDA"/>
+            <a:srgbClr val="A4472B"/>
           </a:solidFill>
           <a:ln>
             <a:noFill/>
@@ -7030,14 +6902,14 @@
           </a:fontRef>
         </p:style>
         <p:txBody>
-          <a:bodyPr rtlCol="0" anchor="ctr" lIns="0" rIns="0"/>
+          <a:bodyPr rtlCol="0" anchor="ctr" lIns="0" rIns="0" tIns="0" bIns="0"/>
           <a:lstStyle/>
           <a:p>
             <a:pPr algn="ctr"/>
             <a:r>
               <a:rPr sz="1500" i="0" b="1">
                 <a:solidFill>
-                  <a:srgbClr val="6E625B"/>
+                  <a:srgbClr val="FFFFFF"/>
                 </a:solidFill>
                 <a:latin typeface="Calibri"/>
               </a:rPr>
@@ -7054,8 +6926,8 @@
         </p:nvSpPr>
         <p:spPr>
           <a:xfrm>
-            <a:off x="1371600" y="3959352"/>
-            <a:ext cx="10088575" cy="548640"/>
+            <a:off x="1371600" y="4233672"/>
+            <a:ext cx="10088575" cy="640080"/>
           </a:xfrm>
           <a:prstGeom prst="rect">
             <a:avLst/>
@@ -7071,7 +6943,7 @@
             <a:r>
               <a:rPr sz="1900" i="0" b="0">
                 <a:solidFill>
-                  <a:srgbClr val="6E625B"/>
+                  <a:srgbClr val="2B211C"/>
                 </a:solidFill>
                 <a:latin typeface="Calibri"/>
               </a:rPr>
@@ -7088,8 +6960,8 @@
         </p:nvSpPr>
         <p:spPr>
           <a:xfrm>
-            <a:off x="548640" y="4636008"/>
-            <a:ext cx="11094415" cy="548640"/>
+            <a:off x="548640" y="5001768"/>
+            <a:ext cx="11094415" cy="640080"/>
           </a:xfrm>
           <a:prstGeom prst="roundRect">
             <a:avLst>
@@ -7097,7 +6969,7 @@
             </a:avLst>
           </a:prstGeom>
           <a:solidFill>
-            <a:srgbClr val="F7F4F2"/>
+            <a:srgbClr val="FAF4F2"/>
           </a:solidFill>
           <a:ln>
             <a:noFill/>
@@ -7134,14 +7006,14 @@
         </p:nvSpPr>
         <p:spPr>
           <a:xfrm>
-            <a:off x="713232" y="4700016"/>
+            <a:off x="713232" y="5111496"/>
             <a:ext cx="420624" cy="420624"/>
           </a:xfrm>
           <a:prstGeom prst="ellipse">
             <a:avLst/>
           </a:prstGeom>
           <a:solidFill>
-            <a:srgbClr val="E6DFDA"/>
+            <a:srgbClr val="A4472B"/>
           </a:solidFill>
           <a:ln>
             <a:noFill/>
@@ -7163,14 +7035,14 @@
           </a:fontRef>
         </p:style>
         <p:txBody>
-          <a:bodyPr rtlCol="0" anchor="ctr" lIns="0" rIns="0"/>
+          <a:bodyPr rtlCol="0" anchor="ctr" lIns="0" rIns="0" tIns="0" bIns="0"/>
           <a:lstStyle/>
           <a:p>
             <a:pPr algn="ctr"/>
             <a:r>
               <a:rPr sz="1500" i="0" b="1">
                 <a:solidFill>
-                  <a:srgbClr val="6E625B"/>
+                  <a:srgbClr val="FFFFFF"/>
                 </a:solidFill>
                 <a:latin typeface="Calibri"/>
               </a:rPr>
@@ -7187,8 +7059,8 @@
         </p:nvSpPr>
         <p:spPr>
           <a:xfrm>
-            <a:off x="1371600" y="4636008"/>
-            <a:ext cx="10088575" cy="548640"/>
+            <a:off x="1371600" y="5001768"/>
+            <a:ext cx="10088575" cy="640080"/>
           </a:xfrm>
           <a:prstGeom prst="rect">
             <a:avLst/>
@@ -7204,54 +7076,11 @@
             <a:r>
               <a:rPr sz="1900" i="0" b="0">
                 <a:solidFill>
-                  <a:srgbClr val="6E625B"/>
+                  <a:srgbClr val="2B211C"/>
                 </a:solidFill>
                 <a:latin typeface="Calibri"/>
               </a:rPr>
               <a:t>Cross-sectional study</a:t>
-            </a:r>
-          </a:p>
-        </p:txBody>
-      </p:sp>
-      <p:sp>
-        <p:nvSpPr>
-          <p:cNvPr id="21" name="TextBox 20"/>
-          <p:cNvSpPr txBox="1"/>
-          <p:nvPr/>
-        </p:nvSpPr>
-        <p:spPr>
-          <a:xfrm>
-            <a:off x="548640" y="5358384"/>
-            <a:ext cx="11094415" cy="685800"/>
-          </a:xfrm>
-          <a:prstGeom prst="rect">
-            <a:avLst/>
-          </a:prstGeom>
-          <a:noFill/>
-        </p:spPr>
-        <p:txBody>
-          <a:bodyPr wrap="square" anchor="t" lIns="0" rIns="0" tIns="0" bIns="0">
-            <a:spAutoFit/>
-          </a:bodyPr>
-          <a:lstStyle/>
-          <a:p>
-            <a:r>
-              <a:rPr sz="1500" i="0" b="1">
-                <a:solidFill>
-                  <a:srgbClr val="2F6F7A"/>
-                </a:solidFill>
-                <a:latin typeface="Calibri"/>
-              </a:rPr>
-              <a:t>Why:  </a:t>
-            </a:r>
-            <a:r>
-              <a:rPr sz="1500" i="0" b="0">
-                <a:solidFill>
-                  <a:srgbClr val="2B211C"/>
-                </a:solidFill>
-                <a:latin typeface="Calibri"/>
-              </a:rPr>
-              <a:t>It starts from the outcome (liver failure) and looks back at exposure. A goes forward, C randomises, D measures one time point.</a:t>
             </a:r>
           </a:p>
         </p:txBody>
@@ -7319,7 +7148,7 @@
           </a:fontRef>
         </p:style>
         <p:txBody>
-          <a:bodyPr rtlCol="0" anchor="ctr" lIns="0" rIns="0"/>
+          <a:bodyPr rtlCol="0" anchor="ctr" lIns="0" rIns="0" tIns="0" bIns="0"/>
           <a:lstStyle/>
           <a:p>
             <a:pPr algn="ctr"/>
@@ -7364,7 +7193,7 @@
                 </a:solidFill>
                 <a:latin typeface="Calibri"/>
               </a:rPr>
-              <a:t>SELF-ASSESSMENT  ·  QUESTION 2 OF 5</a:t>
+              <a:t>SECTION 3  ·  QUESTION 1 OF 5  ·  ANSWER</a:t>
             </a:r>
           </a:p>
         </p:txBody>
@@ -7398,7 +7227,7 @@
                 </a:solidFill>
                 <a:latin typeface="Cambria"/>
               </a:rPr>
-              <a:t>Your turn</a:t>
+              <a:t>Check your answer</a:t>
             </a:r>
           </a:p>
         </p:txBody>
@@ -7481,7 +7310,7 @@
           <p:nvPr/>
         </p:nvPicPr>
         <p:blipFill>
-          <a:blip r:embed="rId3"/>
+          <a:blip r:embed="rId2"/>
           <a:stretch>
             <a:fillRect/>
           </a:stretch>
@@ -7525,7 +7354,7 @@
                 </a:solidFill>
                 <a:latin typeface="Calibri"/>
               </a:rPr>
-              <a:t>Which study is experimental?</a:t>
+              <a:t>Researchers compare past drug use in 200 patients with liver failure and 400 without. What design is this?</a:t>
             </a:r>
           </a:p>
         </p:txBody>
@@ -7538,8 +7367,8 @@
         </p:nvSpPr>
         <p:spPr>
           <a:xfrm>
-            <a:off x="548640" y="2697480"/>
-            <a:ext cx="11094415" cy="640080"/>
+            <a:off x="548640" y="2606040"/>
+            <a:ext cx="11094415" cy="548640"/>
           </a:xfrm>
           <a:prstGeom prst="roundRect">
             <a:avLst>
@@ -7547,7 +7376,7 @@
             </a:avLst>
           </a:prstGeom>
           <a:solidFill>
-            <a:srgbClr val="FBF3EE"/>
+            <a:srgbClr val="F5F4F4"/>
           </a:solidFill>
           <a:ln>
             <a:noFill/>
@@ -7584,14 +7413,14 @@
         </p:nvSpPr>
         <p:spPr>
           <a:xfrm>
-            <a:off x="713232" y="2807208"/>
+            <a:off x="713232" y="2670048"/>
             <a:ext cx="420624" cy="420624"/>
           </a:xfrm>
           <a:prstGeom prst="ellipse">
             <a:avLst/>
           </a:prstGeom>
           <a:solidFill>
-            <a:srgbClr val="A4472B"/>
+            <a:srgbClr val="E2E0DE"/>
           </a:solidFill>
           <a:ln>
             <a:noFill/>
@@ -7613,14 +7442,14 @@
           </a:fontRef>
         </p:style>
         <p:txBody>
-          <a:bodyPr rtlCol="0" anchor="ctr" lIns="0" rIns="0"/>
+          <a:bodyPr rtlCol="0" anchor="ctr" lIns="0" rIns="0" tIns="0" bIns="0"/>
           <a:lstStyle/>
           <a:p>
             <a:pPr algn="ctr"/>
             <a:r>
               <a:rPr sz="1500" i="0" b="1">
                 <a:solidFill>
-                  <a:srgbClr val="FFFFFF"/>
+                  <a:srgbClr val="6E625B"/>
                 </a:solidFill>
                 <a:latin typeface="Calibri"/>
               </a:rPr>
@@ -7637,8 +7466,8 @@
         </p:nvSpPr>
         <p:spPr>
           <a:xfrm>
-            <a:off x="1371600" y="2697480"/>
-            <a:ext cx="10088575" cy="640080"/>
+            <a:off x="1371600" y="2606040"/>
+            <a:ext cx="10088575" cy="548640"/>
           </a:xfrm>
           <a:prstGeom prst="rect">
             <a:avLst/>
@@ -7654,11 +7483,11 @@
             <a:r>
               <a:rPr sz="1900" i="0" b="0">
                 <a:solidFill>
-                  <a:srgbClr val="2B211C"/>
-                </a:solidFill>
-                <a:latin typeface="Calibri"/>
-              </a:rPr>
-              <a:t>A cohort study of smokers</a:t>
+                  <a:srgbClr val="6E625B"/>
+                </a:solidFill>
+                <a:latin typeface="Calibri"/>
+              </a:rPr>
+              <a:t>Cohort study</a:t>
             </a:r>
           </a:p>
         </p:txBody>
@@ -7671,8 +7500,8 @@
         </p:nvSpPr>
         <p:spPr>
           <a:xfrm>
-            <a:off x="548640" y="3465576"/>
-            <a:ext cx="11094415" cy="640080"/>
+            <a:off x="548640" y="3282696"/>
+            <a:ext cx="11094415" cy="548640"/>
           </a:xfrm>
           <a:prstGeom prst="roundRect">
             <a:avLst>
@@ -7680,7 +7509,7 @@
             </a:avLst>
           </a:prstGeom>
           <a:solidFill>
-            <a:srgbClr val="FBF3EE"/>
+            <a:srgbClr val="2F6F7A"/>
           </a:solidFill>
           <a:ln>
             <a:noFill/>
@@ -7717,14 +7546,14 @@
         </p:nvSpPr>
         <p:spPr>
           <a:xfrm>
-            <a:off x="713232" y="3575304"/>
+            <a:off x="713232" y="3346703"/>
             <a:ext cx="420624" cy="420624"/>
           </a:xfrm>
           <a:prstGeom prst="ellipse">
             <a:avLst/>
           </a:prstGeom>
           <a:solidFill>
-            <a:srgbClr val="A4472B"/>
+            <a:srgbClr val="FFFFFF"/>
           </a:solidFill>
           <a:ln>
             <a:noFill/>
@@ -7746,14 +7575,14 @@
           </a:fontRef>
         </p:style>
         <p:txBody>
-          <a:bodyPr rtlCol="0" anchor="ctr" lIns="0" rIns="0"/>
+          <a:bodyPr rtlCol="0" anchor="ctr" lIns="0" rIns="0" tIns="0" bIns="0"/>
           <a:lstStyle/>
           <a:p>
             <a:pPr algn="ctr"/>
             <a:r>
               <a:rPr sz="1500" i="0" b="1">
                 <a:solidFill>
-                  <a:srgbClr val="FFFFFF"/>
+                  <a:srgbClr val="2F6F7A"/>
                 </a:solidFill>
                 <a:latin typeface="Calibri"/>
               </a:rPr>
@@ -7770,8 +7599,8 @@
         </p:nvSpPr>
         <p:spPr>
           <a:xfrm>
-            <a:off x="1371600" y="3465576"/>
-            <a:ext cx="10088575" cy="640080"/>
+            <a:off x="1371600" y="3282696"/>
+            <a:ext cx="10088575" cy="548640"/>
           </a:xfrm>
           <a:prstGeom prst="rect">
             <a:avLst/>
@@ -7785,13 +7614,13 @@
           <a:lstStyle/>
           <a:p>
             <a:r>
-              <a:rPr sz="1900" i="0" b="0">
-                <a:solidFill>
-                  <a:srgbClr val="2B211C"/>
-                </a:solidFill>
-                <a:latin typeface="Calibri"/>
-              </a:rPr>
-              <a:t>A case report of a rash</a:t>
+              <a:rPr sz="1900" i="0" b="1">
+                <a:solidFill>
+                  <a:srgbClr val="FFFFFF"/>
+                </a:solidFill>
+                <a:latin typeface="Calibri"/>
+              </a:rPr>
+              <a:t>Case-control study</a:t>
             </a:r>
           </a:p>
         </p:txBody>
@@ -7804,8 +7633,8 @@
         </p:nvSpPr>
         <p:spPr>
           <a:xfrm>
-            <a:off x="548640" y="4233672"/>
-            <a:ext cx="11094415" cy="640080"/>
+            <a:off x="548640" y="3959352"/>
+            <a:ext cx="11094415" cy="548640"/>
           </a:xfrm>
           <a:prstGeom prst="roundRect">
             <a:avLst>
@@ -7813,7 +7642,7 @@
             </a:avLst>
           </a:prstGeom>
           <a:solidFill>
-            <a:srgbClr val="FBF3EE"/>
+            <a:srgbClr val="F5F4F4"/>
           </a:solidFill>
           <a:ln>
             <a:noFill/>
@@ -7850,14 +7679,14 @@
         </p:nvSpPr>
         <p:spPr>
           <a:xfrm>
-            <a:off x="713232" y="4343400"/>
+            <a:off x="713232" y="4023360"/>
             <a:ext cx="420624" cy="420624"/>
           </a:xfrm>
           <a:prstGeom prst="ellipse">
             <a:avLst/>
           </a:prstGeom>
           <a:solidFill>
-            <a:srgbClr val="A4472B"/>
+            <a:srgbClr val="E2E0DE"/>
           </a:solidFill>
           <a:ln>
             <a:noFill/>
@@ -7879,14 +7708,14 @@
           </a:fontRef>
         </p:style>
         <p:txBody>
-          <a:bodyPr rtlCol="0" anchor="ctr" lIns="0" rIns="0"/>
+          <a:bodyPr rtlCol="0" anchor="ctr" lIns="0" rIns="0" tIns="0" bIns="0"/>
           <a:lstStyle/>
           <a:p>
             <a:pPr algn="ctr"/>
             <a:r>
               <a:rPr sz="1500" i="0" b="1">
                 <a:solidFill>
-                  <a:srgbClr val="FFFFFF"/>
+                  <a:srgbClr val="6E625B"/>
                 </a:solidFill>
                 <a:latin typeface="Calibri"/>
               </a:rPr>
@@ -7903,8 +7732,8 @@
         </p:nvSpPr>
         <p:spPr>
           <a:xfrm>
-            <a:off x="1371600" y="4233672"/>
-            <a:ext cx="10088575" cy="640080"/>
+            <a:off x="1371600" y="3959352"/>
+            <a:ext cx="10088575" cy="548640"/>
           </a:xfrm>
           <a:prstGeom prst="rect">
             <a:avLst/>
@@ -7920,11 +7749,11 @@
             <a:r>
               <a:rPr sz="1900" i="0" b="0">
                 <a:solidFill>
-                  <a:srgbClr val="2B211C"/>
-                </a:solidFill>
-                <a:latin typeface="Calibri"/>
-              </a:rPr>
-              <a:t>A trial that randomly assigns patients to a new drug or placebo</a:t>
+                  <a:srgbClr val="6E625B"/>
+                </a:solidFill>
+                <a:latin typeface="Calibri"/>
+              </a:rPr>
+              <a:t>Randomised controlled trial</a:t>
             </a:r>
           </a:p>
         </p:txBody>
@@ -7937,8 +7766,8 @@
         </p:nvSpPr>
         <p:spPr>
           <a:xfrm>
-            <a:off x="548640" y="5001768"/>
-            <a:ext cx="11094415" cy="640080"/>
+            <a:off x="548640" y="4636008"/>
+            <a:ext cx="11094415" cy="548640"/>
           </a:xfrm>
           <a:prstGeom prst="roundRect">
             <a:avLst>
@@ -7946,7 +7775,7 @@
             </a:avLst>
           </a:prstGeom>
           <a:solidFill>
-            <a:srgbClr val="FBF3EE"/>
+            <a:srgbClr val="F5F4F4"/>
           </a:solidFill>
           <a:ln>
             <a:noFill/>
@@ -7983,14 +7812,14 @@
         </p:nvSpPr>
         <p:spPr>
           <a:xfrm>
-            <a:off x="713232" y="5111496"/>
+            <a:off x="713232" y="4700016"/>
             <a:ext cx="420624" cy="420624"/>
           </a:xfrm>
           <a:prstGeom prst="ellipse">
             <a:avLst/>
           </a:prstGeom>
           <a:solidFill>
-            <a:srgbClr val="A4472B"/>
+            <a:srgbClr val="E2E0DE"/>
           </a:solidFill>
           <a:ln>
             <a:noFill/>
@@ -8012,14 +7841,14 @@
           </a:fontRef>
         </p:style>
         <p:txBody>
-          <a:bodyPr rtlCol="0" anchor="ctr" lIns="0" rIns="0"/>
+          <a:bodyPr rtlCol="0" anchor="ctr" lIns="0" rIns="0" tIns="0" bIns="0"/>
           <a:lstStyle/>
           <a:p>
             <a:pPr algn="ctr"/>
             <a:r>
               <a:rPr sz="1500" i="0" b="1">
                 <a:solidFill>
-                  <a:srgbClr val="FFFFFF"/>
+                  <a:srgbClr val="6E625B"/>
                 </a:solidFill>
                 <a:latin typeface="Calibri"/>
               </a:rPr>
@@ -8036,8 +7865,8 @@
         </p:nvSpPr>
         <p:spPr>
           <a:xfrm>
-            <a:off x="1371600" y="5001768"/>
-            <a:ext cx="10088575" cy="640080"/>
+            <a:off x="1371600" y="4636008"/>
+            <a:ext cx="10088575" cy="548640"/>
           </a:xfrm>
           <a:prstGeom prst="rect">
             <a:avLst/>
@@ -8053,11 +7882,54 @@
             <a:r>
               <a:rPr sz="1900" i="0" b="0">
                 <a:solidFill>
+                  <a:srgbClr val="6E625B"/>
+                </a:solidFill>
+                <a:latin typeface="Calibri"/>
+              </a:rPr>
+              <a:t>Cross-sectional study</a:t>
+            </a:r>
+          </a:p>
+        </p:txBody>
+      </p:sp>
+      <p:sp>
+        <p:nvSpPr>
+          <p:cNvPr id="21" name="TextBox 20"/>
+          <p:cNvSpPr txBox="1"/>
+          <p:nvPr/>
+        </p:nvSpPr>
+        <p:spPr>
+          <a:xfrm>
+            <a:off x="548640" y="5358384"/>
+            <a:ext cx="11094415" cy="685800"/>
+          </a:xfrm>
+          <a:prstGeom prst="rect">
+            <a:avLst/>
+          </a:prstGeom>
+          <a:noFill/>
+        </p:spPr>
+        <p:txBody>
+          <a:bodyPr wrap="square" anchor="t" lIns="0" rIns="0" tIns="0" bIns="0">
+            <a:spAutoFit/>
+          </a:bodyPr>
+          <a:lstStyle/>
+          <a:p>
+            <a:r>
+              <a:rPr sz="1500" i="0" b="1">
+                <a:solidFill>
+                  <a:srgbClr val="2F6F7A"/>
+                </a:solidFill>
+                <a:latin typeface="Calibri"/>
+              </a:rPr>
+              <a:t>Why:  </a:t>
+            </a:r>
+            <a:r>
+              <a:rPr sz="1500" i="0" b="0">
+                <a:solidFill>
                   <a:srgbClr val="2B211C"/>
                 </a:solidFill>
                 <a:latin typeface="Calibri"/>
               </a:rPr>
-              <a:t>A survey of antibiotic use</a:t>
+              <a:t>It starts from the outcome (liver failure) and looks back at exposure. A goes forward, C randomises, D measures one time point.</a:t>
             </a:r>
           </a:p>
         </p:txBody>
@@ -8125,7 +7997,7 @@
           </a:fontRef>
         </p:style>
         <p:txBody>
-          <a:bodyPr rtlCol="0" anchor="ctr" lIns="0" rIns="0"/>
+          <a:bodyPr rtlCol="0" anchor="ctr" lIns="0" rIns="0" tIns="0" bIns="0"/>
           <a:lstStyle/>
           <a:p>
             <a:pPr algn="ctr"/>
@@ -8170,7 +8042,7 @@
                 </a:solidFill>
                 <a:latin typeface="Calibri"/>
               </a:rPr>
-              <a:t>SELF-ASSESSMENT  ·  QUESTION 2 OF 5  ·  ANSWER</a:t>
+              <a:t>SECTION 3  ·  QUESTION 2 OF 5</a:t>
             </a:r>
           </a:p>
         </p:txBody>
@@ -8204,7 +8076,7 @@
                 </a:solidFill>
                 <a:latin typeface="Cambria"/>
               </a:rPr>
-              <a:t>Check your answer</a:t>
+              <a:t>Your turn</a:t>
             </a:r>
           </a:p>
         </p:txBody>
@@ -8287,7 +8159,7 @@
           <p:nvPr/>
         </p:nvPicPr>
         <p:blipFill>
-          <a:blip r:embed="rId2"/>
+          <a:blip r:embed="rId3"/>
           <a:stretch>
             <a:fillRect/>
           </a:stretch>
@@ -8344,8 +8216,8 @@
         </p:nvSpPr>
         <p:spPr>
           <a:xfrm>
-            <a:off x="548640" y="2606040"/>
-            <a:ext cx="11094415" cy="548640"/>
+            <a:off x="548640" y="2697480"/>
+            <a:ext cx="11094415" cy="640080"/>
           </a:xfrm>
           <a:prstGeom prst="roundRect">
             <a:avLst>
@@ -8353,7 +8225,7 @@
             </a:avLst>
           </a:prstGeom>
           <a:solidFill>
-            <a:srgbClr val="F7F4F2"/>
+            <a:srgbClr val="FAF4F2"/>
           </a:solidFill>
           <a:ln>
             <a:noFill/>
@@ -8390,14 +8262,14 @@
         </p:nvSpPr>
         <p:spPr>
           <a:xfrm>
-            <a:off x="713232" y="2670048"/>
+            <a:off x="713232" y="2807208"/>
             <a:ext cx="420624" cy="420624"/>
           </a:xfrm>
           <a:prstGeom prst="ellipse">
             <a:avLst/>
           </a:prstGeom>
           <a:solidFill>
-            <a:srgbClr val="E6DFDA"/>
+            <a:srgbClr val="A4472B"/>
           </a:solidFill>
           <a:ln>
             <a:noFill/>
@@ -8419,14 +8291,14 @@
           </a:fontRef>
         </p:style>
         <p:txBody>
-          <a:bodyPr rtlCol="0" anchor="ctr" lIns="0" rIns="0"/>
+          <a:bodyPr rtlCol="0" anchor="ctr" lIns="0" rIns="0" tIns="0" bIns="0"/>
           <a:lstStyle/>
           <a:p>
             <a:pPr algn="ctr"/>
             <a:r>
               <a:rPr sz="1500" i="0" b="1">
                 <a:solidFill>
-                  <a:srgbClr val="6E625B"/>
+                  <a:srgbClr val="FFFFFF"/>
                 </a:solidFill>
                 <a:latin typeface="Calibri"/>
               </a:rPr>
@@ -8443,8 +8315,8 @@
         </p:nvSpPr>
         <p:spPr>
           <a:xfrm>
-            <a:off x="1371600" y="2606040"/>
-            <a:ext cx="10088575" cy="548640"/>
+            <a:off x="1371600" y="2697480"/>
+            <a:ext cx="10088575" cy="640080"/>
           </a:xfrm>
           <a:prstGeom prst="rect">
             <a:avLst/>
@@ -8460,7 +8332,7 @@
             <a:r>
               <a:rPr sz="1900" i="0" b="0">
                 <a:solidFill>
-                  <a:srgbClr val="6E625B"/>
+                  <a:srgbClr val="2B211C"/>
                 </a:solidFill>
                 <a:latin typeface="Calibri"/>
               </a:rPr>
@@ -8477,8 +8349,8 @@
         </p:nvSpPr>
         <p:spPr>
           <a:xfrm>
-            <a:off x="548640" y="3282696"/>
-            <a:ext cx="11094415" cy="548640"/>
+            <a:off x="548640" y="3465576"/>
+            <a:ext cx="11094415" cy="640080"/>
           </a:xfrm>
           <a:prstGeom prst="roundRect">
             <a:avLst>
@@ -8486,7 +8358,7 @@
             </a:avLst>
           </a:prstGeom>
           <a:solidFill>
-            <a:srgbClr val="F7F4F2"/>
+            <a:srgbClr val="FAF4F2"/>
           </a:solidFill>
           <a:ln>
             <a:noFill/>
@@ -8523,14 +8395,14 @@
         </p:nvSpPr>
         <p:spPr>
           <a:xfrm>
-            <a:off x="713232" y="3346703"/>
+            <a:off x="713232" y="3575304"/>
             <a:ext cx="420624" cy="420624"/>
           </a:xfrm>
           <a:prstGeom prst="ellipse">
             <a:avLst/>
           </a:prstGeom>
           <a:solidFill>
-            <a:srgbClr val="E6DFDA"/>
+            <a:srgbClr val="A4472B"/>
           </a:solidFill>
           <a:ln>
             <a:noFill/>
@@ -8552,14 +8424,14 @@
           </a:fontRef>
         </p:style>
         <p:txBody>
-          <a:bodyPr rtlCol="0" anchor="ctr" lIns="0" rIns="0"/>
+          <a:bodyPr rtlCol="0" anchor="ctr" lIns="0" rIns="0" tIns="0" bIns="0"/>
           <a:lstStyle/>
           <a:p>
             <a:pPr algn="ctr"/>
             <a:r>
               <a:rPr sz="1500" i="0" b="1">
                 <a:solidFill>
-                  <a:srgbClr val="6E625B"/>
+                  <a:srgbClr val="FFFFFF"/>
                 </a:solidFill>
                 <a:latin typeface="Calibri"/>
               </a:rPr>
@@ -8576,8 +8448,8 @@
         </p:nvSpPr>
         <p:spPr>
           <a:xfrm>
-            <a:off x="1371600" y="3282696"/>
-            <a:ext cx="10088575" cy="548640"/>
+            <a:off x="1371600" y="3465576"/>
+            <a:ext cx="10088575" cy="640080"/>
           </a:xfrm>
           <a:prstGeom prst="rect">
             <a:avLst/>
@@ -8593,7 +8465,7 @@
             <a:r>
               <a:rPr sz="1900" i="0" b="0">
                 <a:solidFill>
-                  <a:srgbClr val="6E625B"/>
+                  <a:srgbClr val="2B211C"/>
                 </a:solidFill>
                 <a:latin typeface="Calibri"/>
               </a:rPr>
@@ -8610,8 +8482,8 @@
         </p:nvSpPr>
         <p:spPr>
           <a:xfrm>
-            <a:off x="548640" y="3959352"/>
-            <a:ext cx="11094415" cy="548640"/>
+            <a:off x="548640" y="4233672"/>
+            <a:ext cx="11094415" cy="640080"/>
           </a:xfrm>
           <a:prstGeom prst="roundRect">
             <a:avLst>
@@ -8619,7 +8491,7 @@
             </a:avLst>
           </a:prstGeom>
           <a:solidFill>
-            <a:srgbClr val="2F6F7A"/>
+            <a:srgbClr val="FAF4F2"/>
           </a:solidFill>
           <a:ln>
             <a:noFill/>
@@ -8656,14 +8528,14 @@
         </p:nvSpPr>
         <p:spPr>
           <a:xfrm>
-            <a:off x="713232" y="4023360"/>
+            <a:off x="713232" y="4343400"/>
             <a:ext cx="420624" cy="420624"/>
           </a:xfrm>
           <a:prstGeom prst="ellipse">
             <a:avLst/>
           </a:prstGeom>
           <a:solidFill>
-            <a:srgbClr val="FFFFFF"/>
+            <a:srgbClr val="A4472B"/>
           </a:solidFill>
           <a:ln>
             <a:noFill/>
@@ -8685,14 +8557,14 @@
           </a:fontRef>
         </p:style>
         <p:txBody>
-          <a:bodyPr rtlCol="0" anchor="ctr" lIns="0" rIns="0"/>
+          <a:bodyPr rtlCol="0" anchor="ctr" lIns="0" rIns="0" tIns="0" bIns="0"/>
           <a:lstStyle/>
           <a:p>
             <a:pPr algn="ctr"/>
             <a:r>
               <a:rPr sz="1500" i="0" b="1">
                 <a:solidFill>
-                  <a:srgbClr val="2F6F7A"/>
+                  <a:srgbClr val="FFFFFF"/>
                 </a:solidFill>
                 <a:latin typeface="Calibri"/>
               </a:rPr>
@@ -8709,8 +8581,8 @@
         </p:nvSpPr>
         <p:spPr>
           <a:xfrm>
-            <a:off x="1371600" y="3959352"/>
-            <a:ext cx="10088575" cy="548640"/>
+            <a:off x="1371600" y="4233672"/>
+            <a:ext cx="10088575" cy="640080"/>
           </a:xfrm>
           <a:prstGeom prst="rect">
             <a:avLst/>
@@ -8724,9 +8596,9 @@
           <a:lstStyle/>
           <a:p>
             <a:r>
-              <a:rPr sz="1900" i="0" b="1">
-                <a:solidFill>
-                  <a:srgbClr val="FFFFFF"/>
+              <a:rPr sz="1900" i="0" b="0">
+                <a:solidFill>
+                  <a:srgbClr val="2B211C"/>
                 </a:solidFill>
                 <a:latin typeface="Calibri"/>
               </a:rPr>
@@ -8743,8 +8615,8 @@
         </p:nvSpPr>
         <p:spPr>
           <a:xfrm>
-            <a:off x="548640" y="4636008"/>
-            <a:ext cx="11094415" cy="548640"/>
+            <a:off x="548640" y="5001768"/>
+            <a:ext cx="11094415" cy="640080"/>
           </a:xfrm>
           <a:prstGeom prst="roundRect">
             <a:avLst>
@@ -8752,7 +8624,7 @@
             </a:avLst>
           </a:prstGeom>
           <a:solidFill>
-            <a:srgbClr val="F7F4F2"/>
+            <a:srgbClr val="FAF4F2"/>
           </a:solidFill>
           <a:ln>
             <a:noFill/>
@@ -8789,14 +8661,14 @@
         </p:nvSpPr>
         <p:spPr>
           <a:xfrm>
-            <a:off x="713232" y="4700016"/>
+            <a:off x="713232" y="5111496"/>
             <a:ext cx="420624" cy="420624"/>
           </a:xfrm>
           <a:prstGeom prst="ellipse">
             <a:avLst/>
           </a:prstGeom>
           <a:solidFill>
-            <a:srgbClr val="E6DFDA"/>
+            <a:srgbClr val="A4472B"/>
           </a:solidFill>
           <a:ln>
             <a:noFill/>
@@ -8818,14 +8690,14 @@
           </a:fontRef>
         </p:style>
         <p:txBody>
-          <a:bodyPr rtlCol="0" anchor="ctr" lIns="0" rIns="0"/>
+          <a:bodyPr rtlCol="0" anchor="ctr" lIns="0" rIns="0" tIns="0" bIns="0"/>
           <a:lstStyle/>
           <a:p>
             <a:pPr algn="ctr"/>
             <a:r>
               <a:rPr sz="1500" i="0" b="1">
                 <a:solidFill>
-                  <a:srgbClr val="6E625B"/>
+                  <a:srgbClr val="FFFFFF"/>
                 </a:solidFill>
                 <a:latin typeface="Calibri"/>
               </a:rPr>
@@ -8842,8 +8714,8 @@
         </p:nvSpPr>
         <p:spPr>
           <a:xfrm>
-            <a:off x="1371600" y="4636008"/>
-            <a:ext cx="10088575" cy="548640"/>
+            <a:off x="1371600" y="5001768"/>
+            <a:ext cx="10088575" cy="640080"/>
           </a:xfrm>
           <a:prstGeom prst="rect">
             <a:avLst/>
@@ -8859,54 +8731,11 @@
             <a:r>
               <a:rPr sz="1900" i="0" b="0">
                 <a:solidFill>
-                  <a:srgbClr val="6E625B"/>
+                  <a:srgbClr val="2B211C"/>
                 </a:solidFill>
                 <a:latin typeface="Calibri"/>
               </a:rPr>
               <a:t>A survey of antibiotic use</a:t>
-            </a:r>
-          </a:p>
-        </p:txBody>
-      </p:sp>
-      <p:sp>
-        <p:nvSpPr>
-          <p:cNvPr id="21" name="TextBox 20"/>
-          <p:cNvSpPr txBox="1"/>
-          <p:nvPr/>
-        </p:nvSpPr>
-        <p:spPr>
-          <a:xfrm>
-            <a:off x="548640" y="5358384"/>
-            <a:ext cx="11094415" cy="685800"/>
-          </a:xfrm>
-          <a:prstGeom prst="rect">
-            <a:avLst/>
-          </a:prstGeom>
-          <a:noFill/>
-        </p:spPr>
-        <p:txBody>
-          <a:bodyPr wrap="square" anchor="t" lIns="0" rIns="0" tIns="0" bIns="0">
-            <a:spAutoFit/>
-          </a:bodyPr>
-          <a:lstStyle/>
-          <a:p>
-            <a:r>
-              <a:rPr sz="1500" i="0" b="1">
-                <a:solidFill>
-                  <a:srgbClr val="2F6F7A"/>
-                </a:solidFill>
-                <a:latin typeface="Calibri"/>
-              </a:rPr>
-              <a:t>Why:  </a:t>
-            </a:r>
-            <a:r>
-              <a:rPr sz="1500" i="0" b="0">
-                <a:solidFill>
-                  <a:srgbClr val="2B211C"/>
-                </a:solidFill>
-                <a:latin typeface="Calibri"/>
-              </a:rPr>
-              <a:t>The researcher assigns the treatment. A, B and D only observe.</a:t>
             </a:r>
           </a:p>
         </p:txBody>
@@ -8974,7 +8803,7 @@
           </a:fontRef>
         </p:style>
         <p:txBody>
-          <a:bodyPr rtlCol="0" anchor="ctr" lIns="0" rIns="0"/>
+          <a:bodyPr rtlCol="0" anchor="ctr" lIns="0" rIns="0" tIns="0" bIns="0"/>
           <a:lstStyle/>
           <a:p>
             <a:pPr algn="ctr"/>
@@ -9019,7 +8848,7 @@
                 </a:solidFill>
                 <a:latin typeface="Calibri"/>
               </a:rPr>
-              <a:t>SELF-ASSESSMENT  ·  QUESTION 3 OF 5</a:t>
+              <a:t>SECTION 3  ·  QUESTION 2 OF 5  ·  ANSWER</a:t>
             </a:r>
           </a:p>
         </p:txBody>
@@ -9053,7 +8882,7 @@
                 </a:solidFill>
                 <a:latin typeface="Cambria"/>
               </a:rPr>
-              <a:t>Your turn</a:t>
+              <a:t>Check your answer</a:t>
             </a:r>
           </a:p>
         </p:txBody>
@@ -9136,7 +8965,7 @@
           <p:nvPr/>
         </p:nvPicPr>
         <p:blipFill>
-          <a:blip r:embed="rId3"/>
+          <a:blip r:embed="rId2"/>
           <a:stretch>
             <a:fillRect/>
           </a:stretch>
@@ -9180,7 +9009,7 @@
                 </a:solidFill>
                 <a:latin typeface="Calibri"/>
               </a:rPr>
-              <a:t>Which sits at the top of the evidence pyramid?</a:t>
+              <a:t>Which study is experimental?</a:t>
             </a:r>
           </a:p>
         </p:txBody>
@@ -9193,8 +9022,8 @@
         </p:nvSpPr>
         <p:spPr>
           <a:xfrm>
-            <a:off x="548640" y="2697480"/>
-            <a:ext cx="11094415" cy="640080"/>
+            <a:off x="548640" y="2606040"/>
+            <a:ext cx="11094415" cy="548640"/>
           </a:xfrm>
           <a:prstGeom prst="roundRect">
             <a:avLst>
@@ -9202,7 +9031,7 @@
             </a:avLst>
           </a:prstGeom>
           <a:solidFill>
-            <a:srgbClr val="FBF3EE"/>
+            <a:srgbClr val="F5F4F4"/>
           </a:solidFill>
           <a:ln>
             <a:noFill/>
@@ -9239,14 +9068,14 @@
         </p:nvSpPr>
         <p:spPr>
           <a:xfrm>
-            <a:off x="713232" y="2807208"/>
+            <a:off x="713232" y="2670048"/>
             <a:ext cx="420624" cy="420624"/>
           </a:xfrm>
           <a:prstGeom prst="ellipse">
             <a:avLst/>
           </a:prstGeom>
           <a:solidFill>
-            <a:srgbClr val="A4472B"/>
+            <a:srgbClr val="E2E0DE"/>
           </a:solidFill>
           <a:ln>
             <a:noFill/>
@@ -9268,14 +9097,14 @@
           </a:fontRef>
         </p:style>
         <p:txBody>
-          <a:bodyPr rtlCol="0" anchor="ctr" lIns="0" rIns="0"/>
+          <a:bodyPr rtlCol="0" anchor="ctr" lIns="0" rIns="0" tIns="0" bIns="0"/>
           <a:lstStyle/>
           <a:p>
             <a:pPr algn="ctr"/>
             <a:r>
               <a:rPr sz="1500" i="0" b="1">
                 <a:solidFill>
-                  <a:srgbClr val="FFFFFF"/>
+                  <a:srgbClr val="6E625B"/>
                 </a:solidFill>
                 <a:latin typeface="Calibri"/>
               </a:rPr>
@@ -9292,8 +9121,8 @@
         </p:nvSpPr>
         <p:spPr>
           <a:xfrm>
-            <a:off x="1371600" y="2697480"/>
-            <a:ext cx="10088575" cy="640080"/>
+            <a:off x="1371600" y="2606040"/>
+            <a:ext cx="10088575" cy="548640"/>
           </a:xfrm>
           <a:prstGeom prst="rect">
             <a:avLst/>
@@ -9309,11 +9138,11 @@
             <a:r>
               <a:rPr sz="1900" i="0" b="0">
                 <a:solidFill>
-                  <a:srgbClr val="2B211C"/>
-                </a:solidFill>
-                <a:latin typeface="Calibri"/>
-              </a:rPr>
-              <a:t>Systematic review and meta-analysis of good RCTs</a:t>
+                  <a:srgbClr val="6E625B"/>
+                </a:solidFill>
+                <a:latin typeface="Calibri"/>
+              </a:rPr>
+              <a:t>A cohort study of smokers</a:t>
             </a:r>
           </a:p>
         </p:txBody>
@@ -9326,8 +9155,8 @@
         </p:nvSpPr>
         <p:spPr>
           <a:xfrm>
-            <a:off x="548640" y="3465576"/>
-            <a:ext cx="11094415" cy="640080"/>
+            <a:off x="548640" y="3282696"/>
+            <a:ext cx="11094415" cy="548640"/>
           </a:xfrm>
           <a:prstGeom prst="roundRect">
             <a:avLst>
@@ -9335,7 +9164,7 @@
             </a:avLst>
           </a:prstGeom>
           <a:solidFill>
-            <a:srgbClr val="FBF3EE"/>
+            <a:srgbClr val="F5F4F4"/>
           </a:solidFill>
           <a:ln>
             <a:noFill/>
@@ -9372,14 +9201,14 @@
         </p:nvSpPr>
         <p:spPr>
           <a:xfrm>
-            <a:off x="713232" y="3575304"/>
+            <a:off x="713232" y="3346703"/>
             <a:ext cx="420624" cy="420624"/>
           </a:xfrm>
           <a:prstGeom prst="ellipse">
             <a:avLst/>
           </a:prstGeom>
           <a:solidFill>
-            <a:srgbClr val="A4472B"/>
+            <a:srgbClr val="E2E0DE"/>
           </a:solidFill>
           <a:ln>
             <a:noFill/>
@@ -9401,14 +9230,14 @@
           </a:fontRef>
         </p:style>
         <p:txBody>
-          <a:bodyPr rtlCol="0" anchor="ctr" lIns="0" rIns="0"/>
+          <a:bodyPr rtlCol="0" anchor="ctr" lIns="0" rIns="0" tIns="0" bIns="0"/>
           <a:lstStyle/>
           <a:p>
             <a:pPr algn="ctr"/>
             <a:r>
               <a:rPr sz="1500" i="0" b="1">
                 <a:solidFill>
-                  <a:srgbClr val="FFFFFF"/>
+                  <a:srgbClr val="6E625B"/>
                 </a:solidFill>
                 <a:latin typeface="Calibri"/>
               </a:rPr>
@@ -9425,8 +9254,8 @@
         </p:nvSpPr>
         <p:spPr>
           <a:xfrm>
-            <a:off x="1371600" y="3465576"/>
-            <a:ext cx="10088575" cy="640080"/>
+            <a:off x="1371600" y="3282696"/>
+            <a:ext cx="10088575" cy="548640"/>
           </a:xfrm>
           <a:prstGeom prst="rect">
             <a:avLst/>
@@ -9442,11 +9271,11 @@
             <a:r>
               <a:rPr sz="1900" i="0" b="0">
                 <a:solidFill>
-                  <a:srgbClr val="2B211C"/>
-                </a:solidFill>
-                <a:latin typeface="Calibri"/>
-              </a:rPr>
-              <a:t>Expert opinion</a:t>
+                  <a:srgbClr val="6E625B"/>
+                </a:solidFill>
+                <a:latin typeface="Calibri"/>
+              </a:rPr>
+              <a:t>A case report of a rash</a:t>
             </a:r>
           </a:p>
         </p:txBody>
@@ -9459,8 +9288,8 @@
         </p:nvSpPr>
         <p:spPr>
           <a:xfrm>
-            <a:off x="548640" y="4233672"/>
-            <a:ext cx="11094415" cy="640080"/>
+            <a:off x="548640" y="3959352"/>
+            <a:ext cx="11094415" cy="548640"/>
           </a:xfrm>
           <a:prstGeom prst="roundRect">
             <a:avLst>
@@ -9468,7 +9297,7 @@
             </a:avLst>
           </a:prstGeom>
           <a:solidFill>
-            <a:srgbClr val="FBF3EE"/>
+            <a:srgbClr val="2F6F7A"/>
           </a:solidFill>
           <a:ln>
             <a:noFill/>
@@ -9505,14 +9334,14 @@
         </p:nvSpPr>
         <p:spPr>
           <a:xfrm>
-            <a:off x="713232" y="4343400"/>
+            <a:off x="713232" y="4023360"/>
             <a:ext cx="420624" cy="420624"/>
           </a:xfrm>
           <a:prstGeom prst="ellipse">
             <a:avLst/>
           </a:prstGeom>
           <a:solidFill>
-            <a:srgbClr val="A4472B"/>
+            <a:srgbClr val="FFFFFF"/>
           </a:solidFill>
           <a:ln>
             <a:noFill/>
@@ -9534,14 +9363,14 @@
           </a:fontRef>
         </p:style>
         <p:txBody>
-          <a:bodyPr rtlCol="0" anchor="ctr" lIns="0" rIns="0"/>
+          <a:bodyPr rtlCol="0" anchor="ctr" lIns="0" rIns="0" tIns="0" bIns="0"/>
           <a:lstStyle/>
           <a:p>
             <a:pPr algn="ctr"/>
             <a:r>
               <a:rPr sz="1500" i="0" b="1">
                 <a:solidFill>
-                  <a:srgbClr val="FFFFFF"/>
+                  <a:srgbClr val="2F6F7A"/>
                 </a:solidFill>
                 <a:latin typeface="Calibri"/>
               </a:rPr>
@@ -9558,8 +9387,8 @@
         </p:nvSpPr>
         <p:spPr>
           <a:xfrm>
-            <a:off x="1371600" y="4233672"/>
-            <a:ext cx="10088575" cy="640080"/>
+            <a:off x="1371600" y="3959352"/>
+            <a:ext cx="10088575" cy="548640"/>
           </a:xfrm>
           <a:prstGeom prst="rect">
             <a:avLst/>
@@ -9573,13 +9402,13 @@
           <a:lstStyle/>
           <a:p>
             <a:r>
-              <a:rPr sz="1900" i="0" b="0">
-                <a:solidFill>
-                  <a:srgbClr val="2B211C"/>
-                </a:solidFill>
-                <a:latin typeface="Calibri"/>
-              </a:rPr>
-              <a:t>Case series</a:t>
+              <a:rPr sz="1900" i="0" b="1">
+                <a:solidFill>
+                  <a:srgbClr val="FFFFFF"/>
+                </a:solidFill>
+                <a:latin typeface="Calibri"/>
+              </a:rPr>
+              <a:t>A trial that randomly assigns patients to a new drug or placebo</a:t>
             </a:r>
           </a:p>
         </p:txBody>
@@ -9592,8 +9421,8 @@
         </p:nvSpPr>
         <p:spPr>
           <a:xfrm>
-            <a:off x="548640" y="5001768"/>
-            <a:ext cx="11094415" cy="640080"/>
+            <a:off x="548640" y="4636008"/>
+            <a:ext cx="11094415" cy="548640"/>
           </a:xfrm>
           <a:prstGeom prst="roundRect">
             <a:avLst>
@@ -9601,7 +9430,7 @@
             </a:avLst>
           </a:prstGeom>
           <a:solidFill>
-            <a:srgbClr val="FBF3EE"/>
+            <a:srgbClr val="F5F4F4"/>
           </a:solidFill>
           <a:ln>
             <a:noFill/>
@@ -9638,14 +9467,14 @@
         </p:nvSpPr>
         <p:spPr>
           <a:xfrm>
-            <a:off x="713232" y="5111496"/>
+            <a:off x="713232" y="4700016"/>
             <a:ext cx="420624" cy="420624"/>
           </a:xfrm>
           <a:prstGeom prst="ellipse">
             <a:avLst/>
           </a:prstGeom>
           <a:solidFill>
-            <a:srgbClr val="A4472B"/>
+            <a:srgbClr val="E2E0DE"/>
           </a:solidFill>
           <a:ln>
             <a:noFill/>
@@ -9667,14 +9496,14 @@
           </a:fontRef>
         </p:style>
         <p:txBody>
-          <a:bodyPr rtlCol="0" anchor="ctr" lIns="0" rIns="0"/>
+          <a:bodyPr rtlCol="0" anchor="ctr" lIns="0" rIns="0" tIns="0" bIns="0"/>
           <a:lstStyle/>
           <a:p>
             <a:pPr algn="ctr"/>
             <a:r>
               <a:rPr sz="1500" i="0" b="1">
                 <a:solidFill>
-                  <a:srgbClr val="FFFFFF"/>
+                  <a:srgbClr val="6E625B"/>
                 </a:solidFill>
                 <a:latin typeface="Calibri"/>
               </a:rPr>
@@ -9691,8 +9520,8 @@
         </p:nvSpPr>
         <p:spPr>
           <a:xfrm>
-            <a:off x="1371600" y="5001768"/>
-            <a:ext cx="10088575" cy="640080"/>
+            <a:off x="1371600" y="4636008"/>
+            <a:ext cx="10088575" cy="548640"/>
           </a:xfrm>
           <a:prstGeom prst="rect">
             <a:avLst/>
@@ -9708,11 +9537,54 @@
             <a:r>
               <a:rPr sz="1900" i="0" b="0">
                 <a:solidFill>
+                  <a:srgbClr val="6E625B"/>
+                </a:solidFill>
+                <a:latin typeface="Calibri"/>
+              </a:rPr>
+              <a:t>A survey of antibiotic use</a:t>
+            </a:r>
+          </a:p>
+        </p:txBody>
+      </p:sp>
+      <p:sp>
+        <p:nvSpPr>
+          <p:cNvPr id="21" name="TextBox 20"/>
+          <p:cNvSpPr txBox="1"/>
+          <p:nvPr/>
+        </p:nvSpPr>
+        <p:spPr>
+          <a:xfrm>
+            <a:off x="548640" y="5358384"/>
+            <a:ext cx="11094415" cy="685800"/>
+          </a:xfrm>
+          <a:prstGeom prst="rect">
+            <a:avLst/>
+          </a:prstGeom>
+          <a:noFill/>
+        </p:spPr>
+        <p:txBody>
+          <a:bodyPr wrap="square" anchor="t" lIns="0" rIns="0" tIns="0" bIns="0">
+            <a:spAutoFit/>
+          </a:bodyPr>
+          <a:lstStyle/>
+          <a:p>
+            <a:r>
+              <a:rPr sz="1500" i="0" b="1">
+                <a:solidFill>
+                  <a:srgbClr val="2F6F7A"/>
+                </a:solidFill>
+                <a:latin typeface="Calibri"/>
+              </a:rPr>
+              <a:t>Why:  </a:t>
+            </a:r>
+            <a:r>
+              <a:rPr sz="1500" i="0" b="0">
+                <a:solidFill>
                   <a:srgbClr val="2B211C"/>
                 </a:solidFill>
                 <a:latin typeface="Calibri"/>
               </a:rPr>
-              <a:t>Cohort study</a:t>
+              <a:t>The researcher assigns the treatment. A, B and D only observe.</a:t>
             </a:r>
           </a:p>
         </p:txBody>
@@ -9780,7 +9652,7 @@
           </a:fontRef>
         </p:style>
         <p:txBody>
-          <a:bodyPr rtlCol="0" anchor="ctr" lIns="0" rIns="0"/>
+          <a:bodyPr rtlCol="0" anchor="ctr" lIns="0" rIns="0" tIns="0" bIns="0"/>
           <a:lstStyle/>
           <a:p>
             <a:pPr algn="ctr"/>
@@ -9825,7 +9697,7 @@
                 </a:solidFill>
                 <a:latin typeface="Calibri"/>
               </a:rPr>
-              <a:t>SELF-ASSESSMENT  ·  QUESTION 3 OF 5  ·  ANSWER</a:t>
+              <a:t>SECTION 3  ·  QUESTION 3 OF 5</a:t>
             </a:r>
           </a:p>
         </p:txBody>
@@ -9859,7 +9731,7 @@
                 </a:solidFill>
                 <a:latin typeface="Cambria"/>
               </a:rPr>
-              <a:t>Check your answer</a:t>
+              <a:t>Your turn</a:t>
             </a:r>
           </a:p>
         </p:txBody>
@@ -9942,7 +9814,7 @@
           <p:nvPr/>
         </p:nvPicPr>
         <p:blipFill>
-          <a:blip r:embed="rId2"/>
+          <a:blip r:embed="rId3"/>
           <a:stretch>
             <a:fillRect/>
           </a:stretch>
@@ -9999,8 +9871,8 @@
         </p:nvSpPr>
         <p:spPr>
           <a:xfrm>
-            <a:off x="548640" y="2606040"/>
-            <a:ext cx="11094415" cy="548640"/>
+            <a:off x="548640" y="2697480"/>
+            <a:ext cx="11094415" cy="640080"/>
           </a:xfrm>
           <a:prstGeom prst="roundRect">
             <a:avLst>
@@ -10008,7 +9880,7 @@
             </a:avLst>
           </a:prstGeom>
           <a:solidFill>
-            <a:srgbClr val="2F6F7A"/>
+            <a:srgbClr val="FAF4F2"/>
           </a:solidFill>
           <a:ln>
             <a:noFill/>
@@ -10045,14 +9917,14 @@
         </p:nvSpPr>
         <p:spPr>
           <a:xfrm>
-            <a:off x="713232" y="2670048"/>
+            <a:off x="713232" y="2807208"/>
             <a:ext cx="420624" cy="420624"/>
           </a:xfrm>
           <a:prstGeom prst="ellipse">
             <a:avLst/>
           </a:prstGeom>
           <a:solidFill>
-            <a:srgbClr val="FFFFFF"/>
+            <a:srgbClr val="A4472B"/>
           </a:solidFill>
           <a:ln>
             <a:noFill/>
@@ -10074,14 +9946,14 @@
           </a:fontRef>
         </p:style>
         <p:txBody>
-          <a:bodyPr rtlCol="0" anchor="ctr" lIns="0" rIns="0"/>
+          <a:bodyPr rtlCol="0" anchor="ctr" lIns="0" rIns="0" tIns="0" bIns="0"/>
           <a:lstStyle/>
           <a:p>
             <a:pPr algn="ctr"/>
             <a:r>
               <a:rPr sz="1500" i="0" b="1">
                 <a:solidFill>
-                  <a:srgbClr val="2F6F7A"/>
+                  <a:srgbClr val="FFFFFF"/>
                 </a:solidFill>
                 <a:latin typeface="Calibri"/>
               </a:rPr>
@@ -10098,8 +9970,8 @@
         </p:nvSpPr>
         <p:spPr>
           <a:xfrm>
-            <a:off x="1371600" y="2606040"/>
-            <a:ext cx="10088575" cy="548640"/>
+            <a:off x="1371600" y="2697480"/>
+            <a:ext cx="10088575" cy="640080"/>
           </a:xfrm>
           <a:prstGeom prst="rect">
             <a:avLst/>
@@ -10113,9 +9985,9 @@
           <a:lstStyle/>
           <a:p>
             <a:r>
-              <a:rPr sz="1900" i="0" b="1">
-                <a:solidFill>
-                  <a:srgbClr val="FFFFFF"/>
+              <a:rPr sz="1900" i="0" b="0">
+                <a:solidFill>
+                  <a:srgbClr val="2B211C"/>
                 </a:solidFill>
                 <a:latin typeface="Calibri"/>
               </a:rPr>
@@ -10132,8 +10004,8 @@
         </p:nvSpPr>
         <p:spPr>
           <a:xfrm>
-            <a:off x="548640" y="3282696"/>
-            <a:ext cx="11094415" cy="548640"/>
+            <a:off x="548640" y="3465576"/>
+            <a:ext cx="11094415" cy="640080"/>
           </a:xfrm>
           <a:prstGeom prst="roundRect">
             <a:avLst>
@@ -10141,7 +10013,7 @@
             </a:avLst>
           </a:prstGeom>
           <a:solidFill>
-            <a:srgbClr val="F7F4F2"/>
+            <a:srgbClr val="FAF4F2"/>
           </a:solidFill>
           <a:ln>
             <a:noFill/>
@@ -10178,14 +10050,14 @@
         </p:nvSpPr>
         <p:spPr>
           <a:xfrm>
-            <a:off x="713232" y="3346703"/>
+            <a:off x="713232" y="3575304"/>
             <a:ext cx="420624" cy="420624"/>
           </a:xfrm>
           <a:prstGeom prst="ellipse">
             <a:avLst/>
           </a:prstGeom>
           <a:solidFill>
-            <a:srgbClr val="E6DFDA"/>
+            <a:srgbClr val="A4472B"/>
           </a:solidFill>
           <a:ln>
             <a:noFill/>
@@ -10207,14 +10079,14 @@
           </a:fontRef>
         </p:style>
         <p:txBody>
-          <a:bodyPr rtlCol="0" anchor="ctr" lIns="0" rIns="0"/>
+          <a:bodyPr rtlCol="0" anchor="ctr" lIns="0" rIns="0" tIns="0" bIns="0"/>
           <a:lstStyle/>
           <a:p>
             <a:pPr algn="ctr"/>
             <a:r>
               <a:rPr sz="1500" i="0" b="1">
                 <a:solidFill>
-                  <a:srgbClr val="6E625B"/>
+                  <a:srgbClr val="FFFFFF"/>
                 </a:solidFill>
                 <a:latin typeface="Calibri"/>
               </a:rPr>
@@ -10231,8 +10103,8 @@
         </p:nvSpPr>
         <p:spPr>
           <a:xfrm>
-            <a:off x="1371600" y="3282696"/>
-            <a:ext cx="10088575" cy="548640"/>
+            <a:off x="1371600" y="3465576"/>
+            <a:ext cx="10088575" cy="640080"/>
           </a:xfrm>
           <a:prstGeom prst="rect">
             <a:avLst/>
@@ -10248,7 +10120,7 @@
             <a:r>
               <a:rPr sz="1900" i="0" b="0">
                 <a:solidFill>
-                  <a:srgbClr val="6E625B"/>
+                  <a:srgbClr val="2B211C"/>
                 </a:solidFill>
                 <a:latin typeface="Calibri"/>
               </a:rPr>
@@ -10265,8 +10137,8 @@
         </p:nvSpPr>
         <p:spPr>
           <a:xfrm>
-            <a:off x="548640" y="3959352"/>
-            <a:ext cx="11094415" cy="548640"/>
+            <a:off x="548640" y="4233672"/>
+            <a:ext cx="11094415" cy="640080"/>
           </a:xfrm>
           <a:prstGeom prst="roundRect">
             <a:avLst>
@@ -10274,7 +10146,7 @@
             </a:avLst>
           </a:prstGeom>
           <a:solidFill>
-            <a:srgbClr val="F7F4F2"/>
+            <a:srgbClr val="FAF4F2"/>
           </a:solidFill>
           <a:ln>
             <a:noFill/>
@@ -10311,14 +10183,14 @@
         </p:nvSpPr>
         <p:spPr>
           <a:xfrm>
-            <a:off x="713232" y="4023360"/>
+            <a:off x="713232" y="4343400"/>
             <a:ext cx="420624" cy="420624"/>
           </a:xfrm>
           <a:prstGeom prst="ellipse">
             <a:avLst/>
           </a:prstGeom>
           <a:solidFill>
-            <a:srgbClr val="E6DFDA"/>
+            <a:srgbClr val="A4472B"/>
           </a:solidFill>
           <a:ln>
             <a:noFill/>
@@ -10340,14 +10212,14 @@
           </a:fontRef>
         </p:style>
         <p:txBody>
-          <a:bodyPr rtlCol="0" anchor="ctr" lIns="0" rIns="0"/>
+          <a:bodyPr rtlCol="0" anchor="ctr" lIns="0" rIns="0" tIns="0" bIns="0"/>
           <a:lstStyle/>
           <a:p>
             <a:pPr algn="ctr"/>
             <a:r>
               <a:rPr sz="1500" i="0" b="1">
                 <a:solidFill>
-                  <a:srgbClr val="6E625B"/>
+                  <a:srgbClr val="FFFFFF"/>
                 </a:solidFill>
                 <a:latin typeface="Calibri"/>
               </a:rPr>
@@ -10364,8 +10236,8 @@
         </p:nvSpPr>
         <p:spPr>
           <a:xfrm>
-            <a:off x="1371600" y="3959352"/>
-            <a:ext cx="10088575" cy="548640"/>
+            <a:off x="1371600" y="4233672"/>
+            <a:ext cx="10088575" cy="640080"/>
           </a:xfrm>
           <a:prstGeom prst="rect">
             <a:avLst/>
@@ -10381,7 +10253,7 @@
             <a:r>
               <a:rPr sz="1900" i="0" b="0">
                 <a:solidFill>
-                  <a:srgbClr val="6E625B"/>
+                  <a:srgbClr val="2B211C"/>
                 </a:solidFill>
                 <a:latin typeface="Calibri"/>
               </a:rPr>
@@ -10398,8 +10270,8 @@
         </p:nvSpPr>
         <p:spPr>
           <a:xfrm>
-            <a:off x="548640" y="4636008"/>
-            <a:ext cx="11094415" cy="548640"/>
+            <a:off x="548640" y="5001768"/>
+            <a:ext cx="11094415" cy="640080"/>
           </a:xfrm>
           <a:prstGeom prst="roundRect">
             <a:avLst>
@@ -10407,7 +10279,7 @@
             </a:avLst>
           </a:prstGeom>
           <a:solidFill>
-            <a:srgbClr val="F7F4F2"/>
+            <a:srgbClr val="FAF4F2"/>
           </a:solidFill>
           <a:ln>
             <a:noFill/>
@@ -10444,14 +10316,14 @@
         </p:nvSpPr>
         <p:spPr>
           <a:xfrm>
-            <a:off x="713232" y="4700016"/>
+            <a:off x="713232" y="5111496"/>
             <a:ext cx="420624" cy="420624"/>
           </a:xfrm>
           <a:prstGeom prst="ellipse">
             <a:avLst/>
           </a:prstGeom>
           <a:solidFill>
-            <a:srgbClr val="E6DFDA"/>
+            <a:srgbClr val="A4472B"/>
           </a:solidFill>
           <a:ln>
             <a:noFill/>
@@ -10473,14 +10345,14 @@
           </a:fontRef>
         </p:style>
         <p:txBody>
-          <a:bodyPr rtlCol="0" anchor="ctr" lIns="0" rIns="0"/>
+          <a:bodyPr rtlCol="0" anchor="ctr" lIns="0" rIns="0" tIns="0" bIns="0"/>
           <a:lstStyle/>
           <a:p>
             <a:pPr algn="ctr"/>
             <a:r>
               <a:rPr sz="1500" i="0" b="1">
                 <a:solidFill>
-                  <a:srgbClr val="6E625B"/>
+                  <a:srgbClr val="FFFFFF"/>
                 </a:solidFill>
                 <a:latin typeface="Calibri"/>
               </a:rPr>
@@ -10497,8 +10369,8 @@
         </p:nvSpPr>
         <p:spPr>
           <a:xfrm>
-            <a:off x="1371600" y="4636008"/>
-            <a:ext cx="10088575" cy="548640"/>
+            <a:off x="1371600" y="5001768"/>
+            <a:ext cx="10088575" cy="640080"/>
           </a:xfrm>
           <a:prstGeom prst="rect">
             <a:avLst/>
@@ -10514,54 +10386,11 @@
             <a:r>
               <a:rPr sz="1900" i="0" b="0">
                 <a:solidFill>
-                  <a:srgbClr val="6E625B"/>
+                  <a:srgbClr val="2B211C"/>
                 </a:solidFill>
                 <a:latin typeface="Calibri"/>
               </a:rPr>
               <a:t>Cohort study</a:t>
-            </a:r>
-          </a:p>
-        </p:txBody>
-      </p:sp>
-      <p:sp>
-        <p:nvSpPr>
-          <p:cNvPr id="21" name="TextBox 20"/>
-          <p:cNvSpPr txBox="1"/>
-          <p:nvPr/>
-        </p:nvSpPr>
-        <p:spPr>
-          <a:xfrm>
-            <a:off x="548640" y="5358384"/>
-            <a:ext cx="11094415" cy="685800"/>
-          </a:xfrm>
-          <a:prstGeom prst="rect">
-            <a:avLst/>
-          </a:prstGeom>
-          <a:noFill/>
-        </p:spPr>
-        <p:txBody>
-          <a:bodyPr wrap="square" anchor="t" lIns="0" rIns="0" tIns="0" bIns="0">
-            <a:spAutoFit/>
-          </a:bodyPr>
-          <a:lstStyle/>
-          <a:p>
-            <a:r>
-              <a:rPr sz="1500" i="0" b="1">
-                <a:solidFill>
-                  <a:srgbClr val="2F6F7A"/>
-                </a:solidFill>
-                <a:latin typeface="Calibri"/>
-              </a:rPr>
-              <a:t>Why:  </a:t>
-            </a:r>
-            <a:r>
-              <a:rPr sz="1500" i="0" b="0">
-                <a:solidFill>
-                  <a:srgbClr val="2B211C"/>
-                </a:solidFill>
-                <a:latin typeface="Calibri"/>
-              </a:rPr>
-              <a:t>Pooled good RCTs give the strongest evidence. B, C and D are lower.</a:t>
             </a:r>
           </a:p>
         </p:txBody>
@@ -10629,7 +10458,7 @@
           </a:fontRef>
         </p:style>
         <p:txBody>
-          <a:bodyPr rtlCol="0" anchor="ctr" lIns="0" rIns="0"/>
+          <a:bodyPr rtlCol="0" anchor="ctr" lIns="0" rIns="0" tIns="0" bIns="0"/>
           <a:lstStyle/>
           <a:p>
             <a:pPr algn="ctr"/>
@@ -10674,7 +10503,7 @@
                 </a:solidFill>
                 <a:latin typeface="Calibri"/>
               </a:rPr>
-              <a:t>SELF-ASSESSMENT  ·  QUESTION 4 OF 5</a:t>
+              <a:t>SECTION 3  ·  QUESTION 3 OF 5  ·  ANSWER</a:t>
             </a:r>
           </a:p>
         </p:txBody>
@@ -10708,7 +10537,7 @@
                 </a:solidFill>
                 <a:latin typeface="Cambria"/>
               </a:rPr>
-              <a:t>Your turn</a:t>
+              <a:t>Check your answer</a:t>
             </a:r>
           </a:p>
         </p:txBody>
@@ -10791,7 +10620,7 @@
           <p:nvPr/>
         </p:nvPicPr>
         <p:blipFill>
-          <a:blip r:embed="rId3"/>
+          <a:blip r:embed="rId2"/>
           <a:stretch>
             <a:fillRect/>
           </a:stretch>
@@ -10835,7 +10664,7 @@
                 </a:solidFill>
                 <a:latin typeface="Calibri"/>
               </a:rPr>
-              <a:t>In a trial, 10% of placebo patients and 5% of treated patients have a stroke. What is the NNT?</a:t>
+              <a:t>Which sits at the top of the evidence pyramid?</a:t>
             </a:r>
           </a:p>
         </p:txBody>
@@ -10848,8 +10677,8 @@
         </p:nvSpPr>
         <p:spPr>
           <a:xfrm>
-            <a:off x="548640" y="2697480"/>
-            <a:ext cx="11094415" cy="640080"/>
+            <a:off x="548640" y="2606040"/>
+            <a:ext cx="11094415" cy="548640"/>
           </a:xfrm>
           <a:prstGeom prst="roundRect">
             <a:avLst>
@@ -10857,7 +10686,7 @@
             </a:avLst>
           </a:prstGeom>
           <a:solidFill>
-            <a:srgbClr val="FBF3EE"/>
+            <a:srgbClr val="2F6F7A"/>
           </a:solidFill>
           <a:ln>
             <a:noFill/>
@@ -10894,14 +10723,14 @@
         </p:nvSpPr>
         <p:spPr>
           <a:xfrm>
-            <a:off x="713232" y="2807208"/>
+            <a:off x="713232" y="2670048"/>
             <a:ext cx="420624" cy="420624"/>
           </a:xfrm>
           <a:prstGeom prst="ellipse">
             <a:avLst/>
           </a:prstGeom>
           <a:solidFill>
-            <a:srgbClr val="A4472B"/>
+            <a:srgbClr val="FFFFFF"/>
           </a:solidFill>
           <a:ln>
             <a:noFill/>
@@ -10923,14 +10752,14 @@
           </a:fontRef>
         </p:style>
         <p:txBody>
-          <a:bodyPr rtlCol="0" anchor="ctr" lIns="0" rIns="0"/>
+          <a:bodyPr rtlCol="0" anchor="ctr" lIns="0" rIns="0" tIns="0" bIns="0"/>
           <a:lstStyle/>
           <a:p>
             <a:pPr algn="ctr"/>
             <a:r>
               <a:rPr sz="1500" i="0" b="1">
                 <a:solidFill>
-                  <a:srgbClr val="FFFFFF"/>
+                  <a:srgbClr val="2F6F7A"/>
                 </a:solidFill>
                 <a:latin typeface="Calibri"/>
               </a:rPr>
@@ -10947,8 +10776,8 @@
         </p:nvSpPr>
         <p:spPr>
           <a:xfrm>
-            <a:off x="1371600" y="2697480"/>
-            <a:ext cx="10088575" cy="640080"/>
+            <a:off x="1371600" y="2606040"/>
+            <a:ext cx="10088575" cy="548640"/>
           </a:xfrm>
           <a:prstGeom prst="rect">
             <a:avLst/>
@@ -10962,13 +10791,13 @@
           <a:lstStyle/>
           <a:p>
             <a:r>
-              <a:rPr sz="1900" i="0" b="0">
-                <a:solidFill>
-                  <a:srgbClr val="2B211C"/>
-                </a:solidFill>
-                <a:latin typeface="Calibri"/>
-              </a:rPr>
-              <a:t>5</a:t>
+              <a:rPr sz="1900" i="0" b="1">
+                <a:solidFill>
+                  <a:srgbClr val="FFFFFF"/>
+                </a:solidFill>
+                <a:latin typeface="Calibri"/>
+              </a:rPr>
+              <a:t>Systematic review and meta-analysis of good RCTs</a:t>
             </a:r>
           </a:p>
         </p:txBody>
@@ -10981,8 +10810,8 @@
         </p:nvSpPr>
         <p:spPr>
           <a:xfrm>
-            <a:off x="548640" y="3465576"/>
-            <a:ext cx="11094415" cy="640080"/>
+            <a:off x="548640" y="3282696"/>
+            <a:ext cx="11094415" cy="548640"/>
           </a:xfrm>
           <a:prstGeom prst="roundRect">
             <a:avLst>
@@ -10990,7 +10819,7 @@
             </a:avLst>
           </a:prstGeom>
           <a:solidFill>
-            <a:srgbClr val="FBF3EE"/>
+            <a:srgbClr val="F5F4F4"/>
           </a:solidFill>
           <a:ln>
             <a:noFill/>
@@ -11027,14 +10856,14 @@
         </p:nvSpPr>
         <p:spPr>
           <a:xfrm>
-            <a:off x="713232" y="3575304"/>
+            <a:off x="713232" y="3346703"/>
             <a:ext cx="420624" cy="420624"/>
           </a:xfrm>
           <a:prstGeom prst="ellipse">
             <a:avLst/>
           </a:prstGeom>
           <a:solidFill>
-            <a:srgbClr val="A4472B"/>
+            <a:srgbClr val="E2E0DE"/>
           </a:solidFill>
           <a:ln>
             <a:noFill/>
@@ -11056,14 +10885,14 @@
           </a:fontRef>
         </p:style>
         <p:txBody>
-          <a:bodyPr rtlCol="0" anchor="ctr" lIns="0" rIns="0"/>
+          <a:bodyPr rtlCol="0" anchor="ctr" lIns="0" rIns="0" tIns="0" bIns="0"/>
           <a:lstStyle/>
           <a:p>
             <a:pPr algn="ctr"/>
             <a:r>
               <a:rPr sz="1500" i="0" b="1">
                 <a:solidFill>
-                  <a:srgbClr val="FFFFFF"/>
+                  <a:srgbClr val="6E625B"/>
                 </a:solidFill>
                 <a:latin typeface="Calibri"/>
               </a:rPr>
@@ -11080,8 +10909,8 @@
         </p:nvSpPr>
         <p:spPr>
           <a:xfrm>
-            <a:off x="1371600" y="3465576"/>
-            <a:ext cx="10088575" cy="640080"/>
+            <a:off x="1371600" y="3282696"/>
+            <a:ext cx="10088575" cy="548640"/>
           </a:xfrm>
           <a:prstGeom prst="rect">
             <a:avLst/>
@@ -11097,11 +10926,11 @@
             <a:r>
               <a:rPr sz="1900" i="0" b="0">
                 <a:solidFill>
-                  <a:srgbClr val="2B211C"/>
-                </a:solidFill>
-                <a:latin typeface="Calibri"/>
-              </a:rPr>
-              <a:t>10</a:t>
+                  <a:srgbClr val="6E625B"/>
+                </a:solidFill>
+                <a:latin typeface="Calibri"/>
+              </a:rPr>
+              <a:t>Expert opinion</a:t>
             </a:r>
           </a:p>
         </p:txBody>
@@ -11114,8 +10943,8 @@
         </p:nvSpPr>
         <p:spPr>
           <a:xfrm>
-            <a:off x="548640" y="4233672"/>
-            <a:ext cx="11094415" cy="640080"/>
+            <a:off x="548640" y="3959352"/>
+            <a:ext cx="11094415" cy="548640"/>
           </a:xfrm>
           <a:prstGeom prst="roundRect">
             <a:avLst>
@@ -11123,7 +10952,7 @@
             </a:avLst>
           </a:prstGeom>
           <a:solidFill>
-            <a:srgbClr val="FBF3EE"/>
+            <a:srgbClr val="F5F4F4"/>
           </a:solidFill>
           <a:ln>
             <a:noFill/>
@@ -11160,14 +10989,14 @@
         </p:nvSpPr>
         <p:spPr>
           <a:xfrm>
-            <a:off x="713232" y="4343400"/>
+            <a:off x="713232" y="4023360"/>
             <a:ext cx="420624" cy="420624"/>
           </a:xfrm>
           <a:prstGeom prst="ellipse">
             <a:avLst/>
           </a:prstGeom>
           <a:solidFill>
-            <a:srgbClr val="A4472B"/>
+            <a:srgbClr val="E2E0DE"/>
           </a:solidFill>
           <a:ln>
             <a:noFill/>
@@ -11189,14 +11018,14 @@
           </a:fontRef>
         </p:style>
         <p:txBody>
-          <a:bodyPr rtlCol="0" anchor="ctr" lIns="0" rIns="0"/>
+          <a:bodyPr rtlCol="0" anchor="ctr" lIns="0" rIns="0" tIns="0" bIns="0"/>
           <a:lstStyle/>
           <a:p>
             <a:pPr algn="ctr"/>
             <a:r>
               <a:rPr sz="1500" i="0" b="1">
                 <a:solidFill>
-                  <a:srgbClr val="FFFFFF"/>
+                  <a:srgbClr val="6E625B"/>
                 </a:solidFill>
                 <a:latin typeface="Calibri"/>
               </a:rPr>
@@ -11213,8 +11042,8 @@
         </p:nvSpPr>
         <p:spPr>
           <a:xfrm>
-            <a:off x="1371600" y="4233672"/>
-            <a:ext cx="10088575" cy="640080"/>
+            <a:off x="1371600" y="3959352"/>
+            <a:ext cx="10088575" cy="548640"/>
           </a:xfrm>
           <a:prstGeom prst="rect">
             <a:avLst/>
@@ -11230,11 +11059,11 @@
             <a:r>
               <a:rPr sz="1900" i="0" b="0">
                 <a:solidFill>
-                  <a:srgbClr val="2B211C"/>
-                </a:solidFill>
-                <a:latin typeface="Calibri"/>
-              </a:rPr>
-              <a:t>50</a:t>
+                  <a:srgbClr val="6E625B"/>
+                </a:solidFill>
+                <a:latin typeface="Calibri"/>
+              </a:rPr>
+              <a:t>Case series</a:t>
             </a:r>
           </a:p>
         </p:txBody>
@@ -11247,8 +11076,8 @@
         </p:nvSpPr>
         <p:spPr>
           <a:xfrm>
-            <a:off x="548640" y="5001768"/>
-            <a:ext cx="11094415" cy="640080"/>
+            <a:off x="548640" y="4636008"/>
+            <a:ext cx="11094415" cy="548640"/>
           </a:xfrm>
           <a:prstGeom prst="roundRect">
             <a:avLst>
@@ -11256,7 +11085,7 @@
             </a:avLst>
           </a:prstGeom>
           <a:solidFill>
-            <a:srgbClr val="FBF3EE"/>
+            <a:srgbClr val="F5F4F4"/>
           </a:solidFill>
           <a:ln>
             <a:noFill/>
@@ -11293,14 +11122,14 @@
         </p:nvSpPr>
         <p:spPr>
           <a:xfrm>
-            <a:off x="713232" y="5111496"/>
+            <a:off x="713232" y="4700016"/>
             <a:ext cx="420624" cy="420624"/>
           </a:xfrm>
           <a:prstGeom prst="ellipse">
             <a:avLst/>
           </a:prstGeom>
           <a:solidFill>
-            <a:srgbClr val="A4472B"/>
+            <a:srgbClr val="E2E0DE"/>
           </a:solidFill>
           <a:ln>
             <a:noFill/>
@@ -11322,14 +11151,14 @@
           </a:fontRef>
         </p:style>
         <p:txBody>
-          <a:bodyPr rtlCol="0" anchor="ctr" lIns="0" rIns="0"/>
+          <a:bodyPr rtlCol="0" anchor="ctr" lIns="0" rIns="0" tIns="0" bIns="0"/>
           <a:lstStyle/>
           <a:p>
             <a:pPr algn="ctr"/>
             <a:r>
               <a:rPr sz="1500" i="0" b="1">
                 <a:solidFill>
-                  <a:srgbClr val="FFFFFF"/>
+                  <a:srgbClr val="6E625B"/>
                 </a:solidFill>
                 <a:latin typeface="Calibri"/>
               </a:rPr>
@@ -11346,8 +11175,8 @@
         </p:nvSpPr>
         <p:spPr>
           <a:xfrm>
-            <a:off x="1371600" y="5001768"/>
-            <a:ext cx="10088575" cy="640080"/>
+            <a:off x="1371600" y="4636008"/>
+            <a:ext cx="10088575" cy="548640"/>
           </a:xfrm>
           <a:prstGeom prst="rect">
             <a:avLst/>
@@ -11363,11 +11192,54 @@
             <a:r>
               <a:rPr sz="1900" i="0" b="0">
                 <a:solidFill>
+                  <a:srgbClr val="6E625B"/>
+                </a:solidFill>
+                <a:latin typeface="Calibri"/>
+              </a:rPr>
+              <a:t>Cohort study</a:t>
+            </a:r>
+          </a:p>
+        </p:txBody>
+      </p:sp>
+      <p:sp>
+        <p:nvSpPr>
+          <p:cNvPr id="21" name="TextBox 20"/>
+          <p:cNvSpPr txBox="1"/>
+          <p:nvPr/>
+        </p:nvSpPr>
+        <p:spPr>
+          <a:xfrm>
+            <a:off x="548640" y="5358384"/>
+            <a:ext cx="11094415" cy="685800"/>
+          </a:xfrm>
+          <a:prstGeom prst="rect">
+            <a:avLst/>
+          </a:prstGeom>
+          <a:noFill/>
+        </p:spPr>
+        <p:txBody>
+          <a:bodyPr wrap="square" anchor="t" lIns="0" rIns="0" tIns="0" bIns="0">
+            <a:spAutoFit/>
+          </a:bodyPr>
+          <a:lstStyle/>
+          <a:p>
+            <a:r>
+              <a:rPr sz="1500" i="0" b="1">
+                <a:solidFill>
+                  <a:srgbClr val="2F6F7A"/>
+                </a:solidFill>
+                <a:latin typeface="Calibri"/>
+              </a:rPr>
+              <a:t>Why:  </a:t>
+            </a:r>
+            <a:r>
+              <a:rPr sz="1500" i="0" b="0">
+                <a:solidFill>
                   <a:srgbClr val="2B211C"/>
                 </a:solidFill>
                 <a:latin typeface="Calibri"/>
               </a:rPr>
-              <a:t>20</a:t>
+              <a:t>Pooled good RCTs give the strongest evidence. B, C and D are lower.</a:t>
             </a:r>
           </a:p>
         </p:txBody>
@@ -11435,7 +11307,7 @@
           </a:fontRef>
         </p:style>
         <p:txBody>
-          <a:bodyPr rtlCol="0" anchor="ctr" lIns="0" rIns="0"/>
+          <a:bodyPr rtlCol="0" anchor="ctr" lIns="0" rIns="0" tIns="0" bIns="0"/>
           <a:lstStyle/>
           <a:p>
             <a:pPr algn="ctr"/>
@@ -11480,7 +11352,7 @@
                 </a:solidFill>
                 <a:latin typeface="Calibri"/>
               </a:rPr>
-              <a:t>SELF-ASSESSMENT  ·  QUESTION 4 OF 5  ·  ANSWER</a:t>
+              <a:t>SECTION 3  ·  QUESTION 4 OF 5</a:t>
             </a:r>
           </a:p>
         </p:txBody>
@@ -11514,7 +11386,7 @@
                 </a:solidFill>
                 <a:latin typeface="Cambria"/>
               </a:rPr>
-              <a:t>Check your answer</a:t>
+              <a:t>Your turn</a:t>
             </a:r>
           </a:p>
         </p:txBody>
@@ -11597,7 +11469,7 @@
           <p:nvPr/>
         </p:nvPicPr>
         <p:blipFill>
-          <a:blip r:embed="rId2"/>
+          <a:blip r:embed="rId3"/>
           <a:stretch>
             <a:fillRect/>
           </a:stretch>
@@ -11654,8 +11526,8 @@
         </p:nvSpPr>
         <p:spPr>
           <a:xfrm>
-            <a:off x="548640" y="2606040"/>
-            <a:ext cx="11094415" cy="548640"/>
+            <a:off x="548640" y="2697480"/>
+            <a:ext cx="11094415" cy="640080"/>
           </a:xfrm>
           <a:prstGeom prst="roundRect">
             <a:avLst>
@@ -11663,7 +11535,7 @@
             </a:avLst>
           </a:prstGeom>
           <a:solidFill>
-            <a:srgbClr val="F7F4F2"/>
+            <a:srgbClr val="FAF4F2"/>
           </a:solidFill>
           <a:ln>
             <a:noFill/>
@@ -11700,14 +11572,14 @@
         </p:nvSpPr>
         <p:spPr>
           <a:xfrm>
-            <a:off x="713232" y="2670048"/>
+            <a:off x="713232" y="2807208"/>
             <a:ext cx="420624" cy="420624"/>
           </a:xfrm>
           <a:prstGeom prst="ellipse">
             <a:avLst/>
           </a:prstGeom>
           <a:solidFill>
-            <a:srgbClr val="E6DFDA"/>
+            <a:srgbClr val="A4472B"/>
           </a:solidFill>
           <a:ln>
             <a:noFill/>
@@ -11729,14 +11601,14 @@
           </a:fontRef>
         </p:style>
         <p:txBody>
-          <a:bodyPr rtlCol="0" anchor="ctr" lIns="0" rIns="0"/>
+          <a:bodyPr rtlCol="0" anchor="ctr" lIns="0" rIns="0" tIns="0" bIns="0"/>
           <a:lstStyle/>
           <a:p>
             <a:pPr algn="ctr"/>
             <a:r>
               <a:rPr sz="1500" i="0" b="1">
                 <a:solidFill>
-                  <a:srgbClr val="6E625B"/>
+                  <a:srgbClr val="FFFFFF"/>
                 </a:solidFill>
                 <a:latin typeface="Calibri"/>
               </a:rPr>
@@ -11753,8 +11625,8 @@
         </p:nvSpPr>
         <p:spPr>
           <a:xfrm>
-            <a:off x="1371600" y="2606040"/>
-            <a:ext cx="10088575" cy="548640"/>
+            <a:off x="1371600" y="2697480"/>
+            <a:ext cx="10088575" cy="640080"/>
           </a:xfrm>
           <a:prstGeom prst="rect">
             <a:avLst/>
@@ -11770,7 +11642,7 @@
             <a:r>
               <a:rPr sz="1900" i="0" b="0">
                 <a:solidFill>
-                  <a:srgbClr val="6E625B"/>
+                  <a:srgbClr val="2B211C"/>
                 </a:solidFill>
                 <a:latin typeface="Calibri"/>
               </a:rPr>
@@ -11787,8 +11659,8 @@
         </p:nvSpPr>
         <p:spPr>
           <a:xfrm>
-            <a:off x="548640" y="3282696"/>
-            <a:ext cx="11094415" cy="548640"/>
+            <a:off x="548640" y="3465576"/>
+            <a:ext cx="11094415" cy="640080"/>
           </a:xfrm>
           <a:prstGeom prst="roundRect">
             <a:avLst>
@@ -11796,7 +11668,7 @@
             </a:avLst>
           </a:prstGeom>
           <a:solidFill>
-            <a:srgbClr val="F7F4F2"/>
+            <a:srgbClr val="FAF4F2"/>
           </a:solidFill>
           <a:ln>
             <a:noFill/>
@@ -11833,14 +11705,14 @@
         </p:nvSpPr>
         <p:spPr>
           <a:xfrm>
-            <a:off x="713232" y="3346703"/>
+            <a:off x="713232" y="3575304"/>
             <a:ext cx="420624" cy="420624"/>
           </a:xfrm>
           <a:prstGeom prst="ellipse">
             <a:avLst/>
           </a:prstGeom>
           <a:solidFill>
-            <a:srgbClr val="E6DFDA"/>
+            <a:srgbClr val="A4472B"/>
           </a:solidFill>
           <a:ln>
             <a:noFill/>
@@ -11862,14 +11734,14 @@
           </a:fontRef>
         </p:style>
         <p:txBody>
-          <a:bodyPr rtlCol="0" anchor="ctr" lIns="0" rIns="0"/>
+          <a:bodyPr rtlCol="0" anchor="ctr" lIns="0" rIns="0" tIns="0" bIns="0"/>
           <a:lstStyle/>
           <a:p>
             <a:pPr algn="ctr"/>
             <a:r>
               <a:rPr sz="1500" i="0" b="1">
                 <a:solidFill>
-                  <a:srgbClr val="6E625B"/>
+                  <a:srgbClr val="FFFFFF"/>
                 </a:solidFill>
                 <a:latin typeface="Calibri"/>
               </a:rPr>
@@ -11886,8 +11758,8 @@
         </p:nvSpPr>
         <p:spPr>
           <a:xfrm>
-            <a:off x="1371600" y="3282696"/>
-            <a:ext cx="10088575" cy="548640"/>
+            <a:off x="1371600" y="3465576"/>
+            <a:ext cx="10088575" cy="640080"/>
           </a:xfrm>
           <a:prstGeom prst="rect">
             <a:avLst/>
@@ -11903,7 +11775,7 @@
             <a:r>
               <a:rPr sz="1900" i="0" b="0">
                 <a:solidFill>
-                  <a:srgbClr val="6E625B"/>
+                  <a:srgbClr val="2B211C"/>
                 </a:solidFill>
                 <a:latin typeface="Calibri"/>
               </a:rPr>
@@ -11920,8 +11792,8 @@
         </p:nvSpPr>
         <p:spPr>
           <a:xfrm>
-            <a:off x="548640" y="3959352"/>
-            <a:ext cx="11094415" cy="548640"/>
+            <a:off x="548640" y="4233672"/>
+            <a:ext cx="11094415" cy="640080"/>
           </a:xfrm>
           <a:prstGeom prst="roundRect">
             <a:avLst>
@@ -11929,7 +11801,7 @@
             </a:avLst>
           </a:prstGeom>
           <a:solidFill>
-            <a:srgbClr val="F7F4F2"/>
+            <a:srgbClr val="FAF4F2"/>
           </a:solidFill>
           <a:ln>
             <a:noFill/>
@@ -11966,14 +11838,14 @@
         </p:nvSpPr>
         <p:spPr>
           <a:xfrm>
-            <a:off x="713232" y="4023360"/>
+            <a:off x="713232" y="4343400"/>
             <a:ext cx="420624" cy="420624"/>
           </a:xfrm>
           <a:prstGeom prst="ellipse">
             <a:avLst/>
           </a:prstGeom>
           <a:solidFill>
-            <a:srgbClr val="E6DFDA"/>
+            <a:srgbClr val="A4472B"/>
           </a:solidFill>
           <a:ln>
             <a:noFill/>
@@ -11995,14 +11867,14 @@
           </a:fontRef>
         </p:style>
         <p:txBody>
-          <a:bodyPr rtlCol="0" anchor="ctr" lIns="0" rIns="0"/>
+          <a:bodyPr rtlCol="0" anchor="ctr" lIns="0" rIns="0" tIns="0" bIns="0"/>
           <a:lstStyle/>
           <a:p>
             <a:pPr algn="ctr"/>
             <a:r>
               <a:rPr sz="1500" i="0" b="1">
                 <a:solidFill>
-                  <a:srgbClr val="6E625B"/>
+                  <a:srgbClr val="FFFFFF"/>
                 </a:solidFill>
                 <a:latin typeface="Calibri"/>
               </a:rPr>
@@ -12019,8 +11891,8 @@
         </p:nvSpPr>
         <p:spPr>
           <a:xfrm>
-            <a:off x="1371600" y="3959352"/>
-            <a:ext cx="10088575" cy="548640"/>
+            <a:off x="1371600" y="4233672"/>
+            <a:ext cx="10088575" cy="640080"/>
           </a:xfrm>
           <a:prstGeom prst="rect">
             <a:avLst/>
@@ -12036,7 +11908,7 @@
             <a:r>
               <a:rPr sz="1900" i="0" b="0">
                 <a:solidFill>
-                  <a:srgbClr val="6E625B"/>
+                  <a:srgbClr val="2B211C"/>
                 </a:solidFill>
                 <a:latin typeface="Calibri"/>
               </a:rPr>
@@ -12053,8 +11925,8 @@
         </p:nvSpPr>
         <p:spPr>
           <a:xfrm>
-            <a:off x="548640" y="4636008"/>
-            <a:ext cx="11094415" cy="548640"/>
+            <a:off x="548640" y="5001768"/>
+            <a:ext cx="11094415" cy="640080"/>
           </a:xfrm>
           <a:prstGeom prst="roundRect">
             <a:avLst>
@@ -12062,7 +11934,7 @@
             </a:avLst>
           </a:prstGeom>
           <a:solidFill>
-            <a:srgbClr val="2F6F7A"/>
+            <a:srgbClr val="FAF4F2"/>
           </a:solidFill>
           <a:ln>
             <a:noFill/>
@@ -12099,14 +11971,14 @@
         </p:nvSpPr>
         <p:spPr>
           <a:xfrm>
-            <a:off x="713232" y="4700016"/>
+            <a:off x="713232" y="5111496"/>
             <a:ext cx="420624" cy="420624"/>
           </a:xfrm>
           <a:prstGeom prst="ellipse">
             <a:avLst/>
           </a:prstGeom>
           <a:solidFill>
-            <a:srgbClr val="FFFFFF"/>
+            <a:srgbClr val="A4472B"/>
           </a:solidFill>
           <a:ln>
             <a:noFill/>
@@ -12128,14 +12000,14 @@
           </a:fontRef>
         </p:style>
         <p:txBody>
-          <a:bodyPr rtlCol="0" anchor="ctr" lIns="0" rIns="0"/>
+          <a:bodyPr rtlCol="0" anchor="ctr" lIns="0" rIns="0" tIns="0" bIns="0"/>
           <a:lstStyle/>
           <a:p>
             <a:pPr algn="ctr"/>
             <a:r>
               <a:rPr sz="1500" i="0" b="1">
                 <a:solidFill>
-                  <a:srgbClr val="2F6F7A"/>
+                  <a:srgbClr val="FFFFFF"/>
                 </a:solidFill>
                 <a:latin typeface="Calibri"/>
               </a:rPr>
@@ -12152,8 +12024,8 @@
         </p:nvSpPr>
         <p:spPr>
           <a:xfrm>
-            <a:off x="1371600" y="4636008"/>
-            <a:ext cx="10088575" cy="548640"/>
+            <a:off x="1371600" y="5001768"/>
+            <a:ext cx="10088575" cy="640080"/>
           </a:xfrm>
           <a:prstGeom prst="rect">
             <a:avLst/>
@@ -12167,56 +12039,13 @@
           <a:lstStyle/>
           <a:p>
             <a:r>
-              <a:rPr sz="1900" i="0" b="1">
-                <a:solidFill>
-                  <a:srgbClr val="FFFFFF"/>
+              <a:rPr sz="1900" i="0" b="0">
+                <a:solidFill>
+                  <a:srgbClr val="2B211C"/>
                 </a:solidFill>
                 <a:latin typeface="Calibri"/>
               </a:rPr>
               <a:t>20</a:t>
-            </a:r>
-          </a:p>
-        </p:txBody>
-      </p:sp>
-      <p:sp>
-        <p:nvSpPr>
-          <p:cNvPr id="21" name="TextBox 20"/>
-          <p:cNvSpPr txBox="1"/>
-          <p:nvPr/>
-        </p:nvSpPr>
-        <p:spPr>
-          <a:xfrm>
-            <a:off x="548640" y="5358384"/>
-            <a:ext cx="11094415" cy="685800"/>
-          </a:xfrm>
-          <a:prstGeom prst="rect">
-            <a:avLst/>
-          </a:prstGeom>
-          <a:noFill/>
-        </p:spPr>
-        <p:txBody>
-          <a:bodyPr wrap="square" anchor="t" lIns="0" rIns="0" tIns="0" bIns="0">
-            <a:spAutoFit/>
-          </a:bodyPr>
-          <a:lstStyle/>
-          <a:p>
-            <a:r>
-              <a:rPr sz="1500" i="0" b="1">
-                <a:solidFill>
-                  <a:srgbClr val="2F6F7A"/>
-                </a:solidFill>
-                <a:latin typeface="Calibri"/>
-              </a:rPr>
-              <a:t>Why:  </a:t>
-            </a:r>
-            <a:r>
-              <a:rPr sz="1500" i="0" b="0">
-                <a:solidFill>
-                  <a:srgbClr val="2B211C"/>
-                </a:solidFill>
-                <a:latin typeface="Calibri"/>
-              </a:rPr>
-              <a:t>ARR = 10% − 5% = 5% = 0.05; NNT = 1 ÷ 0.05 = 20. A, B and C are miscalculations.</a:t>
             </a:r>
           </a:p>
         </p:txBody>
@@ -12284,7 +12113,7 @@
           </a:fontRef>
         </p:style>
         <p:txBody>
-          <a:bodyPr rtlCol="0" anchor="ctr" lIns="0" rIns="0"/>
+          <a:bodyPr rtlCol="0" anchor="ctr" lIns="0" rIns="0" tIns="0" bIns="0"/>
           <a:lstStyle/>
           <a:p>
             <a:pPr algn="ctr"/>
@@ -12329,7 +12158,7 @@
                 </a:solidFill>
                 <a:latin typeface="Calibri"/>
               </a:rPr>
-              <a:t>SECTION GOALS</a:t>
+              <a:t>SECTION 3</a:t>
             </a:r>
           </a:p>
         </p:txBody>
@@ -12469,14 +12298,14 @@
         </p:nvSpPr>
         <p:spPr>
           <a:xfrm>
-            <a:off x="548640" y="1618488"/>
+            <a:off x="548640" y="1572768"/>
             <a:ext cx="402336" cy="402336"/>
           </a:xfrm>
           <a:prstGeom prst="ellipse">
             <a:avLst/>
           </a:prstGeom>
           <a:solidFill>
-            <a:srgbClr val="E0EEF0"/>
+            <a:srgbClr val="E6EEEF"/>
           </a:solidFill>
           <a:ln>
             <a:noFill/>
@@ -12498,7 +12327,7 @@
           </a:fontRef>
         </p:style>
         <p:txBody>
-          <a:bodyPr rtlCol="0" anchor="ctr" lIns="0" rIns="0"/>
+          <a:bodyPr rtlCol="0" anchor="ctr" lIns="0" rIns="0" tIns="0" bIns="0"/>
           <a:lstStyle/>
           <a:p>
             <a:pPr algn="ctr"/>
@@ -12522,7 +12351,7 @@
         </p:nvSpPr>
         <p:spPr>
           <a:xfrm>
-            <a:off x="1143000" y="1636776"/>
+            <a:off x="1143000" y="1591056"/>
             <a:ext cx="6629400" cy="1142237"/>
           </a:xfrm>
           <a:prstGeom prst="rect">
@@ -12556,14 +12385,14 @@
         </p:nvSpPr>
         <p:spPr>
           <a:xfrm>
-            <a:off x="548640" y="2806445"/>
+            <a:off x="548640" y="2760726"/>
             <a:ext cx="402336" cy="402336"/>
           </a:xfrm>
           <a:prstGeom prst="ellipse">
             <a:avLst/>
           </a:prstGeom>
           <a:solidFill>
-            <a:srgbClr val="E0EEF0"/>
+            <a:srgbClr val="E6EEEF"/>
           </a:solidFill>
           <a:ln>
             <a:noFill/>
@@ -12585,7 +12414,7 @@
           </a:fontRef>
         </p:style>
         <p:txBody>
-          <a:bodyPr rtlCol="0" anchor="ctr" lIns="0" rIns="0"/>
+          <a:bodyPr rtlCol="0" anchor="ctr" lIns="0" rIns="0" tIns="0" bIns="0"/>
           <a:lstStyle/>
           <a:p>
             <a:pPr algn="ctr"/>
@@ -12609,7 +12438,7 @@
         </p:nvSpPr>
         <p:spPr>
           <a:xfrm>
-            <a:off x="1143000" y="2824733"/>
+            <a:off x="1143000" y="2779014"/>
             <a:ext cx="6629400" cy="1142237"/>
           </a:xfrm>
           <a:prstGeom prst="rect">
@@ -12643,14 +12472,14 @@
         </p:nvSpPr>
         <p:spPr>
           <a:xfrm>
-            <a:off x="548640" y="3994403"/>
+            <a:off x="548640" y="3948683"/>
             <a:ext cx="402336" cy="402336"/>
           </a:xfrm>
           <a:prstGeom prst="ellipse">
             <a:avLst/>
           </a:prstGeom>
           <a:solidFill>
-            <a:srgbClr val="E0EEF0"/>
+            <a:srgbClr val="E6EEEF"/>
           </a:solidFill>
           <a:ln>
             <a:noFill/>
@@ -12672,7 +12501,7 @@
           </a:fontRef>
         </p:style>
         <p:txBody>
-          <a:bodyPr rtlCol="0" anchor="ctr" lIns="0" rIns="0"/>
+          <a:bodyPr rtlCol="0" anchor="ctr" lIns="0" rIns="0" tIns="0" bIns="0"/>
           <a:lstStyle/>
           <a:p>
             <a:pPr algn="ctr"/>
@@ -12696,7 +12525,7 @@
         </p:nvSpPr>
         <p:spPr>
           <a:xfrm>
-            <a:off x="1143000" y="4012691"/>
+            <a:off x="1143000" y="3966971"/>
             <a:ext cx="6629400" cy="808863"/>
           </a:xfrm>
           <a:prstGeom prst="rect">
@@ -12730,14 +12559,14 @@
         </p:nvSpPr>
         <p:spPr>
           <a:xfrm>
-            <a:off x="548640" y="4848986"/>
+            <a:off x="548640" y="4803266"/>
             <a:ext cx="402336" cy="402336"/>
           </a:xfrm>
           <a:prstGeom prst="ellipse">
             <a:avLst/>
           </a:prstGeom>
           <a:solidFill>
-            <a:srgbClr val="E0EEF0"/>
+            <a:srgbClr val="E6EEEF"/>
           </a:solidFill>
           <a:ln>
             <a:noFill/>
@@ -12759,7 +12588,7 @@
           </a:fontRef>
         </p:style>
         <p:txBody>
-          <a:bodyPr rtlCol="0" anchor="ctr" lIns="0" rIns="0"/>
+          <a:bodyPr rtlCol="0" anchor="ctr" lIns="0" rIns="0" tIns="0" bIns="0"/>
           <a:lstStyle/>
           <a:p>
             <a:pPr algn="ctr"/>
@@ -12783,7 +12612,7 @@
         </p:nvSpPr>
         <p:spPr>
           <a:xfrm>
-            <a:off x="1143000" y="4867274"/>
+            <a:off x="1143000" y="4821555"/>
             <a:ext cx="6629400" cy="808863"/>
           </a:xfrm>
           <a:prstGeom prst="rect">
@@ -12826,7 +12655,7 @@
             </a:avLst>
           </a:prstGeom>
           <a:solidFill>
-            <a:srgbClr val="FBF3EE"/>
+            <a:srgbClr val="FAF4F2"/>
           </a:solidFill>
           <a:ln>
             <a:noFill/>
@@ -13022,7 +12851,7 @@
           </a:fontRef>
         </p:style>
         <p:txBody>
-          <a:bodyPr rtlCol="0" anchor="ctr" lIns="0" rIns="0"/>
+          <a:bodyPr rtlCol="0" anchor="ctr" lIns="0" rIns="0" tIns="0" bIns="0"/>
           <a:lstStyle/>
           <a:p>
             <a:pPr algn="ctr"/>
@@ -13067,7 +12896,7 @@
                 </a:solidFill>
                 <a:latin typeface="Calibri"/>
               </a:rPr>
-              <a:t>SELF-ASSESSMENT  ·  QUESTION 5 OF 5</a:t>
+              <a:t>SECTION 3  ·  QUESTION 4 OF 5  ·  ANSWER</a:t>
             </a:r>
           </a:p>
         </p:txBody>
@@ -13101,7 +12930,7 @@
                 </a:solidFill>
                 <a:latin typeface="Cambria"/>
               </a:rPr>
-              <a:t>Your turn</a:t>
+              <a:t>Check your answer</a:t>
             </a:r>
           </a:p>
         </p:txBody>
@@ -13184,7 +13013,7 @@
           <p:nvPr/>
         </p:nvPicPr>
         <p:blipFill>
-          <a:blip r:embed="rId3"/>
+          <a:blip r:embed="rId2"/>
           <a:stretch>
             <a:fillRect/>
           </a:stretch>
@@ -13228,7 +13057,7 @@
                 </a:solidFill>
                 <a:latin typeface="Calibri"/>
               </a:rPr>
-              <a:t>Which design is best to study a very rare birth defect?</a:t>
+              <a:t>In a trial, 10% of placebo patients and 5% of treated patients have a stroke. What is the NNT?</a:t>
             </a:r>
           </a:p>
         </p:txBody>
@@ -13241,8 +13070,8 @@
         </p:nvSpPr>
         <p:spPr>
           <a:xfrm>
-            <a:off x="548640" y="2697480"/>
-            <a:ext cx="11094415" cy="640080"/>
+            <a:off x="548640" y="2606040"/>
+            <a:ext cx="11094415" cy="548640"/>
           </a:xfrm>
           <a:prstGeom prst="roundRect">
             <a:avLst>
@@ -13250,7 +13079,7 @@
             </a:avLst>
           </a:prstGeom>
           <a:solidFill>
-            <a:srgbClr val="FBF3EE"/>
+            <a:srgbClr val="F5F4F4"/>
           </a:solidFill>
           <a:ln>
             <a:noFill/>
@@ -13287,14 +13116,14 @@
         </p:nvSpPr>
         <p:spPr>
           <a:xfrm>
-            <a:off x="713232" y="2807208"/>
+            <a:off x="713232" y="2670048"/>
             <a:ext cx="420624" cy="420624"/>
           </a:xfrm>
           <a:prstGeom prst="ellipse">
             <a:avLst/>
           </a:prstGeom>
           <a:solidFill>
-            <a:srgbClr val="A4472B"/>
+            <a:srgbClr val="E2E0DE"/>
           </a:solidFill>
           <a:ln>
             <a:noFill/>
@@ -13316,14 +13145,14 @@
           </a:fontRef>
         </p:style>
         <p:txBody>
-          <a:bodyPr rtlCol="0" anchor="ctr" lIns="0" rIns="0"/>
+          <a:bodyPr rtlCol="0" anchor="ctr" lIns="0" rIns="0" tIns="0" bIns="0"/>
           <a:lstStyle/>
           <a:p>
             <a:pPr algn="ctr"/>
             <a:r>
               <a:rPr sz="1500" i="0" b="1">
                 <a:solidFill>
-                  <a:srgbClr val="FFFFFF"/>
+                  <a:srgbClr val="6E625B"/>
                 </a:solidFill>
                 <a:latin typeface="Calibri"/>
               </a:rPr>
@@ -13340,8 +13169,8 @@
         </p:nvSpPr>
         <p:spPr>
           <a:xfrm>
-            <a:off x="1371600" y="2697480"/>
-            <a:ext cx="10088575" cy="640080"/>
+            <a:off x="1371600" y="2606040"/>
+            <a:ext cx="10088575" cy="548640"/>
           </a:xfrm>
           <a:prstGeom prst="rect">
             <a:avLst/>
@@ -13357,11 +13186,11 @@
             <a:r>
               <a:rPr sz="1900" i="0" b="0">
                 <a:solidFill>
-                  <a:srgbClr val="2B211C"/>
-                </a:solidFill>
-                <a:latin typeface="Calibri"/>
-              </a:rPr>
-              <a:t>Case-control study</a:t>
+                  <a:srgbClr val="6E625B"/>
+                </a:solidFill>
+                <a:latin typeface="Calibri"/>
+              </a:rPr>
+              <a:t>5</a:t>
             </a:r>
           </a:p>
         </p:txBody>
@@ -13374,8 +13203,8 @@
         </p:nvSpPr>
         <p:spPr>
           <a:xfrm>
-            <a:off x="548640" y="3465576"/>
-            <a:ext cx="11094415" cy="640080"/>
+            <a:off x="548640" y="3282696"/>
+            <a:ext cx="11094415" cy="548640"/>
           </a:xfrm>
           <a:prstGeom prst="roundRect">
             <a:avLst>
@@ -13383,7 +13212,7 @@
             </a:avLst>
           </a:prstGeom>
           <a:solidFill>
-            <a:srgbClr val="FBF3EE"/>
+            <a:srgbClr val="F5F4F4"/>
           </a:solidFill>
           <a:ln>
             <a:noFill/>
@@ -13420,14 +13249,14 @@
         </p:nvSpPr>
         <p:spPr>
           <a:xfrm>
-            <a:off x="713232" y="3575304"/>
+            <a:off x="713232" y="3346703"/>
             <a:ext cx="420624" cy="420624"/>
           </a:xfrm>
           <a:prstGeom prst="ellipse">
             <a:avLst/>
           </a:prstGeom>
           <a:solidFill>
-            <a:srgbClr val="A4472B"/>
+            <a:srgbClr val="E2E0DE"/>
           </a:solidFill>
           <a:ln>
             <a:noFill/>
@@ -13449,14 +13278,14 @@
           </a:fontRef>
         </p:style>
         <p:txBody>
-          <a:bodyPr rtlCol="0" anchor="ctr" lIns="0" rIns="0"/>
+          <a:bodyPr rtlCol="0" anchor="ctr" lIns="0" rIns="0" tIns="0" bIns="0"/>
           <a:lstStyle/>
           <a:p>
             <a:pPr algn="ctr"/>
             <a:r>
               <a:rPr sz="1500" i="0" b="1">
                 <a:solidFill>
-                  <a:srgbClr val="FFFFFF"/>
+                  <a:srgbClr val="6E625B"/>
                 </a:solidFill>
                 <a:latin typeface="Calibri"/>
               </a:rPr>
@@ -13473,8 +13302,8 @@
         </p:nvSpPr>
         <p:spPr>
           <a:xfrm>
-            <a:off x="1371600" y="3465576"/>
-            <a:ext cx="10088575" cy="640080"/>
+            <a:off x="1371600" y="3282696"/>
+            <a:ext cx="10088575" cy="548640"/>
           </a:xfrm>
           <a:prstGeom prst="rect">
             <a:avLst/>
@@ -13490,11 +13319,11 @@
             <a:r>
               <a:rPr sz="1900" i="0" b="0">
                 <a:solidFill>
-                  <a:srgbClr val="2B211C"/>
-                </a:solidFill>
-                <a:latin typeface="Calibri"/>
-              </a:rPr>
-              <a:t>Randomised controlled trial</a:t>
+                  <a:srgbClr val="6E625B"/>
+                </a:solidFill>
+                <a:latin typeface="Calibri"/>
+              </a:rPr>
+              <a:t>10</a:t>
             </a:r>
           </a:p>
         </p:txBody>
@@ -13507,8 +13336,8 @@
         </p:nvSpPr>
         <p:spPr>
           <a:xfrm>
-            <a:off x="548640" y="4233672"/>
-            <a:ext cx="11094415" cy="640080"/>
+            <a:off x="548640" y="3959352"/>
+            <a:ext cx="11094415" cy="548640"/>
           </a:xfrm>
           <a:prstGeom prst="roundRect">
             <a:avLst>
@@ -13516,7 +13345,7 @@
             </a:avLst>
           </a:prstGeom>
           <a:solidFill>
-            <a:srgbClr val="FBF3EE"/>
+            <a:srgbClr val="F5F4F4"/>
           </a:solidFill>
           <a:ln>
             <a:noFill/>
@@ -13553,14 +13382,14 @@
         </p:nvSpPr>
         <p:spPr>
           <a:xfrm>
-            <a:off x="713232" y="4343400"/>
+            <a:off x="713232" y="4023360"/>
             <a:ext cx="420624" cy="420624"/>
           </a:xfrm>
           <a:prstGeom prst="ellipse">
             <a:avLst/>
           </a:prstGeom>
           <a:solidFill>
-            <a:srgbClr val="A4472B"/>
+            <a:srgbClr val="E2E0DE"/>
           </a:solidFill>
           <a:ln>
             <a:noFill/>
@@ -13582,14 +13411,14 @@
           </a:fontRef>
         </p:style>
         <p:txBody>
-          <a:bodyPr rtlCol="0" anchor="ctr" lIns="0" rIns="0"/>
+          <a:bodyPr rtlCol="0" anchor="ctr" lIns="0" rIns="0" tIns="0" bIns="0"/>
           <a:lstStyle/>
           <a:p>
             <a:pPr algn="ctr"/>
             <a:r>
               <a:rPr sz="1500" i="0" b="1">
                 <a:solidFill>
-                  <a:srgbClr val="FFFFFF"/>
+                  <a:srgbClr val="6E625B"/>
                 </a:solidFill>
                 <a:latin typeface="Calibri"/>
               </a:rPr>
@@ -13606,8 +13435,8 @@
         </p:nvSpPr>
         <p:spPr>
           <a:xfrm>
-            <a:off x="1371600" y="4233672"/>
-            <a:ext cx="10088575" cy="640080"/>
+            <a:off x="1371600" y="3959352"/>
+            <a:ext cx="10088575" cy="548640"/>
           </a:xfrm>
           <a:prstGeom prst="rect">
             <a:avLst/>
@@ -13623,11 +13452,11 @@
             <a:r>
               <a:rPr sz="1900" i="0" b="0">
                 <a:solidFill>
-                  <a:srgbClr val="2B211C"/>
-                </a:solidFill>
-                <a:latin typeface="Calibri"/>
-              </a:rPr>
-              <a:t>Cross-sectional survey</a:t>
+                  <a:srgbClr val="6E625B"/>
+                </a:solidFill>
+                <a:latin typeface="Calibri"/>
+              </a:rPr>
+              <a:t>50</a:t>
             </a:r>
           </a:p>
         </p:txBody>
@@ -13640,8 +13469,8 @@
         </p:nvSpPr>
         <p:spPr>
           <a:xfrm>
-            <a:off x="548640" y="5001768"/>
-            <a:ext cx="11094415" cy="640080"/>
+            <a:off x="548640" y="4636008"/>
+            <a:ext cx="11094415" cy="548640"/>
           </a:xfrm>
           <a:prstGeom prst="roundRect">
             <a:avLst>
@@ -13649,7 +13478,7 @@
             </a:avLst>
           </a:prstGeom>
           <a:solidFill>
-            <a:srgbClr val="FBF3EE"/>
+            <a:srgbClr val="2F6F7A"/>
           </a:solidFill>
           <a:ln>
             <a:noFill/>
@@ -13686,14 +13515,14 @@
         </p:nvSpPr>
         <p:spPr>
           <a:xfrm>
-            <a:off x="713232" y="5111496"/>
+            <a:off x="713232" y="4700016"/>
             <a:ext cx="420624" cy="420624"/>
           </a:xfrm>
           <a:prstGeom prst="ellipse">
             <a:avLst/>
           </a:prstGeom>
           <a:solidFill>
-            <a:srgbClr val="A4472B"/>
+            <a:srgbClr val="FFFFFF"/>
           </a:solidFill>
           <a:ln>
             <a:noFill/>
@@ -13715,14 +13544,14 @@
           </a:fontRef>
         </p:style>
         <p:txBody>
-          <a:bodyPr rtlCol="0" anchor="ctr" lIns="0" rIns="0"/>
+          <a:bodyPr rtlCol="0" anchor="ctr" lIns="0" rIns="0" tIns="0" bIns="0"/>
           <a:lstStyle/>
           <a:p>
             <a:pPr algn="ctr"/>
             <a:r>
               <a:rPr sz="1500" i="0" b="1">
                 <a:solidFill>
-                  <a:srgbClr val="FFFFFF"/>
+                  <a:srgbClr val="2F6F7A"/>
                 </a:solidFill>
                 <a:latin typeface="Calibri"/>
               </a:rPr>
@@ -13739,8 +13568,8 @@
         </p:nvSpPr>
         <p:spPr>
           <a:xfrm>
-            <a:off x="1371600" y="5001768"/>
-            <a:ext cx="10088575" cy="640080"/>
+            <a:off x="1371600" y="4636008"/>
+            <a:ext cx="10088575" cy="548640"/>
           </a:xfrm>
           <a:prstGeom prst="rect">
             <a:avLst/>
@@ -13754,13 +13583,56 @@
           <a:lstStyle/>
           <a:p>
             <a:r>
-              <a:rPr sz="1900" i="0" b="0">
+              <a:rPr sz="1900" i="0" b="1">
+                <a:solidFill>
+                  <a:srgbClr val="FFFFFF"/>
+                </a:solidFill>
+                <a:latin typeface="Calibri"/>
+              </a:rPr>
+              <a:t>20</a:t>
+            </a:r>
+          </a:p>
+        </p:txBody>
+      </p:sp>
+      <p:sp>
+        <p:nvSpPr>
+          <p:cNvPr id="21" name="TextBox 20"/>
+          <p:cNvSpPr txBox="1"/>
+          <p:nvPr/>
+        </p:nvSpPr>
+        <p:spPr>
+          <a:xfrm>
+            <a:off x="548640" y="5358384"/>
+            <a:ext cx="11094415" cy="685800"/>
+          </a:xfrm>
+          <a:prstGeom prst="rect">
+            <a:avLst/>
+          </a:prstGeom>
+          <a:noFill/>
+        </p:spPr>
+        <p:txBody>
+          <a:bodyPr wrap="square" anchor="t" lIns="0" rIns="0" tIns="0" bIns="0">
+            <a:spAutoFit/>
+          </a:bodyPr>
+          <a:lstStyle/>
+          <a:p>
+            <a:r>
+              <a:rPr sz="1500" i="0" b="1">
+                <a:solidFill>
+                  <a:srgbClr val="2F6F7A"/>
+                </a:solidFill>
+                <a:latin typeface="Calibri"/>
+              </a:rPr>
+              <a:t>Why:  </a:t>
+            </a:r>
+            <a:r>
+              <a:rPr sz="1500" i="0" b="0">
                 <a:solidFill>
                   <a:srgbClr val="2B211C"/>
                 </a:solidFill>
                 <a:latin typeface="Calibri"/>
               </a:rPr>
-              <a:t>Case report</a:t>
+              <a:t>ARR = 10% − 5% = 5% = 0.05; NNT = 1 ÷ 0.05 = 20. A, B and C are miscalculations.</a:t>
             </a:r>
           </a:p>
         </p:txBody>
@@ -13828,7 +13700,7 @@
           </a:fontRef>
         </p:style>
         <p:txBody>
-          <a:bodyPr rtlCol="0" anchor="ctr" lIns="0" rIns="0"/>
+          <a:bodyPr rtlCol="0" anchor="ctr" lIns="0" rIns="0" tIns="0" bIns="0"/>
           <a:lstStyle/>
           <a:p>
             <a:pPr algn="ctr"/>
@@ -13873,7 +13745,7 @@
                 </a:solidFill>
                 <a:latin typeface="Calibri"/>
               </a:rPr>
-              <a:t>SELF-ASSESSMENT  ·  QUESTION 5 OF 5  ·  ANSWER</a:t>
+              <a:t>SECTION 3  ·  QUESTION 5 OF 5</a:t>
             </a:r>
           </a:p>
         </p:txBody>
@@ -13907,7 +13779,7 @@
                 </a:solidFill>
                 <a:latin typeface="Cambria"/>
               </a:rPr>
-              <a:t>Check your answer</a:t>
+              <a:t>Your turn</a:t>
             </a:r>
           </a:p>
         </p:txBody>
@@ -13990,7 +13862,7 @@
           <p:nvPr/>
         </p:nvPicPr>
         <p:blipFill>
-          <a:blip r:embed="rId2"/>
+          <a:blip r:embed="rId3"/>
           <a:stretch>
             <a:fillRect/>
           </a:stretch>
@@ -14047,8 +13919,8 @@
         </p:nvSpPr>
         <p:spPr>
           <a:xfrm>
-            <a:off x="548640" y="2606040"/>
-            <a:ext cx="11094415" cy="548640"/>
+            <a:off x="548640" y="2697480"/>
+            <a:ext cx="11094415" cy="640080"/>
           </a:xfrm>
           <a:prstGeom prst="roundRect">
             <a:avLst>
@@ -14056,7 +13928,7 @@
             </a:avLst>
           </a:prstGeom>
           <a:solidFill>
-            <a:srgbClr val="2F6F7A"/>
+            <a:srgbClr val="FAF4F2"/>
           </a:solidFill>
           <a:ln>
             <a:noFill/>
@@ -14093,14 +13965,14 @@
         </p:nvSpPr>
         <p:spPr>
           <a:xfrm>
-            <a:off x="713232" y="2670048"/>
+            <a:off x="713232" y="2807208"/>
             <a:ext cx="420624" cy="420624"/>
           </a:xfrm>
           <a:prstGeom prst="ellipse">
             <a:avLst/>
           </a:prstGeom>
           <a:solidFill>
-            <a:srgbClr val="FFFFFF"/>
+            <a:srgbClr val="A4472B"/>
           </a:solidFill>
           <a:ln>
             <a:noFill/>
@@ -14122,14 +13994,14 @@
           </a:fontRef>
         </p:style>
         <p:txBody>
-          <a:bodyPr rtlCol="0" anchor="ctr" lIns="0" rIns="0"/>
+          <a:bodyPr rtlCol="0" anchor="ctr" lIns="0" rIns="0" tIns="0" bIns="0"/>
           <a:lstStyle/>
           <a:p>
             <a:pPr algn="ctr"/>
             <a:r>
               <a:rPr sz="1500" i="0" b="1">
                 <a:solidFill>
-                  <a:srgbClr val="2F6F7A"/>
+                  <a:srgbClr val="FFFFFF"/>
                 </a:solidFill>
                 <a:latin typeface="Calibri"/>
               </a:rPr>
@@ -14146,8 +14018,8 @@
         </p:nvSpPr>
         <p:spPr>
           <a:xfrm>
-            <a:off x="1371600" y="2606040"/>
-            <a:ext cx="10088575" cy="548640"/>
+            <a:off x="1371600" y="2697480"/>
+            <a:ext cx="10088575" cy="640080"/>
           </a:xfrm>
           <a:prstGeom prst="rect">
             <a:avLst/>
@@ -14161,9 +14033,9 @@
           <a:lstStyle/>
           <a:p>
             <a:r>
-              <a:rPr sz="1900" i="0" b="1">
-                <a:solidFill>
-                  <a:srgbClr val="FFFFFF"/>
+              <a:rPr sz="1900" i="0" b="0">
+                <a:solidFill>
+                  <a:srgbClr val="2B211C"/>
                 </a:solidFill>
                 <a:latin typeface="Calibri"/>
               </a:rPr>
@@ -14180,8 +14052,8 @@
         </p:nvSpPr>
         <p:spPr>
           <a:xfrm>
-            <a:off x="548640" y="3282696"/>
-            <a:ext cx="11094415" cy="548640"/>
+            <a:off x="548640" y="3465576"/>
+            <a:ext cx="11094415" cy="640080"/>
           </a:xfrm>
           <a:prstGeom prst="roundRect">
             <a:avLst>
@@ -14189,7 +14061,7 @@
             </a:avLst>
           </a:prstGeom>
           <a:solidFill>
-            <a:srgbClr val="F7F4F2"/>
+            <a:srgbClr val="FAF4F2"/>
           </a:solidFill>
           <a:ln>
             <a:noFill/>
@@ -14226,14 +14098,14 @@
         </p:nvSpPr>
         <p:spPr>
           <a:xfrm>
-            <a:off x="713232" y="3346703"/>
+            <a:off x="713232" y="3575304"/>
             <a:ext cx="420624" cy="420624"/>
           </a:xfrm>
           <a:prstGeom prst="ellipse">
             <a:avLst/>
           </a:prstGeom>
           <a:solidFill>
-            <a:srgbClr val="E6DFDA"/>
+            <a:srgbClr val="A4472B"/>
           </a:solidFill>
           <a:ln>
             <a:noFill/>
@@ -14255,14 +14127,14 @@
           </a:fontRef>
         </p:style>
         <p:txBody>
-          <a:bodyPr rtlCol="0" anchor="ctr" lIns="0" rIns="0"/>
+          <a:bodyPr rtlCol="0" anchor="ctr" lIns="0" rIns="0" tIns="0" bIns="0"/>
           <a:lstStyle/>
           <a:p>
             <a:pPr algn="ctr"/>
             <a:r>
               <a:rPr sz="1500" i="0" b="1">
                 <a:solidFill>
-                  <a:srgbClr val="6E625B"/>
+                  <a:srgbClr val="FFFFFF"/>
                 </a:solidFill>
                 <a:latin typeface="Calibri"/>
               </a:rPr>
@@ -14279,8 +14151,8 @@
         </p:nvSpPr>
         <p:spPr>
           <a:xfrm>
-            <a:off x="1371600" y="3282696"/>
-            <a:ext cx="10088575" cy="548640"/>
+            <a:off x="1371600" y="3465576"/>
+            <a:ext cx="10088575" cy="640080"/>
           </a:xfrm>
           <a:prstGeom prst="rect">
             <a:avLst/>
@@ -14296,7 +14168,7 @@
             <a:r>
               <a:rPr sz="1900" i="0" b="0">
                 <a:solidFill>
-                  <a:srgbClr val="6E625B"/>
+                  <a:srgbClr val="2B211C"/>
                 </a:solidFill>
                 <a:latin typeface="Calibri"/>
               </a:rPr>
@@ -14313,8 +14185,8 @@
         </p:nvSpPr>
         <p:spPr>
           <a:xfrm>
-            <a:off x="548640" y="3959352"/>
-            <a:ext cx="11094415" cy="548640"/>
+            <a:off x="548640" y="4233672"/>
+            <a:ext cx="11094415" cy="640080"/>
           </a:xfrm>
           <a:prstGeom prst="roundRect">
             <a:avLst>
@@ -14322,7 +14194,7 @@
             </a:avLst>
           </a:prstGeom>
           <a:solidFill>
-            <a:srgbClr val="F7F4F2"/>
+            <a:srgbClr val="FAF4F2"/>
           </a:solidFill>
           <a:ln>
             <a:noFill/>
@@ -14359,14 +14231,14 @@
         </p:nvSpPr>
         <p:spPr>
           <a:xfrm>
-            <a:off x="713232" y="4023360"/>
+            <a:off x="713232" y="4343400"/>
             <a:ext cx="420624" cy="420624"/>
           </a:xfrm>
           <a:prstGeom prst="ellipse">
             <a:avLst/>
           </a:prstGeom>
           <a:solidFill>
-            <a:srgbClr val="E6DFDA"/>
+            <a:srgbClr val="A4472B"/>
           </a:solidFill>
           <a:ln>
             <a:noFill/>
@@ -14388,14 +14260,14 @@
           </a:fontRef>
         </p:style>
         <p:txBody>
-          <a:bodyPr rtlCol="0" anchor="ctr" lIns="0" rIns="0"/>
+          <a:bodyPr rtlCol="0" anchor="ctr" lIns="0" rIns="0" tIns="0" bIns="0"/>
           <a:lstStyle/>
           <a:p>
             <a:pPr algn="ctr"/>
             <a:r>
               <a:rPr sz="1500" i="0" b="1">
                 <a:solidFill>
-                  <a:srgbClr val="6E625B"/>
+                  <a:srgbClr val="FFFFFF"/>
                 </a:solidFill>
                 <a:latin typeface="Calibri"/>
               </a:rPr>
@@ -14412,8 +14284,8 @@
         </p:nvSpPr>
         <p:spPr>
           <a:xfrm>
-            <a:off x="1371600" y="3959352"/>
-            <a:ext cx="10088575" cy="548640"/>
+            <a:off x="1371600" y="4233672"/>
+            <a:ext cx="10088575" cy="640080"/>
           </a:xfrm>
           <a:prstGeom prst="rect">
             <a:avLst/>
@@ -14429,7 +14301,7 @@
             <a:r>
               <a:rPr sz="1900" i="0" b="0">
                 <a:solidFill>
-                  <a:srgbClr val="6E625B"/>
+                  <a:srgbClr val="2B211C"/>
                 </a:solidFill>
                 <a:latin typeface="Calibri"/>
               </a:rPr>
@@ -14446,8 +14318,8 @@
         </p:nvSpPr>
         <p:spPr>
           <a:xfrm>
-            <a:off x="548640" y="4636008"/>
-            <a:ext cx="11094415" cy="548640"/>
+            <a:off x="548640" y="5001768"/>
+            <a:ext cx="11094415" cy="640080"/>
           </a:xfrm>
           <a:prstGeom prst="roundRect">
             <a:avLst>
@@ -14455,7 +14327,7 @@
             </a:avLst>
           </a:prstGeom>
           <a:solidFill>
-            <a:srgbClr val="F7F4F2"/>
+            <a:srgbClr val="FAF4F2"/>
           </a:solidFill>
           <a:ln>
             <a:noFill/>
@@ -14492,14 +14364,14 @@
         </p:nvSpPr>
         <p:spPr>
           <a:xfrm>
-            <a:off x="713232" y="4700016"/>
+            <a:off x="713232" y="5111496"/>
             <a:ext cx="420624" cy="420624"/>
           </a:xfrm>
           <a:prstGeom prst="ellipse">
             <a:avLst/>
           </a:prstGeom>
           <a:solidFill>
-            <a:srgbClr val="E6DFDA"/>
+            <a:srgbClr val="A4472B"/>
           </a:solidFill>
           <a:ln>
             <a:noFill/>
@@ -14521,14 +14393,14 @@
           </a:fontRef>
         </p:style>
         <p:txBody>
-          <a:bodyPr rtlCol="0" anchor="ctr" lIns="0" rIns="0"/>
+          <a:bodyPr rtlCol="0" anchor="ctr" lIns="0" rIns="0" tIns="0" bIns="0"/>
           <a:lstStyle/>
           <a:p>
             <a:pPr algn="ctr"/>
             <a:r>
               <a:rPr sz="1500" i="0" b="1">
                 <a:solidFill>
-                  <a:srgbClr val="6E625B"/>
+                  <a:srgbClr val="FFFFFF"/>
                 </a:solidFill>
                 <a:latin typeface="Calibri"/>
               </a:rPr>
@@ -14545,8 +14417,8 @@
         </p:nvSpPr>
         <p:spPr>
           <a:xfrm>
-            <a:off x="1371600" y="4636008"/>
-            <a:ext cx="10088575" cy="548640"/>
+            <a:off x="1371600" y="5001768"/>
+            <a:ext cx="10088575" cy="640080"/>
           </a:xfrm>
           <a:prstGeom prst="rect">
             <a:avLst/>
@@ -14562,54 +14434,11 @@
             <a:r>
               <a:rPr sz="1900" i="0" b="0">
                 <a:solidFill>
-                  <a:srgbClr val="6E625B"/>
+                  <a:srgbClr val="2B211C"/>
                 </a:solidFill>
                 <a:latin typeface="Calibri"/>
               </a:rPr>
               <a:t>Case report</a:t>
-            </a:r>
-          </a:p>
-        </p:txBody>
-      </p:sp>
-      <p:sp>
-        <p:nvSpPr>
-          <p:cNvPr id="21" name="TextBox 20"/>
-          <p:cNvSpPr txBox="1"/>
-          <p:nvPr/>
-        </p:nvSpPr>
-        <p:spPr>
-          <a:xfrm>
-            <a:off x="548640" y="5358384"/>
-            <a:ext cx="11094415" cy="685800"/>
-          </a:xfrm>
-          <a:prstGeom prst="rect">
-            <a:avLst/>
-          </a:prstGeom>
-          <a:noFill/>
-        </p:spPr>
-        <p:txBody>
-          <a:bodyPr wrap="square" anchor="t" lIns="0" rIns="0" tIns="0" bIns="0">
-            <a:spAutoFit/>
-          </a:bodyPr>
-          <a:lstStyle/>
-          <a:p>
-            <a:r>
-              <a:rPr sz="1500" i="0" b="1">
-                <a:solidFill>
-                  <a:srgbClr val="2F6F7A"/>
-                </a:solidFill>
-                <a:latin typeface="Calibri"/>
-              </a:rPr>
-              <a:t>Why:  </a:t>
-            </a:r>
-            <a:r>
-              <a:rPr sz="1500" i="0" b="0">
-                <a:solidFill>
-                  <a:srgbClr val="2B211C"/>
-                </a:solidFill>
-                <a:latin typeface="Calibri"/>
-              </a:rPr>
-              <a:t>Case-control studies suit rare outcomes. B would need huge numbers, C shows prevalence, D cannot compare.</a:t>
             </a:r>
           </a:p>
         </p:txBody>
@@ -14642,6 +14471,855 @@
       <p:grpSpPr/>
       <p:sp>
         <p:nvSpPr>
+          <p:cNvPr id="2" name="Oval 1"/>
+          <p:cNvSpPr/>
+          <p:nvPr/>
+        </p:nvSpPr>
+        <p:spPr>
+          <a:xfrm>
+            <a:off x="548640" y="475488"/>
+            <a:ext cx="658368" cy="658368"/>
+          </a:xfrm>
+          <a:prstGeom prst="ellipse">
+            <a:avLst/>
+          </a:prstGeom>
+          <a:solidFill>
+            <a:srgbClr val="2F6F7A"/>
+          </a:solidFill>
+          <a:ln>
+            <a:noFill/>
+          </a:ln>
+          <a:effectLst/>
+        </p:spPr>
+        <p:style>
+          <a:lnRef idx="1">
+            <a:schemeClr val="accent1"/>
+          </a:lnRef>
+          <a:fillRef idx="3">
+            <a:schemeClr val="accent1"/>
+          </a:fillRef>
+          <a:effectRef idx="2">
+            <a:schemeClr val="accent1"/>
+          </a:effectRef>
+          <a:fontRef idx="minor">
+            <a:schemeClr val="lt1"/>
+          </a:fontRef>
+        </p:style>
+        <p:txBody>
+          <a:bodyPr rtlCol="0" anchor="ctr" lIns="0" rIns="0" tIns="0" bIns="0"/>
+          <a:lstStyle/>
+          <a:p>
+            <a:pPr algn="ctr"/>
+            <a:r>
+              <a:rPr sz="1800" i="0" b="1">
+                <a:solidFill>
+                  <a:srgbClr val="FFFFFF"/>
+                </a:solidFill>
+                <a:latin typeface="Cambria"/>
+              </a:rPr>
+              <a:t>03</a:t>
+            </a:r>
+          </a:p>
+        </p:txBody>
+      </p:sp>
+      <p:sp>
+        <p:nvSpPr>
+          <p:cNvPr id="3" name="TextBox 2"/>
+          <p:cNvSpPr txBox="1"/>
+          <p:nvPr/>
+        </p:nvSpPr>
+        <p:spPr>
+          <a:xfrm>
+            <a:off x="1417319" y="438912"/>
+            <a:ext cx="10180015" cy="292608"/>
+          </a:xfrm>
+          <a:prstGeom prst="rect">
+            <a:avLst/>
+          </a:prstGeom>
+          <a:noFill/>
+        </p:spPr>
+        <p:txBody>
+          <a:bodyPr wrap="square" anchor="t" lIns="0" rIns="0" tIns="0" bIns="0">
+            <a:spAutoFit/>
+          </a:bodyPr>
+          <a:lstStyle/>
+          <a:p>
+            <a:r>
+              <a:rPr sz="1200" i="0" b="1" spc="150">
+                <a:solidFill>
+                  <a:srgbClr val="2F6F7A"/>
+                </a:solidFill>
+                <a:latin typeface="Calibri"/>
+              </a:rPr>
+              <a:t>SECTION 3  ·  QUESTION 5 OF 5  ·  ANSWER</a:t>
+            </a:r>
+          </a:p>
+        </p:txBody>
+      </p:sp>
+      <p:sp>
+        <p:nvSpPr>
+          <p:cNvPr id="4" name="TextBox 3"/>
+          <p:cNvSpPr txBox="1"/>
+          <p:nvPr/>
+        </p:nvSpPr>
+        <p:spPr>
+          <a:xfrm>
+            <a:off x="1417319" y="676656"/>
+            <a:ext cx="10180015" cy="640080"/>
+          </a:xfrm>
+          <a:prstGeom prst="rect">
+            <a:avLst/>
+          </a:prstGeom>
+          <a:noFill/>
+        </p:spPr>
+        <p:txBody>
+          <a:bodyPr wrap="square" anchor="t" lIns="0" rIns="0" tIns="0" bIns="0">
+            <a:spAutoFit/>
+          </a:bodyPr>
+          <a:lstStyle/>
+          <a:p>
+            <a:r>
+              <a:rPr sz="3200" i="0" b="1">
+                <a:solidFill>
+                  <a:srgbClr val="2B211C"/>
+                </a:solidFill>
+                <a:latin typeface="Cambria"/>
+              </a:rPr>
+              <a:t>Check your answer</a:t>
+            </a:r>
+          </a:p>
+        </p:txBody>
+      </p:sp>
+      <p:sp>
+        <p:nvSpPr>
+          <p:cNvPr id="5" name="TextBox 4"/>
+          <p:cNvSpPr txBox="1"/>
+          <p:nvPr/>
+        </p:nvSpPr>
+        <p:spPr>
+          <a:xfrm>
+            <a:off x="548640" y="6419088"/>
+            <a:ext cx="8229600" cy="274320"/>
+          </a:xfrm>
+          <a:prstGeom prst="rect">
+            <a:avLst/>
+          </a:prstGeom>
+          <a:noFill/>
+        </p:spPr>
+        <p:txBody>
+          <a:bodyPr wrap="square" anchor="t" lIns="0" rIns="0" tIns="0" bIns="0">
+            <a:spAutoFit/>
+          </a:bodyPr>
+          <a:lstStyle/>
+          <a:p>
+            <a:r>
+              <a:rPr sz="1000" i="0" b="0">
+                <a:solidFill>
+                  <a:srgbClr val="6E625B"/>
+                </a:solidFill>
+                <a:latin typeface="Calibri"/>
+              </a:rPr>
+              <a:t>Drug Information  ·  Section 3  ·  Study Designs and Levels of Evidence</a:t>
+            </a:r>
+          </a:p>
+        </p:txBody>
+      </p:sp>
+      <p:sp>
+        <p:nvSpPr>
+          <p:cNvPr id="6" name="TextBox 5"/>
+          <p:cNvSpPr txBox="1"/>
+          <p:nvPr/>
+        </p:nvSpPr>
+        <p:spPr>
+          <a:xfrm>
+            <a:off x="10424160" y="6419088"/>
+            <a:ext cx="731520" cy="274320"/>
+          </a:xfrm>
+          <a:prstGeom prst="rect">
+            <a:avLst/>
+          </a:prstGeom>
+          <a:noFill/>
+        </p:spPr>
+        <p:txBody>
+          <a:bodyPr wrap="square" anchor="t" lIns="0" rIns="0" tIns="0" bIns="0">
+            <a:spAutoFit/>
+          </a:bodyPr>
+          <a:lstStyle/>
+          <a:p>
+            <a:pPr algn="r"/>
+            <a:r>
+              <a:rPr sz="1000" i="0" b="1">
+                <a:solidFill>
+                  <a:srgbClr val="6E625B"/>
+                </a:solidFill>
+                <a:latin typeface="Calibri"/>
+              </a:rPr>
+              <a:t>22</a:t>
+            </a:r>
+          </a:p>
+        </p:txBody>
+      </p:sp>
+      <p:pic>
+        <p:nvPicPr>
+          <p:cNvPr id="7" name="Picture 6" descr="faculty-of-pharmacy.png"/>
+          <p:cNvPicPr>
+            <a:picLocks noChangeAspect="1"/>
+          </p:cNvPicPr>
+          <p:nvPr/>
+        </p:nvPicPr>
+        <p:blipFill>
+          <a:blip r:embed="rId2"/>
+          <a:stretch>
+            <a:fillRect/>
+          </a:stretch>
+        </p:blipFill>
+        <p:spPr>
+          <a:xfrm>
+            <a:off x="11247120" y="6309360"/>
+            <a:ext cx="384048" cy="384048"/>
+          </a:xfrm>
+          <a:prstGeom prst="rect">
+            <a:avLst/>
+          </a:prstGeom>
+        </p:spPr>
+      </p:pic>
+      <p:sp>
+        <p:nvSpPr>
+          <p:cNvPr id="8" name="TextBox 7"/>
+          <p:cNvSpPr txBox="1"/>
+          <p:nvPr/>
+        </p:nvSpPr>
+        <p:spPr>
+          <a:xfrm>
+            <a:off x="548640" y="1554480"/>
+            <a:ext cx="11094415" cy="1005840"/>
+          </a:xfrm>
+          <a:prstGeom prst="rect">
+            <a:avLst/>
+          </a:prstGeom>
+          <a:noFill/>
+        </p:spPr>
+        <p:txBody>
+          <a:bodyPr wrap="square" anchor="t" lIns="0" rIns="0" tIns="0" bIns="0">
+            <a:spAutoFit/>
+          </a:bodyPr>
+          <a:lstStyle/>
+          <a:p>
+            <a:r>
+              <a:rPr sz="2400" i="0" b="1">
+                <a:solidFill>
+                  <a:srgbClr val="2B211C"/>
+                </a:solidFill>
+                <a:latin typeface="Calibri"/>
+              </a:rPr>
+              <a:t>Which design is best to study a very rare birth defect?</a:t>
+            </a:r>
+          </a:p>
+        </p:txBody>
+      </p:sp>
+      <p:sp>
+        <p:nvSpPr>
+          <p:cNvPr id="9" name="Rounded Rectangle 8"/>
+          <p:cNvSpPr/>
+          <p:nvPr/>
+        </p:nvSpPr>
+        <p:spPr>
+          <a:xfrm>
+            <a:off x="548640" y="2606040"/>
+            <a:ext cx="11094415" cy="548640"/>
+          </a:xfrm>
+          <a:prstGeom prst="roundRect">
+            <a:avLst>
+              <a:gd name="adj" fmla="val 18000"/>
+            </a:avLst>
+          </a:prstGeom>
+          <a:solidFill>
+            <a:srgbClr val="2F6F7A"/>
+          </a:solidFill>
+          <a:ln>
+            <a:noFill/>
+          </a:ln>
+          <a:effectLst/>
+        </p:spPr>
+        <p:style>
+          <a:lnRef idx="1">
+            <a:schemeClr val="accent1"/>
+          </a:lnRef>
+          <a:fillRef idx="3">
+            <a:schemeClr val="accent1"/>
+          </a:fillRef>
+          <a:effectRef idx="2">
+            <a:schemeClr val="accent1"/>
+          </a:effectRef>
+          <a:fontRef idx="minor">
+            <a:schemeClr val="lt1"/>
+          </a:fontRef>
+        </p:style>
+        <p:txBody>
+          <a:bodyPr rtlCol="0" anchor="ctr"/>
+          <a:lstStyle/>
+          <a:p>
+            <a:pPr algn="ctr"/>
+          </a:p>
+        </p:txBody>
+      </p:sp>
+      <p:sp>
+        <p:nvSpPr>
+          <p:cNvPr id="10" name="Oval 9"/>
+          <p:cNvSpPr/>
+          <p:nvPr/>
+        </p:nvSpPr>
+        <p:spPr>
+          <a:xfrm>
+            <a:off x="713232" y="2670048"/>
+            <a:ext cx="420624" cy="420624"/>
+          </a:xfrm>
+          <a:prstGeom prst="ellipse">
+            <a:avLst/>
+          </a:prstGeom>
+          <a:solidFill>
+            <a:srgbClr val="FFFFFF"/>
+          </a:solidFill>
+          <a:ln>
+            <a:noFill/>
+          </a:ln>
+          <a:effectLst/>
+        </p:spPr>
+        <p:style>
+          <a:lnRef idx="1">
+            <a:schemeClr val="accent1"/>
+          </a:lnRef>
+          <a:fillRef idx="3">
+            <a:schemeClr val="accent1"/>
+          </a:fillRef>
+          <a:effectRef idx="2">
+            <a:schemeClr val="accent1"/>
+          </a:effectRef>
+          <a:fontRef idx="minor">
+            <a:schemeClr val="lt1"/>
+          </a:fontRef>
+        </p:style>
+        <p:txBody>
+          <a:bodyPr rtlCol="0" anchor="ctr" lIns="0" rIns="0" tIns="0" bIns="0"/>
+          <a:lstStyle/>
+          <a:p>
+            <a:pPr algn="ctr"/>
+            <a:r>
+              <a:rPr sz="1500" i="0" b="1">
+                <a:solidFill>
+                  <a:srgbClr val="2F6F7A"/>
+                </a:solidFill>
+                <a:latin typeface="Calibri"/>
+              </a:rPr>
+              <a:t>A</a:t>
+            </a:r>
+          </a:p>
+        </p:txBody>
+      </p:sp>
+      <p:sp>
+        <p:nvSpPr>
+          <p:cNvPr id="11" name="TextBox 10"/>
+          <p:cNvSpPr txBox="1"/>
+          <p:nvPr/>
+        </p:nvSpPr>
+        <p:spPr>
+          <a:xfrm>
+            <a:off x="1371600" y="2606040"/>
+            <a:ext cx="10088575" cy="548640"/>
+          </a:xfrm>
+          <a:prstGeom prst="rect">
+            <a:avLst/>
+          </a:prstGeom>
+          <a:noFill/>
+        </p:spPr>
+        <p:txBody>
+          <a:bodyPr wrap="square" anchor="ctr" lIns="0" rIns="0" tIns="0" bIns="0">
+            <a:spAutoFit/>
+          </a:bodyPr>
+          <a:lstStyle/>
+          <a:p>
+            <a:r>
+              <a:rPr sz="1900" i="0" b="1">
+                <a:solidFill>
+                  <a:srgbClr val="FFFFFF"/>
+                </a:solidFill>
+                <a:latin typeface="Calibri"/>
+              </a:rPr>
+              <a:t>Case-control study</a:t>
+            </a:r>
+          </a:p>
+        </p:txBody>
+      </p:sp>
+      <p:sp>
+        <p:nvSpPr>
+          <p:cNvPr id="12" name="Rounded Rectangle 11"/>
+          <p:cNvSpPr/>
+          <p:nvPr/>
+        </p:nvSpPr>
+        <p:spPr>
+          <a:xfrm>
+            <a:off x="548640" y="3282696"/>
+            <a:ext cx="11094415" cy="548640"/>
+          </a:xfrm>
+          <a:prstGeom prst="roundRect">
+            <a:avLst>
+              <a:gd name="adj" fmla="val 18000"/>
+            </a:avLst>
+          </a:prstGeom>
+          <a:solidFill>
+            <a:srgbClr val="F5F4F4"/>
+          </a:solidFill>
+          <a:ln>
+            <a:noFill/>
+          </a:ln>
+          <a:effectLst/>
+        </p:spPr>
+        <p:style>
+          <a:lnRef idx="1">
+            <a:schemeClr val="accent1"/>
+          </a:lnRef>
+          <a:fillRef idx="3">
+            <a:schemeClr val="accent1"/>
+          </a:fillRef>
+          <a:effectRef idx="2">
+            <a:schemeClr val="accent1"/>
+          </a:effectRef>
+          <a:fontRef idx="minor">
+            <a:schemeClr val="lt1"/>
+          </a:fontRef>
+        </p:style>
+        <p:txBody>
+          <a:bodyPr rtlCol="0" anchor="ctr"/>
+          <a:lstStyle/>
+          <a:p>
+            <a:pPr algn="ctr"/>
+          </a:p>
+        </p:txBody>
+      </p:sp>
+      <p:sp>
+        <p:nvSpPr>
+          <p:cNvPr id="13" name="Oval 12"/>
+          <p:cNvSpPr/>
+          <p:nvPr/>
+        </p:nvSpPr>
+        <p:spPr>
+          <a:xfrm>
+            <a:off x="713232" y="3346703"/>
+            <a:ext cx="420624" cy="420624"/>
+          </a:xfrm>
+          <a:prstGeom prst="ellipse">
+            <a:avLst/>
+          </a:prstGeom>
+          <a:solidFill>
+            <a:srgbClr val="E2E0DE"/>
+          </a:solidFill>
+          <a:ln>
+            <a:noFill/>
+          </a:ln>
+          <a:effectLst/>
+        </p:spPr>
+        <p:style>
+          <a:lnRef idx="1">
+            <a:schemeClr val="accent1"/>
+          </a:lnRef>
+          <a:fillRef idx="3">
+            <a:schemeClr val="accent1"/>
+          </a:fillRef>
+          <a:effectRef idx="2">
+            <a:schemeClr val="accent1"/>
+          </a:effectRef>
+          <a:fontRef idx="minor">
+            <a:schemeClr val="lt1"/>
+          </a:fontRef>
+        </p:style>
+        <p:txBody>
+          <a:bodyPr rtlCol="0" anchor="ctr" lIns="0" rIns="0" tIns="0" bIns="0"/>
+          <a:lstStyle/>
+          <a:p>
+            <a:pPr algn="ctr"/>
+            <a:r>
+              <a:rPr sz="1500" i="0" b="1">
+                <a:solidFill>
+                  <a:srgbClr val="6E625B"/>
+                </a:solidFill>
+                <a:latin typeface="Calibri"/>
+              </a:rPr>
+              <a:t>B</a:t>
+            </a:r>
+          </a:p>
+        </p:txBody>
+      </p:sp>
+      <p:sp>
+        <p:nvSpPr>
+          <p:cNvPr id="14" name="TextBox 13"/>
+          <p:cNvSpPr txBox="1"/>
+          <p:nvPr/>
+        </p:nvSpPr>
+        <p:spPr>
+          <a:xfrm>
+            <a:off x="1371600" y="3282696"/>
+            <a:ext cx="10088575" cy="548640"/>
+          </a:xfrm>
+          <a:prstGeom prst="rect">
+            <a:avLst/>
+          </a:prstGeom>
+          <a:noFill/>
+        </p:spPr>
+        <p:txBody>
+          <a:bodyPr wrap="square" anchor="ctr" lIns="0" rIns="0" tIns="0" bIns="0">
+            <a:spAutoFit/>
+          </a:bodyPr>
+          <a:lstStyle/>
+          <a:p>
+            <a:r>
+              <a:rPr sz="1900" i="0" b="0">
+                <a:solidFill>
+                  <a:srgbClr val="6E625B"/>
+                </a:solidFill>
+                <a:latin typeface="Calibri"/>
+              </a:rPr>
+              <a:t>Randomised controlled trial</a:t>
+            </a:r>
+          </a:p>
+        </p:txBody>
+      </p:sp>
+      <p:sp>
+        <p:nvSpPr>
+          <p:cNvPr id="15" name="Rounded Rectangle 14"/>
+          <p:cNvSpPr/>
+          <p:nvPr/>
+        </p:nvSpPr>
+        <p:spPr>
+          <a:xfrm>
+            <a:off x="548640" y="3959352"/>
+            <a:ext cx="11094415" cy="548640"/>
+          </a:xfrm>
+          <a:prstGeom prst="roundRect">
+            <a:avLst>
+              <a:gd name="adj" fmla="val 18000"/>
+            </a:avLst>
+          </a:prstGeom>
+          <a:solidFill>
+            <a:srgbClr val="F5F4F4"/>
+          </a:solidFill>
+          <a:ln>
+            <a:noFill/>
+          </a:ln>
+          <a:effectLst/>
+        </p:spPr>
+        <p:style>
+          <a:lnRef idx="1">
+            <a:schemeClr val="accent1"/>
+          </a:lnRef>
+          <a:fillRef idx="3">
+            <a:schemeClr val="accent1"/>
+          </a:fillRef>
+          <a:effectRef idx="2">
+            <a:schemeClr val="accent1"/>
+          </a:effectRef>
+          <a:fontRef idx="minor">
+            <a:schemeClr val="lt1"/>
+          </a:fontRef>
+        </p:style>
+        <p:txBody>
+          <a:bodyPr rtlCol="0" anchor="ctr"/>
+          <a:lstStyle/>
+          <a:p>
+            <a:pPr algn="ctr"/>
+          </a:p>
+        </p:txBody>
+      </p:sp>
+      <p:sp>
+        <p:nvSpPr>
+          <p:cNvPr id="16" name="Oval 15"/>
+          <p:cNvSpPr/>
+          <p:nvPr/>
+        </p:nvSpPr>
+        <p:spPr>
+          <a:xfrm>
+            <a:off x="713232" y="4023360"/>
+            <a:ext cx="420624" cy="420624"/>
+          </a:xfrm>
+          <a:prstGeom prst="ellipse">
+            <a:avLst/>
+          </a:prstGeom>
+          <a:solidFill>
+            <a:srgbClr val="E2E0DE"/>
+          </a:solidFill>
+          <a:ln>
+            <a:noFill/>
+          </a:ln>
+          <a:effectLst/>
+        </p:spPr>
+        <p:style>
+          <a:lnRef idx="1">
+            <a:schemeClr val="accent1"/>
+          </a:lnRef>
+          <a:fillRef idx="3">
+            <a:schemeClr val="accent1"/>
+          </a:fillRef>
+          <a:effectRef idx="2">
+            <a:schemeClr val="accent1"/>
+          </a:effectRef>
+          <a:fontRef idx="minor">
+            <a:schemeClr val="lt1"/>
+          </a:fontRef>
+        </p:style>
+        <p:txBody>
+          <a:bodyPr rtlCol="0" anchor="ctr" lIns="0" rIns="0" tIns="0" bIns="0"/>
+          <a:lstStyle/>
+          <a:p>
+            <a:pPr algn="ctr"/>
+            <a:r>
+              <a:rPr sz="1500" i="0" b="1">
+                <a:solidFill>
+                  <a:srgbClr val="6E625B"/>
+                </a:solidFill>
+                <a:latin typeface="Calibri"/>
+              </a:rPr>
+              <a:t>C</a:t>
+            </a:r>
+          </a:p>
+        </p:txBody>
+      </p:sp>
+      <p:sp>
+        <p:nvSpPr>
+          <p:cNvPr id="17" name="TextBox 16"/>
+          <p:cNvSpPr txBox="1"/>
+          <p:nvPr/>
+        </p:nvSpPr>
+        <p:spPr>
+          <a:xfrm>
+            <a:off x="1371600" y="3959352"/>
+            <a:ext cx="10088575" cy="548640"/>
+          </a:xfrm>
+          <a:prstGeom prst="rect">
+            <a:avLst/>
+          </a:prstGeom>
+          <a:noFill/>
+        </p:spPr>
+        <p:txBody>
+          <a:bodyPr wrap="square" anchor="ctr" lIns="0" rIns="0" tIns="0" bIns="0">
+            <a:spAutoFit/>
+          </a:bodyPr>
+          <a:lstStyle/>
+          <a:p>
+            <a:r>
+              <a:rPr sz="1900" i="0" b="0">
+                <a:solidFill>
+                  <a:srgbClr val="6E625B"/>
+                </a:solidFill>
+                <a:latin typeface="Calibri"/>
+              </a:rPr>
+              <a:t>Cross-sectional survey</a:t>
+            </a:r>
+          </a:p>
+        </p:txBody>
+      </p:sp>
+      <p:sp>
+        <p:nvSpPr>
+          <p:cNvPr id="18" name="Rounded Rectangle 17"/>
+          <p:cNvSpPr/>
+          <p:nvPr/>
+        </p:nvSpPr>
+        <p:spPr>
+          <a:xfrm>
+            <a:off x="548640" y="4636008"/>
+            <a:ext cx="11094415" cy="548640"/>
+          </a:xfrm>
+          <a:prstGeom prst="roundRect">
+            <a:avLst>
+              <a:gd name="adj" fmla="val 18000"/>
+            </a:avLst>
+          </a:prstGeom>
+          <a:solidFill>
+            <a:srgbClr val="F5F4F4"/>
+          </a:solidFill>
+          <a:ln>
+            <a:noFill/>
+          </a:ln>
+          <a:effectLst/>
+        </p:spPr>
+        <p:style>
+          <a:lnRef idx="1">
+            <a:schemeClr val="accent1"/>
+          </a:lnRef>
+          <a:fillRef idx="3">
+            <a:schemeClr val="accent1"/>
+          </a:fillRef>
+          <a:effectRef idx="2">
+            <a:schemeClr val="accent1"/>
+          </a:effectRef>
+          <a:fontRef idx="minor">
+            <a:schemeClr val="lt1"/>
+          </a:fontRef>
+        </p:style>
+        <p:txBody>
+          <a:bodyPr rtlCol="0" anchor="ctr"/>
+          <a:lstStyle/>
+          <a:p>
+            <a:pPr algn="ctr"/>
+          </a:p>
+        </p:txBody>
+      </p:sp>
+      <p:sp>
+        <p:nvSpPr>
+          <p:cNvPr id="19" name="Oval 18"/>
+          <p:cNvSpPr/>
+          <p:nvPr/>
+        </p:nvSpPr>
+        <p:spPr>
+          <a:xfrm>
+            <a:off x="713232" y="4700016"/>
+            <a:ext cx="420624" cy="420624"/>
+          </a:xfrm>
+          <a:prstGeom prst="ellipse">
+            <a:avLst/>
+          </a:prstGeom>
+          <a:solidFill>
+            <a:srgbClr val="E2E0DE"/>
+          </a:solidFill>
+          <a:ln>
+            <a:noFill/>
+          </a:ln>
+          <a:effectLst/>
+        </p:spPr>
+        <p:style>
+          <a:lnRef idx="1">
+            <a:schemeClr val="accent1"/>
+          </a:lnRef>
+          <a:fillRef idx="3">
+            <a:schemeClr val="accent1"/>
+          </a:fillRef>
+          <a:effectRef idx="2">
+            <a:schemeClr val="accent1"/>
+          </a:effectRef>
+          <a:fontRef idx="minor">
+            <a:schemeClr val="lt1"/>
+          </a:fontRef>
+        </p:style>
+        <p:txBody>
+          <a:bodyPr rtlCol="0" anchor="ctr" lIns="0" rIns="0" tIns="0" bIns="0"/>
+          <a:lstStyle/>
+          <a:p>
+            <a:pPr algn="ctr"/>
+            <a:r>
+              <a:rPr sz="1500" i="0" b="1">
+                <a:solidFill>
+                  <a:srgbClr val="6E625B"/>
+                </a:solidFill>
+                <a:latin typeface="Calibri"/>
+              </a:rPr>
+              <a:t>D</a:t>
+            </a:r>
+          </a:p>
+        </p:txBody>
+      </p:sp>
+      <p:sp>
+        <p:nvSpPr>
+          <p:cNvPr id="20" name="TextBox 19"/>
+          <p:cNvSpPr txBox="1"/>
+          <p:nvPr/>
+        </p:nvSpPr>
+        <p:spPr>
+          <a:xfrm>
+            <a:off x="1371600" y="4636008"/>
+            <a:ext cx="10088575" cy="548640"/>
+          </a:xfrm>
+          <a:prstGeom prst="rect">
+            <a:avLst/>
+          </a:prstGeom>
+          <a:noFill/>
+        </p:spPr>
+        <p:txBody>
+          <a:bodyPr wrap="square" anchor="ctr" lIns="0" rIns="0" tIns="0" bIns="0">
+            <a:spAutoFit/>
+          </a:bodyPr>
+          <a:lstStyle/>
+          <a:p>
+            <a:r>
+              <a:rPr sz="1900" i="0" b="0">
+                <a:solidFill>
+                  <a:srgbClr val="6E625B"/>
+                </a:solidFill>
+                <a:latin typeface="Calibri"/>
+              </a:rPr>
+              <a:t>Case report</a:t>
+            </a:r>
+          </a:p>
+        </p:txBody>
+      </p:sp>
+      <p:sp>
+        <p:nvSpPr>
+          <p:cNvPr id="21" name="TextBox 20"/>
+          <p:cNvSpPr txBox="1"/>
+          <p:nvPr/>
+        </p:nvSpPr>
+        <p:spPr>
+          <a:xfrm>
+            <a:off x="548640" y="5358384"/>
+            <a:ext cx="11094415" cy="685800"/>
+          </a:xfrm>
+          <a:prstGeom prst="rect">
+            <a:avLst/>
+          </a:prstGeom>
+          <a:noFill/>
+        </p:spPr>
+        <p:txBody>
+          <a:bodyPr wrap="square" anchor="t" lIns="0" rIns="0" tIns="0" bIns="0">
+            <a:spAutoFit/>
+          </a:bodyPr>
+          <a:lstStyle/>
+          <a:p>
+            <a:r>
+              <a:rPr sz="1500" i="0" b="1">
+                <a:solidFill>
+                  <a:srgbClr val="2F6F7A"/>
+                </a:solidFill>
+                <a:latin typeface="Calibri"/>
+              </a:rPr>
+              <a:t>Why:  </a:t>
+            </a:r>
+            <a:r>
+              <a:rPr sz="1500" i="0" b="0">
+                <a:solidFill>
+                  <a:srgbClr val="2B211C"/>
+                </a:solidFill>
+                <a:latin typeface="Calibri"/>
+              </a:rPr>
+              <a:t>Case-control studies suit rare outcomes. B would need huge numbers, C shows prevalence, D cannot compare.</a:t>
+            </a:r>
+          </a:p>
+        </p:txBody>
+      </p:sp>
+    </p:spTree>
+  </p:cSld>
+  <p:clrMapOvr>
+    <a:masterClrMapping/>
+  </p:clrMapOvr>
+</p:sld>
+</file>
+
+<file path=ppt/slides/slide23.xml><?xml version="1.0" encoding="utf-8"?>
+<p:sld xmlns:a="http://schemas.openxmlformats.org/drawingml/2006/main" xmlns:p="http://schemas.openxmlformats.org/presentationml/2006/main" xmlns:r="http://schemas.openxmlformats.org/officeDocument/2006/relationships">
+  <p:cSld>
+    <p:bg>
+      <p:bgPr>
+        <a:solidFill>
+          <a:srgbClr val="FFFFFF"/>
+        </a:solidFill>
+        <a:effectLst/>
+      </p:bgPr>
+    </p:bg>
+    <p:spTree>
+      <p:nvGrpSpPr>
+        <p:cNvPr id="1" name=""/>
+        <p:cNvGrpSpPr/>
+        <p:nvPr/>
+      </p:nvGrpSpPr>
+      <p:grpSpPr/>
+      <p:sp>
+        <p:nvSpPr>
           <p:cNvPr id="2" name="Rectangle 1"/>
           <p:cNvSpPr/>
           <p:nvPr/>
@@ -14706,11 +15384,10 @@
           </a:bodyPr>
           <a:lstStyle/>
           <a:p>
-            <a:pPr algn="l"/>
             <a:r>
               <a:rPr sz="13000" i="0" b="1">
                 <a:solidFill>
-                  <a:srgbClr val="F6E5DE"/>
+                  <a:srgbClr val="F1E3DF"/>
                 </a:solidFill>
                 <a:latin typeface="Cambria"/>
               </a:rPr>
@@ -14755,7 +15432,7 @@
             <a:r>
               <a:rPr sz="1400" i="0" b="1" spc="150">
                 <a:solidFill>
-                  <a:srgbClr val="F6E5DE"/>
+                  <a:srgbClr val="F1E3DF"/>
                 </a:solidFill>
                 <a:latin typeface="Calibri"/>
               </a:rPr>
@@ -14807,7 +15484,7 @@
         <p:spPr>
           <a:xfrm>
             <a:off x="4526280" y="6419088"/>
-            <a:ext cx="5486400" cy="274320"/>
+            <a:ext cx="8229600" cy="274320"/>
           </a:xfrm>
           <a:prstGeom prst="rect">
             <a:avLst/>
@@ -14862,7 +15539,7 @@
                 </a:solidFill>
                 <a:latin typeface="Calibri"/>
               </a:rPr>
-              <a:t>22</a:t>
+              <a:t>23</a:t>
             </a:r>
           </a:p>
         </p:txBody>
@@ -14899,7 +15576,7 @@
 </p:sld>
 </file>
 
-<file path=ppt/slides/slide23.xml><?xml version="1.0" encoding="utf-8"?>
+<file path=ppt/slides/slide24.xml><?xml version="1.0" encoding="utf-8"?>
 <p:sld xmlns:a="http://schemas.openxmlformats.org/drawingml/2006/main" xmlns:p="http://schemas.openxmlformats.org/presentationml/2006/main" xmlns:r="http://schemas.openxmlformats.org/officeDocument/2006/relationships">
   <p:cSld>
     <p:bg>
@@ -14942,7 +15619,7 @@
             <a:r>
               <a:rPr sz="1300" i="0" b="1" spc="200">
                 <a:solidFill>
-                  <a:srgbClr val="F3E6D8"/>
+                  <a:srgbClr val="F2E5E1"/>
                 </a:solidFill>
                 <a:latin typeface="Calibri"/>
               </a:rPr>
@@ -15000,7 +15677,7 @@
             <a:avLst/>
           </a:prstGeom>
           <a:solidFill>
-            <a:srgbClr val="F3E6D8"/>
+            <a:srgbClr val="F2E5E1"/>
           </a:solidFill>
           <a:ln>
             <a:noFill/>
@@ -15022,7 +15699,7 @@
           </a:fontRef>
         </p:style>
         <p:txBody>
-          <a:bodyPr rtlCol="0" anchor="ctr" lIns="0" rIns="0"/>
+          <a:bodyPr rtlCol="0" anchor="ctr" lIns="0" rIns="0" tIns="0" bIns="0"/>
           <a:lstStyle/>
           <a:p>
             <a:pPr algn="ctr"/>
@@ -15087,7 +15764,7 @@
             <a:avLst/>
           </a:prstGeom>
           <a:solidFill>
-            <a:srgbClr val="F3E6D8"/>
+            <a:srgbClr val="F2E5E1"/>
           </a:solidFill>
           <a:ln>
             <a:noFill/>
@@ -15109,7 +15786,7 @@
           </a:fontRef>
         </p:style>
         <p:txBody>
-          <a:bodyPr rtlCol="0" anchor="ctr" lIns="0" rIns="0"/>
+          <a:bodyPr rtlCol="0" anchor="ctr" lIns="0" rIns="0" tIns="0" bIns="0"/>
           <a:lstStyle/>
           <a:p>
             <a:pPr algn="ctr"/>
@@ -15174,7 +15851,7 @@
             <a:avLst/>
           </a:prstGeom>
           <a:solidFill>
-            <a:srgbClr val="F3E6D8"/>
+            <a:srgbClr val="F2E5E1"/>
           </a:solidFill>
           <a:ln>
             <a:noFill/>
@@ -15196,7 +15873,7 @@
           </a:fontRef>
         </p:style>
         <p:txBody>
-          <a:bodyPr rtlCol="0" anchor="ctr" lIns="0" rIns="0"/>
+          <a:bodyPr rtlCol="0" anchor="ctr" lIns="0" rIns="0" tIns="0" bIns="0"/>
           <a:lstStyle/>
           <a:p>
             <a:pPr algn="ctr"/>
@@ -15261,7 +15938,7 @@
             <a:avLst/>
           </a:prstGeom>
           <a:solidFill>
-            <a:srgbClr val="F3E6D8"/>
+            <a:srgbClr val="F2E5E1"/>
           </a:solidFill>
           <a:ln>
             <a:noFill/>
@@ -15283,7 +15960,7 @@
           </a:fontRef>
         </p:style>
         <p:txBody>
-          <a:bodyPr rtlCol="0" anchor="ctr" lIns="0" rIns="0"/>
+          <a:bodyPr rtlCol="0" anchor="ctr" lIns="0" rIns="0" tIns="0" bIns="0"/>
           <a:lstStyle/>
           <a:p>
             <a:pPr algn="ctr"/>
@@ -15348,7 +16025,7 @@
             <a:avLst/>
           </a:prstGeom>
           <a:solidFill>
-            <a:srgbClr val="F3E6D8"/>
+            <a:srgbClr val="F2E5E1"/>
           </a:solidFill>
           <a:ln>
             <a:noFill/>
@@ -15370,7 +16047,7 @@
           </a:fontRef>
         </p:style>
         <p:txBody>
-          <a:bodyPr rtlCol="0" anchor="ctr" lIns="0" rIns="0"/>
+          <a:bodyPr rtlCol="0" anchor="ctr" lIns="0" rIns="0" tIns="0" bIns="0"/>
           <a:lstStyle/>
           <a:p>
             <a:pPr algn="ctr"/>
@@ -15531,7 +16208,7 @@
           </a:fontRef>
         </p:style>
         <p:txBody>
-          <a:bodyPr rtlCol="0" anchor="ctr" lIns="0" rIns="0"/>
+          <a:bodyPr rtlCol="0" anchor="ctr" lIns="0" rIns="0" tIns="0" bIns="0"/>
           <a:lstStyle/>
           <a:p>
             <a:pPr algn="ctr"/>
@@ -15710,20 +16387,111 @@
       </p:pic>
       <p:sp>
         <p:nvSpPr>
-          <p:cNvPr id="8" name="Oval 7"/>
+          <p:cNvPr id="8" name="TextBox 7"/>
+          <p:cNvSpPr txBox="1"/>
+          <p:nvPr/>
+        </p:nvSpPr>
+        <p:spPr>
+          <a:xfrm>
+            <a:off x="548640" y="1554480"/>
+            <a:ext cx="11094415" cy="1202436"/>
+          </a:xfrm>
+          <a:prstGeom prst="rect">
+            <a:avLst/>
+          </a:prstGeom>
+          <a:noFill/>
+        </p:spPr>
+        <p:txBody>
+          <a:bodyPr wrap="square" anchor="t" lIns="0" rIns="0" tIns="0" bIns="0">
+            <a:spAutoFit/>
+          </a:bodyPr>
+          <a:lstStyle/>
+          <a:p>
+            <a:pPr>
+              <a:spcAft>
+                <a:spcPts val="800"/>
+              </a:spcAft>
+            </a:pPr>
+            <a:r>
+              <a:rPr sz="1800" i="0" b="0">
+                <a:solidFill>
+                  <a:srgbClr val="2B211C"/>
+                </a:solidFill>
+                <a:latin typeface="Calibri"/>
+              </a:rPr>
+              <a:t>Every study either </a:t>
+            </a:r>
+            <a:r>
+              <a:rPr sz="1800" i="0" b="1">
+                <a:solidFill>
+                  <a:srgbClr val="2B211C"/>
+                </a:solidFill>
+                <a:latin typeface="Calibri"/>
+              </a:rPr>
+              <a:t>watches</a:t>
+            </a:r>
+            <a:r>
+              <a:rPr sz="1800" i="0" b="0">
+                <a:solidFill>
+                  <a:srgbClr val="2B211C"/>
+                </a:solidFill>
+                <a:latin typeface="Calibri"/>
+              </a:rPr>
+              <a:t> or </a:t>
+            </a:r>
+            <a:r>
+              <a:rPr sz="1800" i="0" b="1">
+                <a:solidFill>
+                  <a:srgbClr val="2B211C"/>
+                </a:solidFill>
+                <a:latin typeface="Calibri"/>
+              </a:rPr>
+              <a:t>acts</a:t>
+            </a:r>
+            <a:r>
+              <a:rPr sz="1800" i="0" b="0">
+                <a:solidFill>
+                  <a:srgbClr val="2B211C"/>
+                </a:solidFill>
+                <a:latin typeface="Calibri"/>
+              </a:rPr>
+              <a:t>. Knowing the design tells you how much to trust the result, which is the first step in answering any evidence question.</a:t>
+            </a:r>
+          </a:p>
+          <a:p>
+            <a:pPr>
+              <a:spcAft>
+                <a:spcPts val="800"/>
+              </a:spcAft>
+            </a:pPr>
+            <a:r>
+              <a:rPr sz="1800" i="0" b="0">
+                <a:solidFill>
+                  <a:srgbClr val="2B211C"/>
+                </a:solidFill>
+                <a:latin typeface="Calibri"/>
+              </a:rPr>
+              <a:t>A quick test: did the researcher choose who got the drug? If yes, it is experimental.</a:t>
+            </a:r>
+          </a:p>
+        </p:txBody>
+      </p:sp>
+      <p:sp>
+        <p:nvSpPr>
+          <p:cNvPr id="9" name="Oval 8"/>
           <p:cNvSpPr/>
           <p:nvPr/>
         </p:nvSpPr>
         <p:spPr>
           <a:xfrm>
-            <a:off x="548640" y="1618488"/>
+            <a:off x="548640" y="2958084"/>
             <a:ext cx="402336" cy="402336"/>
           </a:xfrm>
           <a:prstGeom prst="ellipse">
             <a:avLst/>
           </a:prstGeom>
           <a:solidFill>
-            <a:srgbClr val="E0EEF0"/>
+            <a:srgbClr val="E6EEEF"/>
           </a:solidFill>
           <a:ln>
             <a:noFill/>
@@ -15745,7 +16513,7 @@
           </a:fontRef>
         </p:style>
         <p:txBody>
-          <a:bodyPr rtlCol="0" anchor="ctr" lIns="0" rIns="0"/>
+          <a:bodyPr rtlCol="0" anchor="ctr" lIns="0" rIns="0" tIns="0" bIns="0"/>
           <a:lstStyle/>
           <a:p>
             <a:pPr algn="ctr"/>
@@ -15763,14 +16531,14 @@
       </p:sp>
       <p:sp>
         <p:nvSpPr>
-          <p:cNvPr id="9" name="TextBox 8"/>
+          <p:cNvPr id="10" name="TextBox 9"/>
           <p:cNvSpPr txBox="1"/>
           <p:nvPr/>
         </p:nvSpPr>
         <p:spPr>
           <a:xfrm>
-            <a:off x="1143000" y="1636776"/>
-            <a:ext cx="10500055" cy="1237488"/>
+            <a:off x="1143000" y="2976372"/>
+            <a:ext cx="10500055" cy="1142237"/>
           </a:xfrm>
           <a:prstGeom prst="rect">
             <a:avLst/>
@@ -15784,7 +16552,7 @@
           <a:lstStyle/>
           <a:p>
             <a:r>
-              <a:rPr sz="2400" i="0" b="1">
+              <a:rPr sz="2100" i="0" b="1">
                 <a:solidFill>
                   <a:srgbClr val="2B211C"/>
                 </a:solidFill>
@@ -15793,7 +16561,7 @@
               <a:t>Observational studies:</a:t>
             </a:r>
             <a:r>
-              <a:rPr sz="2400" i="0" b="0">
+              <a:rPr sz="2100" i="0" b="0">
                 <a:solidFill>
                   <a:srgbClr val="2B211C"/>
                 </a:solidFill>
@@ -15806,20 +16574,20 @@
       </p:sp>
       <p:sp>
         <p:nvSpPr>
-          <p:cNvPr id="10" name="Oval 9"/>
+          <p:cNvPr id="11" name="Oval 10"/>
           <p:cNvSpPr/>
           <p:nvPr/>
         </p:nvSpPr>
         <p:spPr>
           <a:xfrm>
-            <a:off x="548640" y="2901696"/>
+            <a:off x="548640" y="4146041"/>
             <a:ext cx="402336" cy="402336"/>
           </a:xfrm>
           <a:prstGeom prst="ellipse">
             <a:avLst/>
           </a:prstGeom>
           <a:solidFill>
-            <a:srgbClr val="E0EEF0"/>
+            <a:srgbClr val="E6EEEF"/>
           </a:solidFill>
           <a:ln>
             <a:noFill/>
@@ -15841,7 +16609,7 @@
           </a:fontRef>
         </p:style>
         <p:txBody>
-          <a:bodyPr rtlCol="0" anchor="ctr" lIns="0" rIns="0"/>
+          <a:bodyPr rtlCol="0" anchor="ctr" lIns="0" rIns="0" tIns="0" bIns="0"/>
           <a:lstStyle/>
           <a:p>
             <a:pPr algn="ctr"/>
@@ -15859,14 +16627,14 @@
       </p:sp>
       <p:sp>
         <p:nvSpPr>
-          <p:cNvPr id="11" name="TextBox 10"/>
+          <p:cNvPr id="12" name="TextBox 11"/>
           <p:cNvSpPr txBox="1"/>
           <p:nvPr/>
         </p:nvSpPr>
         <p:spPr>
           <a:xfrm>
-            <a:off x="1143000" y="2919984"/>
-            <a:ext cx="10500055" cy="1237488"/>
+            <a:off x="1143000" y="4164329"/>
+            <a:ext cx="10500055" cy="1142237"/>
           </a:xfrm>
           <a:prstGeom prst="rect">
             <a:avLst/>
@@ -15880,7 +16648,7 @@
           <a:lstStyle/>
           <a:p>
             <a:r>
-              <a:rPr sz="2400" i="0" b="1">
+              <a:rPr sz="2100" i="0" b="1">
                 <a:solidFill>
                   <a:srgbClr val="2B211C"/>
                 </a:solidFill>
@@ -15889,7 +16657,7 @@
               <a:t>Experimental studies:</a:t>
             </a:r>
             <a:r>
-              <a:rPr sz="2400" i="0" b="0">
+              <a:rPr sz="2100" i="0" b="0">
                 <a:solidFill>
                   <a:srgbClr val="2B211C"/>
                 </a:solidFill>
@@ -15963,7 +16731,7 @@
           </a:fontRef>
         </p:style>
         <p:txBody>
-          <a:bodyPr rtlCol="0" anchor="ctr" lIns="0" rIns="0"/>
+          <a:bodyPr rtlCol="0" anchor="ctr" lIns="0" rIns="0" tIns="0" bIns="0"/>
           <a:lstStyle/>
           <a:p>
             <a:pPr algn="ctr"/>
@@ -16140,17 +16908,65 @@
           </a:prstGeom>
         </p:spPr>
       </p:pic>
+      <p:sp>
+        <p:nvSpPr>
+          <p:cNvPr id="8" name="TextBox 7"/>
+          <p:cNvSpPr txBox="1"/>
+          <p:nvPr/>
+        </p:nvSpPr>
+        <p:spPr>
+          <a:xfrm>
+            <a:off x="548640" y="1554480"/>
+            <a:ext cx="11094415" cy="1092708"/>
+          </a:xfrm>
+          <a:prstGeom prst="rect">
+            <a:avLst/>
+          </a:prstGeom>
+          <a:noFill/>
+        </p:spPr>
+        <p:txBody>
+          <a:bodyPr wrap="square" anchor="t" lIns="0" rIns="0" tIns="0" bIns="0">
+            <a:spAutoFit/>
+          </a:bodyPr>
+          <a:lstStyle/>
+          <a:p>
+            <a:pPr>
+              <a:spcAft>
+                <a:spcPts val="800"/>
+              </a:spcAft>
+            </a:pPr>
+            <a:r>
+              <a:rPr sz="1800" i="0" b="1">
+                <a:solidFill>
+                  <a:srgbClr val="2B211C"/>
+                </a:solidFill>
+                <a:latin typeface="Calibri"/>
+              </a:rPr>
+              <a:t>Confounding</a:t>
+            </a:r>
+            <a:r>
+              <a:rPr sz="1800" i="0" b="0">
+                <a:solidFill>
+                  <a:srgbClr val="2B211C"/>
+                </a:solidFill>
+                <a:latin typeface="Calibri"/>
+              </a:rPr>
+              <a:t> means a third factor explains the link. For example, coffee drinkers get more lung cancer because more of them smoke. Randomisation (Chapter 4) is the best protection against confounding.</a:t>
+            </a:r>
+          </a:p>
+        </p:txBody>
+      </p:sp>
       <p:graphicFrame>
         <p:nvGraphicFramePr>
-          <p:cNvPr id="8" name="Table 7"/>
+          <p:cNvPr id="9" name="Table 8"/>
           <p:cNvGraphicFramePr>
             <a:graphicFrameLocks noGrp="1"/>
           </p:cNvGraphicFramePr>
           <p:nvPr/>
         </p:nvGraphicFramePr>
         <p:xfrm>
-          <a:off x="548640" y="1600200"/>
-          <a:ext cx="11094413" cy="4526277"/>
+          <a:off x="548640" y="2830068"/>
+          <a:ext cx="11094413" cy="3342129"/>
         </p:xfrm>
         <a:graphic>
           <a:graphicData uri="http://schemas.openxmlformats.org/drawingml/2006/table">
@@ -16165,14 +16981,14 @@
                 <a:gridCol w="2359633"/>
                 <a:gridCol w="2359633"/>
               </a:tblGrid>
-              <a:tr h="646611">
+              <a:tr h="477447">
                 <a:tc>
                   <a:txBody>
                     <a:bodyPr/>
                     <a:lstStyle/>
                     <a:p>
                       <a:r>
-                        <a:rPr sz="1300" i="0" b="1">
+                        <a:rPr sz="1000" i="0" b="1">
                           <a:solidFill>
                             <a:srgbClr val="FFFFFF"/>
                           </a:solidFill>
@@ -16194,7 +17010,7 @@
                     <a:lstStyle/>
                     <a:p>
                       <a:r>
-                        <a:rPr sz="1300" i="0" b="1">
+                        <a:rPr sz="1000" i="0" b="1">
                           <a:solidFill>
                             <a:srgbClr val="FFFFFF"/>
                           </a:solidFill>
@@ -16216,7 +17032,7 @@
                     <a:lstStyle/>
                     <a:p>
                       <a:r>
-                        <a:rPr sz="1300" i="0" b="1">
+                        <a:rPr sz="1000" i="0" b="1">
                           <a:solidFill>
                             <a:srgbClr val="FFFFFF"/>
                           </a:solidFill>
@@ -16238,7 +17054,7 @@
                     <a:lstStyle/>
                     <a:p>
                       <a:r>
-                        <a:rPr sz="1300" i="0" b="1">
+                        <a:rPr sz="1000" i="0" b="1">
                           <a:solidFill>
                             <a:srgbClr val="FFFFFF"/>
                           </a:solidFill>
@@ -16260,7 +17076,7 @@
                     <a:lstStyle/>
                     <a:p>
                       <a:r>
-                        <a:rPr sz="1300" i="0" b="1">
+                        <a:rPr sz="1000" i="0" b="1">
                           <a:solidFill>
                             <a:srgbClr val="FFFFFF"/>
                           </a:solidFill>
@@ -16277,14 +17093,14 @@
                   </a:tcPr>
                 </a:tc>
               </a:tr>
-              <a:tr h="646611">
+              <a:tr h="477447">
                 <a:tc>
                   <a:txBody>
                     <a:bodyPr/>
                     <a:lstStyle/>
                     <a:p>
                       <a:r>
-                        <a:rPr sz="1400" i="0" b="1">
+                        <a:rPr sz="1100" i="0" b="1">
                           <a:solidFill>
                             <a:srgbClr val="2B211C"/>
                           </a:solidFill>
@@ -16306,7 +17122,7 @@
                     <a:lstStyle/>
                     <a:p>
                       <a:r>
-                        <a:rPr sz="1400" i="0" b="0">
+                        <a:rPr sz="1100" i="0" b="0">
                           <a:solidFill>
                             <a:srgbClr val="2B211C"/>
                           </a:solidFill>
@@ -16328,7 +17144,7 @@
                     <a:lstStyle/>
                     <a:p>
                       <a:r>
-                        <a:rPr sz="1400" i="0" b="0">
+                        <a:rPr sz="1100" i="0" b="0">
                           <a:solidFill>
                             <a:srgbClr val="2B211C"/>
                           </a:solidFill>
@@ -16350,7 +17166,7 @@
                     <a:lstStyle/>
                     <a:p>
                       <a:r>
-                        <a:rPr sz="1400" i="0" b="0">
+                        <a:rPr sz="1100" i="0" b="0">
                           <a:solidFill>
                             <a:srgbClr val="2B211C"/>
                           </a:solidFill>
@@ -16372,7 +17188,7 @@
                     <a:lstStyle/>
                     <a:p>
                       <a:r>
-                        <a:rPr sz="1400" i="0" b="0">
+                        <a:rPr sz="1100" i="0" b="0">
                           <a:solidFill>
                             <a:srgbClr val="2B211C"/>
                           </a:solidFill>
@@ -16389,14 +17205,14 @@
                   </a:tcPr>
                 </a:tc>
               </a:tr>
-              <a:tr h="646611">
+              <a:tr h="477447">
                 <a:tc>
                   <a:txBody>
                     <a:bodyPr/>
                     <a:lstStyle/>
                     <a:p>
                       <a:r>
-                        <a:rPr sz="1400" i="0" b="1">
+                        <a:rPr sz="1100" i="0" b="1">
                           <a:solidFill>
                             <a:srgbClr val="2B211C"/>
                           </a:solidFill>
@@ -16408,7 +17224,7 @@
                   </a:txBody>
                   <a:tcPr marL="109728" marR="109728" marT="45720" marB="45720" anchor="ctr">
                     <a:solidFill>
-                      <a:srgbClr val="FBF3EE"/>
+                      <a:srgbClr val="FAF4F2"/>
                     </a:solidFill>
                   </a:tcPr>
                 </a:tc>
@@ -16418,7 +17234,7 @@
                     <a:lstStyle/>
                     <a:p>
                       <a:r>
-                        <a:rPr sz="1400" i="0" b="0">
+                        <a:rPr sz="1100" i="0" b="0">
                           <a:solidFill>
                             <a:srgbClr val="2B211C"/>
                           </a:solidFill>
@@ -16430,7 +17246,7 @@
                   </a:txBody>
                   <a:tcPr marL="109728" marR="109728" marT="45720" marB="45720" anchor="ctr">
                     <a:solidFill>
-                      <a:srgbClr val="FBF3EE"/>
+                      <a:srgbClr val="FAF4F2"/>
                     </a:solidFill>
                   </a:tcPr>
                 </a:tc>
@@ -16440,7 +17256,7 @@
                     <a:lstStyle/>
                     <a:p>
                       <a:r>
-                        <a:rPr sz="1400" i="0" b="0">
+                        <a:rPr sz="1100" i="0" b="0">
                           <a:solidFill>
                             <a:srgbClr val="2B211C"/>
                           </a:solidFill>
@@ -16452,7 +17268,7 @@
                   </a:txBody>
                   <a:tcPr marL="109728" marR="109728" marT="45720" marB="45720" anchor="ctr">
                     <a:solidFill>
-                      <a:srgbClr val="FBF3EE"/>
+                      <a:srgbClr val="FAF4F2"/>
                     </a:solidFill>
                   </a:tcPr>
                 </a:tc>
@@ -16462,7 +17278,7 @@
                     <a:lstStyle/>
                     <a:p>
                       <a:r>
-                        <a:rPr sz="1400" i="0" b="0">
+                        <a:rPr sz="1100" i="0" b="0">
                           <a:solidFill>
                             <a:srgbClr val="2B211C"/>
                           </a:solidFill>
@@ -16474,7 +17290,7 @@
                   </a:txBody>
                   <a:tcPr marL="109728" marR="109728" marT="45720" marB="45720" anchor="ctr">
                     <a:solidFill>
-                      <a:srgbClr val="FBF3EE"/>
+                      <a:srgbClr val="FAF4F2"/>
                     </a:solidFill>
                   </a:tcPr>
                 </a:tc>
@@ -16484,7 +17300,7 @@
                     <a:lstStyle/>
                     <a:p>
                       <a:r>
-                        <a:rPr sz="1400" i="0" b="0">
+                        <a:rPr sz="1100" i="0" b="0">
                           <a:solidFill>
                             <a:srgbClr val="2B211C"/>
                           </a:solidFill>
@@ -16496,19 +17312,19 @@
                   </a:txBody>
                   <a:tcPr marL="109728" marR="109728" marT="45720" marB="45720" anchor="ctr">
                     <a:solidFill>
-                      <a:srgbClr val="FBF3EE"/>
+                      <a:srgbClr val="FAF4F2"/>
                     </a:solidFill>
                   </a:tcPr>
                 </a:tc>
               </a:tr>
-              <a:tr h="646611">
+              <a:tr h="477447">
                 <a:tc>
                   <a:txBody>
                     <a:bodyPr/>
                     <a:lstStyle/>
                     <a:p>
                       <a:r>
-                        <a:rPr sz="1400" i="0" b="1">
+                        <a:rPr sz="1100" i="0" b="1">
                           <a:solidFill>
                             <a:srgbClr val="2B211C"/>
                           </a:solidFill>
@@ -16530,7 +17346,7 @@
                     <a:lstStyle/>
                     <a:p>
                       <a:r>
-                        <a:rPr sz="1400" i="0" b="0">
+                        <a:rPr sz="1100" i="0" b="0">
                           <a:solidFill>
                             <a:srgbClr val="2B211C"/>
                           </a:solidFill>
@@ -16552,7 +17368,7 @@
                     <a:lstStyle/>
                     <a:p>
                       <a:r>
-                        <a:rPr sz="1400" i="0" b="0">
+                        <a:rPr sz="1100" i="0" b="0">
                           <a:solidFill>
                             <a:srgbClr val="2B211C"/>
                           </a:solidFill>
@@ -16574,7 +17390,7 @@
                     <a:lstStyle/>
                     <a:p>
                       <a:r>
-                        <a:rPr sz="1400" i="0" b="0">
+                        <a:rPr sz="1100" i="0" b="0">
                           <a:solidFill>
                             <a:srgbClr val="2B211C"/>
                           </a:solidFill>
@@ -16596,7 +17412,7 @@
                     <a:lstStyle/>
                     <a:p>
                       <a:r>
-                        <a:rPr sz="1400" i="0" b="0">
+                        <a:rPr sz="1100" i="0" b="0">
                           <a:solidFill>
                             <a:srgbClr val="2B211C"/>
                           </a:solidFill>
@@ -16613,14 +17429,14 @@
                   </a:tcPr>
                 </a:tc>
               </a:tr>
-              <a:tr h="646611">
+              <a:tr h="477447">
                 <a:tc>
                   <a:txBody>
                     <a:bodyPr/>
                     <a:lstStyle/>
                     <a:p>
                       <a:r>
-                        <a:rPr sz="1400" i="0" b="1">
+                        <a:rPr sz="1100" i="0" b="1">
                           <a:solidFill>
                             <a:srgbClr val="2B211C"/>
                           </a:solidFill>
@@ -16632,7 +17448,7 @@
                   </a:txBody>
                   <a:tcPr marL="109728" marR="109728" marT="45720" marB="45720" anchor="ctr">
                     <a:solidFill>
-                      <a:srgbClr val="FBF3EE"/>
+                      <a:srgbClr val="FAF4F2"/>
                     </a:solidFill>
                   </a:tcPr>
                 </a:tc>
@@ -16642,7 +17458,7 @@
                     <a:lstStyle/>
                     <a:p>
                       <a:r>
-                        <a:rPr sz="1400" i="0" b="0">
+                        <a:rPr sz="1100" i="0" b="0">
                           <a:solidFill>
                             <a:srgbClr val="2B211C"/>
                           </a:solidFill>
@@ -16654,7 +17470,7 @@
                   </a:txBody>
                   <a:tcPr marL="109728" marR="109728" marT="45720" marB="45720" anchor="ctr">
                     <a:solidFill>
-                      <a:srgbClr val="FBF3EE"/>
+                      <a:srgbClr val="FAF4F2"/>
                     </a:solidFill>
                   </a:tcPr>
                 </a:tc>
@@ -16664,7 +17480,7 @@
                     <a:lstStyle/>
                     <a:p>
                       <a:r>
-                        <a:rPr sz="1400" i="0" b="0">
+                        <a:rPr sz="1100" i="0" b="0">
                           <a:solidFill>
                             <a:srgbClr val="2B211C"/>
                           </a:solidFill>
@@ -16676,7 +17492,7 @@
                   </a:txBody>
                   <a:tcPr marL="109728" marR="109728" marT="45720" marB="45720" anchor="ctr">
                     <a:solidFill>
-                      <a:srgbClr val="FBF3EE"/>
+                      <a:srgbClr val="FAF4F2"/>
                     </a:solidFill>
                   </a:tcPr>
                 </a:tc>
@@ -16686,7 +17502,7 @@
                     <a:lstStyle/>
                     <a:p>
                       <a:r>
-                        <a:rPr sz="1400" i="0" b="0">
+                        <a:rPr sz="1100" i="0" b="0">
                           <a:solidFill>
                             <a:srgbClr val="2B211C"/>
                           </a:solidFill>
@@ -16698,7 +17514,7 @@
                   </a:txBody>
                   <a:tcPr marL="109728" marR="109728" marT="45720" marB="45720" anchor="ctr">
                     <a:solidFill>
-                      <a:srgbClr val="FBF3EE"/>
+                      <a:srgbClr val="FAF4F2"/>
                     </a:solidFill>
                   </a:tcPr>
                 </a:tc>
@@ -16708,7 +17524,7 @@
                     <a:lstStyle/>
                     <a:p>
                       <a:r>
-                        <a:rPr sz="1400" i="0" b="0">
+                        <a:rPr sz="1100" i="0" b="0">
                           <a:solidFill>
                             <a:srgbClr val="2B211C"/>
                           </a:solidFill>
@@ -16720,19 +17536,19 @@
                   </a:txBody>
                   <a:tcPr marL="109728" marR="109728" marT="45720" marB="45720" anchor="ctr">
                     <a:solidFill>
-                      <a:srgbClr val="FBF3EE"/>
+                      <a:srgbClr val="FAF4F2"/>
                     </a:solidFill>
                   </a:tcPr>
                 </a:tc>
               </a:tr>
-              <a:tr h="646611">
+              <a:tr h="477447">
                 <a:tc>
                   <a:txBody>
                     <a:bodyPr/>
                     <a:lstStyle/>
                     <a:p>
                       <a:r>
-                        <a:rPr sz="1400" i="0" b="1">
+                        <a:rPr sz="1100" i="0" b="1">
                           <a:solidFill>
                             <a:srgbClr val="2B211C"/>
                           </a:solidFill>
@@ -16754,7 +17570,7 @@
                     <a:lstStyle/>
                     <a:p>
                       <a:r>
-                        <a:rPr sz="1400" i="0" b="0">
+                        <a:rPr sz="1100" i="0" b="0">
                           <a:solidFill>
                             <a:srgbClr val="2B211C"/>
                           </a:solidFill>
@@ -16776,7 +17592,7 @@
                     <a:lstStyle/>
                     <a:p>
                       <a:r>
-                        <a:rPr sz="1400" i="0" b="0">
+                        <a:rPr sz="1100" i="0" b="0">
                           <a:solidFill>
                             <a:srgbClr val="2B211C"/>
                           </a:solidFill>
@@ -16798,7 +17614,7 @@
                     <a:lstStyle/>
                     <a:p>
                       <a:r>
-                        <a:rPr sz="1400" i="0" b="0">
+                        <a:rPr sz="1100" i="0" b="0">
                           <a:solidFill>
                             <a:srgbClr val="2B211C"/>
                           </a:solidFill>
@@ -16820,7 +17636,7 @@
                     <a:lstStyle/>
                     <a:p>
                       <a:r>
-                        <a:rPr sz="1400" i="0" b="0">
+                        <a:rPr sz="1100" i="0" b="0">
                           <a:solidFill>
                             <a:srgbClr val="2B211C"/>
                           </a:solidFill>
@@ -16837,14 +17653,14 @@
                   </a:tcPr>
                 </a:tc>
               </a:tr>
-              <a:tr h="646611">
+              <a:tr h="477447">
                 <a:tc>
                   <a:txBody>
                     <a:bodyPr/>
                     <a:lstStyle/>
                     <a:p>
                       <a:r>
-                        <a:rPr sz="1400" i="0" b="1">
+                        <a:rPr sz="1100" i="0" b="1">
                           <a:solidFill>
                             <a:srgbClr val="2B211C"/>
                           </a:solidFill>
@@ -16856,7 +17672,7 @@
                   </a:txBody>
                   <a:tcPr marL="109728" marR="109728" marT="45720" marB="45720" anchor="ctr">
                     <a:solidFill>
-                      <a:srgbClr val="FBF3EE"/>
+                      <a:srgbClr val="FAF4F2"/>
                     </a:solidFill>
                   </a:tcPr>
                 </a:tc>
@@ -16866,7 +17682,7 @@
                     <a:lstStyle/>
                     <a:p>
                       <a:r>
-                        <a:rPr sz="1400" i="0" b="0">
+                        <a:rPr sz="1100" i="0" b="0">
                           <a:solidFill>
                             <a:srgbClr val="2B211C"/>
                           </a:solidFill>
@@ -16878,7 +17694,7 @@
                   </a:txBody>
                   <a:tcPr marL="109728" marR="109728" marT="45720" marB="45720" anchor="ctr">
                     <a:solidFill>
-                      <a:srgbClr val="FBF3EE"/>
+                      <a:srgbClr val="FAF4F2"/>
                     </a:solidFill>
                   </a:tcPr>
                 </a:tc>
@@ -16888,7 +17704,7 @@
                     <a:lstStyle/>
                     <a:p>
                       <a:r>
-                        <a:rPr sz="1400" i="0" b="0">
+                        <a:rPr sz="1100" i="0" b="0">
                           <a:solidFill>
                             <a:srgbClr val="2B211C"/>
                           </a:solidFill>
@@ -16900,7 +17716,7 @@
                   </a:txBody>
                   <a:tcPr marL="109728" marR="109728" marT="45720" marB="45720" anchor="ctr">
                     <a:solidFill>
-                      <a:srgbClr val="FBF3EE"/>
+                      <a:srgbClr val="FAF4F2"/>
                     </a:solidFill>
                   </a:tcPr>
                 </a:tc>
@@ -16910,7 +17726,7 @@
                     <a:lstStyle/>
                     <a:p>
                       <a:r>
-                        <a:rPr sz="1400" i="0" b="0">
+                        <a:rPr sz="1100" i="0" b="0">
                           <a:solidFill>
                             <a:srgbClr val="2B211C"/>
                           </a:solidFill>
@@ -16922,7 +17738,7 @@
                   </a:txBody>
                   <a:tcPr marL="109728" marR="109728" marT="45720" marB="45720" anchor="ctr">
                     <a:solidFill>
-                      <a:srgbClr val="FBF3EE"/>
+                      <a:srgbClr val="FAF4F2"/>
                     </a:solidFill>
                   </a:tcPr>
                 </a:tc>
@@ -16932,7 +17748,7 @@
                     <a:lstStyle/>
                     <a:p>
                       <a:r>
-                        <a:rPr sz="1400" i="0" b="0">
+                        <a:rPr sz="1100" i="0" b="0">
                           <a:solidFill>
                             <a:srgbClr val="2B211C"/>
                           </a:solidFill>
@@ -16944,7 +17760,7 @@
                   </a:txBody>
                   <a:tcPr marL="109728" marR="109728" marT="45720" marB="45720" anchor="ctr">
                     <a:solidFill>
-                      <a:srgbClr val="FBF3EE"/>
+                      <a:srgbClr val="FAF4F2"/>
                     </a:solidFill>
                   </a:tcPr>
                 </a:tc>
@@ -17016,7 +17832,7 @@
           </a:fontRef>
         </p:style>
         <p:txBody>
-          <a:bodyPr rtlCol="0" anchor="ctr" lIns="0" rIns="0"/>
+          <a:bodyPr rtlCol="0" anchor="ctr" lIns="0" rIns="0" tIns="0" bIns="0"/>
           <a:lstStyle/>
           <a:p>
             <a:pPr algn="ctr"/>
@@ -17210,7 +18026,7 @@
             </a:avLst>
           </a:prstGeom>
           <a:solidFill>
-            <a:srgbClr val="FBF3EE"/>
+            <a:srgbClr val="F6E5DE"/>
           </a:solidFill>
           <a:ln>
             <a:noFill/>
@@ -17283,7 +18099,7 @@
           <a:p>
             <a:pPr algn="ctr"/>
             <a:r>
-              <a:rPr sz="1050" i="0" b="1" spc="100">
+              <a:rPr sz="1050" i="0" b="1">
                 <a:solidFill>
                   <a:srgbClr val="FFFFFF"/>
                 </a:solidFill>
@@ -17427,7 +18243,7 @@
           </a:fontRef>
         </p:style>
         <p:txBody>
-          <a:bodyPr rtlCol="0" anchor="ctr" lIns="0" rIns="0"/>
+          <a:bodyPr rtlCol="0" anchor="ctr" lIns="0" rIns="0" tIns="0" bIns="0"/>
           <a:lstStyle/>
           <a:p>
             <a:pPr algn="ctr"/>
@@ -17604,6 +18420,319 @@
           </a:prstGeom>
         </p:spPr>
       </p:pic>
+      <p:sp>
+        <p:nvSpPr>
+          <p:cNvPr id="8" name="TextBox 7"/>
+          <p:cNvSpPr txBox="1"/>
+          <p:nvPr/>
+        </p:nvSpPr>
+        <p:spPr>
+          <a:xfrm>
+            <a:off x="548640" y="1554480"/>
+            <a:ext cx="11094415" cy="4617720"/>
+          </a:xfrm>
+          <a:prstGeom prst="rect">
+            <a:avLst/>
+          </a:prstGeom>
+          <a:noFill/>
+        </p:spPr>
+        <p:txBody>
+          <a:bodyPr wrap="square" anchor="t" lIns="0" rIns="0" tIns="0" bIns="0">
+            <a:spAutoFit/>
+          </a:bodyPr>
+          <a:lstStyle/>
+          <a:p>
+            <a:pPr>
+              <a:spcAft>
+                <a:spcPts val="800"/>
+              </a:spcAft>
+            </a:pPr>
+            <a:r>
+              <a:rPr sz="2100" i="0" b="0">
+                <a:solidFill>
+                  <a:srgbClr val="2B211C"/>
+                </a:solidFill>
+                <a:latin typeface="Calibri"/>
+              </a:rPr>
+              <a:t>A value of 1 for OR or RR means </a:t>
+            </a:r>
+            <a:r>
+              <a:rPr sz="2100" i="0" b="1">
+                <a:solidFill>
+                  <a:srgbClr val="2B211C"/>
+                </a:solidFill>
+                <a:latin typeface="Calibri"/>
+              </a:rPr>
+              <a:t>no difference</a:t>
+            </a:r>
+            <a:r>
+              <a:rPr sz="2100" i="0" b="0">
+                <a:solidFill>
+                  <a:srgbClr val="2B211C"/>
+                </a:solidFill>
+                <a:latin typeface="Calibri"/>
+              </a:rPr>
+              <a:t>. Values below 1 mean lower risk with the exposure.</a:t>
+            </a:r>
+          </a:p>
+          <a:p>
+            <a:pPr>
+              <a:spcAft>
+                <a:spcPts val="800"/>
+              </a:spcAft>
+            </a:pPr>
+            <a:r>
+              <a:rPr sz="2100" i="0" b="0">
+                <a:solidFill>
+                  <a:srgbClr val="2B211C"/>
+                </a:solidFill>
+                <a:latin typeface="Calibri"/>
+              </a:rPr>
+              <a:t>Relative numbers can sound impressive when absolute numbers are small. A drug that cuts risk from 2% to 1% halves the risk (RR 0.5), but the ARR is only 1% and the NNT is 100. Always ask for the absolute numbers before you judge a benefit, and explain them to patients in the same plain way.</a:t>
+            </a:r>
+          </a:p>
+        </p:txBody>
+      </p:sp>
+    </p:spTree>
+  </p:cSld>
+  <p:clrMapOvr>
+    <a:masterClrMapping/>
+  </p:clrMapOvr>
+</p:sld>
+</file>
+
+<file path=ppt/slides/slide7.xml><?xml version="1.0" encoding="utf-8"?>
+<p:sld xmlns:a="http://schemas.openxmlformats.org/drawingml/2006/main" xmlns:p="http://schemas.openxmlformats.org/presentationml/2006/main" xmlns:r="http://schemas.openxmlformats.org/officeDocument/2006/relationships">
+  <p:cSld>
+    <p:bg>
+      <p:bgPr>
+        <a:solidFill>
+          <a:srgbClr val="FFFFFF"/>
+        </a:solidFill>
+        <a:effectLst/>
+      </p:bgPr>
+    </p:bg>
+    <p:spTree>
+      <p:nvGrpSpPr>
+        <p:cNvPr id="1" name=""/>
+        <p:cNvGrpSpPr/>
+        <p:nvPr/>
+      </p:nvGrpSpPr>
+      <p:grpSpPr/>
+      <p:sp>
+        <p:nvSpPr>
+          <p:cNvPr id="2" name="Oval 1"/>
+          <p:cNvSpPr/>
+          <p:nvPr/>
+        </p:nvSpPr>
+        <p:spPr>
+          <a:xfrm>
+            <a:off x="548640" y="475488"/>
+            <a:ext cx="658368" cy="658368"/>
+          </a:xfrm>
+          <a:prstGeom prst="ellipse">
+            <a:avLst/>
+          </a:prstGeom>
+          <a:solidFill>
+            <a:srgbClr val="2F6F7A"/>
+          </a:solidFill>
+          <a:ln>
+            <a:noFill/>
+          </a:ln>
+          <a:effectLst/>
+        </p:spPr>
+        <p:style>
+          <a:lnRef idx="1">
+            <a:schemeClr val="accent1"/>
+          </a:lnRef>
+          <a:fillRef idx="3">
+            <a:schemeClr val="accent1"/>
+          </a:fillRef>
+          <a:effectRef idx="2">
+            <a:schemeClr val="accent1"/>
+          </a:effectRef>
+          <a:fontRef idx="minor">
+            <a:schemeClr val="lt1"/>
+          </a:fontRef>
+        </p:style>
+        <p:txBody>
+          <a:bodyPr rtlCol="0" anchor="ctr" lIns="0" rIns="0" tIns="0" bIns="0"/>
+          <a:lstStyle/>
+          <a:p>
+            <a:pPr algn="ctr"/>
+            <a:r>
+              <a:rPr sz="1800" i="0" b="1">
+                <a:solidFill>
+                  <a:srgbClr val="FFFFFF"/>
+                </a:solidFill>
+                <a:latin typeface="Cambria"/>
+              </a:rPr>
+              <a:t>03</a:t>
+            </a:r>
+          </a:p>
+        </p:txBody>
+      </p:sp>
+      <p:sp>
+        <p:nvSpPr>
+          <p:cNvPr id="3" name="TextBox 2"/>
+          <p:cNvSpPr txBox="1"/>
+          <p:nvPr/>
+        </p:nvSpPr>
+        <p:spPr>
+          <a:xfrm>
+            <a:off x="1417319" y="438912"/>
+            <a:ext cx="10180015" cy="292608"/>
+          </a:xfrm>
+          <a:prstGeom prst="rect">
+            <a:avLst/>
+          </a:prstGeom>
+          <a:noFill/>
+        </p:spPr>
+        <p:txBody>
+          <a:bodyPr wrap="square" anchor="t" lIns="0" rIns="0" tIns="0" bIns="0">
+            <a:spAutoFit/>
+          </a:bodyPr>
+          <a:lstStyle/>
+          <a:p>
+            <a:r>
+              <a:rPr sz="1200" i="0" b="1" spc="150">
+                <a:solidFill>
+                  <a:srgbClr val="2F6F7A"/>
+                </a:solidFill>
+                <a:latin typeface="Calibri"/>
+              </a:rPr>
+              <a:t>SECTION 3</a:t>
+            </a:r>
+          </a:p>
+        </p:txBody>
+      </p:sp>
+      <p:sp>
+        <p:nvSpPr>
+          <p:cNvPr id="4" name="TextBox 3"/>
+          <p:cNvSpPr txBox="1"/>
+          <p:nvPr/>
+        </p:nvSpPr>
+        <p:spPr>
+          <a:xfrm>
+            <a:off x="1417319" y="676656"/>
+            <a:ext cx="10180015" cy="640080"/>
+          </a:xfrm>
+          <a:prstGeom prst="rect">
+            <a:avLst/>
+          </a:prstGeom>
+          <a:noFill/>
+        </p:spPr>
+        <p:txBody>
+          <a:bodyPr wrap="square" anchor="t" lIns="0" rIns="0" tIns="0" bIns="0">
+            <a:spAutoFit/>
+          </a:bodyPr>
+          <a:lstStyle/>
+          <a:p>
+            <a:r>
+              <a:rPr sz="3200" i="0" b="1">
+                <a:solidFill>
+                  <a:srgbClr val="2B211C"/>
+                </a:solidFill>
+                <a:latin typeface="Cambria"/>
+              </a:rPr>
+              <a:t>Measures You Will Meet</a:t>
+            </a:r>
+          </a:p>
+        </p:txBody>
+      </p:sp>
+      <p:sp>
+        <p:nvSpPr>
+          <p:cNvPr id="5" name="TextBox 4"/>
+          <p:cNvSpPr txBox="1"/>
+          <p:nvPr/>
+        </p:nvSpPr>
+        <p:spPr>
+          <a:xfrm>
+            <a:off x="548640" y="6419088"/>
+            <a:ext cx="8229600" cy="274320"/>
+          </a:xfrm>
+          <a:prstGeom prst="rect">
+            <a:avLst/>
+          </a:prstGeom>
+          <a:noFill/>
+        </p:spPr>
+        <p:txBody>
+          <a:bodyPr wrap="square" anchor="t" lIns="0" rIns="0" tIns="0" bIns="0">
+            <a:spAutoFit/>
+          </a:bodyPr>
+          <a:lstStyle/>
+          <a:p>
+            <a:r>
+              <a:rPr sz="1000" i="0" b="0">
+                <a:solidFill>
+                  <a:srgbClr val="6E625B"/>
+                </a:solidFill>
+                <a:latin typeface="Calibri"/>
+              </a:rPr>
+              <a:t>Drug Information  ·  Section 3  ·  Study Designs and Levels of Evidence</a:t>
+            </a:r>
+          </a:p>
+        </p:txBody>
+      </p:sp>
+      <p:sp>
+        <p:nvSpPr>
+          <p:cNvPr id="6" name="TextBox 5"/>
+          <p:cNvSpPr txBox="1"/>
+          <p:nvPr/>
+        </p:nvSpPr>
+        <p:spPr>
+          <a:xfrm>
+            <a:off x="10424160" y="6419088"/>
+            <a:ext cx="731520" cy="274320"/>
+          </a:xfrm>
+          <a:prstGeom prst="rect">
+            <a:avLst/>
+          </a:prstGeom>
+          <a:noFill/>
+        </p:spPr>
+        <p:txBody>
+          <a:bodyPr wrap="square" anchor="t" lIns="0" rIns="0" tIns="0" bIns="0">
+            <a:spAutoFit/>
+          </a:bodyPr>
+          <a:lstStyle/>
+          <a:p>
+            <a:pPr algn="r"/>
+            <a:r>
+              <a:rPr sz="1000" i="0" b="1">
+                <a:solidFill>
+                  <a:srgbClr val="6E625B"/>
+                </a:solidFill>
+                <a:latin typeface="Calibri"/>
+              </a:rPr>
+              <a:t>7</a:t>
+            </a:r>
+          </a:p>
+        </p:txBody>
+      </p:sp>
+      <p:pic>
+        <p:nvPicPr>
+          <p:cNvPr id="7" name="Picture 6" descr="faculty-of-pharmacy.png"/>
+          <p:cNvPicPr>
+            <a:picLocks noChangeAspect="1"/>
+          </p:cNvPicPr>
+          <p:nvPr/>
+        </p:nvPicPr>
+        <p:blipFill>
+          <a:blip r:embed="rId3"/>
+          <a:stretch>
+            <a:fillRect/>
+          </a:stretch>
+        </p:blipFill>
+        <p:spPr>
+          <a:xfrm>
+            <a:off x="11247120" y="6309360"/>
+            <a:ext cx="384048" cy="384048"/>
+          </a:xfrm>
+          <a:prstGeom prst="rect">
+            <a:avLst/>
+          </a:prstGeom>
+        </p:spPr>
+      </p:pic>
       <p:graphicFrame>
         <p:nvGraphicFramePr>
           <p:cNvPr id="8" name="Table 7"/>
@@ -17613,8 +18742,8 @@
           <p:nvPr/>
         </p:nvGraphicFramePr>
         <p:xfrm>
-          <a:off x="548640" y="1600200"/>
-          <a:ext cx="11094413" cy="3886200"/>
+          <a:off x="548640" y="1554480"/>
+          <a:ext cx="11094413" cy="3200400"/>
         </p:xfrm>
         <a:graphic>
           <a:graphicData uri="http://schemas.openxmlformats.org/drawingml/2006/table">
@@ -17627,7 +18756,7 @@
                 <a:gridCol w="2017166"/>
                 <a:gridCol w="5345490"/>
               </a:tblGrid>
-              <a:tr h="777240">
+              <a:tr h="640080">
                 <a:tc>
                   <a:txBody>
                     <a:bodyPr/>
@@ -17695,7 +18824,7 @@
                   </a:tcPr>
                 </a:tc>
               </a:tr>
-              <a:tr h="777240">
+              <a:tr h="640080">
                 <a:tc>
                   <a:txBody>
                     <a:bodyPr/>
@@ -17763,7 +18892,7 @@
                   </a:tcPr>
                 </a:tc>
               </a:tr>
-              <a:tr h="777240">
+              <a:tr h="640080">
                 <a:tc>
                   <a:txBody>
                     <a:bodyPr/>
@@ -17782,7 +18911,7 @@
                   </a:txBody>
                   <a:tcPr marL="109728" marR="109728" marT="45720" marB="45720" anchor="ctr">
                     <a:solidFill>
-                      <a:srgbClr val="FBF3EE"/>
+                      <a:srgbClr val="FAF4F2"/>
                     </a:solidFill>
                   </a:tcPr>
                 </a:tc>
@@ -17804,7 +18933,7 @@
                   </a:txBody>
                   <a:tcPr marL="109728" marR="109728" marT="45720" marB="45720" anchor="ctr">
                     <a:solidFill>
-                      <a:srgbClr val="FBF3EE"/>
+                      <a:srgbClr val="FAF4F2"/>
                     </a:solidFill>
                   </a:tcPr>
                 </a:tc>
@@ -17826,12 +18955,12 @@
                   </a:txBody>
                   <a:tcPr marL="109728" marR="109728" marT="45720" marB="45720" anchor="ctr">
                     <a:solidFill>
-                      <a:srgbClr val="FBF3EE"/>
+                      <a:srgbClr val="FAF4F2"/>
                     </a:solidFill>
                   </a:tcPr>
                 </a:tc>
               </a:tr>
-              <a:tr h="777240">
+              <a:tr h="640080">
                 <a:tc>
                   <a:txBody>
                     <a:bodyPr/>
@@ -17899,7 +19028,7 @@
                   </a:tcPr>
                 </a:tc>
               </a:tr>
-              <a:tr h="777240">
+              <a:tr h="640080">
                 <a:tc>
                   <a:txBody>
                     <a:bodyPr/>
@@ -17918,7 +19047,7 @@
                   </a:txBody>
                   <a:tcPr marL="109728" marR="109728" marT="45720" marB="45720" anchor="ctr">
                     <a:solidFill>
-                      <a:srgbClr val="FBF3EE"/>
+                      <a:srgbClr val="FAF4F2"/>
                     </a:solidFill>
                   </a:tcPr>
                 </a:tc>
@@ -17940,7 +19069,7 @@
                   </a:txBody>
                   <a:tcPr marL="109728" marR="109728" marT="45720" marB="45720" anchor="ctr">
                     <a:solidFill>
-                      <a:srgbClr val="FBF3EE"/>
+                      <a:srgbClr val="FAF4F2"/>
                     </a:solidFill>
                   </a:tcPr>
                 </a:tc>
@@ -17962,7 +19091,7 @@
                   </a:txBody>
                   <a:tcPr marL="109728" marR="109728" marT="45720" marB="45720" anchor="ctr">
                     <a:solidFill>
-                      <a:srgbClr val="FBF3EE"/>
+                      <a:srgbClr val="FAF4F2"/>
                     </a:solidFill>
                   </a:tcPr>
                 </a:tc>
@@ -17971,305 +19100,6 @@
           </a:graphicData>
         </a:graphic>
       </p:graphicFrame>
-    </p:spTree>
-  </p:cSld>
-  <p:clrMapOvr>
-    <a:masterClrMapping/>
-  </p:clrMapOvr>
-</p:sld>
-</file>
-
-<file path=ppt/slides/slide7.xml><?xml version="1.0" encoding="utf-8"?>
-<p:sld xmlns:a="http://schemas.openxmlformats.org/drawingml/2006/main" xmlns:p="http://schemas.openxmlformats.org/presentationml/2006/main" xmlns:r="http://schemas.openxmlformats.org/officeDocument/2006/relationships">
-  <p:cSld>
-    <p:bg>
-      <p:bgPr>
-        <a:solidFill>
-          <a:srgbClr val="FFFFFF"/>
-        </a:solidFill>
-        <a:effectLst/>
-      </p:bgPr>
-    </p:bg>
-    <p:spTree>
-      <p:nvGrpSpPr>
-        <p:cNvPr id="1" name=""/>
-        <p:cNvGrpSpPr/>
-        <p:nvPr/>
-      </p:nvGrpSpPr>
-      <p:grpSpPr/>
-      <p:sp>
-        <p:nvSpPr>
-          <p:cNvPr id="2" name="Oval 1"/>
-          <p:cNvSpPr/>
-          <p:nvPr/>
-        </p:nvSpPr>
-        <p:spPr>
-          <a:xfrm>
-            <a:off x="548640" y="475488"/>
-            <a:ext cx="658368" cy="658368"/>
-          </a:xfrm>
-          <a:prstGeom prst="ellipse">
-            <a:avLst/>
-          </a:prstGeom>
-          <a:solidFill>
-            <a:srgbClr val="2F6F7A"/>
-          </a:solidFill>
-          <a:ln>
-            <a:noFill/>
-          </a:ln>
-          <a:effectLst/>
-        </p:spPr>
-        <p:style>
-          <a:lnRef idx="1">
-            <a:schemeClr val="accent1"/>
-          </a:lnRef>
-          <a:fillRef idx="3">
-            <a:schemeClr val="accent1"/>
-          </a:fillRef>
-          <a:effectRef idx="2">
-            <a:schemeClr val="accent1"/>
-          </a:effectRef>
-          <a:fontRef idx="minor">
-            <a:schemeClr val="lt1"/>
-          </a:fontRef>
-        </p:style>
-        <p:txBody>
-          <a:bodyPr rtlCol="0" anchor="ctr" lIns="0" rIns="0"/>
-          <a:lstStyle/>
-          <a:p>
-            <a:pPr algn="ctr"/>
-            <a:r>
-              <a:rPr sz="1800" i="0" b="1">
-                <a:solidFill>
-                  <a:srgbClr val="FFFFFF"/>
-                </a:solidFill>
-                <a:latin typeface="Cambria"/>
-              </a:rPr>
-              <a:t>03</a:t>
-            </a:r>
-          </a:p>
-        </p:txBody>
-      </p:sp>
-      <p:sp>
-        <p:nvSpPr>
-          <p:cNvPr id="3" name="TextBox 2"/>
-          <p:cNvSpPr txBox="1"/>
-          <p:nvPr/>
-        </p:nvSpPr>
-        <p:spPr>
-          <a:xfrm>
-            <a:off x="1417319" y="438912"/>
-            <a:ext cx="10180015" cy="292608"/>
-          </a:xfrm>
-          <a:prstGeom prst="rect">
-            <a:avLst/>
-          </a:prstGeom>
-          <a:noFill/>
-        </p:spPr>
-        <p:txBody>
-          <a:bodyPr wrap="square" anchor="t" lIns="0" rIns="0" tIns="0" bIns="0">
-            <a:spAutoFit/>
-          </a:bodyPr>
-          <a:lstStyle/>
-          <a:p>
-            <a:r>
-              <a:rPr sz="1200" i="0" b="1" spc="150">
-                <a:solidFill>
-                  <a:srgbClr val="2F6F7A"/>
-                </a:solidFill>
-                <a:latin typeface="Calibri"/>
-              </a:rPr>
-              <a:t>SECTION 3</a:t>
-            </a:r>
-          </a:p>
-        </p:txBody>
-      </p:sp>
-      <p:sp>
-        <p:nvSpPr>
-          <p:cNvPr id="4" name="TextBox 3"/>
-          <p:cNvSpPr txBox="1"/>
-          <p:nvPr/>
-        </p:nvSpPr>
-        <p:spPr>
-          <a:xfrm>
-            <a:off x="1417319" y="676656"/>
-            <a:ext cx="10180015" cy="640080"/>
-          </a:xfrm>
-          <a:prstGeom prst="rect">
-            <a:avLst/>
-          </a:prstGeom>
-          <a:noFill/>
-        </p:spPr>
-        <p:txBody>
-          <a:bodyPr wrap="square" anchor="t" lIns="0" rIns="0" tIns="0" bIns="0">
-            <a:spAutoFit/>
-          </a:bodyPr>
-          <a:lstStyle/>
-          <a:p>
-            <a:r>
-              <a:rPr sz="3200" i="0" b="1">
-                <a:solidFill>
-                  <a:srgbClr val="2B211C"/>
-                </a:solidFill>
-                <a:latin typeface="Cambria"/>
-              </a:rPr>
-              <a:t>The Levels of Evidence</a:t>
-            </a:r>
-          </a:p>
-        </p:txBody>
-      </p:sp>
-      <p:sp>
-        <p:nvSpPr>
-          <p:cNvPr id="5" name="TextBox 4"/>
-          <p:cNvSpPr txBox="1"/>
-          <p:nvPr/>
-        </p:nvSpPr>
-        <p:spPr>
-          <a:xfrm>
-            <a:off x="548640" y="6419088"/>
-            <a:ext cx="8229600" cy="274320"/>
-          </a:xfrm>
-          <a:prstGeom prst="rect">
-            <a:avLst/>
-          </a:prstGeom>
-          <a:noFill/>
-        </p:spPr>
-        <p:txBody>
-          <a:bodyPr wrap="square" anchor="t" lIns="0" rIns="0" tIns="0" bIns="0">
-            <a:spAutoFit/>
-          </a:bodyPr>
-          <a:lstStyle/>
-          <a:p>
-            <a:r>
-              <a:rPr sz="1000" i="0" b="0">
-                <a:solidFill>
-                  <a:srgbClr val="6E625B"/>
-                </a:solidFill>
-                <a:latin typeface="Calibri"/>
-              </a:rPr>
-              <a:t>Drug Information  ·  Section 3  ·  Study Designs and Levels of Evidence</a:t>
-            </a:r>
-          </a:p>
-        </p:txBody>
-      </p:sp>
-      <p:sp>
-        <p:nvSpPr>
-          <p:cNvPr id="6" name="TextBox 5"/>
-          <p:cNvSpPr txBox="1"/>
-          <p:nvPr/>
-        </p:nvSpPr>
-        <p:spPr>
-          <a:xfrm>
-            <a:off x="10424160" y="6419088"/>
-            <a:ext cx="731520" cy="274320"/>
-          </a:xfrm>
-          <a:prstGeom prst="rect">
-            <a:avLst/>
-          </a:prstGeom>
-          <a:noFill/>
-        </p:spPr>
-        <p:txBody>
-          <a:bodyPr wrap="square" anchor="t" lIns="0" rIns="0" tIns="0" bIns="0">
-            <a:spAutoFit/>
-          </a:bodyPr>
-          <a:lstStyle/>
-          <a:p>
-            <a:pPr algn="r"/>
-            <a:r>
-              <a:rPr sz="1000" i="0" b="1">
-                <a:solidFill>
-                  <a:srgbClr val="6E625B"/>
-                </a:solidFill>
-                <a:latin typeface="Calibri"/>
-              </a:rPr>
-              <a:t>7</a:t>
-            </a:r>
-          </a:p>
-        </p:txBody>
-      </p:sp>
-      <p:pic>
-        <p:nvPicPr>
-          <p:cNvPr id="7" name="Picture 6" descr="faculty-of-pharmacy.png"/>
-          <p:cNvPicPr>
-            <a:picLocks noChangeAspect="1"/>
-          </p:cNvPicPr>
-          <p:nvPr/>
-        </p:nvPicPr>
-        <p:blipFill>
-          <a:blip r:embed="rId3"/>
-          <a:stretch>
-            <a:fillRect/>
-          </a:stretch>
-        </p:blipFill>
-        <p:spPr>
-          <a:xfrm>
-            <a:off x="11247120" y="6309360"/>
-            <a:ext cx="384048" cy="384048"/>
-          </a:xfrm>
-          <a:prstGeom prst="rect">
-            <a:avLst/>
-          </a:prstGeom>
-        </p:spPr>
-      </p:pic>
-      <p:pic>
-        <p:nvPicPr>
-          <p:cNvPr id="8" name="Picture 7" descr="evidence-pyramid.png"/>
-          <p:cNvPicPr>
-            <a:picLocks noChangeAspect="1"/>
-          </p:cNvPicPr>
-          <p:nvPr/>
-        </p:nvPicPr>
-        <p:blipFill>
-          <a:blip r:embed="rId4"/>
-          <a:stretch>
-            <a:fillRect/>
-          </a:stretch>
-        </p:blipFill>
-        <p:spPr>
-          <a:xfrm>
-            <a:off x="1414555" y="1554480"/>
-            <a:ext cx="9362585" cy="4160520"/>
-          </a:xfrm>
-          <a:prstGeom prst="rect">
-            <a:avLst/>
-          </a:prstGeom>
-        </p:spPr>
-      </p:pic>
-      <p:sp>
-        <p:nvSpPr>
-          <p:cNvPr id="9" name="TextBox 8"/>
-          <p:cNvSpPr txBox="1"/>
-          <p:nvPr/>
-        </p:nvSpPr>
-        <p:spPr>
-          <a:xfrm>
-            <a:off x="548640" y="5852160"/>
-            <a:ext cx="11094415" cy="365760"/>
-          </a:xfrm>
-          <a:prstGeom prst="rect">
-            <a:avLst/>
-          </a:prstGeom>
-          <a:noFill/>
-        </p:spPr>
-        <p:txBody>
-          <a:bodyPr wrap="square" anchor="t" lIns="0" rIns="0" tIns="0" bIns="0">
-            <a:spAutoFit/>
-          </a:bodyPr>
-          <a:lstStyle/>
-          <a:p>
-            <a:pPr algn="ctr"/>
-            <a:r>
-              <a:rPr sz="1300" i="1" b="0">
-                <a:solidFill>
-                  <a:srgbClr val="6E625B"/>
-                </a:solidFill>
-                <a:latin typeface="Calibri"/>
-              </a:rPr>
-              <a:t>The evidence pyramid: stronger designs control bias better.</a:t>
-            </a:r>
-          </a:p>
-        </p:txBody>
-      </p:sp>
     </p:spTree>
   </p:cSld>
   <p:clrMapOvr>
@@ -18333,7 +19163,7 @@
           </a:fontRef>
         </p:style>
         <p:txBody>
-          <a:bodyPr rtlCol="0" anchor="ctr" lIns="0" rIns="0"/>
+          <a:bodyPr rtlCol="0" anchor="ctr" lIns="0" rIns="0" tIns="0" bIns="0"/>
           <a:lstStyle/>
           <a:p>
             <a:pPr algn="ctr"/>
@@ -18510,59 +19340,30 @@
           </a:prstGeom>
         </p:spPr>
       </p:pic>
-      <p:sp>
-        <p:nvSpPr>
-          <p:cNvPr id="8" name="Oval 7"/>
-          <p:cNvSpPr/>
-          <p:nvPr/>
-        </p:nvSpPr>
-        <p:spPr>
-          <a:xfrm>
-            <a:off x="548640" y="1618488"/>
-            <a:ext cx="402336" cy="402336"/>
-          </a:xfrm>
-          <a:prstGeom prst="ellipse">
-            <a:avLst/>
-          </a:prstGeom>
-          <a:solidFill>
-            <a:srgbClr val="E0EEF0"/>
-          </a:solidFill>
-          <a:ln>
-            <a:noFill/>
-          </a:ln>
-          <a:effectLst/>
-        </p:spPr>
-        <p:style>
-          <a:lnRef idx="1">
-            <a:schemeClr val="accent1"/>
-          </a:lnRef>
-          <a:fillRef idx="3">
-            <a:schemeClr val="accent1"/>
-          </a:fillRef>
-          <a:effectRef idx="2">
-            <a:schemeClr val="accent1"/>
-          </a:effectRef>
-          <a:fontRef idx="minor">
-            <a:schemeClr val="lt1"/>
-          </a:fontRef>
-        </p:style>
-        <p:txBody>
-          <a:bodyPr rtlCol="0" anchor="ctr" lIns="0" rIns="0"/>
-          <a:lstStyle/>
-          <a:p>
-            <a:pPr algn="ctr"/>
-            <a:r>
-              <a:rPr sz="1300" i="0" b="1">
-                <a:solidFill>
-                  <a:srgbClr val="2F6F7A"/>
-                </a:solidFill>
-                <a:latin typeface="Calibri"/>
-              </a:rPr>
-              <a:t>1</a:t>
-            </a:r>
-          </a:p>
-        </p:txBody>
-      </p:sp>
+      <p:pic>
+        <p:nvPicPr>
+          <p:cNvPr id="8" name="Picture 7" descr="evidence-pyramid.png"/>
+          <p:cNvPicPr>
+            <a:picLocks noChangeAspect="1"/>
+          </p:cNvPicPr>
+          <p:nvPr/>
+        </p:nvPicPr>
+        <p:blipFill>
+          <a:blip r:embed="rId4"/>
+          <a:stretch>
+            <a:fillRect/>
+          </a:stretch>
+        </p:blipFill>
+        <p:spPr>
+          <a:xfrm>
+            <a:off x="1363112" y="1554480"/>
+            <a:ext cx="9465470" cy="4206240"/>
+          </a:xfrm>
+          <a:prstGeom prst="rect">
+            <a:avLst/>
+          </a:prstGeom>
+        </p:spPr>
+      </p:pic>
       <p:sp>
         <p:nvSpPr>
           <p:cNvPr id="9" name="TextBox 8"/>
@@ -18571,8 +19372,8 @@
         </p:nvSpPr>
         <p:spPr>
           <a:xfrm>
-            <a:off x="1143000" y="1636776"/>
-            <a:ext cx="10500055" cy="708660"/>
+            <a:off x="548640" y="5852159"/>
+            <a:ext cx="11094415" cy="365760"/>
           </a:xfrm>
           <a:prstGeom prst="rect">
             <a:avLst/>
@@ -18585,449 +19386,15 @@
           </a:bodyPr>
           <a:lstStyle/>
           <a:p>
-            <a:r>
-              <a:rPr sz="2100" i="0" b="0">
-                <a:solidFill>
-                  <a:srgbClr val="2B211C"/>
-                </a:solidFill>
-                <a:latin typeface="Calibri"/>
-              </a:rPr>
-              <a:t>Expert opinion and case reports</a:t>
-            </a:r>
-          </a:p>
-        </p:txBody>
-      </p:sp>
-      <p:sp>
-        <p:nvSpPr>
-          <p:cNvPr id="10" name="Oval 9"/>
-          <p:cNvSpPr/>
-          <p:nvPr/>
-        </p:nvSpPr>
-        <p:spPr>
-          <a:xfrm>
-            <a:off x="548640" y="2372868"/>
-            <a:ext cx="402336" cy="402336"/>
-          </a:xfrm>
-          <a:prstGeom prst="ellipse">
-            <a:avLst/>
-          </a:prstGeom>
-          <a:solidFill>
-            <a:srgbClr val="E0EEF0"/>
-          </a:solidFill>
-          <a:ln>
-            <a:noFill/>
-          </a:ln>
-          <a:effectLst/>
-        </p:spPr>
-        <p:style>
-          <a:lnRef idx="1">
-            <a:schemeClr val="accent1"/>
-          </a:lnRef>
-          <a:fillRef idx="3">
-            <a:schemeClr val="accent1"/>
-          </a:fillRef>
-          <a:effectRef idx="2">
-            <a:schemeClr val="accent1"/>
-          </a:effectRef>
-          <a:fontRef idx="minor">
-            <a:schemeClr val="lt1"/>
-          </a:fontRef>
-        </p:style>
-        <p:txBody>
-          <a:bodyPr rtlCol="0" anchor="ctr" lIns="0" rIns="0"/>
-          <a:lstStyle/>
-          <a:p>
             <a:pPr algn="ctr"/>
             <a:r>
-              <a:rPr sz="1300" i="0" b="1">
-                <a:solidFill>
-                  <a:srgbClr val="2F6F7A"/>
-                </a:solidFill>
-                <a:latin typeface="Calibri"/>
-              </a:rPr>
-              <a:t>2</a:t>
-            </a:r>
-          </a:p>
-        </p:txBody>
-      </p:sp>
-      <p:sp>
-        <p:nvSpPr>
-          <p:cNvPr id="11" name="TextBox 10"/>
-          <p:cNvSpPr txBox="1"/>
-          <p:nvPr/>
-        </p:nvSpPr>
-        <p:spPr>
-          <a:xfrm>
-            <a:off x="1143000" y="2391156"/>
-            <a:ext cx="10500055" cy="708660"/>
-          </a:xfrm>
-          <a:prstGeom prst="rect">
-            <a:avLst/>
-          </a:prstGeom>
-          <a:noFill/>
-        </p:spPr>
-        <p:txBody>
-          <a:bodyPr wrap="square" anchor="t" lIns="0" rIns="0" tIns="0" bIns="0">
-            <a:spAutoFit/>
-          </a:bodyPr>
-          <a:lstStyle/>
-          <a:p>
-            <a:r>
-              <a:rPr sz="2100" i="0" b="0">
-                <a:solidFill>
-                  <a:srgbClr val="2B211C"/>
-                </a:solidFill>
-                <a:latin typeface="Calibri"/>
-              </a:rPr>
-              <a:t>Case series and cross-sectional studies</a:t>
-            </a:r>
-          </a:p>
-        </p:txBody>
-      </p:sp>
-      <p:sp>
-        <p:nvSpPr>
-          <p:cNvPr id="12" name="Oval 11"/>
-          <p:cNvSpPr/>
-          <p:nvPr/>
-        </p:nvSpPr>
-        <p:spPr>
-          <a:xfrm>
-            <a:off x="548640" y="3127248"/>
-            <a:ext cx="402336" cy="402336"/>
-          </a:xfrm>
-          <a:prstGeom prst="ellipse">
-            <a:avLst/>
-          </a:prstGeom>
-          <a:solidFill>
-            <a:srgbClr val="E0EEF0"/>
-          </a:solidFill>
-          <a:ln>
-            <a:noFill/>
-          </a:ln>
-          <a:effectLst/>
-        </p:spPr>
-        <p:style>
-          <a:lnRef idx="1">
-            <a:schemeClr val="accent1"/>
-          </a:lnRef>
-          <a:fillRef idx="3">
-            <a:schemeClr val="accent1"/>
-          </a:fillRef>
-          <a:effectRef idx="2">
-            <a:schemeClr val="accent1"/>
-          </a:effectRef>
-          <a:fontRef idx="minor">
-            <a:schemeClr val="lt1"/>
-          </a:fontRef>
-        </p:style>
-        <p:txBody>
-          <a:bodyPr rtlCol="0" anchor="ctr" lIns="0" rIns="0"/>
-          <a:lstStyle/>
-          <a:p>
-            <a:pPr algn="ctr"/>
-            <a:r>
-              <a:rPr sz="1300" i="0" b="1">
-                <a:solidFill>
-                  <a:srgbClr val="2F6F7A"/>
-                </a:solidFill>
-                <a:latin typeface="Calibri"/>
-              </a:rPr>
-              <a:t>3</a:t>
-            </a:r>
-          </a:p>
-        </p:txBody>
-      </p:sp>
-      <p:sp>
-        <p:nvSpPr>
-          <p:cNvPr id="13" name="TextBox 12"/>
-          <p:cNvSpPr txBox="1"/>
-          <p:nvPr/>
-        </p:nvSpPr>
-        <p:spPr>
-          <a:xfrm>
-            <a:off x="1143000" y="3145536"/>
-            <a:ext cx="10500055" cy="708660"/>
-          </a:xfrm>
-          <a:prstGeom prst="rect">
-            <a:avLst/>
-          </a:prstGeom>
-          <a:noFill/>
-        </p:spPr>
-        <p:txBody>
-          <a:bodyPr wrap="square" anchor="t" lIns="0" rIns="0" tIns="0" bIns="0">
-            <a:spAutoFit/>
-          </a:bodyPr>
-          <a:lstStyle/>
-          <a:p>
-            <a:r>
-              <a:rPr sz="2100" i="0" b="0">
-                <a:solidFill>
-                  <a:srgbClr val="2B211C"/>
-                </a:solidFill>
-                <a:latin typeface="Calibri"/>
-              </a:rPr>
-              <a:t>Case-control studies</a:t>
-            </a:r>
-          </a:p>
-        </p:txBody>
-      </p:sp>
-      <p:sp>
-        <p:nvSpPr>
-          <p:cNvPr id="14" name="Oval 13"/>
-          <p:cNvSpPr/>
-          <p:nvPr/>
-        </p:nvSpPr>
-        <p:spPr>
-          <a:xfrm>
-            <a:off x="548640" y="3881628"/>
-            <a:ext cx="402336" cy="402336"/>
-          </a:xfrm>
-          <a:prstGeom prst="ellipse">
-            <a:avLst/>
-          </a:prstGeom>
-          <a:solidFill>
-            <a:srgbClr val="E0EEF0"/>
-          </a:solidFill>
-          <a:ln>
-            <a:noFill/>
-          </a:ln>
-          <a:effectLst/>
-        </p:spPr>
-        <p:style>
-          <a:lnRef idx="1">
-            <a:schemeClr val="accent1"/>
-          </a:lnRef>
-          <a:fillRef idx="3">
-            <a:schemeClr val="accent1"/>
-          </a:fillRef>
-          <a:effectRef idx="2">
-            <a:schemeClr val="accent1"/>
-          </a:effectRef>
-          <a:fontRef idx="minor">
-            <a:schemeClr val="lt1"/>
-          </a:fontRef>
-        </p:style>
-        <p:txBody>
-          <a:bodyPr rtlCol="0" anchor="ctr" lIns="0" rIns="0"/>
-          <a:lstStyle/>
-          <a:p>
-            <a:pPr algn="ctr"/>
-            <a:r>
-              <a:rPr sz="1300" i="0" b="1">
-                <a:solidFill>
-                  <a:srgbClr val="2F6F7A"/>
-                </a:solidFill>
-                <a:latin typeface="Calibri"/>
-              </a:rPr>
-              <a:t>4</a:t>
-            </a:r>
-          </a:p>
-        </p:txBody>
-      </p:sp>
-      <p:sp>
-        <p:nvSpPr>
-          <p:cNvPr id="15" name="TextBox 14"/>
-          <p:cNvSpPr txBox="1"/>
-          <p:nvPr/>
-        </p:nvSpPr>
-        <p:spPr>
-          <a:xfrm>
-            <a:off x="1143000" y="3899916"/>
-            <a:ext cx="10500055" cy="708660"/>
-          </a:xfrm>
-          <a:prstGeom prst="rect">
-            <a:avLst/>
-          </a:prstGeom>
-          <a:noFill/>
-        </p:spPr>
-        <p:txBody>
-          <a:bodyPr wrap="square" anchor="t" lIns="0" rIns="0" tIns="0" bIns="0">
-            <a:spAutoFit/>
-          </a:bodyPr>
-          <a:lstStyle/>
-          <a:p>
-            <a:r>
-              <a:rPr sz="2100" i="0" b="0">
-                <a:solidFill>
-                  <a:srgbClr val="2B211C"/>
-                </a:solidFill>
-                <a:latin typeface="Calibri"/>
-              </a:rPr>
-              <a:t>Cohort studies</a:t>
-            </a:r>
-          </a:p>
-        </p:txBody>
-      </p:sp>
-      <p:sp>
-        <p:nvSpPr>
-          <p:cNvPr id="16" name="Oval 15"/>
-          <p:cNvSpPr/>
-          <p:nvPr/>
-        </p:nvSpPr>
-        <p:spPr>
-          <a:xfrm>
-            <a:off x="548640" y="4636008"/>
-            <a:ext cx="402336" cy="402336"/>
-          </a:xfrm>
-          <a:prstGeom prst="ellipse">
-            <a:avLst/>
-          </a:prstGeom>
-          <a:solidFill>
-            <a:srgbClr val="E0EEF0"/>
-          </a:solidFill>
-          <a:ln>
-            <a:noFill/>
-          </a:ln>
-          <a:effectLst/>
-        </p:spPr>
-        <p:style>
-          <a:lnRef idx="1">
-            <a:schemeClr val="accent1"/>
-          </a:lnRef>
-          <a:fillRef idx="3">
-            <a:schemeClr val="accent1"/>
-          </a:fillRef>
-          <a:effectRef idx="2">
-            <a:schemeClr val="accent1"/>
-          </a:effectRef>
-          <a:fontRef idx="minor">
-            <a:schemeClr val="lt1"/>
-          </a:fontRef>
-        </p:style>
-        <p:txBody>
-          <a:bodyPr rtlCol="0" anchor="ctr" lIns="0" rIns="0"/>
-          <a:lstStyle/>
-          <a:p>
-            <a:pPr algn="ctr"/>
-            <a:r>
-              <a:rPr sz="1300" i="0" b="1">
-                <a:solidFill>
-                  <a:srgbClr val="2F6F7A"/>
-                </a:solidFill>
-                <a:latin typeface="Calibri"/>
-              </a:rPr>
-              <a:t>5</a:t>
-            </a:r>
-          </a:p>
-        </p:txBody>
-      </p:sp>
-      <p:sp>
-        <p:nvSpPr>
-          <p:cNvPr id="17" name="TextBox 16"/>
-          <p:cNvSpPr txBox="1"/>
-          <p:nvPr/>
-        </p:nvSpPr>
-        <p:spPr>
-          <a:xfrm>
-            <a:off x="1143000" y="4654296"/>
-            <a:ext cx="10500055" cy="708660"/>
-          </a:xfrm>
-          <a:prstGeom prst="rect">
-            <a:avLst/>
-          </a:prstGeom>
-          <a:noFill/>
-        </p:spPr>
-        <p:txBody>
-          <a:bodyPr wrap="square" anchor="t" lIns="0" rIns="0" tIns="0" bIns="0">
-            <a:spAutoFit/>
-          </a:bodyPr>
-          <a:lstStyle/>
-          <a:p>
-            <a:r>
-              <a:rPr sz="2100" i="0" b="0">
-                <a:solidFill>
-                  <a:srgbClr val="2B211C"/>
-                </a:solidFill>
-                <a:latin typeface="Calibri"/>
-              </a:rPr>
-              <a:t>Randomised controlled trials</a:t>
-            </a:r>
-          </a:p>
-        </p:txBody>
-      </p:sp>
-      <p:sp>
-        <p:nvSpPr>
-          <p:cNvPr id="18" name="Oval 17"/>
-          <p:cNvSpPr/>
-          <p:nvPr/>
-        </p:nvSpPr>
-        <p:spPr>
-          <a:xfrm>
-            <a:off x="548640" y="5390388"/>
-            <a:ext cx="402336" cy="402336"/>
-          </a:xfrm>
-          <a:prstGeom prst="ellipse">
-            <a:avLst/>
-          </a:prstGeom>
-          <a:solidFill>
-            <a:srgbClr val="E0EEF0"/>
-          </a:solidFill>
-          <a:ln>
-            <a:noFill/>
-          </a:ln>
-          <a:effectLst/>
-        </p:spPr>
-        <p:style>
-          <a:lnRef idx="1">
-            <a:schemeClr val="accent1"/>
-          </a:lnRef>
-          <a:fillRef idx="3">
-            <a:schemeClr val="accent1"/>
-          </a:fillRef>
-          <a:effectRef idx="2">
-            <a:schemeClr val="accent1"/>
-          </a:effectRef>
-          <a:fontRef idx="minor">
-            <a:schemeClr val="lt1"/>
-          </a:fontRef>
-        </p:style>
-        <p:txBody>
-          <a:bodyPr rtlCol="0" anchor="ctr" lIns="0" rIns="0"/>
-          <a:lstStyle/>
-          <a:p>
-            <a:pPr algn="ctr"/>
-            <a:r>
-              <a:rPr sz="1300" i="0" b="1">
-                <a:solidFill>
-                  <a:srgbClr val="2F6F7A"/>
-                </a:solidFill>
-                <a:latin typeface="Calibri"/>
-              </a:rPr>
-              <a:t>6</a:t>
-            </a:r>
-          </a:p>
-        </p:txBody>
-      </p:sp>
-      <p:sp>
-        <p:nvSpPr>
-          <p:cNvPr id="19" name="TextBox 18"/>
-          <p:cNvSpPr txBox="1"/>
-          <p:nvPr/>
-        </p:nvSpPr>
-        <p:spPr>
-          <a:xfrm>
-            <a:off x="1143000" y="5408676"/>
-            <a:ext cx="10500055" cy="708660"/>
-          </a:xfrm>
-          <a:prstGeom prst="rect">
-            <a:avLst/>
-          </a:prstGeom>
-          <a:noFill/>
-        </p:spPr>
-        <p:txBody>
-          <a:bodyPr wrap="square" anchor="t" lIns="0" rIns="0" tIns="0" bIns="0">
-            <a:spAutoFit/>
-          </a:bodyPr>
-          <a:lstStyle/>
-          <a:p>
-            <a:r>
-              <a:rPr sz="2100" i="0" b="0">
-                <a:solidFill>
-                  <a:srgbClr val="2B211C"/>
-                </a:solidFill>
-                <a:latin typeface="Calibri"/>
-              </a:rPr>
-              <a:t>Systematic reviews and meta-analyses of good RCTs</a:t>
+              <a:rPr sz="1300" i="1" b="0">
+                <a:solidFill>
+                  <a:srgbClr val="6E625B"/>
+                </a:solidFill>
+                <a:latin typeface="Calibri"/>
+              </a:rPr>
+              <a:t>The evidence pyramid: stronger designs control bias better.</a:t>
             </a:r>
           </a:p>
         </p:txBody>
@@ -19095,7 +19462,7 @@
           </a:fontRef>
         </p:style>
         <p:txBody>
-          <a:bodyPr rtlCol="0" anchor="ctr" lIns="0" rIns="0"/>
+          <a:bodyPr rtlCol="0" anchor="ctr" lIns="0" rIns="0" tIns="0" bIns="0"/>
           <a:lstStyle/>
           <a:p>
             <a:pPr algn="ctr"/>
@@ -19174,7 +19541,7 @@
                 </a:solidFill>
                 <a:latin typeface="Cambria"/>
               </a:rPr>
-              <a:t>Bias in one line each</a:t>
+              <a:t>The Levels of Evidence</a:t>
             </a:r>
           </a:p>
         </p:txBody>
@@ -19274,20 +19641,59 @@
       </p:pic>
       <p:sp>
         <p:nvSpPr>
-          <p:cNvPr id="8" name="Oval 7"/>
+          <p:cNvPr id="8" name="TextBox 7"/>
+          <p:cNvSpPr txBox="1"/>
+          <p:nvPr/>
+        </p:nvSpPr>
+        <p:spPr>
+          <a:xfrm>
+            <a:off x="548640" y="1554480"/>
+            <a:ext cx="11094415" cy="498348"/>
+          </a:xfrm>
+          <a:prstGeom prst="rect">
+            <a:avLst/>
+          </a:prstGeom>
+          <a:noFill/>
+        </p:spPr>
+        <p:txBody>
+          <a:bodyPr wrap="square" anchor="t" lIns="0" rIns="0" tIns="0" bIns="0">
+            <a:spAutoFit/>
+          </a:bodyPr>
+          <a:lstStyle/>
+          <a:p>
+            <a:pPr>
+              <a:spcAft>
+                <a:spcPts val="800"/>
+              </a:spcAft>
+            </a:pPr>
+            <a:r>
+              <a:rPr sz="1800" i="0" b="0">
+                <a:solidFill>
+                  <a:srgbClr val="2B211C"/>
+                </a:solidFill>
+                <a:latin typeface="Calibri"/>
+              </a:rPr>
+              <a:t>Stronger designs control bias better. From weakest to strongest:</a:t>
+            </a:r>
+          </a:p>
+        </p:txBody>
+      </p:sp>
+      <p:sp>
+        <p:nvSpPr>
+          <p:cNvPr id="9" name="Oval 8"/>
           <p:cNvSpPr/>
           <p:nvPr/>
         </p:nvSpPr>
         <p:spPr>
           <a:xfrm>
-            <a:off x="548640" y="1618488"/>
+            <a:off x="548640" y="2253996"/>
             <a:ext cx="402336" cy="402336"/>
           </a:xfrm>
           <a:prstGeom prst="ellipse">
             <a:avLst/>
           </a:prstGeom>
           <a:solidFill>
-            <a:srgbClr val="E0EEF0"/>
+            <a:srgbClr val="E6EEEF"/>
           </a:solidFill>
           <a:ln>
             <a:noFill/>
@@ -19309,7 +19715,7 @@
           </a:fontRef>
         </p:style>
         <p:txBody>
-          <a:bodyPr rtlCol="0" anchor="ctr" lIns="0" rIns="0"/>
+          <a:bodyPr rtlCol="0" anchor="ctr" lIns="0" rIns="0" tIns="0" bIns="0"/>
           <a:lstStyle/>
           <a:p>
             <a:pPr algn="ctr"/>
@@ -19327,14 +19733,14 @@
       </p:sp>
       <p:sp>
         <p:nvSpPr>
-          <p:cNvPr id="9" name="TextBox 8"/>
+          <p:cNvPr id="10" name="TextBox 9"/>
           <p:cNvSpPr txBox="1"/>
           <p:nvPr/>
         </p:nvSpPr>
         <p:spPr>
           <a:xfrm>
-            <a:off x="1143000" y="1636776"/>
-            <a:ext cx="10500055" cy="1237488"/>
+            <a:off x="1143000" y="2272284"/>
+            <a:ext cx="10500055" cy="610362"/>
           </a:xfrm>
           <a:prstGeom prst="rect">
             <a:avLst/>
@@ -19348,42 +19754,33 @@
           <a:lstStyle/>
           <a:p>
             <a:r>
-              <a:rPr sz="2400" i="0" b="1">
+              <a:rPr sz="2100" i="0" b="0">
                 <a:solidFill>
                   <a:srgbClr val="2B211C"/>
                 </a:solidFill>
                 <a:latin typeface="Calibri"/>
               </a:rPr>
-              <a:t>Selection bias:</a:t>
-            </a:r>
-            <a:r>
-              <a:rPr sz="2400" i="0" b="0">
-                <a:solidFill>
-                  <a:srgbClr val="2B211C"/>
-                </a:solidFill>
-                <a:latin typeface="Calibri"/>
-              </a:rPr>
-              <a:t> the groups differ before the study starts. Randomisation prevents it.</a:t>
-            </a:r>
-          </a:p>
-        </p:txBody>
-      </p:sp>
-      <p:sp>
-        <p:nvSpPr>
-          <p:cNvPr id="10" name="Oval 9"/>
+              <a:t>Expert opinion and case reports</a:t>
+            </a:r>
+          </a:p>
+        </p:txBody>
+      </p:sp>
+      <p:sp>
+        <p:nvSpPr>
+          <p:cNvPr id="11" name="Oval 10"/>
           <p:cNvSpPr/>
           <p:nvPr/>
         </p:nvSpPr>
         <p:spPr>
           <a:xfrm>
-            <a:off x="548640" y="2901696"/>
+            <a:off x="548640" y="2910077"/>
             <a:ext cx="402336" cy="402336"/>
           </a:xfrm>
           <a:prstGeom prst="ellipse">
             <a:avLst/>
           </a:prstGeom>
           <a:solidFill>
-            <a:srgbClr val="E0EEF0"/>
+            <a:srgbClr val="E6EEEF"/>
           </a:solidFill>
           <a:ln>
             <a:noFill/>
@@ -19405,7 +19802,7 @@
           </a:fontRef>
         </p:style>
         <p:txBody>
-          <a:bodyPr rtlCol="0" anchor="ctr" lIns="0" rIns="0"/>
+          <a:bodyPr rtlCol="0" anchor="ctr" lIns="0" rIns="0" tIns="0" bIns="0"/>
           <a:lstStyle/>
           <a:p>
             <a:pPr algn="ctr"/>
@@ -19423,14 +19820,14 @@
       </p:sp>
       <p:sp>
         <p:nvSpPr>
-          <p:cNvPr id="11" name="TextBox 10"/>
+          <p:cNvPr id="12" name="TextBox 11"/>
           <p:cNvSpPr txBox="1"/>
           <p:nvPr/>
         </p:nvSpPr>
         <p:spPr>
           <a:xfrm>
-            <a:off x="1143000" y="2919984"/>
-            <a:ext cx="10500055" cy="1237488"/>
+            <a:off x="1143000" y="2928365"/>
+            <a:ext cx="10500055" cy="610362"/>
           </a:xfrm>
           <a:prstGeom prst="rect">
             <a:avLst/>
@@ -19444,42 +19841,33 @@
           <a:lstStyle/>
           <a:p>
             <a:r>
-              <a:rPr sz="2400" i="0" b="1">
+              <a:rPr sz="2100" i="0" b="0">
                 <a:solidFill>
                   <a:srgbClr val="2B211C"/>
                 </a:solidFill>
                 <a:latin typeface="Calibri"/>
               </a:rPr>
-              <a:t>Recall bias:</a:t>
-            </a:r>
-            <a:r>
-              <a:rPr sz="2400" i="0" b="0">
-                <a:solidFill>
-                  <a:srgbClr val="2B211C"/>
-                </a:solidFill>
-                <a:latin typeface="Calibri"/>
-              </a:rPr>
-              <a:t> people with a disease remember past exposures better than healthy people. It affects case-control studies.</a:t>
-            </a:r>
-          </a:p>
-        </p:txBody>
-      </p:sp>
-      <p:sp>
-        <p:nvSpPr>
-          <p:cNvPr id="12" name="Oval 11"/>
+              <a:t>Case series and cross-sectional studies</a:t>
+            </a:r>
+          </a:p>
+        </p:txBody>
+      </p:sp>
+      <p:sp>
+        <p:nvSpPr>
+          <p:cNvPr id="13" name="Oval 12"/>
           <p:cNvSpPr/>
           <p:nvPr/>
         </p:nvSpPr>
         <p:spPr>
           <a:xfrm>
-            <a:off x="548640" y="4184903"/>
+            <a:off x="548640" y="3566160"/>
             <a:ext cx="402336" cy="402336"/>
           </a:xfrm>
           <a:prstGeom prst="ellipse">
             <a:avLst/>
           </a:prstGeom>
           <a:solidFill>
-            <a:srgbClr val="E0EEF0"/>
+            <a:srgbClr val="E6EEEF"/>
           </a:solidFill>
           <a:ln>
             <a:noFill/>
@@ -19501,7 +19889,7 @@
           </a:fontRef>
         </p:style>
         <p:txBody>
-          <a:bodyPr rtlCol="0" anchor="ctr" lIns="0" rIns="0"/>
+          <a:bodyPr rtlCol="0" anchor="ctr" lIns="0" rIns="0" tIns="0" bIns="0"/>
           <a:lstStyle/>
           <a:p>
             <a:pPr algn="ctr"/>
@@ -19519,14 +19907,14 @@
       </p:sp>
       <p:sp>
         <p:nvSpPr>
-          <p:cNvPr id="13" name="TextBox 12"/>
+          <p:cNvPr id="14" name="TextBox 13"/>
           <p:cNvSpPr txBox="1"/>
           <p:nvPr/>
         </p:nvSpPr>
         <p:spPr>
           <a:xfrm>
-            <a:off x="1143000" y="4203192"/>
-            <a:ext cx="10500055" cy="1237488"/>
+            <a:off x="1143000" y="3584448"/>
+            <a:ext cx="10500055" cy="610362"/>
           </a:xfrm>
           <a:prstGeom prst="rect">
             <a:avLst/>
@@ -19540,22 +19928,274 @@
           <a:lstStyle/>
           <a:p>
             <a:r>
-              <a:rPr sz="2400" i="0" b="1">
+              <a:rPr sz="2100" i="0" b="0">
                 <a:solidFill>
                   <a:srgbClr val="2B211C"/>
                 </a:solidFill>
                 <a:latin typeface="Calibri"/>
               </a:rPr>
-              <a:t>Confounding:</a:t>
-            </a:r>
-            <a:r>
-              <a:rPr sz="2400" i="0" b="0">
+              <a:t>Case-control studies</a:t>
+            </a:r>
+          </a:p>
+        </p:txBody>
+      </p:sp>
+      <p:sp>
+        <p:nvSpPr>
+          <p:cNvPr id="15" name="Oval 14"/>
+          <p:cNvSpPr/>
+          <p:nvPr/>
+        </p:nvSpPr>
+        <p:spPr>
+          <a:xfrm>
+            <a:off x="548640" y="4222242"/>
+            <a:ext cx="402336" cy="402336"/>
+          </a:xfrm>
+          <a:prstGeom prst="ellipse">
+            <a:avLst/>
+          </a:prstGeom>
+          <a:solidFill>
+            <a:srgbClr val="E6EEEF"/>
+          </a:solidFill>
+          <a:ln>
+            <a:noFill/>
+          </a:ln>
+          <a:effectLst/>
+        </p:spPr>
+        <p:style>
+          <a:lnRef idx="1">
+            <a:schemeClr val="accent1"/>
+          </a:lnRef>
+          <a:fillRef idx="3">
+            <a:schemeClr val="accent1"/>
+          </a:fillRef>
+          <a:effectRef idx="2">
+            <a:schemeClr val="accent1"/>
+          </a:effectRef>
+          <a:fontRef idx="minor">
+            <a:schemeClr val="lt1"/>
+          </a:fontRef>
+        </p:style>
+        <p:txBody>
+          <a:bodyPr rtlCol="0" anchor="ctr" lIns="0" rIns="0" tIns="0" bIns="0"/>
+          <a:lstStyle/>
+          <a:p>
+            <a:pPr algn="ctr"/>
+            <a:r>
+              <a:rPr sz="1300" i="0" b="1">
+                <a:solidFill>
+                  <a:srgbClr val="2F6F7A"/>
+                </a:solidFill>
+                <a:latin typeface="Calibri"/>
+              </a:rPr>
+              <a:t>4</a:t>
+            </a:r>
+          </a:p>
+        </p:txBody>
+      </p:sp>
+      <p:sp>
+        <p:nvSpPr>
+          <p:cNvPr id="16" name="TextBox 15"/>
+          <p:cNvSpPr txBox="1"/>
+          <p:nvPr/>
+        </p:nvSpPr>
+        <p:spPr>
+          <a:xfrm>
+            <a:off x="1143000" y="4240530"/>
+            <a:ext cx="10500055" cy="610362"/>
+          </a:xfrm>
+          <a:prstGeom prst="rect">
+            <a:avLst/>
+          </a:prstGeom>
+          <a:noFill/>
+        </p:spPr>
+        <p:txBody>
+          <a:bodyPr wrap="square" anchor="t" lIns="0" rIns="0" tIns="0" bIns="0">
+            <a:spAutoFit/>
+          </a:bodyPr>
+          <a:lstStyle/>
+          <a:p>
+            <a:r>
+              <a:rPr sz="2100" i="0" b="0">
                 <a:solidFill>
                   <a:srgbClr val="2B211C"/>
                 </a:solidFill>
                 <a:latin typeface="Calibri"/>
               </a:rPr>
-              <a:t> a third factor explains the result. Matching, adjustment and randomisation reduce it.</a:t>
+              <a:t>Cohort studies</a:t>
+            </a:r>
+          </a:p>
+        </p:txBody>
+      </p:sp>
+      <p:sp>
+        <p:nvSpPr>
+          <p:cNvPr id="17" name="Oval 16"/>
+          <p:cNvSpPr/>
+          <p:nvPr/>
+        </p:nvSpPr>
+        <p:spPr>
+          <a:xfrm>
+            <a:off x="548640" y="4878324"/>
+            <a:ext cx="402336" cy="402336"/>
+          </a:xfrm>
+          <a:prstGeom prst="ellipse">
+            <a:avLst/>
+          </a:prstGeom>
+          <a:solidFill>
+            <a:srgbClr val="E6EEEF"/>
+          </a:solidFill>
+          <a:ln>
+            <a:noFill/>
+          </a:ln>
+          <a:effectLst/>
+        </p:spPr>
+        <p:style>
+          <a:lnRef idx="1">
+            <a:schemeClr val="accent1"/>
+          </a:lnRef>
+          <a:fillRef idx="3">
+            <a:schemeClr val="accent1"/>
+          </a:fillRef>
+          <a:effectRef idx="2">
+            <a:schemeClr val="accent1"/>
+          </a:effectRef>
+          <a:fontRef idx="minor">
+            <a:schemeClr val="lt1"/>
+          </a:fontRef>
+        </p:style>
+        <p:txBody>
+          <a:bodyPr rtlCol="0" anchor="ctr" lIns="0" rIns="0" tIns="0" bIns="0"/>
+          <a:lstStyle/>
+          <a:p>
+            <a:pPr algn="ctr"/>
+            <a:r>
+              <a:rPr sz="1300" i="0" b="1">
+                <a:solidFill>
+                  <a:srgbClr val="2F6F7A"/>
+                </a:solidFill>
+                <a:latin typeface="Calibri"/>
+              </a:rPr>
+              <a:t>5</a:t>
+            </a:r>
+          </a:p>
+        </p:txBody>
+      </p:sp>
+      <p:sp>
+        <p:nvSpPr>
+          <p:cNvPr id="18" name="TextBox 17"/>
+          <p:cNvSpPr txBox="1"/>
+          <p:nvPr/>
+        </p:nvSpPr>
+        <p:spPr>
+          <a:xfrm>
+            <a:off x="1143000" y="4896612"/>
+            <a:ext cx="10500055" cy="610362"/>
+          </a:xfrm>
+          <a:prstGeom prst="rect">
+            <a:avLst/>
+          </a:prstGeom>
+          <a:noFill/>
+        </p:spPr>
+        <p:txBody>
+          <a:bodyPr wrap="square" anchor="t" lIns="0" rIns="0" tIns="0" bIns="0">
+            <a:spAutoFit/>
+          </a:bodyPr>
+          <a:lstStyle/>
+          <a:p>
+            <a:r>
+              <a:rPr sz="2100" i="0" b="0">
+                <a:solidFill>
+                  <a:srgbClr val="2B211C"/>
+                </a:solidFill>
+                <a:latin typeface="Calibri"/>
+              </a:rPr>
+              <a:t>Randomised controlled trials</a:t>
+            </a:r>
+          </a:p>
+        </p:txBody>
+      </p:sp>
+      <p:sp>
+        <p:nvSpPr>
+          <p:cNvPr id="19" name="Oval 18"/>
+          <p:cNvSpPr/>
+          <p:nvPr/>
+        </p:nvSpPr>
+        <p:spPr>
+          <a:xfrm>
+            <a:off x="548640" y="5534406"/>
+            <a:ext cx="402336" cy="402336"/>
+          </a:xfrm>
+          <a:prstGeom prst="ellipse">
+            <a:avLst/>
+          </a:prstGeom>
+          <a:solidFill>
+            <a:srgbClr val="E6EEEF"/>
+          </a:solidFill>
+          <a:ln>
+            <a:noFill/>
+          </a:ln>
+          <a:effectLst/>
+        </p:spPr>
+        <p:style>
+          <a:lnRef idx="1">
+            <a:schemeClr val="accent1"/>
+          </a:lnRef>
+          <a:fillRef idx="3">
+            <a:schemeClr val="accent1"/>
+          </a:fillRef>
+          <a:effectRef idx="2">
+            <a:schemeClr val="accent1"/>
+          </a:effectRef>
+          <a:fontRef idx="minor">
+            <a:schemeClr val="lt1"/>
+          </a:fontRef>
+        </p:style>
+        <p:txBody>
+          <a:bodyPr rtlCol="0" anchor="ctr" lIns="0" rIns="0" tIns="0" bIns="0"/>
+          <a:lstStyle/>
+          <a:p>
+            <a:pPr algn="ctr"/>
+            <a:r>
+              <a:rPr sz="1300" i="0" b="1">
+                <a:solidFill>
+                  <a:srgbClr val="2F6F7A"/>
+                </a:solidFill>
+                <a:latin typeface="Calibri"/>
+              </a:rPr>
+              <a:t>6</a:t>
+            </a:r>
+          </a:p>
+        </p:txBody>
+      </p:sp>
+      <p:sp>
+        <p:nvSpPr>
+          <p:cNvPr id="20" name="TextBox 19"/>
+          <p:cNvSpPr txBox="1"/>
+          <p:nvPr/>
+        </p:nvSpPr>
+        <p:spPr>
+          <a:xfrm>
+            <a:off x="1143000" y="5552694"/>
+            <a:ext cx="10500055" cy="610362"/>
+          </a:xfrm>
+          <a:prstGeom prst="rect">
+            <a:avLst/>
+          </a:prstGeom>
+          <a:noFill/>
+        </p:spPr>
+        <p:txBody>
+          <a:bodyPr wrap="square" anchor="t" lIns="0" rIns="0" tIns="0" bIns="0">
+            <a:spAutoFit/>
+          </a:bodyPr>
+          <a:lstStyle/>
+          <a:p>
+            <a:r>
+              <a:rPr sz="2100" i="0" b="0">
+                <a:solidFill>
+                  <a:srgbClr val="2B211C"/>
+                </a:solidFill>
+                <a:latin typeface="Calibri"/>
+              </a:rPr>
+              <a:t>Systematic reviews and meta-analyses of good RCTs</a:t>
             </a:r>
           </a:p>
         </p:txBody>

--- a/projects/drug-information-practical/slides/ch03-study-designs.pptx
+++ b/projects/drug-information-practical/slides/ch03-study-designs.pptx
@@ -30,7 +30,6 @@
     <p:sldId id="278" r:id="rId30"/>
     <p:sldId id="279" r:id="rId31"/>
     <p:sldId id="280" r:id="rId32"/>
-    <p:sldId id="281" r:id="rId33"/>
   </p:sldIdLst>
   <p:sldSz cx="12191695" cy="6858000" type="screen4x3"/>
   <p:notesSz cx="6858000" cy="9144000"/>
@@ -609,7 +608,7 @@
           <a:p/>
           <a:p>
             <a:r>
-              <a:t>About 60 s.  Next: Bias in one line each.</a:t>
+              <a:t>About 90 s.  Next: Choosing the Design.</a:t>
             </a:r>
           </a:p>
         </p:txBody>
@@ -679,13 +678,13 @@
           <a:lstStyle/>
           <a:p>
             <a:r>
-              <a:t>Stronger designs control bias better. From weakest to strongest: Bias is a systematic error that pushes results away from the truth. Three types appear again and again: When you read a study, ask which bias could explain the result. If one could, trust the result less. The pyramid is a guide, not a law. A large, well-run cohort study can be more useful than a small, poor RCT. Quality matters as much as design.</a:t>
+              <a:t>Discuss with the class: what would you ask, check and say?</a:t>
             </a:r>
           </a:p>
           <a:p/>
           <a:p>
             <a:r>
-              <a:t>About 90 s.  Next: Choosing the Design.</a:t>
+              <a:t>About 30 s.  Next: Your turn.</a:t>
             </a:r>
           </a:p>
         </p:txBody>
@@ -755,13 +754,13 @@
           <a:lstStyle/>
           <a:p>
             <a:r>
-              <a:t>Discuss with the class: what would you ask, check and say?</a:t>
+              <a:t>Answer B: It starts from the outcome (liver failure) and looks back at exposure. A goes forward, C randomises, D measures one time point.</a:t>
             </a:r>
           </a:p>
           <a:p/>
           <a:p>
             <a:r>
-              <a:t>About 30 s.  Next: Your turn.</a:t>
+              <a:t>About 30 s.  Next: Check your answer.</a:t>
             </a:r>
           </a:p>
         </p:txBody>
@@ -831,7 +830,7 @@
           <a:lstStyle/>
           <a:p>
             <a:r>
-              <a:t>Answer B: It starts from the outcome (liver failure) and looks back at exposure. A goes forward, C randomises, D measures one time point.</a:t>
+              <a:t>Answer C: The researcher assigns the treatment. A, B and D only observe.</a:t>
             </a:r>
           </a:p>
           <a:p/>
@@ -907,7 +906,7 @@
           <a:lstStyle/>
           <a:p>
             <a:r>
-              <a:t>Answer C: The researcher assigns the treatment. A, B and D only observe.</a:t>
+              <a:t>Answer A: Pooled good RCTs give the strongest evidence. B, C and D are lower.</a:t>
             </a:r>
           </a:p>
           <a:p/>
@@ -983,7 +982,7 @@
           <a:lstStyle/>
           <a:p>
             <a:r>
-              <a:t>Answer A: Pooled good RCTs give the strongest evidence. B, C and D are lower.</a:t>
+              <a:t>Answer D: ARR = 10% − 5% = 5% = 0.05; NNT = 1 ÷ 0.05 = 20. A, B and C are miscalculations.</a:t>
             </a:r>
           </a:p>
           <a:p/>
@@ -1059,7 +1058,7 @@
           <a:lstStyle/>
           <a:p>
             <a:r>
-              <a:t>Answer D: ARR = 10% − 5% = 5% = 0.05; NNT = 1 ÷ 0.05 = 20. A, B and C are miscalculations.</a:t>
+              <a:t>Answer A: Case-control studies suit rare outcomes. B would need huge numbers, C shows prevalence, D cannot compare.</a:t>
             </a:r>
           </a:p>
           <a:p/>
@@ -1135,13 +1134,13 @@
           <a:lstStyle/>
           <a:p>
             <a:r>
-              <a:t>Answer A: Case-control studies suit rare outcomes. B would need huge numbers, C shows prevalence, D cannot compare.</a:t>
+              <a:t>Model answer: (a) An RCT against metformin: randomisation removes confounding. (b) A case-control study (or reports to pharmacovigilance first): pancreatitis is rare. (c) A cohort study or a long outcome trial: it follows patients forward in time.</a:t>
             </a:r>
           </a:p>
           <a:p/>
           <a:p>
             <a:r>
-              <a:t>About 30 s.  Next: Check your answer.</a:t>
+              <a:t>About 30 s.</a:t>
             </a:r>
           </a:p>
         </p:txBody>
@@ -1211,13 +1210,7 @@
           <a:lstStyle/>
           <a:p>
             <a:r>
-              <a:t>Model answer: (a) An RCT against metformin: randomisation removes confounding. (b) A case-control study (or reports to pharmacovigilance first): pancreatitis is rare. (c) A cohort study or a long outcome trial: it follows patients forward in time.</a:t>
-            </a:r>
-          </a:p>
-          <a:p/>
-          <a:p>
-            <a:r>
-              <a:t>About 30 s.</a:t>
+              <a:t>About 30 s.  Next: In This Section.</a:t>
             </a:r>
           </a:p>
         </p:txBody>
@@ -1287,7 +1280,7 @@
           <a:lstStyle/>
           <a:p>
             <a:r>
-              <a:t>About 30 s.  Next: In This Section.</a:t>
+              <a:t>About 30 s.  Next: Your turn.</a:t>
             </a:r>
           </a:p>
         </p:txBody>
@@ -1713,7 +1706,7 @@
           <a:lstStyle/>
           <a:p>
             <a:r>
-              <a:t>About 30 s.  Next: Your turn.</a:t>
+              <a:t>About 30 s.</a:t>
             </a:r>
           </a:p>
         </p:txBody>
@@ -1808,76 +1801,6 @@
 </p:notes>
 </file>
 
-<file path=ppt/notesSlides/notesSlide26.xml><?xml version="1.0" encoding="utf-8"?>
-<p:notes xmlns:a="http://schemas.openxmlformats.org/drawingml/2006/main" xmlns:p="http://schemas.openxmlformats.org/presentationml/2006/main" xmlns:r="http://schemas.openxmlformats.org/officeDocument/2006/relationships">
-  <p:cSld>
-    <p:spTree>
-      <p:nvGrpSpPr>
-        <p:cNvPr id="1" name=""/>
-        <p:cNvGrpSpPr/>
-        <p:nvPr/>
-      </p:nvGrpSpPr>
-      <p:grpSpPr>
-        <a:xfrm>
-          <a:off x="0" y="0"/>
-          <a:ext cx="0" cy="0"/>
-          <a:chOff x="0" y="0"/>
-          <a:chExt cx="0" cy="0"/>
-        </a:xfrm>
-      </p:grpSpPr>
-      <p:sp>
-        <p:nvSpPr>
-          <p:cNvPr id="2" name="Slide Image Placeholder 1"/>
-          <p:cNvSpPr>
-            <a:spLocks noGrp="1"/>
-          </p:cNvSpPr>
-          <p:nvPr>
-            <p:ph type="sldImg" idx="2"/>
-          </p:nvPr>
-        </p:nvSpPr>
-        <p:spPr/>
-      </p:sp>
-      <p:sp>
-        <p:nvSpPr>
-          <p:cNvPr id="3" name="Notes Placeholder 2"/>
-          <p:cNvSpPr>
-            <a:spLocks noGrp="1"/>
-          </p:cNvSpPr>
-          <p:nvPr>
-            <p:ph type="body" idx="3" sz="quarter"/>
-          </p:nvPr>
-        </p:nvSpPr>
-        <p:spPr/>
-        <p:txBody>
-          <a:bodyPr/>
-          <a:lstStyle/>
-          <a:p>
-            <a:r>
-              <a:t>About 30 s.</a:t>
-            </a:r>
-          </a:p>
-        </p:txBody>
-      </p:sp>
-      <p:sp>
-        <p:nvSpPr>
-          <p:cNvPr id="4" name="Slide Number Placeholder 3"/>
-          <p:cNvSpPr>
-            <a:spLocks noGrp="1"/>
-          </p:cNvSpPr>
-          <p:nvPr>
-            <p:ph type="sldNum" idx="5" sz="quarter"/>
-          </p:nvPr>
-        </p:nvSpPr>
-        <p:spPr/>
-      </p:sp>
-    </p:spTree>
-  </p:cSld>
-  <p:clrMapOvr>
-    <a:masterClrMapping/>
-  </p:clrMapOvr>
-</p:notes>
-</file>
-
 <file path=ppt/notesSlides/notesSlide3.xml><?xml version="1.0" encoding="utf-8"?>
 <p:notes xmlns:a="http://schemas.openxmlformats.org/drawingml/2006/main" xmlns:p="http://schemas.openxmlformats.org/presentationml/2006/main" xmlns:r="http://schemas.openxmlformats.org/officeDocument/2006/relationships">
   <p:cSld>
@@ -2081,7 +2004,7 @@
           <a:p/>
           <a:p>
             <a:r>
-              <a:t>About 30 s.  Next: The Main Designs.</a:t>
+              <a:t>About 30 s.  Next: Measures You Will Meet.</a:t>
             </a:r>
           </a:p>
         </p:txBody>
@@ -2151,13 +2074,13 @@
           <a:lstStyle/>
           <a:p>
             <a:r>
-              <a:t>Confounding means a third factor explains the link. For example, coffee drinkers get more lung cancer because more of them smoke. Randomisation (Chapter 4) is the best protection against confounding.</a:t>
+              <a:t>A value of 1 for OR or RR means no difference. Values below 1 mean lower risk with the exposure. Relative numbers can sound impressive when absolute numbers are small. A drug that cuts risk from 2% to 1% halves the risk (RR 0.5), but the ARR is only 1% and the NNT is 100. Always ask for the absolute numbers before you judge a benefit, and explain them to patients in the same plain way.</a:t>
             </a:r>
           </a:p>
           <a:p/>
           <a:p>
             <a:r>
-              <a:t>About 30 s.  Next: Measures You Will Meet.</a:t>
+              <a:t>About 60 s.  Next: Measures You Will Meet.</a:t>
             </a:r>
           </a:p>
         </p:txBody>
@@ -2233,7 +2156,7 @@
           <a:p/>
           <a:p>
             <a:r>
-              <a:t>About 60 s.  Next: Measures You Will Meet.</a:t>
+              <a:t>About 30 s.  Next: The Levels of Evidence.</a:t>
             </a:r>
           </a:p>
         </p:txBody>
@@ -2303,7 +2226,7 @@
           <a:lstStyle/>
           <a:p>
             <a:r>
-              <a:t>A value of 1 for OR or RR means no difference. Values below 1 mean lower risk with the exposure. Relative numbers can sound impressive when absolute numbers are small. A drug that cuts risk from 2% to 1% halves the risk (RR 0.5), but the ARR is only 1% and the NNT is 100. Always ask for the absolute numbers before you judge a benefit, and explain them to patients in the same plain way.</a:t>
+              <a:t>Stronger designs control bias better. From weakest to strongest: Bias is a systematic error that pushes results away from the truth. Three types appear again and again: When you read a study, ask which bias could explain the result. If one could, trust the result less. The pyramid is a guide, not a law. A large, well-run cohort study can be more useful than a small, poor RCT. Quality matters as much as design.</a:t>
             </a:r>
           </a:p>
           <a:p/>
@@ -2385,7 +2308,7 @@
           <a:p/>
           <a:p>
             <a:r>
-              <a:t>About 30 s.  Next: The Levels of Evidence.</a:t>
+              <a:t>About 60 s.  Next: Bias in one line each.</a:t>
             </a:r>
           </a:p>
         </p:txBody>
@@ -5838,7 +5761,7 @@
                 </a:solidFill>
                 <a:latin typeface="Calibri"/>
               </a:rPr>
-              <a:t>10 / 26</a:t>
+              <a:t>10 / 25</a:t>
             </a:r>
           </a:p>
         </p:txBody>
@@ -5867,40 +5790,16 @@
           </a:prstGeom>
         </p:spPr>
       </p:pic>
-      <p:pic>
-        <p:nvPicPr>
-          <p:cNvPr id="8" name="Picture 7" descr="A six-level pyramid. From the base upward: case reports and expert opinion; case series and cross-sectional studies; case-control studies; cohort studies; randomised controlled trials; systematic reviews and meta-analyses at the top."/>
-          <p:cNvPicPr>
-            <a:picLocks noChangeAspect="1"/>
-          </p:cNvPicPr>
-          <p:nvPr/>
-        </p:nvPicPr>
-        <p:blipFill>
-          <a:blip r:embed="rId4"/>
-          <a:stretch>
-            <a:fillRect/>
-          </a:stretch>
-        </p:blipFill>
-        <p:spPr>
-          <a:xfrm>
-            <a:off x="1363112" y="1554480"/>
-            <a:ext cx="9465470" cy="4206240"/>
-          </a:xfrm>
-          <a:prstGeom prst="rect">
-            <a:avLst/>
-          </a:prstGeom>
-        </p:spPr>
-      </p:pic>
-      <p:sp>
-        <p:nvSpPr>
-          <p:cNvPr id="9" name="TextBox 8"/>
+      <p:sp>
+        <p:nvSpPr>
+          <p:cNvPr id="8" name="TextBox 7"/>
           <p:cNvSpPr txBox="1"/>
           <p:nvPr/>
         </p:nvSpPr>
         <p:spPr>
           <a:xfrm>
-            <a:off x="548640" y="5852159"/>
-            <a:ext cx="11094415" cy="365760"/>
+            <a:off x="548640" y="1554480"/>
+            <a:ext cx="11094415" cy="498348"/>
           </a:xfrm>
           <a:prstGeom prst="rect">
             <a:avLst/>
@@ -5913,15 +5812,541 @@
           </a:bodyPr>
           <a:lstStyle/>
           <a:p>
+            <a:pPr>
+              <a:spcAft>
+                <a:spcPts val="800"/>
+              </a:spcAft>
+            </a:pPr>
+            <a:r>
+              <a:rPr sz="1800" i="0" b="0">
+                <a:solidFill>
+                  <a:srgbClr val="2B211C"/>
+                </a:solidFill>
+                <a:latin typeface="Calibri"/>
+              </a:rPr>
+              <a:t>Stronger designs control bias better. From weakest to strongest:</a:t>
+            </a:r>
+          </a:p>
+        </p:txBody>
+      </p:sp>
+      <p:sp>
+        <p:nvSpPr>
+          <p:cNvPr id="9" name="Oval 8"/>
+          <p:cNvSpPr/>
+          <p:nvPr/>
+        </p:nvSpPr>
+        <p:spPr>
+          <a:xfrm>
+            <a:off x="548640" y="2253996"/>
+            <a:ext cx="402336" cy="402336"/>
+          </a:xfrm>
+          <a:prstGeom prst="ellipse">
+            <a:avLst/>
+          </a:prstGeom>
+          <a:solidFill>
+            <a:srgbClr val="E6EEEF"/>
+          </a:solidFill>
+          <a:ln>
+            <a:noFill/>
+          </a:ln>
+          <a:effectLst/>
+        </p:spPr>
+        <p:style>
+          <a:lnRef idx="1">
+            <a:schemeClr val="accent1"/>
+          </a:lnRef>
+          <a:fillRef idx="3">
+            <a:schemeClr val="accent1"/>
+          </a:fillRef>
+          <a:effectRef idx="2">
+            <a:schemeClr val="accent1"/>
+          </a:effectRef>
+          <a:fontRef idx="minor">
+            <a:schemeClr val="lt1"/>
+          </a:fontRef>
+        </p:style>
+        <p:txBody>
+          <a:bodyPr rtlCol="0" anchor="ctr" lIns="0" rIns="0" tIns="0" bIns="0"/>
+          <a:lstStyle/>
+          <a:p>
             <a:pPr algn="ctr"/>
             <a:r>
-              <a:rPr sz="1300" i="1" b="0">
-                <a:solidFill>
-                  <a:srgbClr val="6E625B"/>
-                </a:solidFill>
-                <a:latin typeface="Calibri"/>
-              </a:rPr>
-              <a:t>The evidence pyramid: stronger designs control bias better.</a:t>
+              <a:rPr sz="1300" i="0" b="1">
+                <a:solidFill>
+                  <a:srgbClr val="2F6F7A"/>
+                </a:solidFill>
+                <a:latin typeface="Calibri"/>
+              </a:rPr>
+              <a:t>1</a:t>
+            </a:r>
+          </a:p>
+        </p:txBody>
+      </p:sp>
+      <p:sp>
+        <p:nvSpPr>
+          <p:cNvPr id="10" name="TextBox 9"/>
+          <p:cNvSpPr txBox="1"/>
+          <p:nvPr/>
+        </p:nvSpPr>
+        <p:spPr>
+          <a:xfrm>
+            <a:off x="1143000" y="2272284"/>
+            <a:ext cx="10500055" cy="610362"/>
+          </a:xfrm>
+          <a:prstGeom prst="rect">
+            <a:avLst/>
+          </a:prstGeom>
+          <a:noFill/>
+        </p:spPr>
+        <p:txBody>
+          <a:bodyPr wrap="square" anchor="t" lIns="0" rIns="0" tIns="0" bIns="0">
+            <a:spAutoFit/>
+          </a:bodyPr>
+          <a:lstStyle/>
+          <a:p>
+            <a:r>
+              <a:rPr sz="2100" i="0" b="0">
+                <a:solidFill>
+                  <a:srgbClr val="2B211C"/>
+                </a:solidFill>
+                <a:latin typeface="Calibri"/>
+              </a:rPr>
+              <a:t>Expert opinion and case reports</a:t>
+            </a:r>
+          </a:p>
+        </p:txBody>
+      </p:sp>
+      <p:sp>
+        <p:nvSpPr>
+          <p:cNvPr id="11" name="Oval 10"/>
+          <p:cNvSpPr/>
+          <p:nvPr/>
+        </p:nvSpPr>
+        <p:spPr>
+          <a:xfrm>
+            <a:off x="548640" y="2910077"/>
+            <a:ext cx="402336" cy="402336"/>
+          </a:xfrm>
+          <a:prstGeom prst="ellipse">
+            <a:avLst/>
+          </a:prstGeom>
+          <a:solidFill>
+            <a:srgbClr val="E6EEEF"/>
+          </a:solidFill>
+          <a:ln>
+            <a:noFill/>
+          </a:ln>
+          <a:effectLst/>
+        </p:spPr>
+        <p:style>
+          <a:lnRef idx="1">
+            <a:schemeClr val="accent1"/>
+          </a:lnRef>
+          <a:fillRef idx="3">
+            <a:schemeClr val="accent1"/>
+          </a:fillRef>
+          <a:effectRef idx="2">
+            <a:schemeClr val="accent1"/>
+          </a:effectRef>
+          <a:fontRef idx="minor">
+            <a:schemeClr val="lt1"/>
+          </a:fontRef>
+        </p:style>
+        <p:txBody>
+          <a:bodyPr rtlCol="0" anchor="ctr" lIns="0" rIns="0" tIns="0" bIns="0"/>
+          <a:lstStyle/>
+          <a:p>
+            <a:pPr algn="ctr"/>
+            <a:r>
+              <a:rPr sz="1300" i="0" b="1">
+                <a:solidFill>
+                  <a:srgbClr val="2F6F7A"/>
+                </a:solidFill>
+                <a:latin typeface="Calibri"/>
+              </a:rPr>
+              <a:t>2</a:t>
+            </a:r>
+          </a:p>
+        </p:txBody>
+      </p:sp>
+      <p:sp>
+        <p:nvSpPr>
+          <p:cNvPr id="12" name="TextBox 11"/>
+          <p:cNvSpPr txBox="1"/>
+          <p:nvPr/>
+        </p:nvSpPr>
+        <p:spPr>
+          <a:xfrm>
+            <a:off x="1143000" y="2928365"/>
+            <a:ext cx="10500055" cy="610362"/>
+          </a:xfrm>
+          <a:prstGeom prst="rect">
+            <a:avLst/>
+          </a:prstGeom>
+          <a:noFill/>
+        </p:spPr>
+        <p:txBody>
+          <a:bodyPr wrap="square" anchor="t" lIns="0" rIns="0" tIns="0" bIns="0">
+            <a:spAutoFit/>
+          </a:bodyPr>
+          <a:lstStyle/>
+          <a:p>
+            <a:r>
+              <a:rPr sz="2100" i="0" b="0">
+                <a:solidFill>
+                  <a:srgbClr val="2B211C"/>
+                </a:solidFill>
+                <a:latin typeface="Calibri"/>
+              </a:rPr>
+              <a:t>Case series and cross-sectional studies</a:t>
+            </a:r>
+          </a:p>
+        </p:txBody>
+      </p:sp>
+      <p:sp>
+        <p:nvSpPr>
+          <p:cNvPr id="13" name="Oval 12"/>
+          <p:cNvSpPr/>
+          <p:nvPr/>
+        </p:nvSpPr>
+        <p:spPr>
+          <a:xfrm>
+            <a:off x="548640" y="3566160"/>
+            <a:ext cx="402336" cy="402336"/>
+          </a:xfrm>
+          <a:prstGeom prst="ellipse">
+            <a:avLst/>
+          </a:prstGeom>
+          <a:solidFill>
+            <a:srgbClr val="E6EEEF"/>
+          </a:solidFill>
+          <a:ln>
+            <a:noFill/>
+          </a:ln>
+          <a:effectLst/>
+        </p:spPr>
+        <p:style>
+          <a:lnRef idx="1">
+            <a:schemeClr val="accent1"/>
+          </a:lnRef>
+          <a:fillRef idx="3">
+            <a:schemeClr val="accent1"/>
+          </a:fillRef>
+          <a:effectRef idx="2">
+            <a:schemeClr val="accent1"/>
+          </a:effectRef>
+          <a:fontRef idx="minor">
+            <a:schemeClr val="lt1"/>
+          </a:fontRef>
+        </p:style>
+        <p:txBody>
+          <a:bodyPr rtlCol="0" anchor="ctr" lIns="0" rIns="0" tIns="0" bIns="0"/>
+          <a:lstStyle/>
+          <a:p>
+            <a:pPr algn="ctr"/>
+            <a:r>
+              <a:rPr sz="1300" i="0" b="1">
+                <a:solidFill>
+                  <a:srgbClr val="2F6F7A"/>
+                </a:solidFill>
+                <a:latin typeface="Calibri"/>
+              </a:rPr>
+              <a:t>3</a:t>
+            </a:r>
+          </a:p>
+        </p:txBody>
+      </p:sp>
+      <p:sp>
+        <p:nvSpPr>
+          <p:cNvPr id="14" name="TextBox 13"/>
+          <p:cNvSpPr txBox="1"/>
+          <p:nvPr/>
+        </p:nvSpPr>
+        <p:spPr>
+          <a:xfrm>
+            <a:off x="1143000" y="3584448"/>
+            <a:ext cx="10500055" cy="610362"/>
+          </a:xfrm>
+          <a:prstGeom prst="rect">
+            <a:avLst/>
+          </a:prstGeom>
+          <a:noFill/>
+        </p:spPr>
+        <p:txBody>
+          <a:bodyPr wrap="square" anchor="t" lIns="0" rIns="0" tIns="0" bIns="0">
+            <a:spAutoFit/>
+          </a:bodyPr>
+          <a:lstStyle/>
+          <a:p>
+            <a:r>
+              <a:rPr sz="2100" i="0" b="0">
+                <a:solidFill>
+                  <a:srgbClr val="2B211C"/>
+                </a:solidFill>
+                <a:latin typeface="Calibri"/>
+              </a:rPr>
+              <a:t>Case-control studies</a:t>
+            </a:r>
+          </a:p>
+        </p:txBody>
+      </p:sp>
+      <p:sp>
+        <p:nvSpPr>
+          <p:cNvPr id="15" name="Oval 14"/>
+          <p:cNvSpPr/>
+          <p:nvPr/>
+        </p:nvSpPr>
+        <p:spPr>
+          <a:xfrm>
+            <a:off x="548640" y="4222242"/>
+            <a:ext cx="402336" cy="402336"/>
+          </a:xfrm>
+          <a:prstGeom prst="ellipse">
+            <a:avLst/>
+          </a:prstGeom>
+          <a:solidFill>
+            <a:srgbClr val="E6EEEF"/>
+          </a:solidFill>
+          <a:ln>
+            <a:noFill/>
+          </a:ln>
+          <a:effectLst/>
+        </p:spPr>
+        <p:style>
+          <a:lnRef idx="1">
+            <a:schemeClr val="accent1"/>
+          </a:lnRef>
+          <a:fillRef idx="3">
+            <a:schemeClr val="accent1"/>
+          </a:fillRef>
+          <a:effectRef idx="2">
+            <a:schemeClr val="accent1"/>
+          </a:effectRef>
+          <a:fontRef idx="minor">
+            <a:schemeClr val="lt1"/>
+          </a:fontRef>
+        </p:style>
+        <p:txBody>
+          <a:bodyPr rtlCol="0" anchor="ctr" lIns="0" rIns="0" tIns="0" bIns="0"/>
+          <a:lstStyle/>
+          <a:p>
+            <a:pPr algn="ctr"/>
+            <a:r>
+              <a:rPr sz="1300" i="0" b="1">
+                <a:solidFill>
+                  <a:srgbClr val="2F6F7A"/>
+                </a:solidFill>
+                <a:latin typeface="Calibri"/>
+              </a:rPr>
+              <a:t>4</a:t>
+            </a:r>
+          </a:p>
+        </p:txBody>
+      </p:sp>
+      <p:sp>
+        <p:nvSpPr>
+          <p:cNvPr id="16" name="TextBox 15"/>
+          <p:cNvSpPr txBox="1"/>
+          <p:nvPr/>
+        </p:nvSpPr>
+        <p:spPr>
+          <a:xfrm>
+            <a:off x="1143000" y="4240530"/>
+            <a:ext cx="10500055" cy="610362"/>
+          </a:xfrm>
+          <a:prstGeom prst="rect">
+            <a:avLst/>
+          </a:prstGeom>
+          <a:noFill/>
+        </p:spPr>
+        <p:txBody>
+          <a:bodyPr wrap="square" anchor="t" lIns="0" rIns="0" tIns="0" bIns="0">
+            <a:spAutoFit/>
+          </a:bodyPr>
+          <a:lstStyle/>
+          <a:p>
+            <a:r>
+              <a:rPr sz="2100" i="0" b="0">
+                <a:solidFill>
+                  <a:srgbClr val="2B211C"/>
+                </a:solidFill>
+                <a:latin typeface="Calibri"/>
+              </a:rPr>
+              <a:t>Cohort studies</a:t>
+            </a:r>
+          </a:p>
+        </p:txBody>
+      </p:sp>
+      <p:sp>
+        <p:nvSpPr>
+          <p:cNvPr id="17" name="Oval 16"/>
+          <p:cNvSpPr/>
+          <p:nvPr/>
+        </p:nvSpPr>
+        <p:spPr>
+          <a:xfrm>
+            <a:off x="548640" y="4878324"/>
+            <a:ext cx="402336" cy="402336"/>
+          </a:xfrm>
+          <a:prstGeom prst="ellipse">
+            <a:avLst/>
+          </a:prstGeom>
+          <a:solidFill>
+            <a:srgbClr val="E6EEEF"/>
+          </a:solidFill>
+          <a:ln>
+            <a:noFill/>
+          </a:ln>
+          <a:effectLst/>
+        </p:spPr>
+        <p:style>
+          <a:lnRef idx="1">
+            <a:schemeClr val="accent1"/>
+          </a:lnRef>
+          <a:fillRef idx="3">
+            <a:schemeClr val="accent1"/>
+          </a:fillRef>
+          <a:effectRef idx="2">
+            <a:schemeClr val="accent1"/>
+          </a:effectRef>
+          <a:fontRef idx="minor">
+            <a:schemeClr val="lt1"/>
+          </a:fontRef>
+        </p:style>
+        <p:txBody>
+          <a:bodyPr rtlCol="0" anchor="ctr" lIns="0" rIns="0" tIns="0" bIns="0"/>
+          <a:lstStyle/>
+          <a:p>
+            <a:pPr algn="ctr"/>
+            <a:r>
+              <a:rPr sz="1300" i="0" b="1">
+                <a:solidFill>
+                  <a:srgbClr val="2F6F7A"/>
+                </a:solidFill>
+                <a:latin typeface="Calibri"/>
+              </a:rPr>
+              <a:t>5</a:t>
+            </a:r>
+          </a:p>
+        </p:txBody>
+      </p:sp>
+      <p:sp>
+        <p:nvSpPr>
+          <p:cNvPr id="18" name="TextBox 17"/>
+          <p:cNvSpPr txBox="1"/>
+          <p:nvPr/>
+        </p:nvSpPr>
+        <p:spPr>
+          <a:xfrm>
+            <a:off x="1143000" y="4896612"/>
+            <a:ext cx="10500055" cy="610362"/>
+          </a:xfrm>
+          <a:prstGeom prst="rect">
+            <a:avLst/>
+          </a:prstGeom>
+          <a:noFill/>
+        </p:spPr>
+        <p:txBody>
+          <a:bodyPr wrap="square" anchor="t" lIns="0" rIns="0" tIns="0" bIns="0">
+            <a:spAutoFit/>
+          </a:bodyPr>
+          <a:lstStyle/>
+          <a:p>
+            <a:r>
+              <a:rPr sz="2100" i="0" b="0">
+                <a:solidFill>
+                  <a:srgbClr val="2B211C"/>
+                </a:solidFill>
+                <a:latin typeface="Calibri"/>
+              </a:rPr>
+              <a:t>Randomised controlled trials</a:t>
+            </a:r>
+          </a:p>
+        </p:txBody>
+      </p:sp>
+      <p:sp>
+        <p:nvSpPr>
+          <p:cNvPr id="19" name="Oval 18"/>
+          <p:cNvSpPr/>
+          <p:nvPr/>
+        </p:nvSpPr>
+        <p:spPr>
+          <a:xfrm>
+            <a:off x="548640" y="5534406"/>
+            <a:ext cx="402336" cy="402336"/>
+          </a:xfrm>
+          <a:prstGeom prst="ellipse">
+            <a:avLst/>
+          </a:prstGeom>
+          <a:solidFill>
+            <a:srgbClr val="E6EEEF"/>
+          </a:solidFill>
+          <a:ln>
+            <a:noFill/>
+          </a:ln>
+          <a:effectLst/>
+        </p:spPr>
+        <p:style>
+          <a:lnRef idx="1">
+            <a:schemeClr val="accent1"/>
+          </a:lnRef>
+          <a:fillRef idx="3">
+            <a:schemeClr val="accent1"/>
+          </a:fillRef>
+          <a:effectRef idx="2">
+            <a:schemeClr val="accent1"/>
+          </a:effectRef>
+          <a:fontRef idx="minor">
+            <a:schemeClr val="lt1"/>
+          </a:fontRef>
+        </p:style>
+        <p:txBody>
+          <a:bodyPr rtlCol="0" anchor="ctr" lIns="0" rIns="0" tIns="0" bIns="0"/>
+          <a:lstStyle/>
+          <a:p>
+            <a:pPr algn="ctr"/>
+            <a:r>
+              <a:rPr sz="1300" i="0" b="1">
+                <a:solidFill>
+                  <a:srgbClr val="2F6F7A"/>
+                </a:solidFill>
+                <a:latin typeface="Calibri"/>
+              </a:rPr>
+              <a:t>6</a:t>
+            </a:r>
+          </a:p>
+        </p:txBody>
+      </p:sp>
+      <p:sp>
+        <p:nvSpPr>
+          <p:cNvPr id="20" name="TextBox 19"/>
+          <p:cNvSpPr txBox="1"/>
+          <p:nvPr/>
+        </p:nvSpPr>
+        <p:spPr>
+          <a:xfrm>
+            <a:off x="1143000" y="5552694"/>
+            <a:ext cx="10500055" cy="610362"/>
+          </a:xfrm>
+          <a:prstGeom prst="rect">
+            <a:avLst/>
+          </a:prstGeom>
+          <a:noFill/>
+        </p:spPr>
+        <p:txBody>
+          <a:bodyPr wrap="square" anchor="t" lIns="0" rIns="0" tIns="0" bIns="0">
+            <a:spAutoFit/>
+          </a:bodyPr>
+          <a:lstStyle/>
+          <a:p>
+            <a:r>
+              <a:rPr sz="2100" i="0" b="0">
+                <a:solidFill>
+                  <a:srgbClr val="2B211C"/>
+                </a:solidFill>
+                <a:latin typeface="Calibri"/>
+              </a:rPr>
+              <a:t>Systematic reviews and meta-analyses of good RCTs</a:t>
             </a:r>
           </a:p>
         </p:txBody>
@@ -6068,7 +6493,7 @@
                 </a:solidFill>
                 <a:latin typeface="Cambria"/>
               </a:rPr>
-              <a:t>The Levels of Evidence</a:t>
+              <a:t>Bias in one line each</a:t>
             </a:r>
           </a:p>
         </p:txBody>
@@ -6137,7 +6562,7 @@
                 </a:solidFill>
                 <a:latin typeface="Calibri"/>
               </a:rPr>
-              <a:t>11 / 26</a:t>
+              <a:t>11 / 25</a:t>
             </a:r>
           </a:p>
         </p:txBody>
@@ -6175,7 +6600,7 @@
         <p:spPr>
           <a:xfrm>
             <a:off x="548640" y="1554480"/>
-            <a:ext cx="11094415" cy="498348"/>
+            <a:ext cx="4480560" cy="4617720"/>
           </a:xfrm>
           <a:prstGeom prst="rect">
             <a:avLst/>
@@ -6194,13 +6619,54 @@
               </a:spcAft>
             </a:pPr>
             <a:r>
-              <a:rPr sz="1800" i="0" b="0">
+              <a:rPr sz="1700" i="0" b="1">
                 <a:solidFill>
                   <a:srgbClr val="2B211C"/>
                 </a:solidFill>
                 <a:latin typeface="Calibri"/>
               </a:rPr>
-              <a:t>Stronger designs control bias better. From weakest to strongest:</a:t>
+              <a:t>Bias</a:t>
+            </a:r>
+            <a:r>
+              <a:rPr sz="1700" i="0" b="0">
+                <a:solidFill>
+                  <a:srgbClr val="2B211C"/>
+                </a:solidFill>
+                <a:latin typeface="Calibri"/>
+              </a:rPr>
+              <a:t> is a systematic error that pushes results away from the truth. Three types appear again and again:</a:t>
+            </a:r>
+          </a:p>
+          <a:p>
+            <a:pPr>
+              <a:spcAft>
+                <a:spcPts val="800"/>
+              </a:spcAft>
+            </a:pPr>
+            <a:r>
+              <a:rPr sz="1700" i="0" b="0">
+                <a:solidFill>
+                  <a:srgbClr val="2B211C"/>
+                </a:solidFill>
+                <a:latin typeface="Calibri"/>
+              </a:rPr>
+              <a:t>When you read a study, ask which bias could explain the result. If one could, trust the result less.</a:t>
+            </a:r>
+          </a:p>
+          <a:p>
+            <a:pPr>
+              <a:spcAft>
+                <a:spcPts val="800"/>
+              </a:spcAft>
+            </a:pPr>
+            <a:r>
+              <a:rPr sz="1700" i="0" b="0">
+                <a:solidFill>
+                  <a:srgbClr val="2B211C"/>
+                </a:solidFill>
+                <a:latin typeface="Calibri"/>
+              </a:rPr>
+              <a:t>The pyramid is a guide, not a law. A large, well-run cohort study can be more useful than a small, poor RCT. Quality matters as much as design.</a:t>
             </a:r>
           </a:p>
         </p:txBody>
@@ -6213,7 +6679,7 @@
         </p:nvSpPr>
         <p:spPr>
           <a:xfrm>
-            <a:off x="548640" y="2253996"/>
+            <a:off x="5394959" y="1572768"/>
             <a:ext cx="402336" cy="402336"/>
           </a:xfrm>
           <a:prstGeom prst="ellipse">
@@ -6266,8 +6732,8 @@
         </p:nvSpPr>
         <p:spPr>
           <a:xfrm>
-            <a:off x="1143000" y="2272284"/>
-            <a:ext cx="10500055" cy="610362"/>
+            <a:off x="5989320" y="1591056"/>
+            <a:ext cx="5653735" cy="1475612"/>
           </a:xfrm>
           <a:prstGeom prst="rect">
             <a:avLst/>
@@ -6281,13 +6747,22 @@
           <a:lstStyle/>
           <a:p>
             <a:r>
+              <a:rPr sz="2100" i="0" b="1">
+                <a:solidFill>
+                  <a:srgbClr val="2B211C"/>
+                </a:solidFill>
+                <a:latin typeface="Calibri"/>
+              </a:rPr>
+              <a:t>Selection bias:</a:t>
+            </a:r>
+            <a:r>
               <a:rPr sz="2100" i="0" b="0">
                 <a:solidFill>
                   <a:srgbClr val="2B211C"/>
                 </a:solidFill>
                 <a:latin typeface="Calibri"/>
               </a:rPr>
-              <a:t>Expert opinion and case reports</a:t>
+              <a:t> the groups differ before the study starts. Randomisation prevents it.</a:t>
             </a:r>
           </a:p>
         </p:txBody>
@@ -6300,7 +6775,7 @@
         </p:nvSpPr>
         <p:spPr>
           <a:xfrm>
-            <a:off x="548640" y="2910077"/>
+            <a:off x="5394959" y="3094100"/>
             <a:ext cx="402336" cy="402336"/>
           </a:xfrm>
           <a:prstGeom prst="ellipse">
@@ -6353,8 +6828,8 @@
         </p:nvSpPr>
         <p:spPr>
           <a:xfrm>
-            <a:off x="1143000" y="2928365"/>
-            <a:ext cx="10500055" cy="610362"/>
+            <a:off x="5989320" y="3112388"/>
+            <a:ext cx="5653735" cy="1475612"/>
           </a:xfrm>
           <a:prstGeom prst="rect">
             <a:avLst/>
@@ -6368,13 +6843,22 @@
           <a:lstStyle/>
           <a:p>
             <a:r>
+              <a:rPr sz="2100" i="0" b="1">
+                <a:solidFill>
+                  <a:srgbClr val="2B211C"/>
+                </a:solidFill>
+                <a:latin typeface="Calibri"/>
+              </a:rPr>
+              <a:t>Recall bias:</a:t>
+            </a:r>
+            <a:r>
               <a:rPr sz="2100" i="0" b="0">
                 <a:solidFill>
                   <a:srgbClr val="2B211C"/>
                 </a:solidFill>
                 <a:latin typeface="Calibri"/>
               </a:rPr>
-              <a:t>Case series and cross-sectional studies</a:t>
+              <a:t> people with a disease remember past exposures better than healthy people. It affects case-control studies.</a:t>
             </a:r>
           </a:p>
         </p:txBody>
@@ -6387,7 +6871,7 @@
         </p:nvSpPr>
         <p:spPr>
           <a:xfrm>
-            <a:off x="548640" y="3566160"/>
+            <a:off x="5394959" y="4615433"/>
             <a:ext cx="402336" cy="402336"/>
           </a:xfrm>
           <a:prstGeom prst="ellipse">
@@ -6440,8 +6924,8 @@
         </p:nvSpPr>
         <p:spPr>
           <a:xfrm>
-            <a:off x="1143000" y="3584448"/>
-            <a:ext cx="10500055" cy="610362"/>
+            <a:off x="5989320" y="4633722"/>
+            <a:ext cx="5653735" cy="1475612"/>
           </a:xfrm>
           <a:prstGeom prst="rect">
             <a:avLst/>
@@ -6455,274 +6939,22 @@
           <a:lstStyle/>
           <a:p>
             <a:r>
+              <a:rPr sz="2100" i="0" b="1">
+                <a:solidFill>
+                  <a:srgbClr val="2B211C"/>
+                </a:solidFill>
+                <a:latin typeface="Calibri"/>
+              </a:rPr>
+              <a:t>Confounding:</a:t>
+            </a:r>
+            <a:r>
               <a:rPr sz="2100" i="0" b="0">
                 <a:solidFill>
                   <a:srgbClr val="2B211C"/>
                 </a:solidFill>
                 <a:latin typeface="Calibri"/>
               </a:rPr>
-              <a:t>Case-control studies</a:t>
-            </a:r>
-          </a:p>
-        </p:txBody>
-      </p:sp>
-      <p:sp>
-        <p:nvSpPr>
-          <p:cNvPr id="15" name="Oval 14"/>
-          <p:cNvSpPr/>
-          <p:nvPr/>
-        </p:nvSpPr>
-        <p:spPr>
-          <a:xfrm>
-            <a:off x="548640" y="4222242"/>
-            <a:ext cx="402336" cy="402336"/>
-          </a:xfrm>
-          <a:prstGeom prst="ellipse">
-            <a:avLst/>
-          </a:prstGeom>
-          <a:solidFill>
-            <a:srgbClr val="E6EEEF"/>
-          </a:solidFill>
-          <a:ln>
-            <a:noFill/>
-          </a:ln>
-          <a:effectLst/>
-        </p:spPr>
-        <p:style>
-          <a:lnRef idx="1">
-            <a:schemeClr val="accent1"/>
-          </a:lnRef>
-          <a:fillRef idx="3">
-            <a:schemeClr val="accent1"/>
-          </a:fillRef>
-          <a:effectRef idx="2">
-            <a:schemeClr val="accent1"/>
-          </a:effectRef>
-          <a:fontRef idx="minor">
-            <a:schemeClr val="lt1"/>
-          </a:fontRef>
-        </p:style>
-        <p:txBody>
-          <a:bodyPr rtlCol="0" anchor="ctr" lIns="0" rIns="0" tIns="0" bIns="0"/>
-          <a:lstStyle/>
-          <a:p>
-            <a:pPr algn="ctr"/>
-            <a:r>
-              <a:rPr sz="1300" i="0" b="1">
-                <a:solidFill>
-                  <a:srgbClr val="2F6F7A"/>
-                </a:solidFill>
-                <a:latin typeface="Calibri"/>
-              </a:rPr>
-              <a:t>4</a:t>
-            </a:r>
-          </a:p>
-        </p:txBody>
-      </p:sp>
-      <p:sp>
-        <p:nvSpPr>
-          <p:cNvPr id="16" name="TextBox 15"/>
-          <p:cNvSpPr txBox="1"/>
-          <p:nvPr/>
-        </p:nvSpPr>
-        <p:spPr>
-          <a:xfrm>
-            <a:off x="1143000" y="4240530"/>
-            <a:ext cx="10500055" cy="610362"/>
-          </a:xfrm>
-          <a:prstGeom prst="rect">
-            <a:avLst/>
-          </a:prstGeom>
-          <a:noFill/>
-        </p:spPr>
-        <p:txBody>
-          <a:bodyPr wrap="square" anchor="t" lIns="0" rIns="0" tIns="0" bIns="0">
-            <a:spAutoFit/>
-          </a:bodyPr>
-          <a:lstStyle/>
-          <a:p>
-            <a:r>
-              <a:rPr sz="2100" i="0" b="0">
-                <a:solidFill>
-                  <a:srgbClr val="2B211C"/>
-                </a:solidFill>
-                <a:latin typeface="Calibri"/>
-              </a:rPr>
-              <a:t>Cohort studies</a:t>
-            </a:r>
-          </a:p>
-        </p:txBody>
-      </p:sp>
-      <p:sp>
-        <p:nvSpPr>
-          <p:cNvPr id="17" name="Oval 16"/>
-          <p:cNvSpPr/>
-          <p:nvPr/>
-        </p:nvSpPr>
-        <p:spPr>
-          <a:xfrm>
-            <a:off x="548640" y="4878324"/>
-            <a:ext cx="402336" cy="402336"/>
-          </a:xfrm>
-          <a:prstGeom prst="ellipse">
-            <a:avLst/>
-          </a:prstGeom>
-          <a:solidFill>
-            <a:srgbClr val="E6EEEF"/>
-          </a:solidFill>
-          <a:ln>
-            <a:noFill/>
-          </a:ln>
-          <a:effectLst/>
-        </p:spPr>
-        <p:style>
-          <a:lnRef idx="1">
-            <a:schemeClr val="accent1"/>
-          </a:lnRef>
-          <a:fillRef idx="3">
-            <a:schemeClr val="accent1"/>
-          </a:fillRef>
-          <a:effectRef idx="2">
-            <a:schemeClr val="accent1"/>
-          </a:effectRef>
-          <a:fontRef idx="minor">
-            <a:schemeClr val="lt1"/>
-          </a:fontRef>
-        </p:style>
-        <p:txBody>
-          <a:bodyPr rtlCol="0" anchor="ctr" lIns="0" rIns="0" tIns="0" bIns="0"/>
-          <a:lstStyle/>
-          <a:p>
-            <a:pPr algn="ctr"/>
-            <a:r>
-              <a:rPr sz="1300" i="0" b="1">
-                <a:solidFill>
-                  <a:srgbClr val="2F6F7A"/>
-                </a:solidFill>
-                <a:latin typeface="Calibri"/>
-              </a:rPr>
-              <a:t>5</a:t>
-            </a:r>
-          </a:p>
-        </p:txBody>
-      </p:sp>
-      <p:sp>
-        <p:nvSpPr>
-          <p:cNvPr id="18" name="TextBox 17"/>
-          <p:cNvSpPr txBox="1"/>
-          <p:nvPr/>
-        </p:nvSpPr>
-        <p:spPr>
-          <a:xfrm>
-            <a:off x="1143000" y="4896612"/>
-            <a:ext cx="10500055" cy="610362"/>
-          </a:xfrm>
-          <a:prstGeom prst="rect">
-            <a:avLst/>
-          </a:prstGeom>
-          <a:noFill/>
-        </p:spPr>
-        <p:txBody>
-          <a:bodyPr wrap="square" anchor="t" lIns="0" rIns="0" tIns="0" bIns="0">
-            <a:spAutoFit/>
-          </a:bodyPr>
-          <a:lstStyle/>
-          <a:p>
-            <a:r>
-              <a:rPr sz="2100" i="0" b="0">
-                <a:solidFill>
-                  <a:srgbClr val="2B211C"/>
-                </a:solidFill>
-                <a:latin typeface="Calibri"/>
-              </a:rPr>
-              <a:t>Randomised controlled trials</a:t>
-            </a:r>
-          </a:p>
-        </p:txBody>
-      </p:sp>
-      <p:sp>
-        <p:nvSpPr>
-          <p:cNvPr id="19" name="Oval 18"/>
-          <p:cNvSpPr/>
-          <p:nvPr/>
-        </p:nvSpPr>
-        <p:spPr>
-          <a:xfrm>
-            <a:off x="548640" y="5534406"/>
-            <a:ext cx="402336" cy="402336"/>
-          </a:xfrm>
-          <a:prstGeom prst="ellipse">
-            <a:avLst/>
-          </a:prstGeom>
-          <a:solidFill>
-            <a:srgbClr val="E6EEEF"/>
-          </a:solidFill>
-          <a:ln>
-            <a:noFill/>
-          </a:ln>
-          <a:effectLst/>
-        </p:spPr>
-        <p:style>
-          <a:lnRef idx="1">
-            <a:schemeClr val="accent1"/>
-          </a:lnRef>
-          <a:fillRef idx="3">
-            <a:schemeClr val="accent1"/>
-          </a:fillRef>
-          <a:effectRef idx="2">
-            <a:schemeClr val="accent1"/>
-          </a:effectRef>
-          <a:fontRef idx="minor">
-            <a:schemeClr val="lt1"/>
-          </a:fontRef>
-        </p:style>
-        <p:txBody>
-          <a:bodyPr rtlCol="0" anchor="ctr" lIns="0" rIns="0" tIns="0" bIns="0"/>
-          <a:lstStyle/>
-          <a:p>
-            <a:pPr algn="ctr"/>
-            <a:r>
-              <a:rPr sz="1300" i="0" b="1">
-                <a:solidFill>
-                  <a:srgbClr val="2F6F7A"/>
-                </a:solidFill>
-                <a:latin typeface="Calibri"/>
-              </a:rPr>
-              <a:t>6</a:t>
-            </a:r>
-          </a:p>
-        </p:txBody>
-      </p:sp>
-      <p:sp>
-        <p:nvSpPr>
-          <p:cNvPr id="20" name="TextBox 19"/>
-          <p:cNvSpPr txBox="1"/>
-          <p:nvPr/>
-        </p:nvSpPr>
-        <p:spPr>
-          <a:xfrm>
-            <a:off x="1143000" y="5552694"/>
-            <a:ext cx="10500055" cy="610362"/>
-          </a:xfrm>
-          <a:prstGeom prst="rect">
-            <a:avLst/>
-          </a:prstGeom>
-          <a:noFill/>
-        </p:spPr>
-        <p:txBody>
-          <a:bodyPr wrap="square" anchor="t" lIns="0" rIns="0" tIns="0" bIns="0">
-            <a:spAutoFit/>
-          </a:bodyPr>
-          <a:lstStyle/>
-          <a:p>
-            <a:r>
-              <a:rPr sz="2100" i="0" b="0">
-                <a:solidFill>
-                  <a:srgbClr val="2B211C"/>
-                </a:solidFill>
-                <a:latin typeface="Calibri"/>
-              </a:rPr>
-              <a:t>Systematic reviews and meta-analyses of good RCTs</a:t>
+              <a:t> a third factor explains the result. Matching, adjustment and randomisation reduce it.</a:t>
             </a:r>
           </a:p>
         </p:txBody>
@@ -6869,7 +7101,7 @@
                 </a:solidFill>
                 <a:latin typeface="Cambria"/>
               </a:rPr>
-              <a:t>Bias in one line each</a:t>
+              <a:t>Choosing the Design</a:t>
             </a:r>
           </a:p>
         </p:txBody>
@@ -6938,615 +7170,7 @@
                 </a:solidFill>
                 <a:latin typeface="Calibri"/>
               </a:rPr>
-              <a:t>12 / 26</a:t>
-            </a:r>
-          </a:p>
-        </p:txBody>
-      </p:sp>
-      <p:pic>
-        <p:nvPicPr>
-          <p:cNvPr id="7" name="Picture 6" descr="logo"/>
-          <p:cNvPicPr>
-            <a:picLocks noChangeAspect="1"/>
-          </p:cNvPicPr>
-          <p:nvPr/>
-        </p:nvPicPr>
-        <p:blipFill>
-          <a:blip r:embed="rId3"/>
-          <a:stretch>
-            <a:fillRect/>
-          </a:stretch>
-        </p:blipFill>
-        <p:spPr>
-          <a:xfrm>
-            <a:off x="11247120" y="6309360"/>
-            <a:ext cx="384048" cy="384048"/>
-          </a:xfrm>
-          <a:prstGeom prst="rect">
-            <a:avLst/>
-          </a:prstGeom>
-        </p:spPr>
-      </p:pic>
-      <p:sp>
-        <p:nvSpPr>
-          <p:cNvPr id="8" name="TextBox 7"/>
-          <p:cNvSpPr txBox="1"/>
-          <p:nvPr/>
-        </p:nvSpPr>
-        <p:spPr>
-          <a:xfrm>
-            <a:off x="548640" y="1554480"/>
-            <a:ext cx="4480560" cy="4617720"/>
-          </a:xfrm>
-          <a:prstGeom prst="rect">
-            <a:avLst/>
-          </a:prstGeom>
-          <a:noFill/>
-        </p:spPr>
-        <p:txBody>
-          <a:bodyPr wrap="square" anchor="t" lIns="0" rIns="0" tIns="0" bIns="0">
-            <a:spAutoFit/>
-          </a:bodyPr>
-          <a:lstStyle/>
-          <a:p>
-            <a:pPr>
-              <a:spcAft>
-                <a:spcPts val="800"/>
-              </a:spcAft>
-            </a:pPr>
-            <a:r>
-              <a:rPr sz="1700" i="0" b="1">
-                <a:solidFill>
-                  <a:srgbClr val="2B211C"/>
-                </a:solidFill>
-                <a:latin typeface="Calibri"/>
-              </a:rPr>
-              <a:t>Bias</a:t>
-            </a:r>
-            <a:r>
-              <a:rPr sz="1700" i="0" b="0">
-                <a:solidFill>
-                  <a:srgbClr val="2B211C"/>
-                </a:solidFill>
-                <a:latin typeface="Calibri"/>
-              </a:rPr>
-              <a:t> is a systematic error that pushes results away from the truth. Three types appear again and again:</a:t>
-            </a:r>
-          </a:p>
-          <a:p>
-            <a:pPr>
-              <a:spcAft>
-                <a:spcPts val="800"/>
-              </a:spcAft>
-            </a:pPr>
-            <a:r>
-              <a:rPr sz="1700" i="0" b="0">
-                <a:solidFill>
-                  <a:srgbClr val="2B211C"/>
-                </a:solidFill>
-                <a:latin typeface="Calibri"/>
-              </a:rPr>
-              <a:t>When you read a study, ask which bias could explain the result. If one could, trust the result less.</a:t>
-            </a:r>
-          </a:p>
-          <a:p>
-            <a:pPr>
-              <a:spcAft>
-                <a:spcPts val="800"/>
-              </a:spcAft>
-            </a:pPr>
-            <a:r>
-              <a:rPr sz="1700" i="0" b="0">
-                <a:solidFill>
-                  <a:srgbClr val="2B211C"/>
-                </a:solidFill>
-                <a:latin typeface="Calibri"/>
-              </a:rPr>
-              <a:t>The pyramid is a guide, not a law. A large, well-run cohort study can be more useful than a small, poor RCT. Quality matters as much as design.</a:t>
-            </a:r>
-          </a:p>
-        </p:txBody>
-      </p:sp>
-      <p:sp>
-        <p:nvSpPr>
-          <p:cNvPr id="9" name="Oval 8"/>
-          <p:cNvSpPr/>
-          <p:nvPr/>
-        </p:nvSpPr>
-        <p:spPr>
-          <a:xfrm>
-            <a:off x="5394959" y="1572768"/>
-            <a:ext cx="402336" cy="402336"/>
-          </a:xfrm>
-          <a:prstGeom prst="ellipse">
-            <a:avLst/>
-          </a:prstGeom>
-          <a:solidFill>
-            <a:srgbClr val="E6EEEF"/>
-          </a:solidFill>
-          <a:ln>
-            <a:noFill/>
-          </a:ln>
-          <a:effectLst/>
-        </p:spPr>
-        <p:style>
-          <a:lnRef idx="1">
-            <a:schemeClr val="accent1"/>
-          </a:lnRef>
-          <a:fillRef idx="3">
-            <a:schemeClr val="accent1"/>
-          </a:fillRef>
-          <a:effectRef idx="2">
-            <a:schemeClr val="accent1"/>
-          </a:effectRef>
-          <a:fontRef idx="minor">
-            <a:schemeClr val="lt1"/>
-          </a:fontRef>
-        </p:style>
-        <p:txBody>
-          <a:bodyPr rtlCol="0" anchor="ctr" lIns="0" rIns="0" tIns="0" bIns="0"/>
-          <a:lstStyle/>
-          <a:p>
-            <a:pPr algn="ctr"/>
-            <a:r>
-              <a:rPr sz="1300" i="0" b="1">
-                <a:solidFill>
-                  <a:srgbClr val="2F6F7A"/>
-                </a:solidFill>
-                <a:latin typeface="Calibri"/>
-              </a:rPr>
-              <a:t>1</a:t>
-            </a:r>
-          </a:p>
-        </p:txBody>
-      </p:sp>
-      <p:sp>
-        <p:nvSpPr>
-          <p:cNvPr id="10" name="TextBox 9"/>
-          <p:cNvSpPr txBox="1"/>
-          <p:nvPr/>
-        </p:nvSpPr>
-        <p:spPr>
-          <a:xfrm>
-            <a:off x="5989320" y="1591056"/>
-            <a:ext cx="5653735" cy="1475612"/>
-          </a:xfrm>
-          <a:prstGeom prst="rect">
-            <a:avLst/>
-          </a:prstGeom>
-          <a:noFill/>
-        </p:spPr>
-        <p:txBody>
-          <a:bodyPr wrap="square" anchor="t" lIns="0" rIns="0" tIns="0" bIns="0">
-            <a:spAutoFit/>
-          </a:bodyPr>
-          <a:lstStyle/>
-          <a:p>
-            <a:r>
-              <a:rPr sz="2100" i="0" b="1">
-                <a:solidFill>
-                  <a:srgbClr val="2B211C"/>
-                </a:solidFill>
-                <a:latin typeface="Calibri"/>
-              </a:rPr>
-              <a:t>Selection bias:</a:t>
-            </a:r>
-            <a:r>
-              <a:rPr sz="2100" i="0" b="0">
-                <a:solidFill>
-                  <a:srgbClr val="2B211C"/>
-                </a:solidFill>
-                <a:latin typeface="Calibri"/>
-              </a:rPr>
-              <a:t> the groups differ before the study starts. Randomisation prevents it.</a:t>
-            </a:r>
-          </a:p>
-        </p:txBody>
-      </p:sp>
-      <p:sp>
-        <p:nvSpPr>
-          <p:cNvPr id="11" name="Oval 10"/>
-          <p:cNvSpPr/>
-          <p:nvPr/>
-        </p:nvSpPr>
-        <p:spPr>
-          <a:xfrm>
-            <a:off x="5394959" y="3094100"/>
-            <a:ext cx="402336" cy="402336"/>
-          </a:xfrm>
-          <a:prstGeom prst="ellipse">
-            <a:avLst/>
-          </a:prstGeom>
-          <a:solidFill>
-            <a:srgbClr val="E6EEEF"/>
-          </a:solidFill>
-          <a:ln>
-            <a:noFill/>
-          </a:ln>
-          <a:effectLst/>
-        </p:spPr>
-        <p:style>
-          <a:lnRef idx="1">
-            <a:schemeClr val="accent1"/>
-          </a:lnRef>
-          <a:fillRef idx="3">
-            <a:schemeClr val="accent1"/>
-          </a:fillRef>
-          <a:effectRef idx="2">
-            <a:schemeClr val="accent1"/>
-          </a:effectRef>
-          <a:fontRef idx="minor">
-            <a:schemeClr val="lt1"/>
-          </a:fontRef>
-        </p:style>
-        <p:txBody>
-          <a:bodyPr rtlCol="0" anchor="ctr" lIns="0" rIns="0" tIns="0" bIns="0"/>
-          <a:lstStyle/>
-          <a:p>
-            <a:pPr algn="ctr"/>
-            <a:r>
-              <a:rPr sz="1300" i="0" b="1">
-                <a:solidFill>
-                  <a:srgbClr val="2F6F7A"/>
-                </a:solidFill>
-                <a:latin typeface="Calibri"/>
-              </a:rPr>
-              <a:t>2</a:t>
-            </a:r>
-          </a:p>
-        </p:txBody>
-      </p:sp>
-      <p:sp>
-        <p:nvSpPr>
-          <p:cNvPr id="12" name="TextBox 11"/>
-          <p:cNvSpPr txBox="1"/>
-          <p:nvPr/>
-        </p:nvSpPr>
-        <p:spPr>
-          <a:xfrm>
-            <a:off x="5989320" y="3112388"/>
-            <a:ext cx="5653735" cy="1475612"/>
-          </a:xfrm>
-          <a:prstGeom prst="rect">
-            <a:avLst/>
-          </a:prstGeom>
-          <a:noFill/>
-        </p:spPr>
-        <p:txBody>
-          <a:bodyPr wrap="square" anchor="t" lIns="0" rIns="0" tIns="0" bIns="0">
-            <a:spAutoFit/>
-          </a:bodyPr>
-          <a:lstStyle/>
-          <a:p>
-            <a:r>
-              <a:rPr sz="2100" i="0" b="1">
-                <a:solidFill>
-                  <a:srgbClr val="2B211C"/>
-                </a:solidFill>
-                <a:latin typeface="Calibri"/>
-              </a:rPr>
-              <a:t>Recall bias:</a:t>
-            </a:r>
-            <a:r>
-              <a:rPr sz="2100" i="0" b="0">
-                <a:solidFill>
-                  <a:srgbClr val="2B211C"/>
-                </a:solidFill>
-                <a:latin typeface="Calibri"/>
-              </a:rPr>
-              <a:t> people with a disease remember past exposures better than healthy people. It affects case-control studies.</a:t>
-            </a:r>
-          </a:p>
-        </p:txBody>
-      </p:sp>
-      <p:sp>
-        <p:nvSpPr>
-          <p:cNvPr id="13" name="Oval 12"/>
-          <p:cNvSpPr/>
-          <p:nvPr/>
-        </p:nvSpPr>
-        <p:spPr>
-          <a:xfrm>
-            <a:off x="5394959" y="4615433"/>
-            <a:ext cx="402336" cy="402336"/>
-          </a:xfrm>
-          <a:prstGeom prst="ellipse">
-            <a:avLst/>
-          </a:prstGeom>
-          <a:solidFill>
-            <a:srgbClr val="E6EEEF"/>
-          </a:solidFill>
-          <a:ln>
-            <a:noFill/>
-          </a:ln>
-          <a:effectLst/>
-        </p:spPr>
-        <p:style>
-          <a:lnRef idx="1">
-            <a:schemeClr val="accent1"/>
-          </a:lnRef>
-          <a:fillRef idx="3">
-            <a:schemeClr val="accent1"/>
-          </a:fillRef>
-          <a:effectRef idx="2">
-            <a:schemeClr val="accent1"/>
-          </a:effectRef>
-          <a:fontRef idx="minor">
-            <a:schemeClr val="lt1"/>
-          </a:fontRef>
-        </p:style>
-        <p:txBody>
-          <a:bodyPr rtlCol="0" anchor="ctr" lIns="0" rIns="0" tIns="0" bIns="0"/>
-          <a:lstStyle/>
-          <a:p>
-            <a:pPr algn="ctr"/>
-            <a:r>
-              <a:rPr sz="1300" i="0" b="1">
-                <a:solidFill>
-                  <a:srgbClr val="2F6F7A"/>
-                </a:solidFill>
-                <a:latin typeface="Calibri"/>
-              </a:rPr>
-              <a:t>3</a:t>
-            </a:r>
-          </a:p>
-        </p:txBody>
-      </p:sp>
-      <p:sp>
-        <p:nvSpPr>
-          <p:cNvPr id="14" name="TextBox 13"/>
-          <p:cNvSpPr txBox="1"/>
-          <p:nvPr/>
-        </p:nvSpPr>
-        <p:spPr>
-          <a:xfrm>
-            <a:off x="5989320" y="4633722"/>
-            <a:ext cx="5653735" cy="1475612"/>
-          </a:xfrm>
-          <a:prstGeom prst="rect">
-            <a:avLst/>
-          </a:prstGeom>
-          <a:noFill/>
-        </p:spPr>
-        <p:txBody>
-          <a:bodyPr wrap="square" anchor="t" lIns="0" rIns="0" tIns="0" bIns="0">
-            <a:spAutoFit/>
-          </a:bodyPr>
-          <a:lstStyle/>
-          <a:p>
-            <a:r>
-              <a:rPr sz="2100" i="0" b="1">
-                <a:solidFill>
-                  <a:srgbClr val="2B211C"/>
-                </a:solidFill>
-                <a:latin typeface="Calibri"/>
-              </a:rPr>
-              <a:t>Confounding:</a:t>
-            </a:r>
-            <a:r>
-              <a:rPr sz="2100" i="0" b="0">
-                <a:solidFill>
-                  <a:srgbClr val="2B211C"/>
-                </a:solidFill>
-                <a:latin typeface="Calibri"/>
-              </a:rPr>
-              <a:t> a third factor explains the result. Matching, adjustment and randomisation reduce it.</a:t>
-            </a:r>
-          </a:p>
-        </p:txBody>
-      </p:sp>
-    </p:spTree>
-  </p:cSld>
-  <p:clrMapOvr>
-    <a:masterClrMapping/>
-  </p:clrMapOvr>
-</p:sld>
-</file>
-
-<file path=ppt/slides/slide13.xml><?xml version="1.0" encoding="utf-8"?>
-<p:sld xmlns:a="http://schemas.openxmlformats.org/drawingml/2006/main" xmlns:p="http://schemas.openxmlformats.org/presentationml/2006/main" xmlns:r="http://schemas.openxmlformats.org/officeDocument/2006/relationships">
-  <p:cSld>
-    <p:bg>
-      <p:bgPr>
-        <a:solidFill>
-          <a:srgbClr val="FFFFFF"/>
-        </a:solidFill>
-        <a:effectLst/>
-      </p:bgPr>
-    </p:bg>
-    <p:spTree>
-      <p:nvGrpSpPr>
-        <p:cNvPr id="1" name=""/>
-        <p:cNvGrpSpPr/>
-        <p:nvPr/>
-      </p:nvGrpSpPr>
-      <p:grpSpPr/>
-      <p:sp>
-        <p:nvSpPr>
-          <p:cNvPr id="2" name="Oval 1"/>
-          <p:cNvSpPr/>
-          <p:nvPr/>
-        </p:nvSpPr>
-        <p:spPr>
-          <a:xfrm>
-            <a:off x="548640" y="475488"/>
-            <a:ext cx="658368" cy="658368"/>
-          </a:xfrm>
-          <a:prstGeom prst="ellipse">
-            <a:avLst/>
-          </a:prstGeom>
-          <a:solidFill>
-            <a:srgbClr val="2F6F7A"/>
-          </a:solidFill>
-          <a:ln>
-            <a:noFill/>
-          </a:ln>
-          <a:effectLst/>
-        </p:spPr>
-        <p:style>
-          <a:lnRef idx="1">
-            <a:schemeClr val="accent1"/>
-          </a:lnRef>
-          <a:fillRef idx="3">
-            <a:schemeClr val="accent1"/>
-          </a:fillRef>
-          <a:effectRef idx="2">
-            <a:schemeClr val="accent1"/>
-          </a:effectRef>
-          <a:fontRef idx="minor">
-            <a:schemeClr val="lt1"/>
-          </a:fontRef>
-        </p:style>
-        <p:txBody>
-          <a:bodyPr rtlCol="0" anchor="ctr" lIns="0" rIns="0" tIns="0" bIns="0"/>
-          <a:lstStyle/>
-          <a:p>
-            <a:pPr algn="ctr"/>
-            <a:r>
-              <a:rPr sz="1800" i="0" b="1">
-                <a:solidFill>
-                  <a:srgbClr val="FFFFFF"/>
-                </a:solidFill>
-                <a:latin typeface="Cambria"/>
-              </a:rPr>
-              <a:t>03</a:t>
-            </a:r>
-          </a:p>
-        </p:txBody>
-      </p:sp>
-      <p:sp>
-        <p:nvSpPr>
-          <p:cNvPr id="3" name="TextBox 2"/>
-          <p:cNvSpPr txBox="1"/>
-          <p:nvPr/>
-        </p:nvSpPr>
-        <p:spPr>
-          <a:xfrm>
-            <a:off x="1417319" y="438912"/>
-            <a:ext cx="10180015" cy="292608"/>
-          </a:xfrm>
-          <a:prstGeom prst="rect">
-            <a:avLst/>
-          </a:prstGeom>
-          <a:noFill/>
-        </p:spPr>
-        <p:txBody>
-          <a:bodyPr wrap="square" anchor="t" lIns="0" rIns="0" tIns="0" bIns="0">
-            <a:spAutoFit/>
-          </a:bodyPr>
-          <a:lstStyle/>
-          <a:p>
-            <a:r>
-              <a:rPr sz="1200" i="0" b="1" spc="150">
-                <a:solidFill>
-                  <a:srgbClr val="2F6F7A"/>
-                </a:solidFill>
-                <a:latin typeface="Calibri"/>
-              </a:rPr>
-              <a:t>SECTION 3</a:t>
-            </a:r>
-          </a:p>
-        </p:txBody>
-      </p:sp>
-      <p:sp>
-        <p:nvSpPr>
-          <p:cNvPr id="4" name="TextBox 3"/>
-          <p:cNvSpPr txBox="1"/>
-          <p:nvPr/>
-        </p:nvSpPr>
-        <p:spPr>
-          <a:xfrm>
-            <a:off x="1417319" y="676656"/>
-            <a:ext cx="10180015" cy="640080"/>
-          </a:xfrm>
-          <a:prstGeom prst="rect">
-            <a:avLst/>
-          </a:prstGeom>
-          <a:noFill/>
-        </p:spPr>
-        <p:txBody>
-          <a:bodyPr wrap="square" anchor="t" lIns="0" rIns="0" tIns="0" bIns="0">
-            <a:spAutoFit/>
-          </a:bodyPr>
-          <a:lstStyle/>
-          <a:p>
-            <a:r>
-              <a:rPr sz="3200" i="0" b="1">
-                <a:solidFill>
-                  <a:srgbClr val="2B211C"/>
-                </a:solidFill>
-                <a:latin typeface="Cambria"/>
-              </a:rPr>
-              <a:t>Choosing the Design</a:t>
-            </a:r>
-          </a:p>
-        </p:txBody>
-      </p:sp>
-      <p:sp>
-        <p:nvSpPr>
-          <p:cNvPr id="5" name="TextBox 4"/>
-          <p:cNvSpPr txBox="1"/>
-          <p:nvPr/>
-        </p:nvSpPr>
-        <p:spPr>
-          <a:xfrm>
-            <a:off x="548640" y="6419088"/>
-            <a:ext cx="8229600" cy="274320"/>
-          </a:xfrm>
-          <a:prstGeom prst="rect">
-            <a:avLst/>
-          </a:prstGeom>
-          <a:noFill/>
-        </p:spPr>
-        <p:txBody>
-          <a:bodyPr wrap="square" anchor="t" lIns="0" rIns="0" tIns="0" bIns="0">
-            <a:spAutoFit/>
-          </a:bodyPr>
-          <a:lstStyle/>
-          <a:p>
-            <a:r>
-              <a:rPr sz="1200" i="0" b="0">
-                <a:solidFill>
-                  <a:srgbClr val="6E625B"/>
-                </a:solidFill>
-                <a:latin typeface="Calibri"/>
-              </a:rPr>
-              <a:t>Drug Information  ·  Section 3  ·  Study Designs and Levels of Evidence</a:t>
-            </a:r>
-          </a:p>
-        </p:txBody>
-      </p:sp>
-      <p:sp>
-        <p:nvSpPr>
-          <p:cNvPr id="6" name="TextBox 5"/>
-          <p:cNvSpPr txBox="1"/>
-          <p:nvPr/>
-        </p:nvSpPr>
-        <p:spPr>
-          <a:xfrm>
-            <a:off x="10058400" y="6419088"/>
-            <a:ext cx="1097280" cy="274320"/>
-          </a:xfrm>
-          <a:prstGeom prst="rect">
-            <a:avLst/>
-          </a:prstGeom>
-          <a:noFill/>
-        </p:spPr>
-        <p:txBody>
-          <a:bodyPr wrap="square" anchor="t" lIns="0" rIns="0" tIns="0" bIns="0">
-            <a:spAutoFit/>
-          </a:bodyPr>
-          <a:lstStyle/>
-          <a:p>
-            <a:pPr algn="r"/>
-            <a:r>
-              <a:rPr sz="1200" i="0" b="1">
-                <a:solidFill>
-                  <a:srgbClr val="6E625B"/>
-                </a:solidFill>
-                <a:latin typeface="Calibri"/>
-              </a:rPr>
-              <a:t>13 / 26</a:t>
+              <a:t>12 / 25</a:t>
             </a:r>
           </a:p>
         </p:txBody>
@@ -7885,6 +7509,318 @@
 </p:sld>
 </file>
 
+<file path=ppt/slides/slide13.xml><?xml version="1.0" encoding="utf-8"?>
+<p:sld xmlns:a="http://schemas.openxmlformats.org/drawingml/2006/main" xmlns:p="http://schemas.openxmlformats.org/presentationml/2006/main" xmlns:r="http://schemas.openxmlformats.org/officeDocument/2006/relationships">
+  <p:cSld>
+    <p:bg>
+      <p:bgPr>
+        <a:solidFill>
+          <a:srgbClr val="FFFFFF"/>
+        </a:solidFill>
+        <a:effectLst/>
+      </p:bgPr>
+    </p:bg>
+    <p:spTree>
+      <p:nvGrpSpPr>
+        <p:cNvPr id="1" name=""/>
+        <p:cNvGrpSpPr/>
+        <p:nvPr/>
+      </p:nvGrpSpPr>
+      <p:grpSpPr/>
+      <p:sp>
+        <p:nvSpPr>
+          <p:cNvPr id="2" name="Rectangle 1"/>
+          <p:cNvSpPr/>
+          <p:nvPr/>
+        </p:nvSpPr>
+        <p:spPr>
+          <a:xfrm>
+            <a:off x="0" y="0"/>
+            <a:ext cx="3931920" cy="6858000"/>
+          </a:xfrm>
+          <a:prstGeom prst="rect">
+            <a:avLst/>
+          </a:prstGeom>
+          <a:solidFill>
+            <a:srgbClr val="2F6F7A"/>
+          </a:solidFill>
+          <a:ln>
+            <a:noFill/>
+          </a:ln>
+          <a:effectLst/>
+        </p:spPr>
+        <p:style>
+          <a:lnRef idx="1">
+            <a:schemeClr val="accent1"/>
+          </a:lnRef>
+          <a:fillRef idx="3">
+            <a:schemeClr val="accent1"/>
+          </a:fillRef>
+          <a:effectRef idx="2">
+            <a:schemeClr val="accent1"/>
+          </a:effectRef>
+          <a:fontRef idx="minor">
+            <a:schemeClr val="lt1"/>
+          </a:fontRef>
+        </p:style>
+        <p:txBody>
+          <a:bodyPr rtlCol="0" anchor="ctr"/>
+          <a:lstStyle/>
+          <a:p>
+            <a:pPr algn="ctr"/>
+          </a:p>
+        </p:txBody>
+      </p:sp>
+      <p:sp>
+        <p:nvSpPr>
+          <p:cNvPr id="3" name="TextBox 2"/>
+          <p:cNvSpPr txBox="1"/>
+          <p:nvPr/>
+        </p:nvSpPr>
+        <p:spPr>
+          <a:xfrm>
+            <a:off x="548640" y="1188720"/>
+            <a:ext cx="2926080" cy="2377440"/>
+          </a:xfrm>
+          <a:prstGeom prst="rect">
+            <a:avLst/>
+          </a:prstGeom>
+          <a:noFill/>
+        </p:spPr>
+        <p:txBody>
+          <a:bodyPr wrap="square" anchor="t" lIns="0" rIns="0" tIns="0" bIns="0">
+            <a:spAutoFit/>
+          </a:bodyPr>
+          <a:lstStyle/>
+          <a:p>
+            <a:r>
+              <a:rPr sz="13000" i="0" b="1">
+                <a:solidFill>
+                  <a:srgbClr val="E6EEEF"/>
+                </a:solidFill>
+                <a:latin typeface="Cambria"/>
+              </a:rPr>
+              <a:t>℞</a:t>
+            </a:r>
+          </a:p>
+        </p:txBody>
+      </p:sp>
+      <p:sp>
+        <p:nvSpPr>
+          <p:cNvPr id="4" name="TextBox 3"/>
+          <p:cNvSpPr txBox="1"/>
+          <p:nvPr/>
+        </p:nvSpPr>
+        <p:spPr>
+          <a:xfrm>
+            <a:off x="548640" y="3977639"/>
+            <a:ext cx="3017520" cy="1280160"/>
+          </a:xfrm>
+          <a:prstGeom prst="rect">
+            <a:avLst/>
+          </a:prstGeom>
+          <a:noFill/>
+        </p:spPr>
+        <p:txBody>
+          <a:bodyPr wrap="square" anchor="t" lIns="0" rIns="0" tIns="0" bIns="0">
+            <a:spAutoFit/>
+          </a:bodyPr>
+          <a:lstStyle/>
+          <a:p>
+            <a:r>
+              <a:rPr sz="3000" i="0" b="1">
+                <a:solidFill>
+                  <a:srgbClr val="FFFFFF"/>
+                </a:solidFill>
+                <a:latin typeface="Cambria"/>
+              </a:rPr>
+              <a:t>At the Pharmacy</a:t>
+            </a:r>
+          </a:p>
+          <a:p>
+            <a:r>
+              <a:rPr sz="1400" i="0" b="1" spc="150">
+                <a:solidFill>
+                  <a:srgbClr val="E6EEEF"/>
+                </a:solidFill>
+                <a:latin typeface="Calibri"/>
+              </a:rPr>
+              <a:t>Section 3</a:t>
+            </a:r>
+          </a:p>
+        </p:txBody>
+      </p:sp>
+      <p:sp>
+        <p:nvSpPr>
+          <p:cNvPr id="5" name="TextBox 4"/>
+          <p:cNvSpPr txBox="1"/>
+          <p:nvPr/>
+        </p:nvSpPr>
+        <p:spPr>
+          <a:xfrm>
+            <a:off x="4526280" y="822960"/>
+            <a:ext cx="7132320" cy="5120640"/>
+          </a:xfrm>
+          <a:prstGeom prst="rect">
+            <a:avLst/>
+          </a:prstGeom>
+          <a:noFill/>
+        </p:spPr>
+        <p:txBody>
+          <a:bodyPr wrap="square" anchor="ctr" lIns="0" rIns="0" tIns="0" bIns="0">
+            <a:spAutoFit/>
+          </a:bodyPr>
+          <a:lstStyle/>
+          <a:p>
+            <a:r>
+              <a:rPr sz="2200" i="0" b="0">
+                <a:solidFill>
+                  <a:srgbClr val="2B211C"/>
+                </a:solidFill>
+                <a:latin typeface="Calibri"/>
+              </a:rPr>
+              <a:t>A patient reads online that a blood-pressure tablet "causes cancer". The claim comes from </a:t>
+            </a:r>
+            <a:r>
+              <a:rPr sz="2200" i="0" b="1">
+                <a:solidFill>
+                  <a:srgbClr val="2B211C"/>
+                </a:solidFill>
+                <a:latin typeface="Calibri"/>
+              </a:rPr>
+              <a:t>one case report</a:t>
+            </a:r>
+            <a:r>
+              <a:rPr sz="2200" i="0" b="0">
+                <a:solidFill>
+                  <a:srgbClr val="2B211C"/>
+                </a:solidFill>
+                <a:latin typeface="Calibri"/>
+              </a:rPr>
+              <a:t>. You explain that a single case cannot prove cause. You check for </a:t>
+            </a:r>
+            <a:r>
+              <a:rPr sz="2200" i="0" b="1">
+                <a:solidFill>
+                  <a:srgbClr val="2B211C"/>
+                </a:solidFill>
+                <a:latin typeface="Calibri"/>
+              </a:rPr>
+              <a:t>cohort studies or meta-analyses</a:t>
+            </a:r>
+            <a:r>
+              <a:rPr sz="2200" i="0" b="0">
+                <a:solidFill>
+                  <a:srgbClr val="2B211C"/>
+                </a:solidFill>
+                <a:latin typeface="Calibri"/>
+              </a:rPr>
+              <a:t> on the drug before advising, and you tell the patient not to stop the tablet without seeing the doctor.</a:t>
+            </a:r>
+          </a:p>
+        </p:txBody>
+      </p:sp>
+      <p:sp>
+        <p:nvSpPr>
+          <p:cNvPr id="6" name="TextBox 5"/>
+          <p:cNvSpPr txBox="1"/>
+          <p:nvPr/>
+        </p:nvSpPr>
+        <p:spPr>
+          <a:xfrm>
+            <a:off x="4526280" y="6419088"/>
+            <a:ext cx="8229600" cy="274320"/>
+          </a:xfrm>
+          <a:prstGeom prst="rect">
+            <a:avLst/>
+          </a:prstGeom>
+          <a:noFill/>
+        </p:spPr>
+        <p:txBody>
+          <a:bodyPr wrap="square" anchor="t" lIns="0" rIns="0" tIns="0" bIns="0">
+            <a:spAutoFit/>
+          </a:bodyPr>
+          <a:lstStyle/>
+          <a:p>
+            <a:r>
+              <a:rPr sz="1200" i="0" b="0">
+                <a:solidFill>
+                  <a:srgbClr val="6E625B"/>
+                </a:solidFill>
+                <a:latin typeface="Calibri"/>
+              </a:rPr>
+              <a:t>Drug Information  ·  Study Designs and Levels of Evidence</a:t>
+            </a:r>
+          </a:p>
+        </p:txBody>
+      </p:sp>
+      <p:sp>
+        <p:nvSpPr>
+          <p:cNvPr id="7" name="TextBox 6"/>
+          <p:cNvSpPr txBox="1"/>
+          <p:nvPr/>
+        </p:nvSpPr>
+        <p:spPr>
+          <a:xfrm>
+            <a:off x="10058400" y="6419088"/>
+            <a:ext cx="1097280" cy="274320"/>
+          </a:xfrm>
+          <a:prstGeom prst="rect">
+            <a:avLst/>
+          </a:prstGeom>
+          <a:noFill/>
+        </p:spPr>
+        <p:txBody>
+          <a:bodyPr wrap="square" anchor="t" lIns="0" rIns="0" tIns="0" bIns="0">
+            <a:spAutoFit/>
+          </a:bodyPr>
+          <a:lstStyle/>
+          <a:p>
+            <a:pPr algn="r"/>
+            <a:r>
+              <a:rPr sz="1200" i="0" b="1">
+                <a:solidFill>
+                  <a:srgbClr val="6E625B"/>
+                </a:solidFill>
+                <a:latin typeface="Calibri"/>
+              </a:rPr>
+              <a:t>13 / 25</a:t>
+            </a:r>
+          </a:p>
+        </p:txBody>
+      </p:sp>
+      <p:pic>
+        <p:nvPicPr>
+          <p:cNvPr id="8" name="Picture 7" descr="logo"/>
+          <p:cNvPicPr>
+            <a:picLocks noChangeAspect="1"/>
+          </p:cNvPicPr>
+          <p:nvPr/>
+        </p:nvPicPr>
+        <p:blipFill>
+          <a:blip r:embed="rId3"/>
+          <a:stretch>
+            <a:fillRect/>
+          </a:stretch>
+        </p:blipFill>
+        <p:spPr>
+          <a:xfrm>
+            <a:off x="11247120" y="6309360"/>
+            <a:ext cx="384048" cy="384048"/>
+          </a:xfrm>
+          <a:prstGeom prst="rect">
+            <a:avLst/>
+          </a:prstGeom>
+        </p:spPr>
+      </p:pic>
+    </p:spTree>
+  </p:cSld>
+  <p:clrMapOvr>
+    <a:masterClrMapping/>
+  </p:clrMapOvr>
+</p:sld>
+</file>
+
 <file path=ppt/slides/slide14.xml><?xml version="1.0" encoding="utf-8"?>
 <p:sld xmlns:a="http://schemas.openxmlformats.org/drawingml/2006/main" xmlns:p="http://schemas.openxmlformats.org/presentationml/2006/main" xmlns:r="http://schemas.openxmlformats.org/officeDocument/2006/relationships">
   <p:cSld>
@@ -7905,16 +7841,16 @@
       <p:grpSpPr/>
       <p:sp>
         <p:nvSpPr>
-          <p:cNvPr id="2" name="Rectangle 1"/>
+          <p:cNvPr id="2" name="Oval 1"/>
           <p:cNvSpPr/>
           <p:nvPr/>
         </p:nvSpPr>
         <p:spPr>
           <a:xfrm>
-            <a:off x="0" y="0"/>
-            <a:ext cx="3931920" cy="6858000"/>
-          </a:xfrm>
-          <a:prstGeom prst="rect">
+            <a:off x="548640" y="475488"/>
+            <a:ext cx="658368" cy="658368"/>
+          </a:xfrm>
+          <a:prstGeom prst="ellipse">
             <a:avLst/>
           </a:prstGeom>
           <a:solidFill>
@@ -7940,10 +7876,19 @@
           </a:fontRef>
         </p:style>
         <p:txBody>
-          <a:bodyPr rtlCol="0" anchor="ctr"/>
+          <a:bodyPr rtlCol="0" anchor="ctr" lIns="0" rIns="0" tIns="0" bIns="0"/>
           <a:lstStyle/>
           <a:p>
             <a:pPr algn="ctr"/>
+            <a:r>
+              <a:rPr sz="1800" i="0" b="1">
+                <a:solidFill>
+                  <a:srgbClr val="FFFFFF"/>
+                </a:solidFill>
+                <a:latin typeface="Cambria"/>
+              </a:rPr>
+              <a:t>03</a:t>
+            </a:r>
           </a:p>
         </p:txBody>
       </p:sp>
@@ -7955,8 +7900,8 @@
         </p:nvSpPr>
         <p:spPr>
           <a:xfrm>
-            <a:off x="548640" y="1188720"/>
-            <a:ext cx="2926080" cy="2377440"/>
+            <a:off x="1417319" y="438912"/>
+            <a:ext cx="10180015" cy="292608"/>
           </a:xfrm>
           <a:prstGeom prst="rect">
             <a:avLst/>
@@ -7970,13 +7915,13 @@
           <a:lstStyle/>
           <a:p>
             <a:r>
-              <a:rPr sz="13000" i="0" b="1">
-                <a:solidFill>
-                  <a:srgbClr val="E6EEEF"/>
-                </a:solidFill>
-                <a:latin typeface="Cambria"/>
-              </a:rPr>
-              <a:t>℞</a:t>
+              <a:rPr sz="1200" i="0" b="1" spc="150">
+                <a:solidFill>
+                  <a:srgbClr val="2F6F7A"/>
+                </a:solidFill>
+                <a:latin typeface="Calibri"/>
+              </a:rPr>
+              <a:t>SECTION 3  ·  QUESTION 1 OF 5</a:t>
             </a:r>
           </a:p>
         </p:txBody>
@@ -7989,8 +7934,8 @@
         </p:nvSpPr>
         <p:spPr>
           <a:xfrm>
-            <a:off x="548640" y="3977639"/>
-            <a:ext cx="3017520" cy="1280160"/>
+            <a:off x="1417319" y="676656"/>
+            <a:ext cx="10180015" cy="640080"/>
           </a:xfrm>
           <a:prstGeom prst="rect">
             <a:avLst/>
@@ -8004,24 +7949,13 @@
           <a:lstStyle/>
           <a:p>
             <a:r>
-              <a:rPr sz="3000" i="0" b="1">
-                <a:solidFill>
-                  <a:srgbClr val="FFFFFF"/>
+              <a:rPr sz="3200" i="0" b="1">
+                <a:solidFill>
+                  <a:srgbClr val="2B211C"/>
                 </a:solidFill>
                 <a:latin typeface="Cambria"/>
               </a:rPr>
-              <a:t>At the Pharmacy</a:t>
-            </a:r>
-          </a:p>
-          <a:p>
-            <a:r>
-              <a:rPr sz="1400" i="0" b="1" spc="150">
-                <a:solidFill>
-                  <a:srgbClr val="E6EEEF"/>
-                </a:solidFill>
-                <a:latin typeface="Calibri"/>
-              </a:rPr>
-              <a:t>Section 3</a:t>
+              <a:t>Your turn</a:t>
             </a:r>
           </a:p>
         </p:txBody>
@@ -8034,77 +7968,7 @@
         </p:nvSpPr>
         <p:spPr>
           <a:xfrm>
-            <a:off x="4526280" y="822960"/>
-            <a:ext cx="7132320" cy="5120640"/>
-          </a:xfrm>
-          <a:prstGeom prst="rect">
-            <a:avLst/>
-          </a:prstGeom>
-          <a:noFill/>
-        </p:spPr>
-        <p:txBody>
-          <a:bodyPr wrap="square" anchor="ctr" lIns="0" rIns="0" tIns="0" bIns="0">
-            <a:spAutoFit/>
-          </a:bodyPr>
-          <a:lstStyle/>
-          <a:p>
-            <a:r>
-              <a:rPr sz="2200" i="0" b="0">
-                <a:solidFill>
-                  <a:srgbClr val="2B211C"/>
-                </a:solidFill>
-                <a:latin typeface="Calibri"/>
-              </a:rPr>
-              <a:t>A patient reads online that a blood-pressure tablet "causes cancer". The claim comes from </a:t>
-            </a:r>
-            <a:r>
-              <a:rPr sz="2200" i="0" b="1">
-                <a:solidFill>
-                  <a:srgbClr val="2B211C"/>
-                </a:solidFill>
-                <a:latin typeface="Calibri"/>
-              </a:rPr>
-              <a:t>one case report</a:t>
-            </a:r>
-            <a:r>
-              <a:rPr sz="2200" i="0" b="0">
-                <a:solidFill>
-                  <a:srgbClr val="2B211C"/>
-                </a:solidFill>
-                <a:latin typeface="Calibri"/>
-              </a:rPr>
-              <a:t>. You explain that a single case cannot prove cause. You check for </a:t>
-            </a:r>
-            <a:r>
-              <a:rPr sz="2200" i="0" b="1">
-                <a:solidFill>
-                  <a:srgbClr val="2B211C"/>
-                </a:solidFill>
-                <a:latin typeface="Calibri"/>
-              </a:rPr>
-              <a:t>cohort studies or meta-analyses</a:t>
-            </a:r>
-            <a:r>
-              <a:rPr sz="2200" i="0" b="0">
-                <a:solidFill>
-                  <a:srgbClr val="2B211C"/>
-                </a:solidFill>
-                <a:latin typeface="Calibri"/>
-              </a:rPr>
-              <a:t> on the drug before advising, and you tell the patient not to stop the tablet without seeing the doctor.</a:t>
-            </a:r>
-          </a:p>
-        </p:txBody>
-      </p:sp>
-      <p:sp>
-        <p:nvSpPr>
-          <p:cNvPr id="6" name="TextBox 5"/>
-          <p:cNvSpPr txBox="1"/>
-          <p:nvPr/>
-        </p:nvSpPr>
-        <p:spPr>
-          <a:xfrm>
-            <a:off x="4526280" y="6419088"/>
+            <a:off x="548640" y="6419088"/>
             <a:ext cx="8229600" cy="274320"/>
           </a:xfrm>
           <a:prstGeom prst="rect">
@@ -8125,14 +7989,14 @@
                 </a:solidFill>
                 <a:latin typeface="Calibri"/>
               </a:rPr>
-              <a:t>Drug Information  ·  Study Designs and Levels of Evidence</a:t>
-            </a:r>
-          </a:p>
-        </p:txBody>
-      </p:sp>
-      <p:sp>
-        <p:nvSpPr>
-          <p:cNvPr id="7" name="TextBox 6"/>
+              <a:t>Drug Information  ·  Section 3  ·  Study Designs and Levels of Evidence</a:t>
+            </a:r>
+          </a:p>
+        </p:txBody>
+      </p:sp>
+      <p:sp>
+        <p:nvSpPr>
+          <p:cNvPr id="6" name="TextBox 5"/>
           <p:cNvSpPr txBox="1"/>
           <p:nvPr/>
         </p:nvSpPr>
@@ -8160,14 +8024,14 @@
                 </a:solidFill>
                 <a:latin typeface="Calibri"/>
               </a:rPr>
-              <a:t>14 / 26</a:t>
+              <a:t>14 / 25</a:t>
             </a:r>
           </a:p>
         </p:txBody>
       </p:sp>
       <p:pic>
         <p:nvPicPr>
-          <p:cNvPr id="8" name="Picture 7" descr="logo"/>
+          <p:cNvPr id="7" name="Picture 6" descr="logo"/>
           <p:cNvPicPr>
             <a:picLocks noChangeAspect="1"/>
           </p:cNvPicPr>
@@ -8189,6 +8053,572 @@
           </a:prstGeom>
         </p:spPr>
       </p:pic>
+      <p:sp>
+        <p:nvSpPr>
+          <p:cNvPr id="8" name="TextBox 7"/>
+          <p:cNvSpPr txBox="1"/>
+          <p:nvPr/>
+        </p:nvSpPr>
+        <p:spPr>
+          <a:xfrm>
+            <a:off x="548640" y="1554480"/>
+            <a:ext cx="11094415" cy="1005840"/>
+          </a:xfrm>
+          <a:prstGeom prst="rect">
+            <a:avLst/>
+          </a:prstGeom>
+          <a:noFill/>
+        </p:spPr>
+        <p:txBody>
+          <a:bodyPr wrap="square" anchor="t" lIns="0" rIns="0" tIns="0" bIns="0">
+            <a:spAutoFit/>
+          </a:bodyPr>
+          <a:lstStyle/>
+          <a:p>
+            <a:r>
+              <a:rPr sz="2400" i="0" b="1">
+                <a:solidFill>
+                  <a:srgbClr val="2B211C"/>
+                </a:solidFill>
+                <a:latin typeface="Calibri"/>
+              </a:rPr>
+              <a:t>Researchers compare past drug use in 200 patients with liver failure and 400 without. What design is this?</a:t>
+            </a:r>
+          </a:p>
+        </p:txBody>
+      </p:sp>
+      <p:sp>
+        <p:nvSpPr>
+          <p:cNvPr id="9" name="Rounded Rectangle 8"/>
+          <p:cNvSpPr/>
+          <p:nvPr/>
+        </p:nvSpPr>
+        <p:spPr>
+          <a:xfrm>
+            <a:off x="548640" y="2697480"/>
+            <a:ext cx="11094415" cy="640080"/>
+          </a:xfrm>
+          <a:prstGeom prst="roundRect">
+            <a:avLst>
+              <a:gd name="adj" fmla="val 18000"/>
+            </a:avLst>
+          </a:prstGeom>
+          <a:solidFill>
+            <a:srgbClr val="FAF4F2"/>
+          </a:solidFill>
+          <a:ln>
+            <a:noFill/>
+          </a:ln>
+          <a:effectLst/>
+        </p:spPr>
+        <p:style>
+          <a:lnRef idx="1">
+            <a:schemeClr val="accent1"/>
+          </a:lnRef>
+          <a:fillRef idx="3">
+            <a:schemeClr val="accent1"/>
+          </a:fillRef>
+          <a:effectRef idx="2">
+            <a:schemeClr val="accent1"/>
+          </a:effectRef>
+          <a:fontRef idx="minor">
+            <a:schemeClr val="lt1"/>
+          </a:fontRef>
+        </p:style>
+        <p:txBody>
+          <a:bodyPr rtlCol="0" anchor="ctr"/>
+          <a:lstStyle/>
+          <a:p>
+            <a:pPr algn="ctr"/>
+          </a:p>
+        </p:txBody>
+      </p:sp>
+      <p:sp>
+        <p:nvSpPr>
+          <p:cNvPr id="10" name="Oval 9"/>
+          <p:cNvSpPr/>
+          <p:nvPr/>
+        </p:nvSpPr>
+        <p:spPr>
+          <a:xfrm>
+            <a:off x="713232" y="2807208"/>
+            <a:ext cx="420624" cy="420624"/>
+          </a:xfrm>
+          <a:prstGeom prst="ellipse">
+            <a:avLst/>
+          </a:prstGeom>
+          <a:solidFill>
+            <a:srgbClr val="A4472B"/>
+          </a:solidFill>
+          <a:ln>
+            <a:noFill/>
+          </a:ln>
+          <a:effectLst/>
+        </p:spPr>
+        <p:style>
+          <a:lnRef idx="1">
+            <a:schemeClr val="accent1"/>
+          </a:lnRef>
+          <a:fillRef idx="3">
+            <a:schemeClr val="accent1"/>
+          </a:fillRef>
+          <a:effectRef idx="2">
+            <a:schemeClr val="accent1"/>
+          </a:effectRef>
+          <a:fontRef idx="minor">
+            <a:schemeClr val="lt1"/>
+          </a:fontRef>
+        </p:style>
+        <p:txBody>
+          <a:bodyPr rtlCol="0" anchor="ctr" lIns="0" rIns="0" tIns="0" bIns="0"/>
+          <a:lstStyle/>
+          <a:p>
+            <a:pPr algn="ctr"/>
+            <a:r>
+              <a:rPr sz="1500" i="0" b="1">
+                <a:solidFill>
+                  <a:srgbClr val="FFFFFF"/>
+                </a:solidFill>
+                <a:latin typeface="Calibri"/>
+              </a:rPr>
+              <a:t>A</a:t>
+            </a:r>
+          </a:p>
+        </p:txBody>
+      </p:sp>
+      <p:sp>
+        <p:nvSpPr>
+          <p:cNvPr id="11" name="TextBox 10"/>
+          <p:cNvSpPr txBox="1"/>
+          <p:nvPr/>
+        </p:nvSpPr>
+        <p:spPr>
+          <a:xfrm>
+            <a:off x="1371600" y="2697480"/>
+            <a:ext cx="10088575" cy="640080"/>
+          </a:xfrm>
+          <a:prstGeom prst="rect">
+            <a:avLst/>
+          </a:prstGeom>
+          <a:noFill/>
+        </p:spPr>
+        <p:txBody>
+          <a:bodyPr wrap="square" anchor="ctr" lIns="0" rIns="0" tIns="0" bIns="0">
+            <a:spAutoFit/>
+          </a:bodyPr>
+          <a:lstStyle/>
+          <a:p>
+            <a:r>
+              <a:rPr sz="1900" i="0" b="0">
+                <a:solidFill>
+                  <a:srgbClr val="2B211C"/>
+                </a:solidFill>
+                <a:latin typeface="Calibri"/>
+              </a:rPr>
+              <a:t>Cohort study</a:t>
+            </a:r>
+          </a:p>
+        </p:txBody>
+      </p:sp>
+      <p:sp>
+        <p:nvSpPr>
+          <p:cNvPr id="12" name="Rounded Rectangle 11"/>
+          <p:cNvSpPr/>
+          <p:nvPr/>
+        </p:nvSpPr>
+        <p:spPr>
+          <a:xfrm>
+            <a:off x="548640" y="3465576"/>
+            <a:ext cx="11094415" cy="640080"/>
+          </a:xfrm>
+          <a:prstGeom prst="roundRect">
+            <a:avLst>
+              <a:gd name="adj" fmla="val 18000"/>
+            </a:avLst>
+          </a:prstGeom>
+          <a:solidFill>
+            <a:srgbClr val="FAF4F2"/>
+          </a:solidFill>
+          <a:ln>
+            <a:noFill/>
+          </a:ln>
+          <a:effectLst/>
+        </p:spPr>
+        <p:style>
+          <a:lnRef idx="1">
+            <a:schemeClr val="accent1"/>
+          </a:lnRef>
+          <a:fillRef idx="3">
+            <a:schemeClr val="accent1"/>
+          </a:fillRef>
+          <a:effectRef idx="2">
+            <a:schemeClr val="accent1"/>
+          </a:effectRef>
+          <a:fontRef idx="minor">
+            <a:schemeClr val="lt1"/>
+          </a:fontRef>
+        </p:style>
+        <p:txBody>
+          <a:bodyPr rtlCol="0" anchor="ctr"/>
+          <a:lstStyle/>
+          <a:p>
+            <a:pPr algn="ctr"/>
+          </a:p>
+        </p:txBody>
+      </p:sp>
+      <p:sp>
+        <p:nvSpPr>
+          <p:cNvPr id="13" name="Oval 12"/>
+          <p:cNvSpPr/>
+          <p:nvPr/>
+        </p:nvSpPr>
+        <p:spPr>
+          <a:xfrm>
+            <a:off x="713232" y="3575304"/>
+            <a:ext cx="420624" cy="420624"/>
+          </a:xfrm>
+          <a:prstGeom prst="ellipse">
+            <a:avLst/>
+          </a:prstGeom>
+          <a:solidFill>
+            <a:srgbClr val="A4472B"/>
+          </a:solidFill>
+          <a:ln>
+            <a:noFill/>
+          </a:ln>
+          <a:effectLst/>
+        </p:spPr>
+        <p:style>
+          <a:lnRef idx="1">
+            <a:schemeClr val="accent1"/>
+          </a:lnRef>
+          <a:fillRef idx="3">
+            <a:schemeClr val="accent1"/>
+          </a:fillRef>
+          <a:effectRef idx="2">
+            <a:schemeClr val="accent1"/>
+          </a:effectRef>
+          <a:fontRef idx="minor">
+            <a:schemeClr val="lt1"/>
+          </a:fontRef>
+        </p:style>
+        <p:txBody>
+          <a:bodyPr rtlCol="0" anchor="ctr" lIns="0" rIns="0" tIns="0" bIns="0"/>
+          <a:lstStyle/>
+          <a:p>
+            <a:pPr algn="ctr"/>
+            <a:r>
+              <a:rPr sz="1500" i="0" b="1">
+                <a:solidFill>
+                  <a:srgbClr val="FFFFFF"/>
+                </a:solidFill>
+                <a:latin typeface="Calibri"/>
+              </a:rPr>
+              <a:t>B</a:t>
+            </a:r>
+          </a:p>
+        </p:txBody>
+      </p:sp>
+      <p:sp>
+        <p:nvSpPr>
+          <p:cNvPr id="14" name="TextBox 13"/>
+          <p:cNvSpPr txBox="1"/>
+          <p:nvPr/>
+        </p:nvSpPr>
+        <p:spPr>
+          <a:xfrm>
+            <a:off x="1371600" y="3465576"/>
+            <a:ext cx="10088575" cy="640080"/>
+          </a:xfrm>
+          <a:prstGeom prst="rect">
+            <a:avLst/>
+          </a:prstGeom>
+          <a:noFill/>
+        </p:spPr>
+        <p:txBody>
+          <a:bodyPr wrap="square" anchor="ctr" lIns="0" rIns="0" tIns="0" bIns="0">
+            <a:spAutoFit/>
+          </a:bodyPr>
+          <a:lstStyle/>
+          <a:p>
+            <a:r>
+              <a:rPr sz="1900" i="0" b="0">
+                <a:solidFill>
+                  <a:srgbClr val="2B211C"/>
+                </a:solidFill>
+                <a:latin typeface="Calibri"/>
+              </a:rPr>
+              <a:t>Case-control study</a:t>
+            </a:r>
+          </a:p>
+        </p:txBody>
+      </p:sp>
+      <p:sp>
+        <p:nvSpPr>
+          <p:cNvPr id="15" name="Rounded Rectangle 14"/>
+          <p:cNvSpPr/>
+          <p:nvPr/>
+        </p:nvSpPr>
+        <p:spPr>
+          <a:xfrm>
+            <a:off x="548640" y="4233672"/>
+            <a:ext cx="11094415" cy="640080"/>
+          </a:xfrm>
+          <a:prstGeom prst="roundRect">
+            <a:avLst>
+              <a:gd name="adj" fmla="val 18000"/>
+            </a:avLst>
+          </a:prstGeom>
+          <a:solidFill>
+            <a:srgbClr val="FAF4F2"/>
+          </a:solidFill>
+          <a:ln>
+            <a:noFill/>
+          </a:ln>
+          <a:effectLst/>
+        </p:spPr>
+        <p:style>
+          <a:lnRef idx="1">
+            <a:schemeClr val="accent1"/>
+          </a:lnRef>
+          <a:fillRef idx="3">
+            <a:schemeClr val="accent1"/>
+          </a:fillRef>
+          <a:effectRef idx="2">
+            <a:schemeClr val="accent1"/>
+          </a:effectRef>
+          <a:fontRef idx="minor">
+            <a:schemeClr val="lt1"/>
+          </a:fontRef>
+        </p:style>
+        <p:txBody>
+          <a:bodyPr rtlCol="0" anchor="ctr"/>
+          <a:lstStyle/>
+          <a:p>
+            <a:pPr algn="ctr"/>
+          </a:p>
+        </p:txBody>
+      </p:sp>
+      <p:sp>
+        <p:nvSpPr>
+          <p:cNvPr id="16" name="Oval 15"/>
+          <p:cNvSpPr/>
+          <p:nvPr/>
+        </p:nvSpPr>
+        <p:spPr>
+          <a:xfrm>
+            <a:off x="713232" y="4343400"/>
+            <a:ext cx="420624" cy="420624"/>
+          </a:xfrm>
+          <a:prstGeom prst="ellipse">
+            <a:avLst/>
+          </a:prstGeom>
+          <a:solidFill>
+            <a:srgbClr val="A4472B"/>
+          </a:solidFill>
+          <a:ln>
+            <a:noFill/>
+          </a:ln>
+          <a:effectLst/>
+        </p:spPr>
+        <p:style>
+          <a:lnRef idx="1">
+            <a:schemeClr val="accent1"/>
+          </a:lnRef>
+          <a:fillRef idx="3">
+            <a:schemeClr val="accent1"/>
+          </a:fillRef>
+          <a:effectRef idx="2">
+            <a:schemeClr val="accent1"/>
+          </a:effectRef>
+          <a:fontRef idx="minor">
+            <a:schemeClr val="lt1"/>
+          </a:fontRef>
+        </p:style>
+        <p:txBody>
+          <a:bodyPr rtlCol="0" anchor="ctr" lIns="0" rIns="0" tIns="0" bIns="0"/>
+          <a:lstStyle/>
+          <a:p>
+            <a:pPr algn="ctr"/>
+            <a:r>
+              <a:rPr sz="1500" i="0" b="1">
+                <a:solidFill>
+                  <a:srgbClr val="FFFFFF"/>
+                </a:solidFill>
+                <a:latin typeface="Calibri"/>
+              </a:rPr>
+              <a:t>C</a:t>
+            </a:r>
+          </a:p>
+        </p:txBody>
+      </p:sp>
+      <p:sp>
+        <p:nvSpPr>
+          <p:cNvPr id="17" name="TextBox 16"/>
+          <p:cNvSpPr txBox="1"/>
+          <p:nvPr/>
+        </p:nvSpPr>
+        <p:spPr>
+          <a:xfrm>
+            <a:off x="1371600" y="4233672"/>
+            <a:ext cx="10088575" cy="640080"/>
+          </a:xfrm>
+          <a:prstGeom prst="rect">
+            <a:avLst/>
+          </a:prstGeom>
+          <a:noFill/>
+        </p:spPr>
+        <p:txBody>
+          <a:bodyPr wrap="square" anchor="ctr" lIns="0" rIns="0" tIns="0" bIns="0">
+            <a:spAutoFit/>
+          </a:bodyPr>
+          <a:lstStyle/>
+          <a:p>
+            <a:r>
+              <a:rPr sz="1900" i="0" b="0">
+                <a:solidFill>
+                  <a:srgbClr val="2B211C"/>
+                </a:solidFill>
+                <a:latin typeface="Calibri"/>
+              </a:rPr>
+              <a:t>Randomised controlled trial</a:t>
+            </a:r>
+          </a:p>
+        </p:txBody>
+      </p:sp>
+      <p:sp>
+        <p:nvSpPr>
+          <p:cNvPr id="18" name="Rounded Rectangle 17"/>
+          <p:cNvSpPr/>
+          <p:nvPr/>
+        </p:nvSpPr>
+        <p:spPr>
+          <a:xfrm>
+            <a:off x="548640" y="5001768"/>
+            <a:ext cx="11094415" cy="640080"/>
+          </a:xfrm>
+          <a:prstGeom prst="roundRect">
+            <a:avLst>
+              <a:gd name="adj" fmla="val 18000"/>
+            </a:avLst>
+          </a:prstGeom>
+          <a:solidFill>
+            <a:srgbClr val="FAF4F2"/>
+          </a:solidFill>
+          <a:ln>
+            <a:noFill/>
+          </a:ln>
+          <a:effectLst/>
+        </p:spPr>
+        <p:style>
+          <a:lnRef idx="1">
+            <a:schemeClr val="accent1"/>
+          </a:lnRef>
+          <a:fillRef idx="3">
+            <a:schemeClr val="accent1"/>
+          </a:fillRef>
+          <a:effectRef idx="2">
+            <a:schemeClr val="accent1"/>
+          </a:effectRef>
+          <a:fontRef idx="minor">
+            <a:schemeClr val="lt1"/>
+          </a:fontRef>
+        </p:style>
+        <p:txBody>
+          <a:bodyPr rtlCol="0" anchor="ctr"/>
+          <a:lstStyle/>
+          <a:p>
+            <a:pPr algn="ctr"/>
+          </a:p>
+        </p:txBody>
+      </p:sp>
+      <p:sp>
+        <p:nvSpPr>
+          <p:cNvPr id="19" name="Oval 18"/>
+          <p:cNvSpPr/>
+          <p:nvPr/>
+        </p:nvSpPr>
+        <p:spPr>
+          <a:xfrm>
+            <a:off x="713232" y="5111496"/>
+            <a:ext cx="420624" cy="420624"/>
+          </a:xfrm>
+          <a:prstGeom prst="ellipse">
+            <a:avLst/>
+          </a:prstGeom>
+          <a:solidFill>
+            <a:srgbClr val="A4472B"/>
+          </a:solidFill>
+          <a:ln>
+            <a:noFill/>
+          </a:ln>
+          <a:effectLst/>
+        </p:spPr>
+        <p:style>
+          <a:lnRef idx="1">
+            <a:schemeClr val="accent1"/>
+          </a:lnRef>
+          <a:fillRef idx="3">
+            <a:schemeClr val="accent1"/>
+          </a:fillRef>
+          <a:effectRef idx="2">
+            <a:schemeClr val="accent1"/>
+          </a:effectRef>
+          <a:fontRef idx="minor">
+            <a:schemeClr val="lt1"/>
+          </a:fontRef>
+        </p:style>
+        <p:txBody>
+          <a:bodyPr rtlCol="0" anchor="ctr" lIns="0" rIns="0" tIns="0" bIns="0"/>
+          <a:lstStyle/>
+          <a:p>
+            <a:pPr algn="ctr"/>
+            <a:r>
+              <a:rPr sz="1500" i="0" b="1">
+                <a:solidFill>
+                  <a:srgbClr val="FFFFFF"/>
+                </a:solidFill>
+                <a:latin typeface="Calibri"/>
+              </a:rPr>
+              <a:t>D</a:t>
+            </a:r>
+          </a:p>
+        </p:txBody>
+      </p:sp>
+      <p:sp>
+        <p:nvSpPr>
+          <p:cNvPr id="20" name="TextBox 19"/>
+          <p:cNvSpPr txBox="1"/>
+          <p:nvPr/>
+        </p:nvSpPr>
+        <p:spPr>
+          <a:xfrm>
+            <a:off x="1371600" y="5001768"/>
+            <a:ext cx="10088575" cy="640080"/>
+          </a:xfrm>
+          <a:prstGeom prst="rect">
+            <a:avLst/>
+          </a:prstGeom>
+          <a:noFill/>
+        </p:spPr>
+        <p:txBody>
+          <a:bodyPr wrap="square" anchor="ctr" lIns="0" rIns="0" tIns="0" bIns="0">
+            <a:spAutoFit/>
+          </a:bodyPr>
+          <a:lstStyle/>
+          <a:p>
+            <a:r>
+              <a:rPr sz="1900" i="0" b="0">
+                <a:solidFill>
+                  <a:srgbClr val="2B211C"/>
+                </a:solidFill>
+                <a:latin typeface="Calibri"/>
+              </a:rPr>
+              <a:t>Cross-sectional study</a:t>
+            </a:r>
+          </a:p>
+        </p:txBody>
+      </p:sp>
     </p:spTree>
   </p:cSld>
   <p:clrMapOvr>
@@ -8297,7 +8727,7 @@
                 </a:solidFill>
                 <a:latin typeface="Calibri"/>
               </a:rPr>
-              <a:t>SECTION 3  ·  QUESTION 1 OF 5</a:t>
+              <a:t>SECTION 3  ·  QUESTION 1 OF 5  ·  ANSWER</a:t>
             </a:r>
           </a:p>
         </p:txBody>
@@ -8331,7 +8761,7 @@
                 </a:solidFill>
                 <a:latin typeface="Cambria"/>
               </a:rPr>
-              <a:t>Your turn</a:t>
+              <a:t>Check your answer</a:t>
             </a:r>
           </a:p>
         </p:txBody>
@@ -8400,7 +8830,7 @@
                 </a:solidFill>
                 <a:latin typeface="Calibri"/>
               </a:rPr>
-              <a:t>15 / 26</a:t>
+              <a:t>15 / 25</a:t>
             </a:r>
           </a:p>
         </p:txBody>
@@ -8414,7 +8844,7 @@
           <p:nvPr/>
         </p:nvPicPr>
         <p:blipFill>
-          <a:blip r:embed="rId3"/>
+          <a:blip r:embed="rId2"/>
           <a:stretch>
             <a:fillRect/>
           </a:stretch>
@@ -8471,8 +8901,8 @@
         </p:nvSpPr>
         <p:spPr>
           <a:xfrm>
-            <a:off x="548640" y="2697480"/>
-            <a:ext cx="11094415" cy="640080"/>
+            <a:off x="548640" y="2606040"/>
+            <a:ext cx="11094415" cy="548640"/>
           </a:xfrm>
           <a:prstGeom prst="roundRect">
             <a:avLst>
@@ -8480,7 +8910,7 @@
             </a:avLst>
           </a:prstGeom>
           <a:solidFill>
-            <a:srgbClr val="FAF4F2"/>
+            <a:srgbClr val="F5F4F4"/>
           </a:solidFill>
           <a:ln>
             <a:noFill/>
@@ -8517,14 +8947,14 @@
         </p:nvSpPr>
         <p:spPr>
           <a:xfrm>
-            <a:off x="713232" y="2807208"/>
+            <a:off x="713232" y="2670048"/>
             <a:ext cx="420624" cy="420624"/>
           </a:xfrm>
           <a:prstGeom prst="ellipse">
             <a:avLst/>
           </a:prstGeom>
           <a:solidFill>
-            <a:srgbClr val="A4472B"/>
+            <a:srgbClr val="E2E0DE"/>
           </a:solidFill>
           <a:ln>
             <a:noFill/>
@@ -8553,7 +8983,7 @@
             <a:r>
               <a:rPr sz="1500" i="0" b="1">
                 <a:solidFill>
-                  <a:srgbClr val="FFFFFF"/>
+                  <a:srgbClr val="6E625B"/>
                 </a:solidFill>
                 <a:latin typeface="Calibri"/>
               </a:rPr>
@@ -8570,8 +9000,8 @@
         </p:nvSpPr>
         <p:spPr>
           <a:xfrm>
-            <a:off x="1371600" y="2697480"/>
-            <a:ext cx="10088575" cy="640080"/>
+            <a:off x="1371600" y="2606040"/>
+            <a:ext cx="10088575" cy="548640"/>
           </a:xfrm>
           <a:prstGeom prst="rect">
             <a:avLst/>
@@ -8587,7 +9017,7 @@
             <a:r>
               <a:rPr sz="1900" i="0" b="0">
                 <a:solidFill>
-                  <a:srgbClr val="2B211C"/>
+                  <a:srgbClr val="6E625B"/>
                 </a:solidFill>
                 <a:latin typeface="Calibri"/>
               </a:rPr>
@@ -8604,8 +9034,8 @@
         </p:nvSpPr>
         <p:spPr>
           <a:xfrm>
-            <a:off x="548640" y="3465576"/>
-            <a:ext cx="11094415" cy="640080"/>
+            <a:off x="548640" y="3282696"/>
+            <a:ext cx="11094415" cy="548640"/>
           </a:xfrm>
           <a:prstGeom prst="roundRect">
             <a:avLst>
@@ -8613,7 +9043,7 @@
             </a:avLst>
           </a:prstGeom>
           <a:solidFill>
-            <a:srgbClr val="FAF4F2"/>
+            <a:srgbClr val="2F6F7A"/>
           </a:solidFill>
           <a:ln>
             <a:noFill/>
@@ -8650,14 +9080,14 @@
         </p:nvSpPr>
         <p:spPr>
           <a:xfrm>
-            <a:off x="713232" y="3575304"/>
+            <a:off x="713232" y="3346703"/>
             <a:ext cx="420624" cy="420624"/>
           </a:xfrm>
           <a:prstGeom prst="ellipse">
             <a:avLst/>
           </a:prstGeom>
           <a:solidFill>
-            <a:srgbClr val="A4472B"/>
+            <a:srgbClr val="FFFFFF"/>
           </a:solidFill>
           <a:ln>
             <a:noFill/>
@@ -8686,7 +9116,7 @@
             <a:r>
               <a:rPr sz="1500" i="0" b="1">
                 <a:solidFill>
-                  <a:srgbClr val="FFFFFF"/>
+                  <a:srgbClr val="2F6F7A"/>
                 </a:solidFill>
                 <a:latin typeface="Calibri"/>
               </a:rPr>
@@ -8703,8 +9133,8 @@
         </p:nvSpPr>
         <p:spPr>
           <a:xfrm>
-            <a:off x="1371600" y="3465576"/>
-            <a:ext cx="10088575" cy="640080"/>
+            <a:off x="1371600" y="3282696"/>
+            <a:ext cx="10088575" cy="548640"/>
           </a:xfrm>
           <a:prstGeom prst="rect">
             <a:avLst/>
@@ -8718,9 +9148,9 @@
           <a:lstStyle/>
           <a:p>
             <a:r>
-              <a:rPr sz="1900" i="0" b="0">
-                <a:solidFill>
-                  <a:srgbClr val="2B211C"/>
+              <a:rPr sz="1900" i="0" b="1">
+                <a:solidFill>
+                  <a:srgbClr val="FFFFFF"/>
                 </a:solidFill>
                 <a:latin typeface="Calibri"/>
               </a:rPr>
@@ -8737,8 +9167,8 @@
         </p:nvSpPr>
         <p:spPr>
           <a:xfrm>
-            <a:off x="548640" y="4233672"/>
-            <a:ext cx="11094415" cy="640080"/>
+            <a:off x="548640" y="3959352"/>
+            <a:ext cx="11094415" cy="548640"/>
           </a:xfrm>
           <a:prstGeom prst="roundRect">
             <a:avLst>
@@ -8746,7 +9176,7 @@
             </a:avLst>
           </a:prstGeom>
           <a:solidFill>
-            <a:srgbClr val="FAF4F2"/>
+            <a:srgbClr val="F5F4F4"/>
           </a:solidFill>
           <a:ln>
             <a:noFill/>
@@ -8783,14 +9213,14 @@
         </p:nvSpPr>
         <p:spPr>
           <a:xfrm>
-            <a:off x="713232" y="4343400"/>
+            <a:off x="713232" y="4023360"/>
             <a:ext cx="420624" cy="420624"/>
           </a:xfrm>
           <a:prstGeom prst="ellipse">
             <a:avLst/>
           </a:prstGeom>
           <a:solidFill>
-            <a:srgbClr val="A4472B"/>
+            <a:srgbClr val="E2E0DE"/>
           </a:solidFill>
           <a:ln>
             <a:noFill/>
@@ -8819,7 +9249,7 @@
             <a:r>
               <a:rPr sz="1500" i="0" b="1">
                 <a:solidFill>
-                  <a:srgbClr val="FFFFFF"/>
+                  <a:srgbClr val="6E625B"/>
                 </a:solidFill>
                 <a:latin typeface="Calibri"/>
               </a:rPr>
@@ -8836,8 +9266,8 @@
         </p:nvSpPr>
         <p:spPr>
           <a:xfrm>
-            <a:off x="1371600" y="4233672"/>
-            <a:ext cx="10088575" cy="640080"/>
+            <a:off x="1371600" y="3959352"/>
+            <a:ext cx="10088575" cy="548640"/>
           </a:xfrm>
           <a:prstGeom prst="rect">
             <a:avLst/>
@@ -8853,7 +9283,7 @@
             <a:r>
               <a:rPr sz="1900" i="0" b="0">
                 <a:solidFill>
-                  <a:srgbClr val="2B211C"/>
+                  <a:srgbClr val="6E625B"/>
                 </a:solidFill>
                 <a:latin typeface="Calibri"/>
               </a:rPr>
@@ -8870,8 +9300,8 @@
         </p:nvSpPr>
         <p:spPr>
           <a:xfrm>
-            <a:off x="548640" y="5001768"/>
-            <a:ext cx="11094415" cy="640080"/>
+            <a:off x="548640" y="4636008"/>
+            <a:ext cx="11094415" cy="548640"/>
           </a:xfrm>
           <a:prstGeom prst="roundRect">
             <a:avLst>
@@ -8879,7 +9309,7 @@
             </a:avLst>
           </a:prstGeom>
           <a:solidFill>
-            <a:srgbClr val="FAF4F2"/>
+            <a:srgbClr val="F5F4F4"/>
           </a:solidFill>
           <a:ln>
             <a:noFill/>
@@ -8916,14 +9346,14 @@
         </p:nvSpPr>
         <p:spPr>
           <a:xfrm>
-            <a:off x="713232" y="5111496"/>
+            <a:off x="713232" y="4700016"/>
             <a:ext cx="420624" cy="420624"/>
           </a:xfrm>
           <a:prstGeom prst="ellipse">
             <a:avLst/>
           </a:prstGeom>
           <a:solidFill>
-            <a:srgbClr val="A4472B"/>
+            <a:srgbClr val="E2E0DE"/>
           </a:solidFill>
           <a:ln>
             <a:noFill/>
@@ -8952,7 +9382,7 @@
             <a:r>
               <a:rPr sz="1500" i="0" b="1">
                 <a:solidFill>
-                  <a:srgbClr val="FFFFFF"/>
+                  <a:srgbClr val="6E625B"/>
                 </a:solidFill>
                 <a:latin typeface="Calibri"/>
               </a:rPr>
@@ -8969,8 +9399,8 @@
         </p:nvSpPr>
         <p:spPr>
           <a:xfrm>
-            <a:off x="1371600" y="5001768"/>
-            <a:ext cx="10088575" cy="640080"/>
+            <a:off x="1371600" y="4636008"/>
+            <a:ext cx="10088575" cy="548640"/>
           </a:xfrm>
           <a:prstGeom prst="rect">
             <a:avLst/>
@@ -8986,11 +9416,54 @@
             <a:r>
               <a:rPr sz="1900" i="0" b="0">
                 <a:solidFill>
+                  <a:srgbClr val="6E625B"/>
+                </a:solidFill>
+                <a:latin typeface="Calibri"/>
+              </a:rPr>
+              <a:t>Cross-sectional study</a:t>
+            </a:r>
+          </a:p>
+        </p:txBody>
+      </p:sp>
+      <p:sp>
+        <p:nvSpPr>
+          <p:cNvPr id="21" name="TextBox 20"/>
+          <p:cNvSpPr txBox="1"/>
+          <p:nvPr/>
+        </p:nvSpPr>
+        <p:spPr>
+          <a:xfrm>
+            <a:off x="548640" y="5358384"/>
+            <a:ext cx="11094415" cy="685800"/>
+          </a:xfrm>
+          <a:prstGeom prst="rect">
+            <a:avLst/>
+          </a:prstGeom>
+          <a:noFill/>
+        </p:spPr>
+        <p:txBody>
+          <a:bodyPr wrap="square" anchor="t" lIns="0" rIns="0" tIns="0" bIns="0">
+            <a:spAutoFit/>
+          </a:bodyPr>
+          <a:lstStyle/>
+          <a:p>
+            <a:r>
+              <a:rPr sz="1500" i="0" b="1">
+                <a:solidFill>
+                  <a:srgbClr val="2F6F7A"/>
+                </a:solidFill>
+                <a:latin typeface="Calibri"/>
+              </a:rPr>
+              <a:t>Why:  </a:t>
+            </a:r>
+            <a:r>
+              <a:rPr sz="1500" i="0" b="0">
+                <a:solidFill>
                   <a:srgbClr val="2B211C"/>
                 </a:solidFill>
                 <a:latin typeface="Calibri"/>
               </a:rPr>
-              <a:t>Cross-sectional study</a:t>
+              <a:t>It starts from the outcome (liver failure) and looks back at exposure. A goes forward, C randomises, D measures one time point.</a:t>
             </a:r>
           </a:p>
         </p:txBody>
@@ -9103,7 +9576,7 @@
                 </a:solidFill>
                 <a:latin typeface="Calibri"/>
               </a:rPr>
-              <a:t>SECTION 3  ·  QUESTION 1 OF 5  ·  ANSWER</a:t>
+              <a:t>SECTION 3  ·  QUESTION 2 OF 5</a:t>
             </a:r>
           </a:p>
         </p:txBody>
@@ -9137,7 +9610,7 @@
                 </a:solidFill>
                 <a:latin typeface="Cambria"/>
               </a:rPr>
-              <a:t>Check your answer</a:t>
+              <a:t>Your turn</a:t>
             </a:r>
           </a:p>
         </p:txBody>
@@ -9206,7 +9679,7 @@
                 </a:solidFill>
                 <a:latin typeface="Calibri"/>
               </a:rPr>
-              <a:t>16 / 26</a:t>
+              <a:t>16 / 25</a:t>
             </a:r>
           </a:p>
         </p:txBody>
@@ -9220,7 +9693,7 @@
           <p:nvPr/>
         </p:nvPicPr>
         <p:blipFill>
-          <a:blip r:embed="rId2"/>
+          <a:blip r:embed="rId3"/>
           <a:stretch>
             <a:fillRect/>
           </a:stretch>
@@ -9264,7 +9737,7 @@
                 </a:solidFill>
                 <a:latin typeface="Calibri"/>
               </a:rPr>
-              <a:t>Researchers compare past drug use in 200 patients with liver failure and 400 without. What design is this?</a:t>
+              <a:t>Which study is experimental?</a:t>
             </a:r>
           </a:p>
         </p:txBody>
@@ -9277,8 +9750,8 @@
         </p:nvSpPr>
         <p:spPr>
           <a:xfrm>
-            <a:off x="548640" y="2606040"/>
-            <a:ext cx="11094415" cy="548640"/>
+            <a:off x="548640" y="2697480"/>
+            <a:ext cx="11094415" cy="640080"/>
           </a:xfrm>
           <a:prstGeom prst="roundRect">
             <a:avLst>
@@ -9286,7 +9759,7 @@
             </a:avLst>
           </a:prstGeom>
           <a:solidFill>
-            <a:srgbClr val="F5F4F4"/>
+            <a:srgbClr val="FAF4F2"/>
           </a:solidFill>
           <a:ln>
             <a:noFill/>
@@ -9323,14 +9796,14 @@
         </p:nvSpPr>
         <p:spPr>
           <a:xfrm>
-            <a:off x="713232" y="2670048"/>
+            <a:off x="713232" y="2807208"/>
             <a:ext cx="420624" cy="420624"/>
           </a:xfrm>
           <a:prstGeom prst="ellipse">
             <a:avLst/>
           </a:prstGeom>
           <a:solidFill>
-            <a:srgbClr val="E2E0DE"/>
+            <a:srgbClr val="A4472B"/>
           </a:solidFill>
           <a:ln>
             <a:noFill/>
@@ -9359,7 +9832,7 @@
             <a:r>
               <a:rPr sz="1500" i="0" b="1">
                 <a:solidFill>
-                  <a:srgbClr val="6E625B"/>
+                  <a:srgbClr val="FFFFFF"/>
                 </a:solidFill>
                 <a:latin typeface="Calibri"/>
               </a:rPr>
@@ -9376,8 +9849,8 @@
         </p:nvSpPr>
         <p:spPr>
           <a:xfrm>
-            <a:off x="1371600" y="2606040"/>
-            <a:ext cx="10088575" cy="548640"/>
+            <a:off x="1371600" y="2697480"/>
+            <a:ext cx="10088575" cy="640080"/>
           </a:xfrm>
           <a:prstGeom prst="rect">
             <a:avLst/>
@@ -9393,11 +9866,11 @@
             <a:r>
               <a:rPr sz="1900" i="0" b="0">
                 <a:solidFill>
-                  <a:srgbClr val="6E625B"/>
-                </a:solidFill>
-                <a:latin typeface="Calibri"/>
-              </a:rPr>
-              <a:t>Cohort study</a:t>
+                  <a:srgbClr val="2B211C"/>
+                </a:solidFill>
+                <a:latin typeface="Calibri"/>
+              </a:rPr>
+              <a:t>A cohort study of smokers</a:t>
             </a:r>
           </a:p>
         </p:txBody>
@@ -9410,8 +9883,8 @@
         </p:nvSpPr>
         <p:spPr>
           <a:xfrm>
-            <a:off x="548640" y="3282696"/>
-            <a:ext cx="11094415" cy="548640"/>
+            <a:off x="548640" y="3465576"/>
+            <a:ext cx="11094415" cy="640080"/>
           </a:xfrm>
           <a:prstGeom prst="roundRect">
             <a:avLst>
@@ -9419,7 +9892,7 @@
             </a:avLst>
           </a:prstGeom>
           <a:solidFill>
-            <a:srgbClr val="2F6F7A"/>
+            <a:srgbClr val="FAF4F2"/>
           </a:solidFill>
           <a:ln>
             <a:noFill/>
@@ -9456,14 +9929,14 @@
         </p:nvSpPr>
         <p:spPr>
           <a:xfrm>
-            <a:off x="713232" y="3346703"/>
+            <a:off x="713232" y="3575304"/>
             <a:ext cx="420624" cy="420624"/>
           </a:xfrm>
           <a:prstGeom prst="ellipse">
             <a:avLst/>
           </a:prstGeom>
           <a:solidFill>
-            <a:srgbClr val="FFFFFF"/>
+            <a:srgbClr val="A4472B"/>
           </a:solidFill>
           <a:ln>
             <a:noFill/>
@@ -9492,7 +9965,7 @@
             <a:r>
               <a:rPr sz="1500" i="0" b="1">
                 <a:solidFill>
-                  <a:srgbClr val="2F6F7A"/>
+                  <a:srgbClr val="FFFFFF"/>
                 </a:solidFill>
                 <a:latin typeface="Calibri"/>
               </a:rPr>
@@ -9509,8 +9982,8 @@
         </p:nvSpPr>
         <p:spPr>
           <a:xfrm>
-            <a:off x="1371600" y="3282696"/>
-            <a:ext cx="10088575" cy="548640"/>
+            <a:off x="1371600" y="3465576"/>
+            <a:ext cx="10088575" cy="640080"/>
           </a:xfrm>
           <a:prstGeom prst="rect">
             <a:avLst/>
@@ -9524,13 +9997,13 @@
           <a:lstStyle/>
           <a:p>
             <a:r>
-              <a:rPr sz="1900" i="0" b="1">
-                <a:solidFill>
-                  <a:srgbClr val="FFFFFF"/>
-                </a:solidFill>
-                <a:latin typeface="Calibri"/>
-              </a:rPr>
-              <a:t>Case-control study</a:t>
+              <a:rPr sz="1900" i="0" b="0">
+                <a:solidFill>
+                  <a:srgbClr val="2B211C"/>
+                </a:solidFill>
+                <a:latin typeface="Calibri"/>
+              </a:rPr>
+              <a:t>A case report of a rash</a:t>
             </a:r>
           </a:p>
         </p:txBody>
@@ -9543,8 +10016,8 @@
         </p:nvSpPr>
         <p:spPr>
           <a:xfrm>
-            <a:off x="548640" y="3959352"/>
-            <a:ext cx="11094415" cy="548640"/>
+            <a:off x="548640" y="4233672"/>
+            <a:ext cx="11094415" cy="640080"/>
           </a:xfrm>
           <a:prstGeom prst="roundRect">
             <a:avLst>
@@ -9552,7 +10025,7 @@
             </a:avLst>
           </a:prstGeom>
           <a:solidFill>
-            <a:srgbClr val="F5F4F4"/>
+            <a:srgbClr val="FAF4F2"/>
           </a:solidFill>
           <a:ln>
             <a:noFill/>
@@ -9589,14 +10062,14 @@
         </p:nvSpPr>
         <p:spPr>
           <a:xfrm>
-            <a:off x="713232" y="4023360"/>
+            <a:off x="713232" y="4343400"/>
             <a:ext cx="420624" cy="420624"/>
           </a:xfrm>
           <a:prstGeom prst="ellipse">
             <a:avLst/>
           </a:prstGeom>
           <a:solidFill>
-            <a:srgbClr val="E2E0DE"/>
+            <a:srgbClr val="A4472B"/>
           </a:solidFill>
           <a:ln>
             <a:noFill/>
@@ -9625,7 +10098,7 @@
             <a:r>
               <a:rPr sz="1500" i="0" b="1">
                 <a:solidFill>
-                  <a:srgbClr val="6E625B"/>
+                  <a:srgbClr val="FFFFFF"/>
                 </a:solidFill>
                 <a:latin typeface="Calibri"/>
               </a:rPr>
@@ -9642,8 +10115,8 @@
         </p:nvSpPr>
         <p:spPr>
           <a:xfrm>
-            <a:off x="1371600" y="3959352"/>
-            <a:ext cx="10088575" cy="548640"/>
+            <a:off x="1371600" y="4233672"/>
+            <a:ext cx="10088575" cy="640080"/>
           </a:xfrm>
           <a:prstGeom prst="rect">
             <a:avLst/>
@@ -9659,11 +10132,11 @@
             <a:r>
               <a:rPr sz="1900" i="0" b="0">
                 <a:solidFill>
-                  <a:srgbClr val="6E625B"/>
-                </a:solidFill>
-                <a:latin typeface="Calibri"/>
-              </a:rPr>
-              <a:t>Randomised controlled trial</a:t>
+                  <a:srgbClr val="2B211C"/>
+                </a:solidFill>
+                <a:latin typeface="Calibri"/>
+              </a:rPr>
+              <a:t>A trial that randomly assigns patients to a new drug or placebo</a:t>
             </a:r>
           </a:p>
         </p:txBody>
@@ -9676,8 +10149,8 @@
         </p:nvSpPr>
         <p:spPr>
           <a:xfrm>
-            <a:off x="548640" y="4636008"/>
-            <a:ext cx="11094415" cy="548640"/>
+            <a:off x="548640" y="5001768"/>
+            <a:ext cx="11094415" cy="640080"/>
           </a:xfrm>
           <a:prstGeom prst="roundRect">
             <a:avLst>
@@ -9685,7 +10158,7 @@
             </a:avLst>
           </a:prstGeom>
           <a:solidFill>
-            <a:srgbClr val="F5F4F4"/>
+            <a:srgbClr val="FAF4F2"/>
           </a:solidFill>
           <a:ln>
             <a:noFill/>
@@ -9722,14 +10195,14 @@
         </p:nvSpPr>
         <p:spPr>
           <a:xfrm>
-            <a:off x="713232" y="4700016"/>
+            <a:off x="713232" y="5111496"/>
             <a:ext cx="420624" cy="420624"/>
           </a:xfrm>
           <a:prstGeom prst="ellipse">
             <a:avLst/>
           </a:prstGeom>
           <a:solidFill>
-            <a:srgbClr val="E2E0DE"/>
+            <a:srgbClr val="A4472B"/>
           </a:solidFill>
           <a:ln>
             <a:noFill/>
@@ -9758,7 +10231,7 @@
             <a:r>
               <a:rPr sz="1500" i="0" b="1">
                 <a:solidFill>
-                  <a:srgbClr val="6E625B"/>
+                  <a:srgbClr val="FFFFFF"/>
                 </a:solidFill>
                 <a:latin typeface="Calibri"/>
               </a:rPr>
@@ -9775,8 +10248,8 @@
         </p:nvSpPr>
         <p:spPr>
           <a:xfrm>
-            <a:off x="1371600" y="4636008"/>
-            <a:ext cx="10088575" cy="548640"/>
+            <a:off x="1371600" y="5001768"/>
+            <a:ext cx="10088575" cy="640080"/>
           </a:xfrm>
           <a:prstGeom prst="rect">
             <a:avLst/>
@@ -9792,54 +10265,11 @@
             <a:r>
               <a:rPr sz="1900" i="0" b="0">
                 <a:solidFill>
-                  <a:srgbClr val="6E625B"/>
-                </a:solidFill>
-                <a:latin typeface="Calibri"/>
-              </a:rPr>
-              <a:t>Cross-sectional study</a:t>
-            </a:r>
-          </a:p>
-        </p:txBody>
-      </p:sp>
-      <p:sp>
-        <p:nvSpPr>
-          <p:cNvPr id="21" name="TextBox 20"/>
-          <p:cNvSpPr txBox="1"/>
-          <p:nvPr/>
-        </p:nvSpPr>
-        <p:spPr>
-          <a:xfrm>
-            <a:off x="548640" y="5358384"/>
-            <a:ext cx="11094415" cy="685800"/>
-          </a:xfrm>
-          <a:prstGeom prst="rect">
-            <a:avLst/>
-          </a:prstGeom>
-          <a:noFill/>
-        </p:spPr>
-        <p:txBody>
-          <a:bodyPr wrap="square" anchor="t" lIns="0" rIns="0" tIns="0" bIns="0">
-            <a:spAutoFit/>
-          </a:bodyPr>
-          <a:lstStyle/>
-          <a:p>
-            <a:r>
-              <a:rPr sz="1500" i="0" b="1">
-                <a:solidFill>
-                  <a:srgbClr val="2F6F7A"/>
-                </a:solidFill>
-                <a:latin typeface="Calibri"/>
-              </a:rPr>
-              <a:t>Why:  </a:t>
-            </a:r>
-            <a:r>
-              <a:rPr sz="1500" i="0" b="0">
-                <a:solidFill>
                   <a:srgbClr val="2B211C"/>
                 </a:solidFill>
                 <a:latin typeface="Calibri"/>
               </a:rPr>
-              <a:t>It starts from the outcome (liver failure) and looks back at exposure. A goes forward, C randomises, D measures one time point.</a:t>
+              <a:t>A survey of antibiotic use</a:t>
             </a:r>
           </a:p>
         </p:txBody>
@@ -9952,7 +10382,7 @@
                 </a:solidFill>
                 <a:latin typeface="Calibri"/>
               </a:rPr>
-              <a:t>SECTION 3  ·  QUESTION 2 OF 5</a:t>
+              <a:t>SECTION 3  ·  QUESTION 2 OF 5  ·  ANSWER</a:t>
             </a:r>
           </a:p>
         </p:txBody>
@@ -9986,7 +10416,7 @@
                 </a:solidFill>
                 <a:latin typeface="Cambria"/>
               </a:rPr>
-              <a:t>Your turn</a:t>
+              <a:t>Check your answer</a:t>
             </a:r>
           </a:p>
         </p:txBody>
@@ -10055,7 +10485,7 @@
                 </a:solidFill>
                 <a:latin typeface="Calibri"/>
               </a:rPr>
-              <a:t>17 / 26</a:t>
+              <a:t>17 / 25</a:t>
             </a:r>
           </a:p>
         </p:txBody>
@@ -10069,7 +10499,7 @@
           <p:nvPr/>
         </p:nvPicPr>
         <p:blipFill>
-          <a:blip r:embed="rId3"/>
+          <a:blip r:embed="rId2"/>
           <a:stretch>
             <a:fillRect/>
           </a:stretch>
@@ -10126,8 +10556,8 @@
         </p:nvSpPr>
         <p:spPr>
           <a:xfrm>
-            <a:off x="548640" y="2697480"/>
-            <a:ext cx="11094415" cy="640080"/>
+            <a:off x="548640" y="2606040"/>
+            <a:ext cx="11094415" cy="548640"/>
           </a:xfrm>
           <a:prstGeom prst="roundRect">
             <a:avLst>
@@ -10135,7 +10565,7 @@
             </a:avLst>
           </a:prstGeom>
           <a:solidFill>
-            <a:srgbClr val="FAF4F2"/>
+            <a:srgbClr val="F5F4F4"/>
           </a:solidFill>
           <a:ln>
             <a:noFill/>
@@ -10172,14 +10602,14 @@
         </p:nvSpPr>
         <p:spPr>
           <a:xfrm>
-            <a:off x="713232" y="2807208"/>
+            <a:off x="713232" y="2670048"/>
             <a:ext cx="420624" cy="420624"/>
           </a:xfrm>
           <a:prstGeom prst="ellipse">
             <a:avLst/>
           </a:prstGeom>
           <a:solidFill>
-            <a:srgbClr val="A4472B"/>
+            <a:srgbClr val="E2E0DE"/>
           </a:solidFill>
           <a:ln>
             <a:noFill/>
@@ -10208,7 +10638,7 @@
             <a:r>
               <a:rPr sz="1500" i="0" b="1">
                 <a:solidFill>
-                  <a:srgbClr val="FFFFFF"/>
+                  <a:srgbClr val="6E625B"/>
                 </a:solidFill>
                 <a:latin typeface="Calibri"/>
               </a:rPr>
@@ -10225,8 +10655,8 @@
         </p:nvSpPr>
         <p:spPr>
           <a:xfrm>
-            <a:off x="1371600" y="2697480"/>
-            <a:ext cx="10088575" cy="640080"/>
+            <a:off x="1371600" y="2606040"/>
+            <a:ext cx="10088575" cy="548640"/>
           </a:xfrm>
           <a:prstGeom prst="rect">
             <a:avLst/>
@@ -10242,7 +10672,7 @@
             <a:r>
               <a:rPr sz="1900" i="0" b="0">
                 <a:solidFill>
-                  <a:srgbClr val="2B211C"/>
+                  <a:srgbClr val="6E625B"/>
                 </a:solidFill>
                 <a:latin typeface="Calibri"/>
               </a:rPr>
@@ -10259,8 +10689,8 @@
         </p:nvSpPr>
         <p:spPr>
           <a:xfrm>
-            <a:off x="548640" y="3465576"/>
-            <a:ext cx="11094415" cy="640080"/>
+            <a:off x="548640" y="3282696"/>
+            <a:ext cx="11094415" cy="548640"/>
           </a:xfrm>
           <a:prstGeom prst="roundRect">
             <a:avLst>
@@ -10268,7 +10698,7 @@
             </a:avLst>
           </a:prstGeom>
           <a:solidFill>
-            <a:srgbClr val="FAF4F2"/>
+            <a:srgbClr val="F5F4F4"/>
           </a:solidFill>
           <a:ln>
             <a:noFill/>
@@ -10305,14 +10735,14 @@
         </p:nvSpPr>
         <p:spPr>
           <a:xfrm>
-            <a:off x="713232" y="3575304"/>
+            <a:off x="713232" y="3346703"/>
             <a:ext cx="420624" cy="420624"/>
           </a:xfrm>
           <a:prstGeom prst="ellipse">
             <a:avLst/>
           </a:prstGeom>
           <a:solidFill>
-            <a:srgbClr val="A4472B"/>
+            <a:srgbClr val="E2E0DE"/>
           </a:solidFill>
           <a:ln>
             <a:noFill/>
@@ -10341,7 +10771,7 @@
             <a:r>
               <a:rPr sz="1500" i="0" b="1">
                 <a:solidFill>
-                  <a:srgbClr val="FFFFFF"/>
+                  <a:srgbClr val="6E625B"/>
                 </a:solidFill>
                 <a:latin typeface="Calibri"/>
               </a:rPr>
@@ -10358,8 +10788,8 @@
         </p:nvSpPr>
         <p:spPr>
           <a:xfrm>
-            <a:off x="1371600" y="3465576"/>
-            <a:ext cx="10088575" cy="640080"/>
+            <a:off x="1371600" y="3282696"/>
+            <a:ext cx="10088575" cy="548640"/>
           </a:xfrm>
           <a:prstGeom prst="rect">
             <a:avLst/>
@@ -10375,7 +10805,7 @@
             <a:r>
               <a:rPr sz="1900" i="0" b="0">
                 <a:solidFill>
-                  <a:srgbClr val="2B211C"/>
+                  <a:srgbClr val="6E625B"/>
                 </a:solidFill>
                 <a:latin typeface="Calibri"/>
               </a:rPr>
@@ -10392,8 +10822,8 @@
         </p:nvSpPr>
         <p:spPr>
           <a:xfrm>
-            <a:off x="548640" y="4233672"/>
-            <a:ext cx="11094415" cy="640080"/>
+            <a:off x="548640" y="3959352"/>
+            <a:ext cx="11094415" cy="548640"/>
           </a:xfrm>
           <a:prstGeom prst="roundRect">
             <a:avLst>
@@ -10401,7 +10831,7 @@
             </a:avLst>
           </a:prstGeom>
           <a:solidFill>
-            <a:srgbClr val="FAF4F2"/>
+            <a:srgbClr val="2F6F7A"/>
           </a:solidFill>
           <a:ln>
             <a:noFill/>
@@ -10438,14 +10868,14 @@
         </p:nvSpPr>
         <p:spPr>
           <a:xfrm>
-            <a:off x="713232" y="4343400"/>
+            <a:off x="713232" y="4023360"/>
             <a:ext cx="420624" cy="420624"/>
           </a:xfrm>
           <a:prstGeom prst="ellipse">
             <a:avLst/>
           </a:prstGeom>
           <a:solidFill>
-            <a:srgbClr val="A4472B"/>
+            <a:srgbClr val="FFFFFF"/>
           </a:solidFill>
           <a:ln>
             <a:noFill/>
@@ -10474,7 +10904,7 @@
             <a:r>
               <a:rPr sz="1500" i="0" b="1">
                 <a:solidFill>
-                  <a:srgbClr val="FFFFFF"/>
+                  <a:srgbClr val="2F6F7A"/>
                 </a:solidFill>
                 <a:latin typeface="Calibri"/>
               </a:rPr>
@@ -10491,8 +10921,8 @@
         </p:nvSpPr>
         <p:spPr>
           <a:xfrm>
-            <a:off x="1371600" y="4233672"/>
-            <a:ext cx="10088575" cy="640080"/>
+            <a:off x="1371600" y="3959352"/>
+            <a:ext cx="10088575" cy="548640"/>
           </a:xfrm>
           <a:prstGeom prst="rect">
             <a:avLst/>
@@ -10506,9 +10936,9 @@
           <a:lstStyle/>
           <a:p>
             <a:r>
-              <a:rPr sz="1900" i="0" b="0">
-                <a:solidFill>
-                  <a:srgbClr val="2B211C"/>
+              <a:rPr sz="1900" i="0" b="1">
+                <a:solidFill>
+                  <a:srgbClr val="FFFFFF"/>
                 </a:solidFill>
                 <a:latin typeface="Calibri"/>
               </a:rPr>
@@ -10525,8 +10955,8 @@
         </p:nvSpPr>
         <p:spPr>
           <a:xfrm>
-            <a:off x="548640" y="5001768"/>
-            <a:ext cx="11094415" cy="640080"/>
+            <a:off x="548640" y="4636008"/>
+            <a:ext cx="11094415" cy="548640"/>
           </a:xfrm>
           <a:prstGeom prst="roundRect">
             <a:avLst>
@@ -10534,7 +10964,7 @@
             </a:avLst>
           </a:prstGeom>
           <a:solidFill>
-            <a:srgbClr val="FAF4F2"/>
+            <a:srgbClr val="F5F4F4"/>
           </a:solidFill>
           <a:ln>
             <a:noFill/>
@@ -10571,14 +11001,14 @@
         </p:nvSpPr>
         <p:spPr>
           <a:xfrm>
-            <a:off x="713232" y="5111496"/>
+            <a:off x="713232" y="4700016"/>
             <a:ext cx="420624" cy="420624"/>
           </a:xfrm>
           <a:prstGeom prst="ellipse">
             <a:avLst/>
           </a:prstGeom>
           <a:solidFill>
-            <a:srgbClr val="A4472B"/>
+            <a:srgbClr val="E2E0DE"/>
           </a:solidFill>
           <a:ln>
             <a:noFill/>
@@ -10607,7 +11037,7 @@
             <a:r>
               <a:rPr sz="1500" i="0" b="1">
                 <a:solidFill>
-                  <a:srgbClr val="FFFFFF"/>
+                  <a:srgbClr val="6E625B"/>
                 </a:solidFill>
                 <a:latin typeface="Calibri"/>
               </a:rPr>
@@ -10624,8 +11054,8 @@
         </p:nvSpPr>
         <p:spPr>
           <a:xfrm>
-            <a:off x="1371600" y="5001768"/>
-            <a:ext cx="10088575" cy="640080"/>
+            <a:off x="1371600" y="4636008"/>
+            <a:ext cx="10088575" cy="548640"/>
           </a:xfrm>
           <a:prstGeom prst="rect">
             <a:avLst/>
@@ -10641,11 +11071,54 @@
             <a:r>
               <a:rPr sz="1900" i="0" b="0">
                 <a:solidFill>
+                  <a:srgbClr val="6E625B"/>
+                </a:solidFill>
+                <a:latin typeface="Calibri"/>
+              </a:rPr>
+              <a:t>A survey of antibiotic use</a:t>
+            </a:r>
+          </a:p>
+        </p:txBody>
+      </p:sp>
+      <p:sp>
+        <p:nvSpPr>
+          <p:cNvPr id="21" name="TextBox 20"/>
+          <p:cNvSpPr txBox="1"/>
+          <p:nvPr/>
+        </p:nvSpPr>
+        <p:spPr>
+          <a:xfrm>
+            <a:off x="548640" y="5358384"/>
+            <a:ext cx="11094415" cy="685800"/>
+          </a:xfrm>
+          <a:prstGeom prst="rect">
+            <a:avLst/>
+          </a:prstGeom>
+          <a:noFill/>
+        </p:spPr>
+        <p:txBody>
+          <a:bodyPr wrap="square" anchor="t" lIns="0" rIns="0" tIns="0" bIns="0">
+            <a:spAutoFit/>
+          </a:bodyPr>
+          <a:lstStyle/>
+          <a:p>
+            <a:r>
+              <a:rPr sz="1500" i="0" b="1">
+                <a:solidFill>
+                  <a:srgbClr val="2F6F7A"/>
+                </a:solidFill>
+                <a:latin typeface="Calibri"/>
+              </a:rPr>
+              <a:t>Why:  </a:t>
+            </a:r>
+            <a:r>
+              <a:rPr sz="1500" i="0" b="0">
+                <a:solidFill>
                   <a:srgbClr val="2B211C"/>
                 </a:solidFill>
                 <a:latin typeface="Calibri"/>
               </a:rPr>
-              <a:t>A survey of antibiotic use</a:t>
+              <a:t>The researcher assigns the treatment. A, B and D only observe.</a:t>
             </a:r>
           </a:p>
         </p:txBody>
@@ -10758,7 +11231,7 @@
                 </a:solidFill>
                 <a:latin typeface="Calibri"/>
               </a:rPr>
-              <a:t>SECTION 3  ·  QUESTION 2 OF 5  ·  ANSWER</a:t>
+              <a:t>SECTION 3  ·  QUESTION 3 OF 5</a:t>
             </a:r>
           </a:p>
         </p:txBody>
@@ -10792,7 +11265,7 @@
                 </a:solidFill>
                 <a:latin typeface="Cambria"/>
               </a:rPr>
-              <a:t>Check your answer</a:t>
+              <a:t>Your turn</a:t>
             </a:r>
           </a:p>
         </p:txBody>
@@ -10861,7 +11334,7 @@
                 </a:solidFill>
                 <a:latin typeface="Calibri"/>
               </a:rPr>
-              <a:t>18 / 26</a:t>
+              <a:t>18 / 25</a:t>
             </a:r>
           </a:p>
         </p:txBody>
@@ -10875,7 +11348,7 @@
           <p:nvPr/>
         </p:nvPicPr>
         <p:blipFill>
-          <a:blip r:embed="rId2"/>
+          <a:blip r:embed="rId3"/>
           <a:stretch>
             <a:fillRect/>
           </a:stretch>
@@ -10919,7 +11392,7 @@
                 </a:solidFill>
                 <a:latin typeface="Calibri"/>
               </a:rPr>
-              <a:t>Which study is experimental?</a:t>
+              <a:t>Which sits at the top of the evidence pyramid?</a:t>
             </a:r>
           </a:p>
         </p:txBody>
@@ -10932,8 +11405,8 @@
         </p:nvSpPr>
         <p:spPr>
           <a:xfrm>
-            <a:off x="548640" y="2606040"/>
-            <a:ext cx="11094415" cy="548640"/>
+            <a:off x="548640" y="2697480"/>
+            <a:ext cx="11094415" cy="640080"/>
           </a:xfrm>
           <a:prstGeom prst="roundRect">
             <a:avLst>
@@ -10941,7 +11414,7 @@
             </a:avLst>
           </a:prstGeom>
           <a:solidFill>
-            <a:srgbClr val="F5F4F4"/>
+            <a:srgbClr val="FAF4F2"/>
           </a:solidFill>
           <a:ln>
             <a:noFill/>
@@ -10978,14 +11451,14 @@
         </p:nvSpPr>
         <p:spPr>
           <a:xfrm>
-            <a:off x="713232" y="2670048"/>
+            <a:off x="713232" y="2807208"/>
             <a:ext cx="420624" cy="420624"/>
           </a:xfrm>
           <a:prstGeom prst="ellipse">
             <a:avLst/>
           </a:prstGeom>
           <a:solidFill>
-            <a:srgbClr val="E2E0DE"/>
+            <a:srgbClr val="A4472B"/>
           </a:solidFill>
           <a:ln>
             <a:noFill/>
@@ -11014,7 +11487,7 @@
             <a:r>
               <a:rPr sz="1500" i="0" b="1">
                 <a:solidFill>
-                  <a:srgbClr val="6E625B"/>
+                  <a:srgbClr val="FFFFFF"/>
                 </a:solidFill>
                 <a:latin typeface="Calibri"/>
               </a:rPr>
@@ -11031,8 +11504,8 @@
         </p:nvSpPr>
         <p:spPr>
           <a:xfrm>
-            <a:off x="1371600" y="2606040"/>
-            <a:ext cx="10088575" cy="548640"/>
+            <a:off x="1371600" y="2697480"/>
+            <a:ext cx="10088575" cy="640080"/>
           </a:xfrm>
           <a:prstGeom prst="rect">
             <a:avLst/>
@@ -11048,11 +11521,11 @@
             <a:r>
               <a:rPr sz="1900" i="0" b="0">
                 <a:solidFill>
-                  <a:srgbClr val="6E625B"/>
-                </a:solidFill>
-                <a:latin typeface="Calibri"/>
-              </a:rPr>
-              <a:t>A cohort study of smokers</a:t>
+                  <a:srgbClr val="2B211C"/>
+                </a:solidFill>
+                <a:latin typeface="Calibri"/>
+              </a:rPr>
+              <a:t>Systematic review and meta-analysis of good RCTs</a:t>
             </a:r>
           </a:p>
         </p:txBody>
@@ -11065,8 +11538,8 @@
         </p:nvSpPr>
         <p:spPr>
           <a:xfrm>
-            <a:off x="548640" y="3282696"/>
-            <a:ext cx="11094415" cy="548640"/>
+            <a:off x="548640" y="3465576"/>
+            <a:ext cx="11094415" cy="640080"/>
           </a:xfrm>
           <a:prstGeom prst="roundRect">
             <a:avLst>
@@ -11074,7 +11547,7 @@
             </a:avLst>
           </a:prstGeom>
           <a:solidFill>
-            <a:srgbClr val="F5F4F4"/>
+            <a:srgbClr val="FAF4F2"/>
           </a:solidFill>
           <a:ln>
             <a:noFill/>
@@ -11111,14 +11584,14 @@
         </p:nvSpPr>
         <p:spPr>
           <a:xfrm>
-            <a:off x="713232" y="3346703"/>
+            <a:off x="713232" y="3575304"/>
             <a:ext cx="420624" cy="420624"/>
           </a:xfrm>
           <a:prstGeom prst="ellipse">
             <a:avLst/>
           </a:prstGeom>
           <a:solidFill>
-            <a:srgbClr val="E2E0DE"/>
+            <a:srgbClr val="A4472B"/>
           </a:solidFill>
           <a:ln>
             <a:noFill/>
@@ -11147,7 +11620,7 @@
             <a:r>
               <a:rPr sz="1500" i="0" b="1">
                 <a:solidFill>
-                  <a:srgbClr val="6E625B"/>
+                  <a:srgbClr val="FFFFFF"/>
                 </a:solidFill>
                 <a:latin typeface="Calibri"/>
               </a:rPr>
@@ -11164,8 +11637,8 @@
         </p:nvSpPr>
         <p:spPr>
           <a:xfrm>
-            <a:off x="1371600" y="3282696"/>
-            <a:ext cx="10088575" cy="548640"/>
+            <a:off x="1371600" y="3465576"/>
+            <a:ext cx="10088575" cy="640080"/>
           </a:xfrm>
           <a:prstGeom prst="rect">
             <a:avLst/>
@@ -11181,11 +11654,11 @@
             <a:r>
               <a:rPr sz="1900" i="0" b="0">
                 <a:solidFill>
-                  <a:srgbClr val="6E625B"/>
-                </a:solidFill>
-                <a:latin typeface="Calibri"/>
-              </a:rPr>
-              <a:t>A case report of a rash</a:t>
+                  <a:srgbClr val="2B211C"/>
+                </a:solidFill>
+                <a:latin typeface="Calibri"/>
+              </a:rPr>
+              <a:t>Expert opinion</a:t>
             </a:r>
           </a:p>
         </p:txBody>
@@ -11198,8 +11671,8 @@
         </p:nvSpPr>
         <p:spPr>
           <a:xfrm>
-            <a:off x="548640" y="3959352"/>
-            <a:ext cx="11094415" cy="548640"/>
+            <a:off x="548640" y="4233672"/>
+            <a:ext cx="11094415" cy="640080"/>
           </a:xfrm>
           <a:prstGeom prst="roundRect">
             <a:avLst>
@@ -11207,7 +11680,7 @@
             </a:avLst>
           </a:prstGeom>
           <a:solidFill>
-            <a:srgbClr val="2F6F7A"/>
+            <a:srgbClr val="FAF4F2"/>
           </a:solidFill>
           <a:ln>
             <a:noFill/>
@@ -11244,14 +11717,14 @@
         </p:nvSpPr>
         <p:spPr>
           <a:xfrm>
-            <a:off x="713232" y="4023360"/>
+            <a:off x="713232" y="4343400"/>
             <a:ext cx="420624" cy="420624"/>
           </a:xfrm>
           <a:prstGeom prst="ellipse">
             <a:avLst/>
           </a:prstGeom>
           <a:solidFill>
-            <a:srgbClr val="FFFFFF"/>
+            <a:srgbClr val="A4472B"/>
           </a:solidFill>
           <a:ln>
             <a:noFill/>
@@ -11280,7 +11753,7 @@
             <a:r>
               <a:rPr sz="1500" i="0" b="1">
                 <a:solidFill>
-                  <a:srgbClr val="2F6F7A"/>
+                  <a:srgbClr val="FFFFFF"/>
                 </a:solidFill>
                 <a:latin typeface="Calibri"/>
               </a:rPr>
@@ -11297,8 +11770,8 @@
         </p:nvSpPr>
         <p:spPr>
           <a:xfrm>
-            <a:off x="1371600" y="3959352"/>
-            <a:ext cx="10088575" cy="548640"/>
+            <a:off x="1371600" y="4233672"/>
+            <a:ext cx="10088575" cy="640080"/>
           </a:xfrm>
           <a:prstGeom prst="rect">
             <a:avLst/>
@@ -11312,13 +11785,13 @@
           <a:lstStyle/>
           <a:p>
             <a:r>
-              <a:rPr sz="1900" i="0" b="1">
-                <a:solidFill>
-                  <a:srgbClr val="FFFFFF"/>
-                </a:solidFill>
-                <a:latin typeface="Calibri"/>
-              </a:rPr>
-              <a:t>A trial that randomly assigns patients to a new drug or placebo</a:t>
+              <a:rPr sz="1900" i="0" b="0">
+                <a:solidFill>
+                  <a:srgbClr val="2B211C"/>
+                </a:solidFill>
+                <a:latin typeface="Calibri"/>
+              </a:rPr>
+              <a:t>Case series</a:t>
             </a:r>
           </a:p>
         </p:txBody>
@@ -11331,8 +11804,8 @@
         </p:nvSpPr>
         <p:spPr>
           <a:xfrm>
-            <a:off x="548640" y="4636008"/>
-            <a:ext cx="11094415" cy="548640"/>
+            <a:off x="548640" y="5001768"/>
+            <a:ext cx="11094415" cy="640080"/>
           </a:xfrm>
           <a:prstGeom prst="roundRect">
             <a:avLst>
@@ -11340,7 +11813,7 @@
             </a:avLst>
           </a:prstGeom>
           <a:solidFill>
-            <a:srgbClr val="F5F4F4"/>
+            <a:srgbClr val="FAF4F2"/>
           </a:solidFill>
           <a:ln>
             <a:noFill/>
@@ -11377,14 +11850,14 @@
         </p:nvSpPr>
         <p:spPr>
           <a:xfrm>
-            <a:off x="713232" y="4700016"/>
+            <a:off x="713232" y="5111496"/>
             <a:ext cx="420624" cy="420624"/>
           </a:xfrm>
           <a:prstGeom prst="ellipse">
             <a:avLst/>
           </a:prstGeom>
           <a:solidFill>
-            <a:srgbClr val="E2E0DE"/>
+            <a:srgbClr val="A4472B"/>
           </a:solidFill>
           <a:ln>
             <a:noFill/>
@@ -11413,7 +11886,7 @@
             <a:r>
               <a:rPr sz="1500" i="0" b="1">
                 <a:solidFill>
-                  <a:srgbClr val="6E625B"/>
+                  <a:srgbClr val="FFFFFF"/>
                 </a:solidFill>
                 <a:latin typeface="Calibri"/>
               </a:rPr>
@@ -11430,8 +11903,8 @@
         </p:nvSpPr>
         <p:spPr>
           <a:xfrm>
-            <a:off x="1371600" y="4636008"/>
-            <a:ext cx="10088575" cy="548640"/>
+            <a:off x="1371600" y="5001768"/>
+            <a:ext cx="10088575" cy="640080"/>
           </a:xfrm>
           <a:prstGeom prst="rect">
             <a:avLst/>
@@ -11447,54 +11920,11 @@
             <a:r>
               <a:rPr sz="1900" i="0" b="0">
                 <a:solidFill>
-                  <a:srgbClr val="6E625B"/>
-                </a:solidFill>
-                <a:latin typeface="Calibri"/>
-              </a:rPr>
-              <a:t>A survey of antibiotic use</a:t>
-            </a:r>
-          </a:p>
-        </p:txBody>
-      </p:sp>
-      <p:sp>
-        <p:nvSpPr>
-          <p:cNvPr id="21" name="TextBox 20"/>
-          <p:cNvSpPr txBox="1"/>
-          <p:nvPr/>
-        </p:nvSpPr>
-        <p:spPr>
-          <a:xfrm>
-            <a:off x="548640" y="5358384"/>
-            <a:ext cx="11094415" cy="685800"/>
-          </a:xfrm>
-          <a:prstGeom prst="rect">
-            <a:avLst/>
-          </a:prstGeom>
-          <a:noFill/>
-        </p:spPr>
-        <p:txBody>
-          <a:bodyPr wrap="square" anchor="t" lIns="0" rIns="0" tIns="0" bIns="0">
-            <a:spAutoFit/>
-          </a:bodyPr>
-          <a:lstStyle/>
-          <a:p>
-            <a:r>
-              <a:rPr sz="1500" i="0" b="1">
-                <a:solidFill>
-                  <a:srgbClr val="2F6F7A"/>
-                </a:solidFill>
-                <a:latin typeface="Calibri"/>
-              </a:rPr>
-              <a:t>Why:  </a:t>
-            </a:r>
-            <a:r>
-              <a:rPr sz="1500" i="0" b="0">
-                <a:solidFill>
                   <a:srgbClr val="2B211C"/>
                 </a:solidFill>
                 <a:latin typeface="Calibri"/>
               </a:rPr>
-              <a:t>The researcher assigns the treatment. A, B and D only observe.</a:t>
+              <a:t>Cohort study</a:t>
             </a:r>
           </a:p>
         </p:txBody>
@@ -11607,7 +12037,7 @@
                 </a:solidFill>
                 <a:latin typeface="Calibri"/>
               </a:rPr>
-              <a:t>SECTION 3  ·  QUESTION 3 OF 5</a:t>
+              <a:t>SECTION 3  ·  QUESTION 3 OF 5  ·  ANSWER</a:t>
             </a:r>
           </a:p>
         </p:txBody>
@@ -11641,7 +12071,7 @@
                 </a:solidFill>
                 <a:latin typeface="Cambria"/>
               </a:rPr>
-              <a:t>Your turn</a:t>
+              <a:t>Check your answer</a:t>
             </a:r>
           </a:p>
         </p:txBody>
@@ -11710,7 +12140,7 @@
                 </a:solidFill>
                 <a:latin typeface="Calibri"/>
               </a:rPr>
-              <a:t>19 / 26</a:t>
+              <a:t>19 / 25</a:t>
             </a:r>
           </a:p>
         </p:txBody>
@@ -11724,7 +12154,7 @@
           <p:nvPr/>
         </p:nvPicPr>
         <p:blipFill>
-          <a:blip r:embed="rId3"/>
+          <a:blip r:embed="rId2"/>
           <a:stretch>
             <a:fillRect/>
           </a:stretch>
@@ -11781,8 +12211,8 @@
         </p:nvSpPr>
         <p:spPr>
           <a:xfrm>
-            <a:off x="548640" y="2697480"/>
-            <a:ext cx="11094415" cy="640080"/>
+            <a:off x="548640" y="2606040"/>
+            <a:ext cx="11094415" cy="548640"/>
           </a:xfrm>
           <a:prstGeom prst="roundRect">
             <a:avLst>
@@ -11790,7 +12220,7 @@
             </a:avLst>
           </a:prstGeom>
           <a:solidFill>
-            <a:srgbClr val="FAF4F2"/>
+            <a:srgbClr val="2F6F7A"/>
           </a:solidFill>
           <a:ln>
             <a:noFill/>
@@ -11827,14 +12257,14 @@
         </p:nvSpPr>
         <p:spPr>
           <a:xfrm>
-            <a:off x="713232" y="2807208"/>
+            <a:off x="713232" y="2670048"/>
             <a:ext cx="420624" cy="420624"/>
           </a:xfrm>
           <a:prstGeom prst="ellipse">
             <a:avLst/>
           </a:prstGeom>
           <a:solidFill>
-            <a:srgbClr val="A4472B"/>
+            <a:srgbClr val="FFFFFF"/>
           </a:solidFill>
           <a:ln>
             <a:noFill/>
@@ -11863,7 +12293,7 @@
             <a:r>
               <a:rPr sz="1500" i="0" b="1">
                 <a:solidFill>
-                  <a:srgbClr val="FFFFFF"/>
+                  <a:srgbClr val="2F6F7A"/>
                 </a:solidFill>
                 <a:latin typeface="Calibri"/>
               </a:rPr>
@@ -11880,8 +12310,8 @@
         </p:nvSpPr>
         <p:spPr>
           <a:xfrm>
-            <a:off x="1371600" y="2697480"/>
-            <a:ext cx="10088575" cy="640080"/>
+            <a:off x="1371600" y="2606040"/>
+            <a:ext cx="10088575" cy="548640"/>
           </a:xfrm>
           <a:prstGeom prst="rect">
             <a:avLst/>
@@ -11895,9 +12325,9 @@
           <a:lstStyle/>
           <a:p>
             <a:r>
-              <a:rPr sz="1900" i="0" b="0">
-                <a:solidFill>
-                  <a:srgbClr val="2B211C"/>
+              <a:rPr sz="1900" i="0" b="1">
+                <a:solidFill>
+                  <a:srgbClr val="FFFFFF"/>
                 </a:solidFill>
                 <a:latin typeface="Calibri"/>
               </a:rPr>
@@ -11914,8 +12344,8 @@
         </p:nvSpPr>
         <p:spPr>
           <a:xfrm>
-            <a:off x="548640" y="3465576"/>
-            <a:ext cx="11094415" cy="640080"/>
+            <a:off x="548640" y="3282696"/>
+            <a:ext cx="11094415" cy="548640"/>
           </a:xfrm>
           <a:prstGeom prst="roundRect">
             <a:avLst>
@@ -11923,7 +12353,7 @@
             </a:avLst>
           </a:prstGeom>
           <a:solidFill>
-            <a:srgbClr val="FAF4F2"/>
+            <a:srgbClr val="F5F4F4"/>
           </a:solidFill>
           <a:ln>
             <a:noFill/>
@@ -11960,14 +12390,14 @@
         </p:nvSpPr>
         <p:spPr>
           <a:xfrm>
-            <a:off x="713232" y="3575304"/>
+            <a:off x="713232" y="3346703"/>
             <a:ext cx="420624" cy="420624"/>
           </a:xfrm>
           <a:prstGeom prst="ellipse">
             <a:avLst/>
           </a:prstGeom>
           <a:solidFill>
-            <a:srgbClr val="A4472B"/>
+            <a:srgbClr val="E2E0DE"/>
           </a:solidFill>
           <a:ln>
             <a:noFill/>
@@ -11996,7 +12426,7 @@
             <a:r>
               <a:rPr sz="1500" i="0" b="1">
                 <a:solidFill>
-                  <a:srgbClr val="FFFFFF"/>
+                  <a:srgbClr val="6E625B"/>
                 </a:solidFill>
                 <a:latin typeface="Calibri"/>
               </a:rPr>
@@ -12013,8 +12443,8 @@
         </p:nvSpPr>
         <p:spPr>
           <a:xfrm>
-            <a:off x="1371600" y="3465576"/>
-            <a:ext cx="10088575" cy="640080"/>
+            <a:off x="1371600" y="3282696"/>
+            <a:ext cx="10088575" cy="548640"/>
           </a:xfrm>
           <a:prstGeom prst="rect">
             <a:avLst/>
@@ -12030,7 +12460,7 @@
             <a:r>
               <a:rPr sz="1900" i="0" b="0">
                 <a:solidFill>
-                  <a:srgbClr val="2B211C"/>
+                  <a:srgbClr val="6E625B"/>
                 </a:solidFill>
                 <a:latin typeface="Calibri"/>
               </a:rPr>
@@ -12047,8 +12477,8 @@
         </p:nvSpPr>
         <p:spPr>
           <a:xfrm>
-            <a:off x="548640" y="4233672"/>
-            <a:ext cx="11094415" cy="640080"/>
+            <a:off x="548640" y="3959352"/>
+            <a:ext cx="11094415" cy="548640"/>
           </a:xfrm>
           <a:prstGeom prst="roundRect">
             <a:avLst>
@@ -12056,7 +12486,7 @@
             </a:avLst>
           </a:prstGeom>
           <a:solidFill>
-            <a:srgbClr val="FAF4F2"/>
+            <a:srgbClr val="F5F4F4"/>
           </a:solidFill>
           <a:ln>
             <a:noFill/>
@@ -12093,14 +12523,14 @@
         </p:nvSpPr>
         <p:spPr>
           <a:xfrm>
-            <a:off x="713232" y="4343400"/>
+            <a:off x="713232" y="4023360"/>
             <a:ext cx="420624" cy="420624"/>
           </a:xfrm>
           <a:prstGeom prst="ellipse">
             <a:avLst/>
           </a:prstGeom>
           <a:solidFill>
-            <a:srgbClr val="A4472B"/>
+            <a:srgbClr val="E2E0DE"/>
           </a:solidFill>
           <a:ln>
             <a:noFill/>
@@ -12129,7 +12559,7 @@
             <a:r>
               <a:rPr sz="1500" i="0" b="1">
                 <a:solidFill>
-                  <a:srgbClr val="FFFFFF"/>
+                  <a:srgbClr val="6E625B"/>
                 </a:solidFill>
                 <a:latin typeface="Calibri"/>
               </a:rPr>
@@ -12146,8 +12576,8 @@
         </p:nvSpPr>
         <p:spPr>
           <a:xfrm>
-            <a:off x="1371600" y="4233672"/>
-            <a:ext cx="10088575" cy="640080"/>
+            <a:off x="1371600" y="3959352"/>
+            <a:ext cx="10088575" cy="548640"/>
           </a:xfrm>
           <a:prstGeom prst="rect">
             <a:avLst/>
@@ -12163,7 +12593,7 @@
             <a:r>
               <a:rPr sz="1900" i="0" b="0">
                 <a:solidFill>
-                  <a:srgbClr val="2B211C"/>
+                  <a:srgbClr val="6E625B"/>
                 </a:solidFill>
                 <a:latin typeface="Calibri"/>
               </a:rPr>
@@ -12180,8 +12610,8 @@
         </p:nvSpPr>
         <p:spPr>
           <a:xfrm>
-            <a:off x="548640" y="5001768"/>
-            <a:ext cx="11094415" cy="640080"/>
+            <a:off x="548640" y="4636008"/>
+            <a:ext cx="11094415" cy="548640"/>
           </a:xfrm>
           <a:prstGeom prst="roundRect">
             <a:avLst>
@@ -12189,7 +12619,7 @@
             </a:avLst>
           </a:prstGeom>
           <a:solidFill>
-            <a:srgbClr val="FAF4F2"/>
+            <a:srgbClr val="F5F4F4"/>
           </a:solidFill>
           <a:ln>
             <a:noFill/>
@@ -12226,14 +12656,14 @@
         </p:nvSpPr>
         <p:spPr>
           <a:xfrm>
-            <a:off x="713232" y="5111496"/>
+            <a:off x="713232" y="4700016"/>
             <a:ext cx="420624" cy="420624"/>
           </a:xfrm>
           <a:prstGeom prst="ellipse">
             <a:avLst/>
           </a:prstGeom>
           <a:solidFill>
-            <a:srgbClr val="A4472B"/>
+            <a:srgbClr val="E2E0DE"/>
           </a:solidFill>
           <a:ln>
             <a:noFill/>
@@ -12262,7 +12692,7 @@
             <a:r>
               <a:rPr sz="1500" i="0" b="1">
                 <a:solidFill>
-                  <a:srgbClr val="FFFFFF"/>
+                  <a:srgbClr val="6E625B"/>
                 </a:solidFill>
                 <a:latin typeface="Calibri"/>
               </a:rPr>
@@ -12279,8 +12709,8 @@
         </p:nvSpPr>
         <p:spPr>
           <a:xfrm>
-            <a:off x="1371600" y="5001768"/>
-            <a:ext cx="10088575" cy="640080"/>
+            <a:off x="1371600" y="4636008"/>
+            <a:ext cx="10088575" cy="548640"/>
           </a:xfrm>
           <a:prstGeom prst="rect">
             <a:avLst/>
@@ -12296,11 +12726,54 @@
             <a:r>
               <a:rPr sz="1900" i="0" b="0">
                 <a:solidFill>
+                  <a:srgbClr val="6E625B"/>
+                </a:solidFill>
+                <a:latin typeface="Calibri"/>
+              </a:rPr>
+              <a:t>Cohort study</a:t>
+            </a:r>
+          </a:p>
+        </p:txBody>
+      </p:sp>
+      <p:sp>
+        <p:nvSpPr>
+          <p:cNvPr id="21" name="TextBox 20"/>
+          <p:cNvSpPr txBox="1"/>
+          <p:nvPr/>
+        </p:nvSpPr>
+        <p:spPr>
+          <a:xfrm>
+            <a:off x="548640" y="5358384"/>
+            <a:ext cx="11094415" cy="685800"/>
+          </a:xfrm>
+          <a:prstGeom prst="rect">
+            <a:avLst/>
+          </a:prstGeom>
+          <a:noFill/>
+        </p:spPr>
+        <p:txBody>
+          <a:bodyPr wrap="square" anchor="t" lIns="0" rIns="0" tIns="0" bIns="0">
+            <a:spAutoFit/>
+          </a:bodyPr>
+          <a:lstStyle/>
+          <a:p>
+            <a:r>
+              <a:rPr sz="1500" i="0" b="1">
+                <a:solidFill>
+                  <a:srgbClr val="2F6F7A"/>
+                </a:solidFill>
+                <a:latin typeface="Calibri"/>
+              </a:rPr>
+              <a:t>Why:  </a:t>
+            </a:r>
+            <a:r>
+              <a:rPr sz="1500" i="0" b="0">
+                <a:solidFill>
                   <a:srgbClr val="2B211C"/>
                 </a:solidFill>
                 <a:latin typeface="Calibri"/>
               </a:rPr>
-              <a:t>Cohort study</a:t>
+              <a:t>Pooled good RCTs give the strongest evidence. B, C and D are lower.</a:t>
             </a:r>
           </a:p>
         </p:txBody>
@@ -12516,7 +12989,7 @@
                 </a:solidFill>
                 <a:latin typeface="Calibri"/>
               </a:rPr>
-              <a:t>02 / 26</a:t>
+              <a:t>02 / 25</a:t>
             </a:r>
           </a:p>
         </p:txBody>
@@ -13151,7 +13624,7 @@
                 </a:solidFill>
                 <a:latin typeface="Calibri"/>
               </a:rPr>
-              <a:t>SECTION 3  ·  QUESTION 3 OF 5  ·  ANSWER</a:t>
+              <a:t>SECTION 3  ·  QUESTION 4 OF 5</a:t>
             </a:r>
           </a:p>
         </p:txBody>
@@ -13185,7 +13658,7 @@
                 </a:solidFill>
                 <a:latin typeface="Cambria"/>
               </a:rPr>
-              <a:t>Check your answer</a:t>
+              <a:t>Your turn</a:t>
             </a:r>
           </a:p>
         </p:txBody>
@@ -13254,7 +13727,7 @@
                 </a:solidFill>
                 <a:latin typeface="Calibri"/>
               </a:rPr>
-              <a:t>20 / 26</a:t>
+              <a:t>20 / 25</a:t>
             </a:r>
           </a:p>
         </p:txBody>
@@ -13268,7 +13741,7 @@
           <p:nvPr/>
         </p:nvPicPr>
         <p:blipFill>
-          <a:blip r:embed="rId2"/>
+          <a:blip r:embed="rId3"/>
           <a:stretch>
             <a:fillRect/>
           </a:stretch>
@@ -13312,7 +13785,7 @@
                 </a:solidFill>
                 <a:latin typeface="Calibri"/>
               </a:rPr>
-              <a:t>Which sits at the top of the evidence pyramid?</a:t>
+              <a:t>In a trial, 10% of placebo patients and 5% of treated patients have a stroke. What is the NNT?</a:t>
             </a:r>
           </a:p>
         </p:txBody>
@@ -13325,8 +13798,8 @@
         </p:nvSpPr>
         <p:spPr>
           <a:xfrm>
-            <a:off x="548640" y="2606040"/>
-            <a:ext cx="11094415" cy="548640"/>
+            <a:off x="548640" y="2697480"/>
+            <a:ext cx="11094415" cy="640080"/>
           </a:xfrm>
           <a:prstGeom prst="roundRect">
             <a:avLst>
@@ -13334,7 +13807,7 @@
             </a:avLst>
           </a:prstGeom>
           <a:solidFill>
-            <a:srgbClr val="2F6F7A"/>
+            <a:srgbClr val="FAF4F2"/>
           </a:solidFill>
           <a:ln>
             <a:noFill/>
@@ -13371,14 +13844,14 @@
         </p:nvSpPr>
         <p:spPr>
           <a:xfrm>
-            <a:off x="713232" y="2670048"/>
+            <a:off x="713232" y="2807208"/>
             <a:ext cx="420624" cy="420624"/>
           </a:xfrm>
           <a:prstGeom prst="ellipse">
             <a:avLst/>
           </a:prstGeom>
           <a:solidFill>
-            <a:srgbClr val="FFFFFF"/>
+            <a:srgbClr val="A4472B"/>
           </a:solidFill>
           <a:ln>
             <a:noFill/>
@@ -13407,7 +13880,7 @@
             <a:r>
               <a:rPr sz="1500" i="0" b="1">
                 <a:solidFill>
-                  <a:srgbClr val="2F6F7A"/>
+                  <a:srgbClr val="FFFFFF"/>
                 </a:solidFill>
                 <a:latin typeface="Calibri"/>
               </a:rPr>
@@ -13424,8 +13897,8 @@
         </p:nvSpPr>
         <p:spPr>
           <a:xfrm>
-            <a:off x="1371600" y="2606040"/>
-            <a:ext cx="10088575" cy="548640"/>
+            <a:off x="1371600" y="2697480"/>
+            <a:ext cx="10088575" cy="640080"/>
           </a:xfrm>
           <a:prstGeom prst="rect">
             <a:avLst/>
@@ -13439,13 +13912,13 @@
           <a:lstStyle/>
           <a:p>
             <a:r>
-              <a:rPr sz="1900" i="0" b="1">
-                <a:solidFill>
-                  <a:srgbClr val="FFFFFF"/>
-                </a:solidFill>
-                <a:latin typeface="Calibri"/>
-              </a:rPr>
-              <a:t>Systematic review and meta-analysis of good RCTs</a:t>
+              <a:rPr sz="1900" i="0" b="0">
+                <a:solidFill>
+                  <a:srgbClr val="2B211C"/>
+                </a:solidFill>
+                <a:latin typeface="Calibri"/>
+              </a:rPr>
+              <a:t>5</a:t>
             </a:r>
           </a:p>
         </p:txBody>
@@ -13458,8 +13931,8 @@
         </p:nvSpPr>
         <p:spPr>
           <a:xfrm>
-            <a:off x="548640" y="3282696"/>
-            <a:ext cx="11094415" cy="548640"/>
+            <a:off x="548640" y="3465576"/>
+            <a:ext cx="11094415" cy="640080"/>
           </a:xfrm>
           <a:prstGeom prst="roundRect">
             <a:avLst>
@@ -13467,7 +13940,7 @@
             </a:avLst>
           </a:prstGeom>
           <a:solidFill>
-            <a:srgbClr val="F5F4F4"/>
+            <a:srgbClr val="FAF4F2"/>
           </a:solidFill>
           <a:ln>
             <a:noFill/>
@@ -13504,14 +13977,14 @@
         </p:nvSpPr>
         <p:spPr>
           <a:xfrm>
-            <a:off x="713232" y="3346703"/>
+            <a:off x="713232" y="3575304"/>
             <a:ext cx="420624" cy="420624"/>
           </a:xfrm>
           <a:prstGeom prst="ellipse">
             <a:avLst/>
           </a:prstGeom>
           <a:solidFill>
-            <a:srgbClr val="E2E0DE"/>
+            <a:srgbClr val="A4472B"/>
           </a:solidFill>
           <a:ln>
             <a:noFill/>
@@ -13540,7 +14013,7 @@
             <a:r>
               <a:rPr sz="1500" i="0" b="1">
                 <a:solidFill>
-                  <a:srgbClr val="6E625B"/>
+                  <a:srgbClr val="FFFFFF"/>
                 </a:solidFill>
                 <a:latin typeface="Calibri"/>
               </a:rPr>
@@ -13557,8 +14030,8 @@
         </p:nvSpPr>
         <p:spPr>
           <a:xfrm>
-            <a:off x="1371600" y="3282696"/>
-            <a:ext cx="10088575" cy="548640"/>
+            <a:off x="1371600" y="3465576"/>
+            <a:ext cx="10088575" cy="640080"/>
           </a:xfrm>
           <a:prstGeom prst="rect">
             <a:avLst/>
@@ -13574,11 +14047,11 @@
             <a:r>
               <a:rPr sz="1900" i="0" b="0">
                 <a:solidFill>
-                  <a:srgbClr val="6E625B"/>
-                </a:solidFill>
-                <a:latin typeface="Calibri"/>
-              </a:rPr>
-              <a:t>Expert opinion</a:t>
+                  <a:srgbClr val="2B211C"/>
+                </a:solidFill>
+                <a:latin typeface="Calibri"/>
+              </a:rPr>
+              <a:t>10</a:t>
             </a:r>
           </a:p>
         </p:txBody>
@@ -13591,8 +14064,8 @@
         </p:nvSpPr>
         <p:spPr>
           <a:xfrm>
-            <a:off x="548640" y="3959352"/>
-            <a:ext cx="11094415" cy="548640"/>
+            <a:off x="548640" y="4233672"/>
+            <a:ext cx="11094415" cy="640080"/>
           </a:xfrm>
           <a:prstGeom prst="roundRect">
             <a:avLst>
@@ -13600,7 +14073,7 @@
             </a:avLst>
           </a:prstGeom>
           <a:solidFill>
-            <a:srgbClr val="F5F4F4"/>
+            <a:srgbClr val="FAF4F2"/>
           </a:solidFill>
           <a:ln>
             <a:noFill/>
@@ -13637,14 +14110,14 @@
         </p:nvSpPr>
         <p:spPr>
           <a:xfrm>
-            <a:off x="713232" y="4023360"/>
+            <a:off x="713232" y="4343400"/>
             <a:ext cx="420624" cy="420624"/>
           </a:xfrm>
           <a:prstGeom prst="ellipse">
             <a:avLst/>
           </a:prstGeom>
           <a:solidFill>
-            <a:srgbClr val="E2E0DE"/>
+            <a:srgbClr val="A4472B"/>
           </a:solidFill>
           <a:ln>
             <a:noFill/>
@@ -13673,7 +14146,7 @@
             <a:r>
               <a:rPr sz="1500" i="0" b="1">
                 <a:solidFill>
-                  <a:srgbClr val="6E625B"/>
+                  <a:srgbClr val="FFFFFF"/>
                 </a:solidFill>
                 <a:latin typeface="Calibri"/>
               </a:rPr>
@@ -13690,8 +14163,8 @@
         </p:nvSpPr>
         <p:spPr>
           <a:xfrm>
-            <a:off x="1371600" y="3959352"/>
-            <a:ext cx="10088575" cy="548640"/>
+            <a:off x="1371600" y="4233672"/>
+            <a:ext cx="10088575" cy="640080"/>
           </a:xfrm>
           <a:prstGeom prst="rect">
             <a:avLst/>
@@ -13707,11 +14180,11 @@
             <a:r>
               <a:rPr sz="1900" i="0" b="0">
                 <a:solidFill>
-                  <a:srgbClr val="6E625B"/>
-                </a:solidFill>
-                <a:latin typeface="Calibri"/>
-              </a:rPr>
-              <a:t>Case series</a:t>
+                  <a:srgbClr val="2B211C"/>
+                </a:solidFill>
+                <a:latin typeface="Calibri"/>
+              </a:rPr>
+              <a:t>50</a:t>
             </a:r>
           </a:p>
         </p:txBody>
@@ -13724,8 +14197,8 @@
         </p:nvSpPr>
         <p:spPr>
           <a:xfrm>
-            <a:off x="548640" y="4636008"/>
-            <a:ext cx="11094415" cy="548640"/>
+            <a:off x="548640" y="5001768"/>
+            <a:ext cx="11094415" cy="640080"/>
           </a:xfrm>
           <a:prstGeom prst="roundRect">
             <a:avLst>
@@ -13733,7 +14206,7 @@
             </a:avLst>
           </a:prstGeom>
           <a:solidFill>
-            <a:srgbClr val="F5F4F4"/>
+            <a:srgbClr val="FAF4F2"/>
           </a:solidFill>
           <a:ln>
             <a:noFill/>
@@ -13770,14 +14243,14 @@
         </p:nvSpPr>
         <p:spPr>
           <a:xfrm>
-            <a:off x="713232" y="4700016"/>
+            <a:off x="713232" y="5111496"/>
             <a:ext cx="420624" cy="420624"/>
           </a:xfrm>
           <a:prstGeom prst="ellipse">
             <a:avLst/>
           </a:prstGeom>
           <a:solidFill>
-            <a:srgbClr val="E2E0DE"/>
+            <a:srgbClr val="A4472B"/>
           </a:solidFill>
           <a:ln>
             <a:noFill/>
@@ -13806,7 +14279,7 @@
             <a:r>
               <a:rPr sz="1500" i="0" b="1">
                 <a:solidFill>
-                  <a:srgbClr val="6E625B"/>
+                  <a:srgbClr val="FFFFFF"/>
                 </a:solidFill>
                 <a:latin typeface="Calibri"/>
               </a:rPr>
@@ -13823,8 +14296,8 @@
         </p:nvSpPr>
         <p:spPr>
           <a:xfrm>
-            <a:off x="1371600" y="4636008"/>
-            <a:ext cx="10088575" cy="548640"/>
+            <a:off x="1371600" y="5001768"/>
+            <a:ext cx="10088575" cy="640080"/>
           </a:xfrm>
           <a:prstGeom prst="rect">
             <a:avLst/>
@@ -13840,54 +14313,11 @@
             <a:r>
               <a:rPr sz="1900" i="0" b="0">
                 <a:solidFill>
-                  <a:srgbClr val="6E625B"/>
-                </a:solidFill>
-                <a:latin typeface="Calibri"/>
-              </a:rPr>
-              <a:t>Cohort study</a:t>
-            </a:r>
-          </a:p>
-        </p:txBody>
-      </p:sp>
-      <p:sp>
-        <p:nvSpPr>
-          <p:cNvPr id="21" name="TextBox 20"/>
-          <p:cNvSpPr txBox="1"/>
-          <p:nvPr/>
-        </p:nvSpPr>
-        <p:spPr>
-          <a:xfrm>
-            <a:off x="548640" y="5358384"/>
-            <a:ext cx="11094415" cy="685800"/>
-          </a:xfrm>
-          <a:prstGeom prst="rect">
-            <a:avLst/>
-          </a:prstGeom>
-          <a:noFill/>
-        </p:spPr>
-        <p:txBody>
-          <a:bodyPr wrap="square" anchor="t" lIns="0" rIns="0" tIns="0" bIns="0">
-            <a:spAutoFit/>
-          </a:bodyPr>
-          <a:lstStyle/>
-          <a:p>
-            <a:r>
-              <a:rPr sz="1500" i="0" b="1">
-                <a:solidFill>
-                  <a:srgbClr val="2F6F7A"/>
-                </a:solidFill>
-                <a:latin typeface="Calibri"/>
-              </a:rPr>
-              <a:t>Why:  </a:t>
-            </a:r>
-            <a:r>
-              <a:rPr sz="1500" i="0" b="0">
-                <a:solidFill>
                   <a:srgbClr val="2B211C"/>
                 </a:solidFill>
                 <a:latin typeface="Calibri"/>
               </a:rPr>
-              <a:t>Pooled good RCTs give the strongest evidence. B, C and D are lower.</a:t>
+              <a:t>20</a:t>
             </a:r>
           </a:p>
         </p:txBody>
@@ -14000,7 +14430,7 @@
                 </a:solidFill>
                 <a:latin typeface="Calibri"/>
               </a:rPr>
-              <a:t>SECTION 3  ·  QUESTION 4 OF 5</a:t>
+              <a:t>SECTION 3  ·  QUESTION 4 OF 5  ·  ANSWER</a:t>
             </a:r>
           </a:p>
         </p:txBody>
@@ -14034,7 +14464,7 @@
                 </a:solidFill>
                 <a:latin typeface="Cambria"/>
               </a:rPr>
-              <a:t>Your turn</a:t>
+              <a:t>Check your answer</a:t>
             </a:r>
           </a:p>
         </p:txBody>
@@ -14103,7 +14533,7 @@
                 </a:solidFill>
                 <a:latin typeface="Calibri"/>
               </a:rPr>
-              <a:t>21 / 26</a:t>
+              <a:t>21 / 25</a:t>
             </a:r>
           </a:p>
         </p:txBody>
@@ -14117,7 +14547,7 @@
           <p:nvPr/>
         </p:nvPicPr>
         <p:blipFill>
-          <a:blip r:embed="rId3"/>
+          <a:blip r:embed="rId2"/>
           <a:stretch>
             <a:fillRect/>
           </a:stretch>
@@ -14174,8 +14604,8 @@
         </p:nvSpPr>
         <p:spPr>
           <a:xfrm>
-            <a:off x="548640" y="2697480"/>
-            <a:ext cx="11094415" cy="640080"/>
+            <a:off x="548640" y="2606040"/>
+            <a:ext cx="11094415" cy="548640"/>
           </a:xfrm>
           <a:prstGeom prst="roundRect">
             <a:avLst>
@@ -14183,7 +14613,7 @@
             </a:avLst>
           </a:prstGeom>
           <a:solidFill>
-            <a:srgbClr val="FAF4F2"/>
+            <a:srgbClr val="F5F4F4"/>
           </a:solidFill>
           <a:ln>
             <a:noFill/>
@@ -14220,14 +14650,14 @@
         </p:nvSpPr>
         <p:spPr>
           <a:xfrm>
-            <a:off x="713232" y="2807208"/>
+            <a:off x="713232" y="2670048"/>
             <a:ext cx="420624" cy="420624"/>
           </a:xfrm>
           <a:prstGeom prst="ellipse">
             <a:avLst/>
           </a:prstGeom>
           <a:solidFill>
-            <a:srgbClr val="A4472B"/>
+            <a:srgbClr val="E2E0DE"/>
           </a:solidFill>
           <a:ln>
             <a:noFill/>
@@ -14256,7 +14686,7 @@
             <a:r>
               <a:rPr sz="1500" i="0" b="1">
                 <a:solidFill>
-                  <a:srgbClr val="FFFFFF"/>
+                  <a:srgbClr val="6E625B"/>
                 </a:solidFill>
                 <a:latin typeface="Calibri"/>
               </a:rPr>
@@ -14273,8 +14703,8 @@
         </p:nvSpPr>
         <p:spPr>
           <a:xfrm>
-            <a:off x="1371600" y="2697480"/>
-            <a:ext cx="10088575" cy="640080"/>
+            <a:off x="1371600" y="2606040"/>
+            <a:ext cx="10088575" cy="548640"/>
           </a:xfrm>
           <a:prstGeom prst="rect">
             <a:avLst/>
@@ -14290,7 +14720,7 @@
             <a:r>
               <a:rPr sz="1900" i="0" b="0">
                 <a:solidFill>
-                  <a:srgbClr val="2B211C"/>
+                  <a:srgbClr val="6E625B"/>
                 </a:solidFill>
                 <a:latin typeface="Calibri"/>
               </a:rPr>
@@ -14307,8 +14737,8 @@
         </p:nvSpPr>
         <p:spPr>
           <a:xfrm>
-            <a:off x="548640" y="3465576"/>
-            <a:ext cx="11094415" cy="640080"/>
+            <a:off x="548640" y="3282696"/>
+            <a:ext cx="11094415" cy="548640"/>
           </a:xfrm>
           <a:prstGeom prst="roundRect">
             <a:avLst>
@@ -14316,7 +14746,7 @@
             </a:avLst>
           </a:prstGeom>
           <a:solidFill>
-            <a:srgbClr val="FAF4F2"/>
+            <a:srgbClr val="F5F4F4"/>
           </a:solidFill>
           <a:ln>
             <a:noFill/>
@@ -14353,14 +14783,14 @@
         </p:nvSpPr>
         <p:spPr>
           <a:xfrm>
-            <a:off x="713232" y="3575304"/>
+            <a:off x="713232" y="3346703"/>
             <a:ext cx="420624" cy="420624"/>
           </a:xfrm>
           <a:prstGeom prst="ellipse">
             <a:avLst/>
           </a:prstGeom>
           <a:solidFill>
-            <a:srgbClr val="A4472B"/>
+            <a:srgbClr val="E2E0DE"/>
           </a:solidFill>
           <a:ln>
             <a:noFill/>
@@ -14389,7 +14819,7 @@
             <a:r>
               <a:rPr sz="1500" i="0" b="1">
                 <a:solidFill>
-                  <a:srgbClr val="FFFFFF"/>
+                  <a:srgbClr val="6E625B"/>
                 </a:solidFill>
                 <a:latin typeface="Calibri"/>
               </a:rPr>
@@ -14406,8 +14836,8 @@
         </p:nvSpPr>
         <p:spPr>
           <a:xfrm>
-            <a:off x="1371600" y="3465576"/>
-            <a:ext cx="10088575" cy="640080"/>
+            <a:off x="1371600" y="3282696"/>
+            <a:ext cx="10088575" cy="548640"/>
           </a:xfrm>
           <a:prstGeom prst="rect">
             <a:avLst/>
@@ -14423,7 +14853,7 @@
             <a:r>
               <a:rPr sz="1900" i="0" b="0">
                 <a:solidFill>
-                  <a:srgbClr val="2B211C"/>
+                  <a:srgbClr val="6E625B"/>
                 </a:solidFill>
                 <a:latin typeface="Calibri"/>
               </a:rPr>
@@ -14440,8 +14870,8 @@
         </p:nvSpPr>
         <p:spPr>
           <a:xfrm>
-            <a:off x="548640" y="4233672"/>
-            <a:ext cx="11094415" cy="640080"/>
+            <a:off x="548640" y="3959352"/>
+            <a:ext cx="11094415" cy="548640"/>
           </a:xfrm>
           <a:prstGeom prst="roundRect">
             <a:avLst>
@@ -14449,7 +14879,7 @@
             </a:avLst>
           </a:prstGeom>
           <a:solidFill>
-            <a:srgbClr val="FAF4F2"/>
+            <a:srgbClr val="F5F4F4"/>
           </a:solidFill>
           <a:ln>
             <a:noFill/>
@@ -14486,14 +14916,14 @@
         </p:nvSpPr>
         <p:spPr>
           <a:xfrm>
-            <a:off x="713232" y="4343400"/>
+            <a:off x="713232" y="4023360"/>
             <a:ext cx="420624" cy="420624"/>
           </a:xfrm>
           <a:prstGeom prst="ellipse">
             <a:avLst/>
           </a:prstGeom>
           <a:solidFill>
-            <a:srgbClr val="A4472B"/>
+            <a:srgbClr val="E2E0DE"/>
           </a:solidFill>
           <a:ln>
             <a:noFill/>
@@ -14522,7 +14952,7 @@
             <a:r>
               <a:rPr sz="1500" i="0" b="1">
                 <a:solidFill>
-                  <a:srgbClr val="FFFFFF"/>
+                  <a:srgbClr val="6E625B"/>
                 </a:solidFill>
                 <a:latin typeface="Calibri"/>
               </a:rPr>
@@ -14539,8 +14969,8 @@
         </p:nvSpPr>
         <p:spPr>
           <a:xfrm>
-            <a:off x="1371600" y="4233672"/>
-            <a:ext cx="10088575" cy="640080"/>
+            <a:off x="1371600" y="3959352"/>
+            <a:ext cx="10088575" cy="548640"/>
           </a:xfrm>
           <a:prstGeom prst="rect">
             <a:avLst/>
@@ -14556,7 +14986,7 @@
             <a:r>
               <a:rPr sz="1900" i="0" b="0">
                 <a:solidFill>
-                  <a:srgbClr val="2B211C"/>
+                  <a:srgbClr val="6E625B"/>
                 </a:solidFill>
                 <a:latin typeface="Calibri"/>
               </a:rPr>
@@ -14573,8 +15003,8 @@
         </p:nvSpPr>
         <p:spPr>
           <a:xfrm>
-            <a:off x="548640" y="5001768"/>
-            <a:ext cx="11094415" cy="640080"/>
+            <a:off x="548640" y="4636008"/>
+            <a:ext cx="11094415" cy="548640"/>
           </a:xfrm>
           <a:prstGeom prst="roundRect">
             <a:avLst>
@@ -14582,7 +15012,7 @@
             </a:avLst>
           </a:prstGeom>
           <a:solidFill>
-            <a:srgbClr val="FAF4F2"/>
+            <a:srgbClr val="2F6F7A"/>
           </a:solidFill>
           <a:ln>
             <a:noFill/>
@@ -14619,14 +15049,14 @@
         </p:nvSpPr>
         <p:spPr>
           <a:xfrm>
-            <a:off x="713232" y="5111496"/>
+            <a:off x="713232" y="4700016"/>
             <a:ext cx="420624" cy="420624"/>
           </a:xfrm>
           <a:prstGeom prst="ellipse">
             <a:avLst/>
           </a:prstGeom>
           <a:solidFill>
-            <a:srgbClr val="A4472B"/>
+            <a:srgbClr val="FFFFFF"/>
           </a:solidFill>
           <a:ln>
             <a:noFill/>
@@ -14655,7 +15085,7 @@
             <a:r>
               <a:rPr sz="1500" i="0" b="1">
                 <a:solidFill>
-                  <a:srgbClr val="FFFFFF"/>
+                  <a:srgbClr val="2F6F7A"/>
                 </a:solidFill>
                 <a:latin typeface="Calibri"/>
               </a:rPr>
@@ -14672,8 +15102,8 @@
         </p:nvSpPr>
         <p:spPr>
           <a:xfrm>
-            <a:off x="1371600" y="5001768"/>
-            <a:ext cx="10088575" cy="640080"/>
+            <a:off x="1371600" y="4636008"/>
+            <a:ext cx="10088575" cy="548640"/>
           </a:xfrm>
           <a:prstGeom prst="rect">
             <a:avLst/>
@@ -14687,13 +15117,56 @@
           <a:lstStyle/>
           <a:p>
             <a:r>
-              <a:rPr sz="1900" i="0" b="0">
+              <a:rPr sz="1900" i="0" b="1">
+                <a:solidFill>
+                  <a:srgbClr val="FFFFFF"/>
+                </a:solidFill>
+                <a:latin typeface="Calibri"/>
+              </a:rPr>
+              <a:t>20</a:t>
+            </a:r>
+          </a:p>
+        </p:txBody>
+      </p:sp>
+      <p:sp>
+        <p:nvSpPr>
+          <p:cNvPr id="21" name="TextBox 20"/>
+          <p:cNvSpPr txBox="1"/>
+          <p:nvPr/>
+        </p:nvSpPr>
+        <p:spPr>
+          <a:xfrm>
+            <a:off x="548640" y="5358384"/>
+            <a:ext cx="11094415" cy="685800"/>
+          </a:xfrm>
+          <a:prstGeom prst="rect">
+            <a:avLst/>
+          </a:prstGeom>
+          <a:noFill/>
+        </p:spPr>
+        <p:txBody>
+          <a:bodyPr wrap="square" anchor="t" lIns="0" rIns="0" tIns="0" bIns="0">
+            <a:spAutoFit/>
+          </a:bodyPr>
+          <a:lstStyle/>
+          <a:p>
+            <a:r>
+              <a:rPr sz="1500" i="0" b="1">
+                <a:solidFill>
+                  <a:srgbClr val="2F6F7A"/>
+                </a:solidFill>
+                <a:latin typeface="Calibri"/>
+              </a:rPr>
+              <a:t>Why:  </a:t>
+            </a:r>
+            <a:r>
+              <a:rPr sz="1500" i="0" b="0">
                 <a:solidFill>
                   <a:srgbClr val="2B211C"/>
                 </a:solidFill>
                 <a:latin typeface="Calibri"/>
               </a:rPr>
-              <a:t>20</a:t>
+              <a:t>ARR = 10% − 5% = 5% = 0.05; NNT = 1 ÷ 0.05 = 20. A, B and C are miscalculations.</a:t>
             </a:r>
           </a:p>
         </p:txBody>
@@ -14806,7 +15279,7 @@
                 </a:solidFill>
                 <a:latin typeface="Calibri"/>
               </a:rPr>
-              <a:t>SECTION 3  ·  QUESTION 4 OF 5  ·  ANSWER</a:t>
+              <a:t>SECTION 3  ·  QUESTION 5 OF 5</a:t>
             </a:r>
           </a:p>
         </p:txBody>
@@ -14840,7 +15313,7 @@
                 </a:solidFill>
                 <a:latin typeface="Cambria"/>
               </a:rPr>
-              <a:t>Check your answer</a:t>
+              <a:t>Your turn</a:t>
             </a:r>
           </a:p>
         </p:txBody>
@@ -14909,7 +15382,7 @@
                 </a:solidFill>
                 <a:latin typeface="Calibri"/>
               </a:rPr>
-              <a:t>22 / 26</a:t>
+              <a:t>22 / 25</a:t>
             </a:r>
           </a:p>
         </p:txBody>
@@ -14923,7 +15396,7 @@
           <p:nvPr/>
         </p:nvPicPr>
         <p:blipFill>
-          <a:blip r:embed="rId2"/>
+          <a:blip r:embed="rId3"/>
           <a:stretch>
             <a:fillRect/>
           </a:stretch>
@@ -14967,7 +15440,7 @@
                 </a:solidFill>
                 <a:latin typeface="Calibri"/>
               </a:rPr>
-              <a:t>In a trial, 10% of placebo patients and 5% of treated patients have a stroke. What is the NNT?</a:t>
+              <a:t>Which design is best to study a very rare birth defect?</a:t>
             </a:r>
           </a:p>
         </p:txBody>
@@ -14980,8 +15453,8 @@
         </p:nvSpPr>
         <p:spPr>
           <a:xfrm>
-            <a:off x="548640" y="2606040"/>
-            <a:ext cx="11094415" cy="548640"/>
+            <a:off x="548640" y="2697480"/>
+            <a:ext cx="11094415" cy="640080"/>
           </a:xfrm>
           <a:prstGeom prst="roundRect">
             <a:avLst>
@@ -14989,7 +15462,7 @@
             </a:avLst>
           </a:prstGeom>
           <a:solidFill>
-            <a:srgbClr val="F5F4F4"/>
+            <a:srgbClr val="FAF4F2"/>
           </a:solidFill>
           <a:ln>
             <a:noFill/>
@@ -15026,14 +15499,14 @@
         </p:nvSpPr>
         <p:spPr>
           <a:xfrm>
-            <a:off x="713232" y="2670048"/>
+            <a:off x="713232" y="2807208"/>
             <a:ext cx="420624" cy="420624"/>
           </a:xfrm>
           <a:prstGeom prst="ellipse">
             <a:avLst/>
           </a:prstGeom>
           <a:solidFill>
-            <a:srgbClr val="E2E0DE"/>
+            <a:srgbClr val="A4472B"/>
           </a:solidFill>
           <a:ln>
             <a:noFill/>
@@ -15062,7 +15535,7 @@
             <a:r>
               <a:rPr sz="1500" i="0" b="1">
                 <a:solidFill>
-                  <a:srgbClr val="6E625B"/>
+                  <a:srgbClr val="FFFFFF"/>
                 </a:solidFill>
                 <a:latin typeface="Calibri"/>
               </a:rPr>
@@ -15079,8 +15552,8 @@
         </p:nvSpPr>
         <p:spPr>
           <a:xfrm>
-            <a:off x="1371600" y="2606040"/>
-            <a:ext cx="10088575" cy="548640"/>
+            <a:off x="1371600" y="2697480"/>
+            <a:ext cx="10088575" cy="640080"/>
           </a:xfrm>
           <a:prstGeom prst="rect">
             <a:avLst/>
@@ -15096,11 +15569,11 @@
             <a:r>
               <a:rPr sz="1900" i="0" b="0">
                 <a:solidFill>
-                  <a:srgbClr val="6E625B"/>
-                </a:solidFill>
-                <a:latin typeface="Calibri"/>
-              </a:rPr>
-              <a:t>5</a:t>
+                  <a:srgbClr val="2B211C"/>
+                </a:solidFill>
+                <a:latin typeface="Calibri"/>
+              </a:rPr>
+              <a:t>Case-control study</a:t>
             </a:r>
           </a:p>
         </p:txBody>
@@ -15113,8 +15586,8 @@
         </p:nvSpPr>
         <p:spPr>
           <a:xfrm>
-            <a:off x="548640" y="3282696"/>
-            <a:ext cx="11094415" cy="548640"/>
+            <a:off x="548640" y="3465576"/>
+            <a:ext cx="11094415" cy="640080"/>
           </a:xfrm>
           <a:prstGeom prst="roundRect">
             <a:avLst>
@@ -15122,7 +15595,7 @@
             </a:avLst>
           </a:prstGeom>
           <a:solidFill>
-            <a:srgbClr val="F5F4F4"/>
+            <a:srgbClr val="FAF4F2"/>
           </a:solidFill>
           <a:ln>
             <a:noFill/>
@@ -15159,14 +15632,14 @@
         </p:nvSpPr>
         <p:spPr>
           <a:xfrm>
-            <a:off x="713232" y="3346703"/>
+            <a:off x="713232" y="3575304"/>
             <a:ext cx="420624" cy="420624"/>
           </a:xfrm>
           <a:prstGeom prst="ellipse">
             <a:avLst/>
           </a:prstGeom>
           <a:solidFill>
-            <a:srgbClr val="E2E0DE"/>
+            <a:srgbClr val="A4472B"/>
           </a:solidFill>
           <a:ln>
             <a:noFill/>
@@ -15195,7 +15668,7 @@
             <a:r>
               <a:rPr sz="1500" i="0" b="1">
                 <a:solidFill>
-                  <a:srgbClr val="6E625B"/>
+                  <a:srgbClr val="FFFFFF"/>
                 </a:solidFill>
                 <a:latin typeface="Calibri"/>
               </a:rPr>
@@ -15212,8 +15685,8 @@
         </p:nvSpPr>
         <p:spPr>
           <a:xfrm>
-            <a:off x="1371600" y="3282696"/>
-            <a:ext cx="10088575" cy="548640"/>
+            <a:off x="1371600" y="3465576"/>
+            <a:ext cx="10088575" cy="640080"/>
           </a:xfrm>
           <a:prstGeom prst="rect">
             <a:avLst/>
@@ -15229,11 +15702,11 @@
             <a:r>
               <a:rPr sz="1900" i="0" b="0">
                 <a:solidFill>
-                  <a:srgbClr val="6E625B"/>
-                </a:solidFill>
-                <a:latin typeface="Calibri"/>
-              </a:rPr>
-              <a:t>10</a:t>
+                  <a:srgbClr val="2B211C"/>
+                </a:solidFill>
+                <a:latin typeface="Calibri"/>
+              </a:rPr>
+              <a:t>Randomised controlled trial</a:t>
             </a:r>
           </a:p>
         </p:txBody>
@@ -15246,8 +15719,8 @@
         </p:nvSpPr>
         <p:spPr>
           <a:xfrm>
-            <a:off x="548640" y="3959352"/>
-            <a:ext cx="11094415" cy="548640"/>
+            <a:off x="548640" y="4233672"/>
+            <a:ext cx="11094415" cy="640080"/>
           </a:xfrm>
           <a:prstGeom prst="roundRect">
             <a:avLst>
@@ -15255,7 +15728,7 @@
             </a:avLst>
           </a:prstGeom>
           <a:solidFill>
-            <a:srgbClr val="F5F4F4"/>
+            <a:srgbClr val="FAF4F2"/>
           </a:solidFill>
           <a:ln>
             <a:noFill/>
@@ -15292,14 +15765,14 @@
         </p:nvSpPr>
         <p:spPr>
           <a:xfrm>
-            <a:off x="713232" y="4023360"/>
+            <a:off x="713232" y="4343400"/>
             <a:ext cx="420624" cy="420624"/>
           </a:xfrm>
           <a:prstGeom prst="ellipse">
             <a:avLst/>
           </a:prstGeom>
           <a:solidFill>
-            <a:srgbClr val="E2E0DE"/>
+            <a:srgbClr val="A4472B"/>
           </a:solidFill>
           <a:ln>
             <a:noFill/>
@@ -15328,7 +15801,7 @@
             <a:r>
               <a:rPr sz="1500" i="0" b="1">
                 <a:solidFill>
-                  <a:srgbClr val="6E625B"/>
+                  <a:srgbClr val="FFFFFF"/>
                 </a:solidFill>
                 <a:latin typeface="Calibri"/>
               </a:rPr>
@@ -15345,8 +15818,8 @@
         </p:nvSpPr>
         <p:spPr>
           <a:xfrm>
-            <a:off x="1371600" y="3959352"/>
-            <a:ext cx="10088575" cy="548640"/>
+            <a:off x="1371600" y="4233672"/>
+            <a:ext cx="10088575" cy="640080"/>
           </a:xfrm>
           <a:prstGeom prst="rect">
             <a:avLst/>
@@ -15362,11 +15835,11 @@
             <a:r>
               <a:rPr sz="1900" i="0" b="0">
                 <a:solidFill>
-                  <a:srgbClr val="6E625B"/>
-                </a:solidFill>
-                <a:latin typeface="Calibri"/>
-              </a:rPr>
-              <a:t>50</a:t>
+                  <a:srgbClr val="2B211C"/>
+                </a:solidFill>
+                <a:latin typeface="Calibri"/>
+              </a:rPr>
+              <a:t>Cross-sectional survey</a:t>
             </a:r>
           </a:p>
         </p:txBody>
@@ -15379,8 +15852,8 @@
         </p:nvSpPr>
         <p:spPr>
           <a:xfrm>
-            <a:off x="548640" y="4636008"/>
-            <a:ext cx="11094415" cy="548640"/>
+            <a:off x="548640" y="5001768"/>
+            <a:ext cx="11094415" cy="640080"/>
           </a:xfrm>
           <a:prstGeom prst="roundRect">
             <a:avLst>
@@ -15388,7 +15861,7 @@
             </a:avLst>
           </a:prstGeom>
           <a:solidFill>
-            <a:srgbClr val="2F6F7A"/>
+            <a:srgbClr val="FAF4F2"/>
           </a:solidFill>
           <a:ln>
             <a:noFill/>
@@ -15425,14 +15898,14 @@
         </p:nvSpPr>
         <p:spPr>
           <a:xfrm>
-            <a:off x="713232" y="4700016"/>
+            <a:off x="713232" y="5111496"/>
             <a:ext cx="420624" cy="420624"/>
           </a:xfrm>
           <a:prstGeom prst="ellipse">
             <a:avLst/>
           </a:prstGeom>
           <a:solidFill>
-            <a:srgbClr val="FFFFFF"/>
+            <a:srgbClr val="A4472B"/>
           </a:solidFill>
           <a:ln>
             <a:noFill/>
@@ -15461,7 +15934,7 @@
             <a:r>
               <a:rPr sz="1500" i="0" b="1">
                 <a:solidFill>
-                  <a:srgbClr val="2F6F7A"/>
+                  <a:srgbClr val="FFFFFF"/>
                 </a:solidFill>
                 <a:latin typeface="Calibri"/>
               </a:rPr>
@@ -15478,8 +15951,8 @@
         </p:nvSpPr>
         <p:spPr>
           <a:xfrm>
-            <a:off x="1371600" y="4636008"/>
-            <a:ext cx="10088575" cy="548640"/>
+            <a:off x="1371600" y="5001768"/>
+            <a:ext cx="10088575" cy="640080"/>
           </a:xfrm>
           <a:prstGeom prst="rect">
             <a:avLst/>
@@ -15493,56 +15966,13 @@
           <a:lstStyle/>
           <a:p>
             <a:r>
-              <a:rPr sz="1900" i="0" b="1">
-                <a:solidFill>
-                  <a:srgbClr val="FFFFFF"/>
-                </a:solidFill>
-                <a:latin typeface="Calibri"/>
-              </a:rPr>
-              <a:t>20</a:t>
-            </a:r>
-          </a:p>
-        </p:txBody>
-      </p:sp>
-      <p:sp>
-        <p:nvSpPr>
-          <p:cNvPr id="21" name="TextBox 20"/>
-          <p:cNvSpPr txBox="1"/>
-          <p:nvPr/>
-        </p:nvSpPr>
-        <p:spPr>
-          <a:xfrm>
-            <a:off x="548640" y="5358384"/>
-            <a:ext cx="11094415" cy="685800"/>
-          </a:xfrm>
-          <a:prstGeom prst="rect">
-            <a:avLst/>
-          </a:prstGeom>
-          <a:noFill/>
-        </p:spPr>
-        <p:txBody>
-          <a:bodyPr wrap="square" anchor="t" lIns="0" rIns="0" tIns="0" bIns="0">
-            <a:spAutoFit/>
-          </a:bodyPr>
-          <a:lstStyle/>
-          <a:p>
-            <a:r>
-              <a:rPr sz="1500" i="0" b="1">
-                <a:solidFill>
-                  <a:srgbClr val="2F6F7A"/>
-                </a:solidFill>
-                <a:latin typeface="Calibri"/>
-              </a:rPr>
-              <a:t>Why:  </a:t>
-            </a:r>
-            <a:r>
-              <a:rPr sz="1500" i="0" b="0">
+              <a:rPr sz="1900" i="0" b="0">
                 <a:solidFill>
                   <a:srgbClr val="2B211C"/>
                 </a:solidFill>
                 <a:latin typeface="Calibri"/>
               </a:rPr>
-              <a:t>ARR = 10% − 5% = 5% = 0.05; NNT = 1 ÷ 0.05 = 20. A, B and C are miscalculations.</a:t>
+              <a:t>Case report</a:t>
             </a:r>
           </a:p>
         </p:txBody>
@@ -15655,7 +16085,7 @@
                 </a:solidFill>
                 <a:latin typeface="Calibri"/>
               </a:rPr>
-              <a:t>SECTION 3  ·  QUESTION 5 OF 5</a:t>
+              <a:t>SECTION 3  ·  QUESTION 5 OF 5  ·  ANSWER</a:t>
             </a:r>
           </a:p>
         </p:txBody>
@@ -15689,7 +16119,7 @@
                 </a:solidFill>
                 <a:latin typeface="Cambria"/>
               </a:rPr>
-              <a:t>Your turn</a:t>
+              <a:t>Check your answer</a:t>
             </a:r>
           </a:p>
         </p:txBody>
@@ -15758,7 +16188,7 @@
                 </a:solidFill>
                 <a:latin typeface="Calibri"/>
               </a:rPr>
-              <a:t>23 / 26</a:t>
+              <a:t>23 / 25</a:t>
             </a:r>
           </a:p>
         </p:txBody>
@@ -15772,7 +16202,7 @@
           <p:nvPr/>
         </p:nvPicPr>
         <p:blipFill>
-          <a:blip r:embed="rId3"/>
+          <a:blip r:embed="rId2"/>
           <a:stretch>
             <a:fillRect/>
           </a:stretch>
@@ -15829,8 +16259,8 @@
         </p:nvSpPr>
         <p:spPr>
           <a:xfrm>
-            <a:off x="548640" y="2697480"/>
-            <a:ext cx="11094415" cy="640080"/>
+            <a:off x="548640" y="2606040"/>
+            <a:ext cx="11094415" cy="548640"/>
           </a:xfrm>
           <a:prstGeom prst="roundRect">
             <a:avLst>
@@ -15838,7 +16268,7 @@
             </a:avLst>
           </a:prstGeom>
           <a:solidFill>
-            <a:srgbClr val="FAF4F2"/>
+            <a:srgbClr val="2F6F7A"/>
           </a:solidFill>
           <a:ln>
             <a:noFill/>
@@ -15875,14 +16305,14 @@
         </p:nvSpPr>
         <p:spPr>
           <a:xfrm>
-            <a:off x="713232" y="2807208"/>
+            <a:off x="713232" y="2670048"/>
             <a:ext cx="420624" cy="420624"/>
           </a:xfrm>
           <a:prstGeom prst="ellipse">
             <a:avLst/>
           </a:prstGeom>
           <a:solidFill>
-            <a:srgbClr val="A4472B"/>
+            <a:srgbClr val="FFFFFF"/>
           </a:solidFill>
           <a:ln>
             <a:noFill/>
@@ -15911,7 +16341,7 @@
             <a:r>
               <a:rPr sz="1500" i="0" b="1">
                 <a:solidFill>
-                  <a:srgbClr val="FFFFFF"/>
+                  <a:srgbClr val="2F6F7A"/>
                 </a:solidFill>
                 <a:latin typeface="Calibri"/>
               </a:rPr>
@@ -15928,8 +16358,8 @@
         </p:nvSpPr>
         <p:spPr>
           <a:xfrm>
-            <a:off x="1371600" y="2697480"/>
-            <a:ext cx="10088575" cy="640080"/>
+            <a:off x="1371600" y="2606040"/>
+            <a:ext cx="10088575" cy="548640"/>
           </a:xfrm>
           <a:prstGeom prst="rect">
             <a:avLst/>
@@ -15943,9 +16373,9 @@
           <a:lstStyle/>
           <a:p>
             <a:r>
-              <a:rPr sz="1900" i="0" b="0">
-                <a:solidFill>
-                  <a:srgbClr val="2B211C"/>
+              <a:rPr sz="1900" i="0" b="1">
+                <a:solidFill>
+                  <a:srgbClr val="FFFFFF"/>
                 </a:solidFill>
                 <a:latin typeface="Calibri"/>
               </a:rPr>
@@ -15962,8 +16392,8 @@
         </p:nvSpPr>
         <p:spPr>
           <a:xfrm>
-            <a:off x="548640" y="3465576"/>
-            <a:ext cx="11094415" cy="640080"/>
+            <a:off x="548640" y="3282696"/>
+            <a:ext cx="11094415" cy="548640"/>
           </a:xfrm>
           <a:prstGeom prst="roundRect">
             <a:avLst>
@@ -15971,7 +16401,7 @@
             </a:avLst>
           </a:prstGeom>
           <a:solidFill>
-            <a:srgbClr val="FAF4F2"/>
+            <a:srgbClr val="F5F4F4"/>
           </a:solidFill>
           <a:ln>
             <a:noFill/>
@@ -16008,14 +16438,14 @@
         </p:nvSpPr>
         <p:spPr>
           <a:xfrm>
-            <a:off x="713232" y="3575304"/>
+            <a:off x="713232" y="3346703"/>
             <a:ext cx="420624" cy="420624"/>
           </a:xfrm>
           <a:prstGeom prst="ellipse">
             <a:avLst/>
           </a:prstGeom>
           <a:solidFill>
-            <a:srgbClr val="A4472B"/>
+            <a:srgbClr val="E2E0DE"/>
           </a:solidFill>
           <a:ln>
             <a:noFill/>
@@ -16044,7 +16474,7 @@
             <a:r>
               <a:rPr sz="1500" i="0" b="1">
                 <a:solidFill>
-                  <a:srgbClr val="FFFFFF"/>
+                  <a:srgbClr val="6E625B"/>
                 </a:solidFill>
                 <a:latin typeface="Calibri"/>
               </a:rPr>
@@ -16061,8 +16491,8 @@
         </p:nvSpPr>
         <p:spPr>
           <a:xfrm>
-            <a:off x="1371600" y="3465576"/>
-            <a:ext cx="10088575" cy="640080"/>
+            <a:off x="1371600" y="3282696"/>
+            <a:ext cx="10088575" cy="548640"/>
           </a:xfrm>
           <a:prstGeom prst="rect">
             <a:avLst/>
@@ -16078,7 +16508,7 @@
             <a:r>
               <a:rPr sz="1900" i="0" b="0">
                 <a:solidFill>
-                  <a:srgbClr val="2B211C"/>
+                  <a:srgbClr val="6E625B"/>
                 </a:solidFill>
                 <a:latin typeface="Calibri"/>
               </a:rPr>
@@ -16095,8 +16525,8 @@
         </p:nvSpPr>
         <p:spPr>
           <a:xfrm>
-            <a:off x="548640" y="4233672"/>
-            <a:ext cx="11094415" cy="640080"/>
+            <a:off x="548640" y="3959352"/>
+            <a:ext cx="11094415" cy="548640"/>
           </a:xfrm>
           <a:prstGeom prst="roundRect">
             <a:avLst>
@@ -16104,7 +16534,7 @@
             </a:avLst>
           </a:prstGeom>
           <a:solidFill>
-            <a:srgbClr val="FAF4F2"/>
+            <a:srgbClr val="F5F4F4"/>
           </a:solidFill>
           <a:ln>
             <a:noFill/>
@@ -16141,14 +16571,14 @@
         </p:nvSpPr>
         <p:spPr>
           <a:xfrm>
-            <a:off x="713232" y="4343400"/>
+            <a:off x="713232" y="4023360"/>
             <a:ext cx="420624" cy="420624"/>
           </a:xfrm>
           <a:prstGeom prst="ellipse">
             <a:avLst/>
           </a:prstGeom>
           <a:solidFill>
-            <a:srgbClr val="A4472B"/>
+            <a:srgbClr val="E2E0DE"/>
           </a:solidFill>
           <a:ln>
             <a:noFill/>
@@ -16177,7 +16607,7 @@
             <a:r>
               <a:rPr sz="1500" i="0" b="1">
                 <a:solidFill>
-                  <a:srgbClr val="FFFFFF"/>
+                  <a:srgbClr val="6E625B"/>
                 </a:solidFill>
                 <a:latin typeface="Calibri"/>
               </a:rPr>
@@ -16194,8 +16624,8 @@
         </p:nvSpPr>
         <p:spPr>
           <a:xfrm>
-            <a:off x="1371600" y="4233672"/>
-            <a:ext cx="10088575" cy="640080"/>
+            <a:off x="1371600" y="3959352"/>
+            <a:ext cx="10088575" cy="548640"/>
           </a:xfrm>
           <a:prstGeom prst="rect">
             <a:avLst/>
@@ -16211,7 +16641,7 @@
             <a:r>
               <a:rPr sz="1900" i="0" b="0">
                 <a:solidFill>
-                  <a:srgbClr val="2B211C"/>
+                  <a:srgbClr val="6E625B"/>
                 </a:solidFill>
                 <a:latin typeface="Calibri"/>
               </a:rPr>
@@ -16228,8 +16658,8 @@
         </p:nvSpPr>
         <p:spPr>
           <a:xfrm>
-            <a:off x="548640" y="5001768"/>
-            <a:ext cx="11094415" cy="640080"/>
+            <a:off x="548640" y="4636008"/>
+            <a:ext cx="11094415" cy="548640"/>
           </a:xfrm>
           <a:prstGeom prst="roundRect">
             <a:avLst>
@@ -16237,7 +16667,7 @@
             </a:avLst>
           </a:prstGeom>
           <a:solidFill>
-            <a:srgbClr val="FAF4F2"/>
+            <a:srgbClr val="F5F4F4"/>
           </a:solidFill>
           <a:ln>
             <a:noFill/>
@@ -16274,14 +16704,14 @@
         </p:nvSpPr>
         <p:spPr>
           <a:xfrm>
-            <a:off x="713232" y="5111496"/>
+            <a:off x="713232" y="4700016"/>
             <a:ext cx="420624" cy="420624"/>
           </a:xfrm>
           <a:prstGeom prst="ellipse">
             <a:avLst/>
           </a:prstGeom>
           <a:solidFill>
-            <a:srgbClr val="A4472B"/>
+            <a:srgbClr val="E2E0DE"/>
           </a:solidFill>
           <a:ln>
             <a:noFill/>
@@ -16310,7 +16740,7 @@
             <a:r>
               <a:rPr sz="1500" i="0" b="1">
                 <a:solidFill>
-                  <a:srgbClr val="FFFFFF"/>
+                  <a:srgbClr val="6E625B"/>
                 </a:solidFill>
                 <a:latin typeface="Calibri"/>
               </a:rPr>
@@ -16327,8 +16757,8 @@
         </p:nvSpPr>
         <p:spPr>
           <a:xfrm>
-            <a:off x="1371600" y="5001768"/>
-            <a:ext cx="10088575" cy="640080"/>
+            <a:off x="1371600" y="4636008"/>
+            <a:ext cx="10088575" cy="548640"/>
           </a:xfrm>
           <a:prstGeom prst="rect">
             <a:avLst/>
@@ -16344,11 +16774,54 @@
             <a:r>
               <a:rPr sz="1900" i="0" b="0">
                 <a:solidFill>
+                  <a:srgbClr val="6E625B"/>
+                </a:solidFill>
+                <a:latin typeface="Calibri"/>
+              </a:rPr>
+              <a:t>Case report</a:t>
+            </a:r>
+          </a:p>
+        </p:txBody>
+      </p:sp>
+      <p:sp>
+        <p:nvSpPr>
+          <p:cNvPr id="21" name="TextBox 20"/>
+          <p:cNvSpPr txBox="1"/>
+          <p:nvPr/>
+        </p:nvSpPr>
+        <p:spPr>
+          <a:xfrm>
+            <a:off x="548640" y="5358384"/>
+            <a:ext cx="11094415" cy="685800"/>
+          </a:xfrm>
+          <a:prstGeom prst="rect">
+            <a:avLst/>
+          </a:prstGeom>
+          <a:noFill/>
+        </p:spPr>
+        <p:txBody>
+          <a:bodyPr wrap="square" anchor="t" lIns="0" rIns="0" tIns="0" bIns="0">
+            <a:spAutoFit/>
+          </a:bodyPr>
+          <a:lstStyle/>
+          <a:p>
+            <a:r>
+              <a:rPr sz="1500" i="0" b="1">
+                <a:solidFill>
+                  <a:srgbClr val="2F6F7A"/>
+                </a:solidFill>
+                <a:latin typeface="Calibri"/>
+              </a:rPr>
+              <a:t>Why:  </a:t>
+            </a:r>
+            <a:r>
+              <a:rPr sz="1500" i="0" b="0">
+                <a:solidFill>
                   <a:srgbClr val="2B211C"/>
                 </a:solidFill>
                 <a:latin typeface="Calibri"/>
               </a:rPr>
-              <a:t>Case report</a:t>
+              <a:t>Case-control studies suit rare outcomes. B would need huge numbers, C shows prevalence, D cannot compare.</a:t>
             </a:r>
           </a:p>
         </p:txBody>
@@ -16381,20 +16854,20 @@
       <p:grpSpPr/>
       <p:sp>
         <p:nvSpPr>
-          <p:cNvPr id="2" name="Oval 1"/>
+          <p:cNvPr id="2" name="Rectangle 1"/>
           <p:cNvSpPr/>
           <p:nvPr/>
         </p:nvSpPr>
         <p:spPr>
           <a:xfrm>
-            <a:off x="548640" y="475488"/>
-            <a:ext cx="658368" cy="658368"/>
-          </a:xfrm>
-          <a:prstGeom prst="ellipse">
+            <a:off x="0" y="0"/>
+            <a:ext cx="3931920" cy="6858000"/>
+          </a:xfrm>
+          <a:prstGeom prst="rect">
             <a:avLst/>
           </a:prstGeom>
           <a:solidFill>
-            <a:srgbClr val="2F6F7A"/>
+            <a:srgbClr val="A4472B"/>
           </a:solidFill>
           <a:ln>
             <a:noFill/>
@@ -16416,19 +16889,10 @@
           </a:fontRef>
         </p:style>
         <p:txBody>
-          <a:bodyPr rtlCol="0" anchor="ctr" lIns="0" rIns="0" tIns="0" bIns="0"/>
+          <a:bodyPr rtlCol="0" anchor="ctr"/>
           <a:lstStyle/>
           <a:p>
             <a:pPr algn="ctr"/>
-            <a:r>
-              <a:rPr sz="1800" i="0" b="1">
-                <a:solidFill>
-                  <a:srgbClr val="FFFFFF"/>
-                </a:solidFill>
-                <a:latin typeface="Cambria"/>
-              </a:rPr>
-              <a:t>03</a:t>
-            </a:r>
           </a:p>
         </p:txBody>
       </p:sp>
@@ -16440,8 +16904,8 @@
         </p:nvSpPr>
         <p:spPr>
           <a:xfrm>
-            <a:off x="1417319" y="438912"/>
-            <a:ext cx="10180015" cy="292608"/>
+            <a:off x="548640" y="1188720"/>
+            <a:ext cx="2926080" cy="2377440"/>
           </a:xfrm>
           <a:prstGeom prst="rect">
             <a:avLst/>
@@ -16455,13 +16919,13 @@
           <a:lstStyle/>
           <a:p>
             <a:r>
-              <a:rPr sz="1200" i="0" b="1" spc="150">
-                <a:solidFill>
-                  <a:srgbClr val="2F6F7A"/>
-                </a:solidFill>
-                <a:latin typeface="Calibri"/>
-              </a:rPr>
-              <a:t>SECTION 3  ·  QUESTION 5 OF 5  ·  ANSWER</a:t>
+              <a:rPr sz="13000" i="0" b="1">
+                <a:solidFill>
+                  <a:srgbClr val="F1E3DF"/>
+                </a:solidFill>
+                <a:latin typeface="Cambria"/>
+              </a:rPr>
+              <a:t>?</a:t>
             </a:r>
           </a:p>
         </p:txBody>
@@ -16474,8 +16938,8 @@
         </p:nvSpPr>
         <p:spPr>
           <a:xfrm>
-            <a:off x="1417319" y="676656"/>
-            <a:ext cx="10180015" cy="640080"/>
+            <a:off x="548640" y="3977639"/>
+            <a:ext cx="3017520" cy="1280160"/>
           </a:xfrm>
           <a:prstGeom prst="rect">
             <a:avLst/>
@@ -16489,13 +16953,24 @@
           <a:lstStyle/>
           <a:p>
             <a:r>
-              <a:rPr sz="3200" i="0" b="1">
-                <a:solidFill>
-                  <a:srgbClr val="2B211C"/>
+              <a:rPr sz="3000" i="0" b="1">
+                <a:solidFill>
+                  <a:srgbClr val="FFFFFF"/>
                 </a:solidFill>
                 <a:latin typeface="Cambria"/>
               </a:rPr>
-              <a:t>Check your answer</a:t>
+              <a:t>Practice Case</a:t>
+            </a:r>
+          </a:p>
+          <a:p>
+            <a:r>
+              <a:rPr sz="1400" i="0" b="1" spc="150">
+                <a:solidFill>
+                  <a:srgbClr val="F1E3DF"/>
+                </a:solidFill>
+                <a:latin typeface="Calibri"/>
+              </a:rPr>
+              <a:t>Section 3</a:t>
             </a:r>
           </a:p>
         </p:txBody>
@@ -16508,7 +16983,41 @@
         </p:nvSpPr>
         <p:spPr>
           <a:xfrm>
-            <a:off x="548640" y="6419088"/>
+            <a:off x="4526280" y="822960"/>
+            <a:ext cx="7132320" cy="5120640"/>
+          </a:xfrm>
+          <a:prstGeom prst="rect">
+            <a:avLst/>
+          </a:prstGeom>
+          <a:noFill/>
+        </p:spPr>
+        <p:txBody>
+          <a:bodyPr wrap="square" anchor="ctr" lIns="0" rIns="0" tIns="0" bIns="0">
+            <a:spAutoFit/>
+          </a:bodyPr>
+          <a:lstStyle/>
+          <a:p>
+            <a:r>
+              <a:rPr sz="2200" i="0" b="0">
+                <a:solidFill>
+                  <a:srgbClr val="2B211C"/>
+                </a:solidFill>
+                <a:latin typeface="Calibri"/>
+              </a:rPr>
+              <a:t>A new antidiabetic drug is launched. Three questions arise: (a) Does it lower HbA1c more than metformin? (b) Does it cause a rare pancreatitis? (c) What happens to heart outcomes over five years? Choose a design for each and give one reason.</a:t>
+            </a:r>
+          </a:p>
+        </p:txBody>
+      </p:sp>
+      <p:sp>
+        <p:nvSpPr>
+          <p:cNvPr id="6" name="TextBox 5"/>
+          <p:cNvSpPr txBox="1"/>
+          <p:nvPr/>
+        </p:nvSpPr>
+        <p:spPr>
+          <a:xfrm>
+            <a:off x="4526280" y="6419088"/>
             <a:ext cx="8229600" cy="274320"/>
           </a:xfrm>
           <a:prstGeom prst="rect">
@@ -16529,14 +17038,14 @@
                 </a:solidFill>
                 <a:latin typeface="Calibri"/>
               </a:rPr>
-              <a:t>Drug Information  ·  Section 3  ·  Study Designs and Levels of Evidence</a:t>
-            </a:r>
-          </a:p>
-        </p:txBody>
-      </p:sp>
-      <p:sp>
-        <p:nvSpPr>
-          <p:cNvPr id="6" name="TextBox 5"/>
+              <a:t>Drug Information  ·  Study Designs and Levels of Evidence</a:t>
+            </a:r>
+          </a:p>
+        </p:txBody>
+      </p:sp>
+      <p:sp>
+        <p:nvSpPr>
+          <p:cNvPr id="7" name="TextBox 6"/>
           <p:cNvSpPr txBox="1"/>
           <p:nvPr/>
         </p:nvSpPr>
@@ -16564,21 +17073,21 @@
                 </a:solidFill>
                 <a:latin typeface="Calibri"/>
               </a:rPr>
-              <a:t>24 / 26</a:t>
+              <a:t>24 / 25</a:t>
             </a:r>
           </a:p>
         </p:txBody>
       </p:sp>
       <p:pic>
         <p:nvPicPr>
-          <p:cNvPr id="7" name="Picture 6" descr="logo"/>
+          <p:cNvPr id="8" name="Picture 7" descr="logo"/>
           <p:cNvPicPr>
             <a:picLocks noChangeAspect="1"/>
           </p:cNvPicPr>
           <p:nvPr/>
         </p:nvPicPr>
         <p:blipFill>
-          <a:blip r:embed="rId2"/>
+          <a:blip r:embed="rId3"/>
           <a:stretch>
             <a:fillRect/>
           </a:stretch>
@@ -16593,615 +17102,6 @@
           </a:prstGeom>
         </p:spPr>
       </p:pic>
-      <p:sp>
-        <p:nvSpPr>
-          <p:cNvPr id="8" name="TextBox 7"/>
-          <p:cNvSpPr txBox="1"/>
-          <p:nvPr/>
-        </p:nvSpPr>
-        <p:spPr>
-          <a:xfrm>
-            <a:off x="548640" y="1554480"/>
-            <a:ext cx="11094415" cy="1005840"/>
-          </a:xfrm>
-          <a:prstGeom prst="rect">
-            <a:avLst/>
-          </a:prstGeom>
-          <a:noFill/>
-        </p:spPr>
-        <p:txBody>
-          <a:bodyPr wrap="square" anchor="t" lIns="0" rIns="0" tIns="0" bIns="0">
-            <a:spAutoFit/>
-          </a:bodyPr>
-          <a:lstStyle/>
-          <a:p>
-            <a:r>
-              <a:rPr sz="2400" i="0" b="1">
-                <a:solidFill>
-                  <a:srgbClr val="2B211C"/>
-                </a:solidFill>
-                <a:latin typeface="Calibri"/>
-              </a:rPr>
-              <a:t>Which design is best to study a very rare birth defect?</a:t>
-            </a:r>
-          </a:p>
-        </p:txBody>
-      </p:sp>
-      <p:sp>
-        <p:nvSpPr>
-          <p:cNvPr id="9" name="Rounded Rectangle 8"/>
-          <p:cNvSpPr/>
-          <p:nvPr/>
-        </p:nvSpPr>
-        <p:spPr>
-          <a:xfrm>
-            <a:off x="548640" y="2606040"/>
-            <a:ext cx="11094415" cy="548640"/>
-          </a:xfrm>
-          <a:prstGeom prst="roundRect">
-            <a:avLst>
-              <a:gd name="adj" fmla="val 18000"/>
-            </a:avLst>
-          </a:prstGeom>
-          <a:solidFill>
-            <a:srgbClr val="2F6F7A"/>
-          </a:solidFill>
-          <a:ln>
-            <a:noFill/>
-          </a:ln>
-          <a:effectLst/>
-        </p:spPr>
-        <p:style>
-          <a:lnRef idx="1">
-            <a:schemeClr val="accent1"/>
-          </a:lnRef>
-          <a:fillRef idx="3">
-            <a:schemeClr val="accent1"/>
-          </a:fillRef>
-          <a:effectRef idx="2">
-            <a:schemeClr val="accent1"/>
-          </a:effectRef>
-          <a:fontRef idx="minor">
-            <a:schemeClr val="lt1"/>
-          </a:fontRef>
-        </p:style>
-        <p:txBody>
-          <a:bodyPr rtlCol="0" anchor="ctr"/>
-          <a:lstStyle/>
-          <a:p>
-            <a:pPr algn="ctr"/>
-          </a:p>
-        </p:txBody>
-      </p:sp>
-      <p:sp>
-        <p:nvSpPr>
-          <p:cNvPr id="10" name="Oval 9"/>
-          <p:cNvSpPr/>
-          <p:nvPr/>
-        </p:nvSpPr>
-        <p:spPr>
-          <a:xfrm>
-            <a:off x="713232" y="2670048"/>
-            <a:ext cx="420624" cy="420624"/>
-          </a:xfrm>
-          <a:prstGeom prst="ellipse">
-            <a:avLst/>
-          </a:prstGeom>
-          <a:solidFill>
-            <a:srgbClr val="FFFFFF"/>
-          </a:solidFill>
-          <a:ln>
-            <a:noFill/>
-          </a:ln>
-          <a:effectLst/>
-        </p:spPr>
-        <p:style>
-          <a:lnRef idx="1">
-            <a:schemeClr val="accent1"/>
-          </a:lnRef>
-          <a:fillRef idx="3">
-            <a:schemeClr val="accent1"/>
-          </a:fillRef>
-          <a:effectRef idx="2">
-            <a:schemeClr val="accent1"/>
-          </a:effectRef>
-          <a:fontRef idx="minor">
-            <a:schemeClr val="lt1"/>
-          </a:fontRef>
-        </p:style>
-        <p:txBody>
-          <a:bodyPr rtlCol="0" anchor="ctr" lIns="0" rIns="0" tIns="0" bIns="0"/>
-          <a:lstStyle/>
-          <a:p>
-            <a:pPr algn="ctr"/>
-            <a:r>
-              <a:rPr sz="1500" i="0" b="1">
-                <a:solidFill>
-                  <a:srgbClr val="2F6F7A"/>
-                </a:solidFill>
-                <a:latin typeface="Calibri"/>
-              </a:rPr>
-              <a:t>A</a:t>
-            </a:r>
-          </a:p>
-        </p:txBody>
-      </p:sp>
-      <p:sp>
-        <p:nvSpPr>
-          <p:cNvPr id="11" name="TextBox 10"/>
-          <p:cNvSpPr txBox="1"/>
-          <p:nvPr/>
-        </p:nvSpPr>
-        <p:spPr>
-          <a:xfrm>
-            <a:off x="1371600" y="2606040"/>
-            <a:ext cx="10088575" cy="548640"/>
-          </a:xfrm>
-          <a:prstGeom prst="rect">
-            <a:avLst/>
-          </a:prstGeom>
-          <a:noFill/>
-        </p:spPr>
-        <p:txBody>
-          <a:bodyPr wrap="square" anchor="ctr" lIns="0" rIns="0" tIns="0" bIns="0">
-            <a:spAutoFit/>
-          </a:bodyPr>
-          <a:lstStyle/>
-          <a:p>
-            <a:r>
-              <a:rPr sz="1900" i="0" b="1">
-                <a:solidFill>
-                  <a:srgbClr val="FFFFFF"/>
-                </a:solidFill>
-                <a:latin typeface="Calibri"/>
-              </a:rPr>
-              <a:t>Case-control study</a:t>
-            </a:r>
-          </a:p>
-        </p:txBody>
-      </p:sp>
-      <p:sp>
-        <p:nvSpPr>
-          <p:cNvPr id="12" name="Rounded Rectangle 11"/>
-          <p:cNvSpPr/>
-          <p:nvPr/>
-        </p:nvSpPr>
-        <p:spPr>
-          <a:xfrm>
-            <a:off x="548640" y="3282696"/>
-            <a:ext cx="11094415" cy="548640"/>
-          </a:xfrm>
-          <a:prstGeom prst="roundRect">
-            <a:avLst>
-              <a:gd name="adj" fmla="val 18000"/>
-            </a:avLst>
-          </a:prstGeom>
-          <a:solidFill>
-            <a:srgbClr val="F5F4F4"/>
-          </a:solidFill>
-          <a:ln>
-            <a:noFill/>
-          </a:ln>
-          <a:effectLst/>
-        </p:spPr>
-        <p:style>
-          <a:lnRef idx="1">
-            <a:schemeClr val="accent1"/>
-          </a:lnRef>
-          <a:fillRef idx="3">
-            <a:schemeClr val="accent1"/>
-          </a:fillRef>
-          <a:effectRef idx="2">
-            <a:schemeClr val="accent1"/>
-          </a:effectRef>
-          <a:fontRef idx="minor">
-            <a:schemeClr val="lt1"/>
-          </a:fontRef>
-        </p:style>
-        <p:txBody>
-          <a:bodyPr rtlCol="0" anchor="ctr"/>
-          <a:lstStyle/>
-          <a:p>
-            <a:pPr algn="ctr"/>
-          </a:p>
-        </p:txBody>
-      </p:sp>
-      <p:sp>
-        <p:nvSpPr>
-          <p:cNvPr id="13" name="Oval 12"/>
-          <p:cNvSpPr/>
-          <p:nvPr/>
-        </p:nvSpPr>
-        <p:spPr>
-          <a:xfrm>
-            <a:off x="713232" y="3346703"/>
-            <a:ext cx="420624" cy="420624"/>
-          </a:xfrm>
-          <a:prstGeom prst="ellipse">
-            <a:avLst/>
-          </a:prstGeom>
-          <a:solidFill>
-            <a:srgbClr val="E2E0DE"/>
-          </a:solidFill>
-          <a:ln>
-            <a:noFill/>
-          </a:ln>
-          <a:effectLst/>
-        </p:spPr>
-        <p:style>
-          <a:lnRef idx="1">
-            <a:schemeClr val="accent1"/>
-          </a:lnRef>
-          <a:fillRef idx="3">
-            <a:schemeClr val="accent1"/>
-          </a:fillRef>
-          <a:effectRef idx="2">
-            <a:schemeClr val="accent1"/>
-          </a:effectRef>
-          <a:fontRef idx="minor">
-            <a:schemeClr val="lt1"/>
-          </a:fontRef>
-        </p:style>
-        <p:txBody>
-          <a:bodyPr rtlCol="0" anchor="ctr" lIns="0" rIns="0" tIns="0" bIns="0"/>
-          <a:lstStyle/>
-          <a:p>
-            <a:pPr algn="ctr"/>
-            <a:r>
-              <a:rPr sz="1500" i="0" b="1">
-                <a:solidFill>
-                  <a:srgbClr val="6E625B"/>
-                </a:solidFill>
-                <a:latin typeface="Calibri"/>
-              </a:rPr>
-              <a:t>B</a:t>
-            </a:r>
-          </a:p>
-        </p:txBody>
-      </p:sp>
-      <p:sp>
-        <p:nvSpPr>
-          <p:cNvPr id="14" name="TextBox 13"/>
-          <p:cNvSpPr txBox="1"/>
-          <p:nvPr/>
-        </p:nvSpPr>
-        <p:spPr>
-          <a:xfrm>
-            <a:off x="1371600" y="3282696"/>
-            <a:ext cx="10088575" cy="548640"/>
-          </a:xfrm>
-          <a:prstGeom prst="rect">
-            <a:avLst/>
-          </a:prstGeom>
-          <a:noFill/>
-        </p:spPr>
-        <p:txBody>
-          <a:bodyPr wrap="square" anchor="ctr" lIns="0" rIns="0" tIns="0" bIns="0">
-            <a:spAutoFit/>
-          </a:bodyPr>
-          <a:lstStyle/>
-          <a:p>
-            <a:r>
-              <a:rPr sz="1900" i="0" b="0">
-                <a:solidFill>
-                  <a:srgbClr val="6E625B"/>
-                </a:solidFill>
-                <a:latin typeface="Calibri"/>
-              </a:rPr>
-              <a:t>Randomised controlled trial</a:t>
-            </a:r>
-          </a:p>
-        </p:txBody>
-      </p:sp>
-      <p:sp>
-        <p:nvSpPr>
-          <p:cNvPr id="15" name="Rounded Rectangle 14"/>
-          <p:cNvSpPr/>
-          <p:nvPr/>
-        </p:nvSpPr>
-        <p:spPr>
-          <a:xfrm>
-            <a:off x="548640" y="3959352"/>
-            <a:ext cx="11094415" cy="548640"/>
-          </a:xfrm>
-          <a:prstGeom prst="roundRect">
-            <a:avLst>
-              <a:gd name="adj" fmla="val 18000"/>
-            </a:avLst>
-          </a:prstGeom>
-          <a:solidFill>
-            <a:srgbClr val="F5F4F4"/>
-          </a:solidFill>
-          <a:ln>
-            <a:noFill/>
-          </a:ln>
-          <a:effectLst/>
-        </p:spPr>
-        <p:style>
-          <a:lnRef idx="1">
-            <a:schemeClr val="accent1"/>
-          </a:lnRef>
-          <a:fillRef idx="3">
-            <a:schemeClr val="accent1"/>
-          </a:fillRef>
-          <a:effectRef idx="2">
-            <a:schemeClr val="accent1"/>
-          </a:effectRef>
-          <a:fontRef idx="minor">
-            <a:schemeClr val="lt1"/>
-          </a:fontRef>
-        </p:style>
-        <p:txBody>
-          <a:bodyPr rtlCol="0" anchor="ctr"/>
-          <a:lstStyle/>
-          <a:p>
-            <a:pPr algn="ctr"/>
-          </a:p>
-        </p:txBody>
-      </p:sp>
-      <p:sp>
-        <p:nvSpPr>
-          <p:cNvPr id="16" name="Oval 15"/>
-          <p:cNvSpPr/>
-          <p:nvPr/>
-        </p:nvSpPr>
-        <p:spPr>
-          <a:xfrm>
-            <a:off x="713232" y="4023360"/>
-            <a:ext cx="420624" cy="420624"/>
-          </a:xfrm>
-          <a:prstGeom prst="ellipse">
-            <a:avLst/>
-          </a:prstGeom>
-          <a:solidFill>
-            <a:srgbClr val="E2E0DE"/>
-          </a:solidFill>
-          <a:ln>
-            <a:noFill/>
-          </a:ln>
-          <a:effectLst/>
-        </p:spPr>
-        <p:style>
-          <a:lnRef idx="1">
-            <a:schemeClr val="accent1"/>
-          </a:lnRef>
-          <a:fillRef idx="3">
-            <a:schemeClr val="accent1"/>
-          </a:fillRef>
-          <a:effectRef idx="2">
-            <a:schemeClr val="accent1"/>
-          </a:effectRef>
-          <a:fontRef idx="minor">
-            <a:schemeClr val="lt1"/>
-          </a:fontRef>
-        </p:style>
-        <p:txBody>
-          <a:bodyPr rtlCol="0" anchor="ctr" lIns="0" rIns="0" tIns="0" bIns="0"/>
-          <a:lstStyle/>
-          <a:p>
-            <a:pPr algn="ctr"/>
-            <a:r>
-              <a:rPr sz="1500" i="0" b="1">
-                <a:solidFill>
-                  <a:srgbClr val="6E625B"/>
-                </a:solidFill>
-                <a:latin typeface="Calibri"/>
-              </a:rPr>
-              <a:t>C</a:t>
-            </a:r>
-          </a:p>
-        </p:txBody>
-      </p:sp>
-      <p:sp>
-        <p:nvSpPr>
-          <p:cNvPr id="17" name="TextBox 16"/>
-          <p:cNvSpPr txBox="1"/>
-          <p:nvPr/>
-        </p:nvSpPr>
-        <p:spPr>
-          <a:xfrm>
-            <a:off x="1371600" y="3959352"/>
-            <a:ext cx="10088575" cy="548640"/>
-          </a:xfrm>
-          <a:prstGeom prst="rect">
-            <a:avLst/>
-          </a:prstGeom>
-          <a:noFill/>
-        </p:spPr>
-        <p:txBody>
-          <a:bodyPr wrap="square" anchor="ctr" lIns="0" rIns="0" tIns="0" bIns="0">
-            <a:spAutoFit/>
-          </a:bodyPr>
-          <a:lstStyle/>
-          <a:p>
-            <a:r>
-              <a:rPr sz="1900" i="0" b="0">
-                <a:solidFill>
-                  <a:srgbClr val="6E625B"/>
-                </a:solidFill>
-                <a:latin typeface="Calibri"/>
-              </a:rPr>
-              <a:t>Cross-sectional survey</a:t>
-            </a:r>
-          </a:p>
-        </p:txBody>
-      </p:sp>
-      <p:sp>
-        <p:nvSpPr>
-          <p:cNvPr id="18" name="Rounded Rectangle 17"/>
-          <p:cNvSpPr/>
-          <p:nvPr/>
-        </p:nvSpPr>
-        <p:spPr>
-          <a:xfrm>
-            <a:off x="548640" y="4636008"/>
-            <a:ext cx="11094415" cy="548640"/>
-          </a:xfrm>
-          <a:prstGeom prst="roundRect">
-            <a:avLst>
-              <a:gd name="adj" fmla="val 18000"/>
-            </a:avLst>
-          </a:prstGeom>
-          <a:solidFill>
-            <a:srgbClr val="F5F4F4"/>
-          </a:solidFill>
-          <a:ln>
-            <a:noFill/>
-          </a:ln>
-          <a:effectLst/>
-        </p:spPr>
-        <p:style>
-          <a:lnRef idx="1">
-            <a:schemeClr val="accent1"/>
-          </a:lnRef>
-          <a:fillRef idx="3">
-            <a:schemeClr val="accent1"/>
-          </a:fillRef>
-          <a:effectRef idx="2">
-            <a:schemeClr val="accent1"/>
-          </a:effectRef>
-          <a:fontRef idx="minor">
-            <a:schemeClr val="lt1"/>
-          </a:fontRef>
-        </p:style>
-        <p:txBody>
-          <a:bodyPr rtlCol="0" anchor="ctr"/>
-          <a:lstStyle/>
-          <a:p>
-            <a:pPr algn="ctr"/>
-          </a:p>
-        </p:txBody>
-      </p:sp>
-      <p:sp>
-        <p:nvSpPr>
-          <p:cNvPr id="19" name="Oval 18"/>
-          <p:cNvSpPr/>
-          <p:nvPr/>
-        </p:nvSpPr>
-        <p:spPr>
-          <a:xfrm>
-            <a:off x="713232" y="4700016"/>
-            <a:ext cx="420624" cy="420624"/>
-          </a:xfrm>
-          <a:prstGeom prst="ellipse">
-            <a:avLst/>
-          </a:prstGeom>
-          <a:solidFill>
-            <a:srgbClr val="E2E0DE"/>
-          </a:solidFill>
-          <a:ln>
-            <a:noFill/>
-          </a:ln>
-          <a:effectLst/>
-        </p:spPr>
-        <p:style>
-          <a:lnRef idx="1">
-            <a:schemeClr val="accent1"/>
-          </a:lnRef>
-          <a:fillRef idx="3">
-            <a:schemeClr val="accent1"/>
-          </a:fillRef>
-          <a:effectRef idx="2">
-            <a:schemeClr val="accent1"/>
-          </a:effectRef>
-          <a:fontRef idx="minor">
-            <a:schemeClr val="lt1"/>
-          </a:fontRef>
-        </p:style>
-        <p:txBody>
-          <a:bodyPr rtlCol="0" anchor="ctr" lIns="0" rIns="0" tIns="0" bIns="0"/>
-          <a:lstStyle/>
-          <a:p>
-            <a:pPr algn="ctr"/>
-            <a:r>
-              <a:rPr sz="1500" i="0" b="1">
-                <a:solidFill>
-                  <a:srgbClr val="6E625B"/>
-                </a:solidFill>
-                <a:latin typeface="Calibri"/>
-              </a:rPr>
-              <a:t>D</a:t>
-            </a:r>
-          </a:p>
-        </p:txBody>
-      </p:sp>
-      <p:sp>
-        <p:nvSpPr>
-          <p:cNvPr id="20" name="TextBox 19"/>
-          <p:cNvSpPr txBox="1"/>
-          <p:nvPr/>
-        </p:nvSpPr>
-        <p:spPr>
-          <a:xfrm>
-            <a:off x="1371600" y="4636008"/>
-            <a:ext cx="10088575" cy="548640"/>
-          </a:xfrm>
-          <a:prstGeom prst="rect">
-            <a:avLst/>
-          </a:prstGeom>
-          <a:noFill/>
-        </p:spPr>
-        <p:txBody>
-          <a:bodyPr wrap="square" anchor="ctr" lIns="0" rIns="0" tIns="0" bIns="0">
-            <a:spAutoFit/>
-          </a:bodyPr>
-          <a:lstStyle/>
-          <a:p>
-            <a:r>
-              <a:rPr sz="1900" i="0" b="0">
-                <a:solidFill>
-                  <a:srgbClr val="6E625B"/>
-                </a:solidFill>
-                <a:latin typeface="Calibri"/>
-              </a:rPr>
-              <a:t>Case report</a:t>
-            </a:r>
-          </a:p>
-        </p:txBody>
-      </p:sp>
-      <p:sp>
-        <p:nvSpPr>
-          <p:cNvPr id="21" name="TextBox 20"/>
-          <p:cNvSpPr txBox="1"/>
-          <p:nvPr/>
-        </p:nvSpPr>
-        <p:spPr>
-          <a:xfrm>
-            <a:off x="548640" y="5358384"/>
-            <a:ext cx="11094415" cy="685800"/>
-          </a:xfrm>
-          <a:prstGeom prst="rect">
-            <a:avLst/>
-          </a:prstGeom>
-          <a:noFill/>
-        </p:spPr>
-        <p:txBody>
-          <a:bodyPr wrap="square" anchor="t" lIns="0" rIns="0" tIns="0" bIns="0">
-            <a:spAutoFit/>
-          </a:bodyPr>
-          <a:lstStyle/>
-          <a:p>
-            <a:r>
-              <a:rPr sz="1500" i="0" b="1">
-                <a:solidFill>
-                  <a:srgbClr val="2F6F7A"/>
-                </a:solidFill>
-                <a:latin typeface="Calibri"/>
-              </a:rPr>
-              <a:t>Why:  </a:t>
-            </a:r>
-            <a:r>
-              <a:rPr sz="1500" i="0" b="0">
-                <a:solidFill>
-                  <a:srgbClr val="2B211C"/>
-                </a:solidFill>
-                <a:latin typeface="Calibri"/>
-              </a:rPr>
-              <a:t>Case-control studies suit rare outcomes. B would need huge numbers, C shows prevalence, D cannot compare.</a:t>
-            </a:r>
-          </a:p>
-        </p:txBody>
-      </p:sp>
     </p:spTree>
   </p:cSld>
   <p:clrMapOvr>
@@ -17211,282 +17111,6 @@
 </file>
 
 <file path=ppt/slides/slide25.xml><?xml version="1.0" encoding="utf-8"?>
-<p:sld xmlns:a="http://schemas.openxmlformats.org/drawingml/2006/main" xmlns:p="http://schemas.openxmlformats.org/presentationml/2006/main" xmlns:r="http://schemas.openxmlformats.org/officeDocument/2006/relationships">
-  <p:cSld>
-    <p:bg>
-      <p:bgPr>
-        <a:solidFill>
-          <a:srgbClr val="FFFFFF"/>
-        </a:solidFill>
-        <a:effectLst/>
-      </p:bgPr>
-    </p:bg>
-    <p:spTree>
-      <p:nvGrpSpPr>
-        <p:cNvPr id="1" name=""/>
-        <p:cNvGrpSpPr/>
-        <p:nvPr/>
-      </p:nvGrpSpPr>
-      <p:grpSpPr/>
-      <p:sp>
-        <p:nvSpPr>
-          <p:cNvPr id="2" name="Rectangle 1"/>
-          <p:cNvSpPr/>
-          <p:nvPr/>
-        </p:nvSpPr>
-        <p:spPr>
-          <a:xfrm>
-            <a:off x="0" y="0"/>
-            <a:ext cx="3931920" cy="6858000"/>
-          </a:xfrm>
-          <a:prstGeom prst="rect">
-            <a:avLst/>
-          </a:prstGeom>
-          <a:solidFill>
-            <a:srgbClr val="A4472B"/>
-          </a:solidFill>
-          <a:ln>
-            <a:noFill/>
-          </a:ln>
-          <a:effectLst/>
-        </p:spPr>
-        <p:style>
-          <a:lnRef idx="1">
-            <a:schemeClr val="accent1"/>
-          </a:lnRef>
-          <a:fillRef idx="3">
-            <a:schemeClr val="accent1"/>
-          </a:fillRef>
-          <a:effectRef idx="2">
-            <a:schemeClr val="accent1"/>
-          </a:effectRef>
-          <a:fontRef idx="minor">
-            <a:schemeClr val="lt1"/>
-          </a:fontRef>
-        </p:style>
-        <p:txBody>
-          <a:bodyPr rtlCol="0" anchor="ctr"/>
-          <a:lstStyle/>
-          <a:p>
-            <a:pPr algn="ctr"/>
-          </a:p>
-        </p:txBody>
-      </p:sp>
-      <p:sp>
-        <p:nvSpPr>
-          <p:cNvPr id="3" name="TextBox 2"/>
-          <p:cNvSpPr txBox="1"/>
-          <p:nvPr/>
-        </p:nvSpPr>
-        <p:spPr>
-          <a:xfrm>
-            <a:off x="548640" y="1188720"/>
-            <a:ext cx="2926080" cy="2377440"/>
-          </a:xfrm>
-          <a:prstGeom prst="rect">
-            <a:avLst/>
-          </a:prstGeom>
-          <a:noFill/>
-        </p:spPr>
-        <p:txBody>
-          <a:bodyPr wrap="square" anchor="t" lIns="0" rIns="0" tIns="0" bIns="0">
-            <a:spAutoFit/>
-          </a:bodyPr>
-          <a:lstStyle/>
-          <a:p>
-            <a:r>
-              <a:rPr sz="13000" i="0" b="1">
-                <a:solidFill>
-                  <a:srgbClr val="F1E3DF"/>
-                </a:solidFill>
-                <a:latin typeface="Cambria"/>
-              </a:rPr>
-              <a:t>?</a:t>
-            </a:r>
-          </a:p>
-        </p:txBody>
-      </p:sp>
-      <p:sp>
-        <p:nvSpPr>
-          <p:cNvPr id="4" name="TextBox 3"/>
-          <p:cNvSpPr txBox="1"/>
-          <p:nvPr/>
-        </p:nvSpPr>
-        <p:spPr>
-          <a:xfrm>
-            <a:off x="548640" y="3977639"/>
-            <a:ext cx="3017520" cy="1280160"/>
-          </a:xfrm>
-          <a:prstGeom prst="rect">
-            <a:avLst/>
-          </a:prstGeom>
-          <a:noFill/>
-        </p:spPr>
-        <p:txBody>
-          <a:bodyPr wrap="square" anchor="t" lIns="0" rIns="0" tIns="0" bIns="0">
-            <a:spAutoFit/>
-          </a:bodyPr>
-          <a:lstStyle/>
-          <a:p>
-            <a:r>
-              <a:rPr sz="3000" i="0" b="1">
-                <a:solidFill>
-                  <a:srgbClr val="FFFFFF"/>
-                </a:solidFill>
-                <a:latin typeface="Cambria"/>
-              </a:rPr>
-              <a:t>Practice Case</a:t>
-            </a:r>
-          </a:p>
-          <a:p>
-            <a:r>
-              <a:rPr sz="1400" i="0" b="1" spc="150">
-                <a:solidFill>
-                  <a:srgbClr val="F1E3DF"/>
-                </a:solidFill>
-                <a:latin typeface="Calibri"/>
-              </a:rPr>
-              <a:t>Section 3</a:t>
-            </a:r>
-          </a:p>
-        </p:txBody>
-      </p:sp>
-      <p:sp>
-        <p:nvSpPr>
-          <p:cNvPr id="5" name="TextBox 4"/>
-          <p:cNvSpPr txBox="1"/>
-          <p:nvPr/>
-        </p:nvSpPr>
-        <p:spPr>
-          <a:xfrm>
-            <a:off x="4526280" y="822960"/>
-            <a:ext cx="7132320" cy="5120640"/>
-          </a:xfrm>
-          <a:prstGeom prst="rect">
-            <a:avLst/>
-          </a:prstGeom>
-          <a:noFill/>
-        </p:spPr>
-        <p:txBody>
-          <a:bodyPr wrap="square" anchor="ctr" lIns="0" rIns="0" tIns="0" bIns="0">
-            <a:spAutoFit/>
-          </a:bodyPr>
-          <a:lstStyle/>
-          <a:p>
-            <a:r>
-              <a:rPr sz="2200" i="0" b="0">
-                <a:solidFill>
-                  <a:srgbClr val="2B211C"/>
-                </a:solidFill>
-                <a:latin typeface="Calibri"/>
-              </a:rPr>
-              <a:t>A new antidiabetic drug is launched. Three questions arise: (a) Does it lower HbA1c more than metformin? (b) Does it cause a rare pancreatitis? (c) What happens to heart outcomes over five years? Choose a design for each and give one reason.</a:t>
-            </a:r>
-          </a:p>
-        </p:txBody>
-      </p:sp>
-      <p:sp>
-        <p:nvSpPr>
-          <p:cNvPr id="6" name="TextBox 5"/>
-          <p:cNvSpPr txBox="1"/>
-          <p:nvPr/>
-        </p:nvSpPr>
-        <p:spPr>
-          <a:xfrm>
-            <a:off x="4526280" y="6419088"/>
-            <a:ext cx="8229600" cy="274320"/>
-          </a:xfrm>
-          <a:prstGeom prst="rect">
-            <a:avLst/>
-          </a:prstGeom>
-          <a:noFill/>
-        </p:spPr>
-        <p:txBody>
-          <a:bodyPr wrap="square" anchor="t" lIns="0" rIns="0" tIns="0" bIns="0">
-            <a:spAutoFit/>
-          </a:bodyPr>
-          <a:lstStyle/>
-          <a:p>
-            <a:r>
-              <a:rPr sz="1200" i="0" b="0">
-                <a:solidFill>
-                  <a:srgbClr val="6E625B"/>
-                </a:solidFill>
-                <a:latin typeface="Calibri"/>
-              </a:rPr>
-              <a:t>Drug Information  ·  Study Designs and Levels of Evidence</a:t>
-            </a:r>
-          </a:p>
-        </p:txBody>
-      </p:sp>
-      <p:sp>
-        <p:nvSpPr>
-          <p:cNvPr id="7" name="TextBox 6"/>
-          <p:cNvSpPr txBox="1"/>
-          <p:nvPr/>
-        </p:nvSpPr>
-        <p:spPr>
-          <a:xfrm>
-            <a:off x="10058400" y="6419088"/>
-            <a:ext cx="1097280" cy="274320"/>
-          </a:xfrm>
-          <a:prstGeom prst="rect">
-            <a:avLst/>
-          </a:prstGeom>
-          <a:noFill/>
-        </p:spPr>
-        <p:txBody>
-          <a:bodyPr wrap="square" anchor="t" lIns="0" rIns="0" tIns="0" bIns="0">
-            <a:spAutoFit/>
-          </a:bodyPr>
-          <a:lstStyle/>
-          <a:p>
-            <a:pPr algn="r"/>
-            <a:r>
-              <a:rPr sz="1200" i="0" b="1">
-                <a:solidFill>
-                  <a:srgbClr val="6E625B"/>
-                </a:solidFill>
-                <a:latin typeface="Calibri"/>
-              </a:rPr>
-              <a:t>25 / 26</a:t>
-            </a:r>
-          </a:p>
-        </p:txBody>
-      </p:sp>
-      <p:pic>
-        <p:nvPicPr>
-          <p:cNvPr id="8" name="Picture 7" descr="logo"/>
-          <p:cNvPicPr>
-            <a:picLocks noChangeAspect="1"/>
-          </p:cNvPicPr>
-          <p:nvPr/>
-        </p:nvPicPr>
-        <p:blipFill>
-          <a:blip r:embed="rId3"/>
-          <a:stretch>
-            <a:fillRect/>
-          </a:stretch>
-        </p:blipFill>
-        <p:spPr>
-          <a:xfrm>
-            <a:off x="11247120" y="6309360"/>
-            <a:ext cx="384048" cy="384048"/>
-          </a:xfrm>
-          <a:prstGeom prst="rect">
-            <a:avLst/>
-          </a:prstGeom>
-        </p:spPr>
-      </p:pic>
-    </p:spTree>
-  </p:cSld>
-  <p:clrMapOvr>
-    <a:masterClrMapping/>
-  </p:clrMapOvr>
-</p:sld>
-</file>
-
-<file path=ppt/slides/slide26.xml><?xml version="1.0" encoding="utf-8"?>
 <p:sld xmlns:a="http://schemas.openxmlformats.org/drawingml/2006/main" xmlns:p="http://schemas.openxmlformats.org/presentationml/2006/main" xmlns:r="http://schemas.openxmlformats.org/officeDocument/2006/relationships">
   <p:cSld>
     <p:bg>
@@ -18266,7 +17890,7 @@
                 </a:solidFill>
                 <a:latin typeface="Calibri"/>
               </a:rPr>
-              <a:t>03 / 26</a:t>
+              <a:t>03 / 25</a:t>
             </a:r>
           </a:p>
         </p:txBody>
@@ -18941,7 +18565,7 @@
                 </a:solidFill>
                 <a:latin typeface="Calibri"/>
               </a:rPr>
-              <a:t>04 / 26</a:t>
+              <a:t>04 / 25</a:t>
             </a:r>
           </a:p>
         </p:txBody>
@@ -19464,7 +19088,7 @@
                 </a:solidFill>
                 <a:latin typeface="Calibri"/>
               </a:rPr>
-              <a:t>05 / 26</a:t>
+              <a:t>05 / 25</a:t>
             </a:r>
           </a:p>
         </p:txBody>
@@ -19502,7 +19126,7 @@
         <p:spPr>
           <a:xfrm>
             <a:off x="548640" y="1554480"/>
-            <a:ext cx="11094415" cy="4617720"/>
+            <a:ext cx="11094415" cy="1092708"/>
           </a:xfrm>
           <a:prstGeom prst="rect">
             <a:avLst/>
@@ -19521,7 +19145,7 @@
               </a:spcAft>
             </a:pPr>
             <a:r>
-              <a:rPr sz="2100" i="0" b="1">
+              <a:rPr sz="1800" i="0" b="1">
                 <a:solidFill>
                   <a:srgbClr val="2B211C"/>
                 </a:solidFill>
@@ -19530,7 +19154,7 @@
               <a:t>Confounding</a:t>
             </a:r>
             <a:r>
-              <a:rPr sz="2100" i="0" b="0">
+              <a:rPr sz="1800" i="0" b="0">
                 <a:solidFill>
                   <a:srgbClr val="2B211C"/>
                 </a:solidFill>
@@ -19541,257 +19165,17 @@
           </a:p>
         </p:txBody>
       </p:sp>
-    </p:spTree>
-  </p:cSld>
-  <p:clrMapOvr>
-    <a:masterClrMapping/>
-  </p:clrMapOvr>
-</p:sld>
-</file>
-
-<file path=ppt/slides/slide6.xml><?xml version="1.0" encoding="utf-8"?>
-<p:sld xmlns:a="http://schemas.openxmlformats.org/drawingml/2006/main" xmlns:p="http://schemas.openxmlformats.org/presentationml/2006/main" xmlns:r="http://schemas.openxmlformats.org/officeDocument/2006/relationships">
-  <p:cSld>
-    <p:bg>
-      <p:bgPr>
-        <a:solidFill>
-          <a:srgbClr val="FFFFFF"/>
-        </a:solidFill>
-        <a:effectLst/>
-      </p:bgPr>
-    </p:bg>
-    <p:spTree>
-      <p:nvGrpSpPr>
-        <p:cNvPr id="1" name=""/>
-        <p:cNvGrpSpPr/>
-        <p:nvPr/>
-      </p:nvGrpSpPr>
-      <p:grpSpPr/>
-      <p:sp>
-        <p:nvSpPr>
-          <p:cNvPr id="2" name="Oval 1"/>
-          <p:cNvSpPr/>
-          <p:nvPr/>
-        </p:nvSpPr>
-        <p:spPr>
-          <a:xfrm>
-            <a:off x="548640" y="475488"/>
-            <a:ext cx="658368" cy="658368"/>
-          </a:xfrm>
-          <a:prstGeom prst="ellipse">
-            <a:avLst/>
-          </a:prstGeom>
-          <a:solidFill>
-            <a:srgbClr val="2F6F7A"/>
-          </a:solidFill>
-          <a:ln>
-            <a:noFill/>
-          </a:ln>
-          <a:effectLst/>
-        </p:spPr>
-        <p:style>
-          <a:lnRef idx="1">
-            <a:schemeClr val="accent1"/>
-          </a:lnRef>
-          <a:fillRef idx="3">
-            <a:schemeClr val="accent1"/>
-          </a:fillRef>
-          <a:effectRef idx="2">
-            <a:schemeClr val="accent1"/>
-          </a:effectRef>
-          <a:fontRef idx="minor">
-            <a:schemeClr val="lt1"/>
-          </a:fontRef>
-        </p:style>
-        <p:txBody>
-          <a:bodyPr rtlCol="0" anchor="ctr" lIns="0" rIns="0" tIns="0" bIns="0"/>
-          <a:lstStyle/>
-          <a:p>
-            <a:pPr algn="ctr"/>
-            <a:r>
-              <a:rPr sz="1800" i="0" b="1">
-                <a:solidFill>
-                  <a:srgbClr val="FFFFFF"/>
-                </a:solidFill>
-                <a:latin typeface="Cambria"/>
-              </a:rPr>
-              <a:t>03</a:t>
-            </a:r>
-          </a:p>
-        </p:txBody>
-      </p:sp>
-      <p:sp>
-        <p:nvSpPr>
-          <p:cNvPr id="3" name="TextBox 2"/>
-          <p:cNvSpPr txBox="1"/>
-          <p:nvPr/>
-        </p:nvSpPr>
-        <p:spPr>
-          <a:xfrm>
-            <a:off x="1417319" y="438912"/>
-            <a:ext cx="10180015" cy="292608"/>
-          </a:xfrm>
-          <a:prstGeom prst="rect">
-            <a:avLst/>
-          </a:prstGeom>
-          <a:noFill/>
-        </p:spPr>
-        <p:txBody>
-          <a:bodyPr wrap="square" anchor="t" lIns="0" rIns="0" tIns="0" bIns="0">
-            <a:spAutoFit/>
-          </a:bodyPr>
-          <a:lstStyle/>
-          <a:p>
-            <a:r>
-              <a:rPr sz="1200" i="0" b="1" spc="150">
-                <a:solidFill>
-                  <a:srgbClr val="2F6F7A"/>
-                </a:solidFill>
-                <a:latin typeface="Calibri"/>
-              </a:rPr>
-              <a:t>SECTION 3</a:t>
-            </a:r>
-          </a:p>
-        </p:txBody>
-      </p:sp>
-      <p:sp>
-        <p:nvSpPr>
-          <p:cNvPr id="4" name="TextBox 3"/>
-          <p:cNvSpPr txBox="1"/>
-          <p:nvPr/>
-        </p:nvSpPr>
-        <p:spPr>
-          <a:xfrm>
-            <a:off x="1417319" y="676656"/>
-            <a:ext cx="10180015" cy="640080"/>
-          </a:xfrm>
-          <a:prstGeom prst="rect">
-            <a:avLst/>
-          </a:prstGeom>
-          <a:noFill/>
-        </p:spPr>
-        <p:txBody>
-          <a:bodyPr wrap="square" anchor="t" lIns="0" rIns="0" tIns="0" bIns="0">
-            <a:spAutoFit/>
-          </a:bodyPr>
-          <a:lstStyle/>
-          <a:p>
-            <a:r>
-              <a:rPr sz="3200" i="0" b="1">
-                <a:solidFill>
-                  <a:srgbClr val="2B211C"/>
-                </a:solidFill>
-                <a:latin typeface="Cambria"/>
-              </a:rPr>
-              <a:t>The Main Designs</a:t>
-            </a:r>
-          </a:p>
-        </p:txBody>
-      </p:sp>
-      <p:sp>
-        <p:nvSpPr>
-          <p:cNvPr id="5" name="TextBox 4"/>
-          <p:cNvSpPr txBox="1"/>
-          <p:nvPr/>
-        </p:nvSpPr>
-        <p:spPr>
-          <a:xfrm>
-            <a:off x="548640" y="6419088"/>
-            <a:ext cx="8229600" cy="274320"/>
-          </a:xfrm>
-          <a:prstGeom prst="rect">
-            <a:avLst/>
-          </a:prstGeom>
-          <a:noFill/>
-        </p:spPr>
-        <p:txBody>
-          <a:bodyPr wrap="square" anchor="t" lIns="0" rIns="0" tIns="0" bIns="0">
-            <a:spAutoFit/>
-          </a:bodyPr>
-          <a:lstStyle/>
-          <a:p>
-            <a:r>
-              <a:rPr sz="1200" i="0" b="0">
-                <a:solidFill>
-                  <a:srgbClr val="6E625B"/>
-                </a:solidFill>
-                <a:latin typeface="Calibri"/>
-              </a:rPr>
-              <a:t>Drug Information  ·  Section 3  ·  Study Designs and Levels of Evidence</a:t>
-            </a:r>
-          </a:p>
-        </p:txBody>
-      </p:sp>
-      <p:sp>
-        <p:nvSpPr>
-          <p:cNvPr id="6" name="TextBox 5"/>
-          <p:cNvSpPr txBox="1"/>
-          <p:nvPr/>
-        </p:nvSpPr>
-        <p:spPr>
-          <a:xfrm>
-            <a:off x="10058400" y="6419088"/>
-            <a:ext cx="1097280" cy="274320"/>
-          </a:xfrm>
-          <a:prstGeom prst="rect">
-            <a:avLst/>
-          </a:prstGeom>
-          <a:noFill/>
-        </p:spPr>
-        <p:txBody>
-          <a:bodyPr wrap="square" anchor="t" lIns="0" rIns="0" tIns="0" bIns="0">
-            <a:spAutoFit/>
-          </a:bodyPr>
-          <a:lstStyle/>
-          <a:p>
-            <a:pPr algn="r"/>
-            <a:r>
-              <a:rPr sz="1200" i="0" b="1">
-                <a:solidFill>
-                  <a:srgbClr val="6E625B"/>
-                </a:solidFill>
-                <a:latin typeface="Calibri"/>
-              </a:rPr>
-              <a:t>06 / 26</a:t>
-            </a:r>
-          </a:p>
-        </p:txBody>
-      </p:sp>
-      <p:pic>
-        <p:nvPicPr>
-          <p:cNvPr id="7" name="Picture 6" descr="logo"/>
-          <p:cNvPicPr>
-            <a:picLocks noChangeAspect="1"/>
-          </p:cNvPicPr>
-          <p:nvPr/>
-        </p:nvPicPr>
-        <p:blipFill>
-          <a:blip r:embed="rId3"/>
-          <a:stretch>
-            <a:fillRect/>
-          </a:stretch>
-        </p:blipFill>
-        <p:spPr>
-          <a:xfrm>
-            <a:off x="11247120" y="6309360"/>
-            <a:ext cx="384048" cy="384048"/>
-          </a:xfrm>
-          <a:prstGeom prst="rect">
-            <a:avLst/>
-          </a:prstGeom>
-        </p:spPr>
-      </p:pic>
       <p:graphicFrame>
         <p:nvGraphicFramePr>
-          <p:cNvPr id="8" name="Table 7"/>
+          <p:cNvPr id="9" name="Table 8"/>
           <p:cNvGraphicFramePr>
             <a:graphicFrameLocks noGrp="1"/>
           </p:cNvGraphicFramePr>
           <p:nvPr/>
         </p:nvGraphicFramePr>
         <p:xfrm>
-          <a:off x="548640" y="1554480"/>
-          <a:ext cx="11094413" cy="4480560"/>
+          <a:off x="548640" y="2830068"/>
+          <a:ext cx="11094413" cy="3342129"/>
         </p:xfrm>
         <a:graphic>
           <a:graphicData uri="http://schemas.openxmlformats.org/drawingml/2006/table">
@@ -19806,14 +19190,14 @@
                 <a:gridCol w="2359633"/>
                 <a:gridCol w="2359633"/>
               </a:tblGrid>
-              <a:tr h="640080">
+              <a:tr h="477447">
                 <a:tc>
                   <a:txBody>
                     <a:bodyPr/>
                     <a:lstStyle/>
                     <a:p>
                       <a:r>
-                        <a:rPr sz="1200" i="0" b="1">
+                        <a:rPr sz="1100" i="0" b="1">
                           <a:solidFill>
                             <a:srgbClr val="FFFFFF"/>
                           </a:solidFill>
@@ -19835,7 +19219,7 @@
                     <a:lstStyle/>
                     <a:p>
                       <a:r>
-                        <a:rPr sz="1200" i="0" b="1">
+                        <a:rPr sz="1100" i="0" b="1">
                           <a:solidFill>
                             <a:srgbClr val="FFFFFF"/>
                           </a:solidFill>
@@ -19857,7 +19241,7 @@
                     <a:lstStyle/>
                     <a:p>
                       <a:r>
-                        <a:rPr sz="1200" i="0" b="1">
+                        <a:rPr sz="1100" i="0" b="1">
                           <a:solidFill>
                             <a:srgbClr val="FFFFFF"/>
                           </a:solidFill>
@@ -19879,7 +19263,7 @@
                     <a:lstStyle/>
                     <a:p>
                       <a:r>
-                        <a:rPr sz="1200" i="0" b="1">
+                        <a:rPr sz="1100" i="0" b="1">
                           <a:solidFill>
                             <a:srgbClr val="FFFFFF"/>
                           </a:solidFill>
@@ -19901,7 +19285,7 @@
                     <a:lstStyle/>
                     <a:p>
                       <a:r>
-                        <a:rPr sz="1200" i="0" b="1">
+                        <a:rPr sz="1100" i="0" b="1">
                           <a:solidFill>
                             <a:srgbClr val="FFFFFF"/>
                           </a:solidFill>
@@ -19918,14 +19302,14 @@
                   </a:tcPr>
                 </a:tc>
               </a:tr>
-              <a:tr h="640080">
+              <a:tr h="477447">
                 <a:tc>
                   <a:txBody>
                     <a:bodyPr/>
                     <a:lstStyle/>
                     <a:p>
                       <a:r>
-                        <a:rPr sz="1300" i="0" b="1">
+                        <a:rPr sz="1200" i="0" b="1">
                           <a:solidFill>
                             <a:srgbClr val="2B211C"/>
                           </a:solidFill>
@@ -19947,7 +19331,7 @@
                     <a:lstStyle/>
                     <a:p>
                       <a:r>
-                        <a:rPr sz="1300" i="0" b="0">
+                        <a:rPr sz="1200" i="0" b="0">
                           <a:solidFill>
                             <a:srgbClr val="2B211C"/>
                           </a:solidFill>
@@ -19969,7 +19353,7 @@
                     <a:lstStyle/>
                     <a:p>
                       <a:r>
-                        <a:rPr sz="1300" i="0" b="0">
+                        <a:rPr sz="1200" i="0" b="0">
                           <a:solidFill>
                             <a:srgbClr val="2B211C"/>
                           </a:solidFill>
@@ -19991,7 +19375,7 @@
                     <a:lstStyle/>
                     <a:p>
                       <a:r>
-                        <a:rPr sz="1300" i="0" b="0">
+                        <a:rPr sz="1200" i="0" b="0">
                           <a:solidFill>
                             <a:srgbClr val="2B211C"/>
                           </a:solidFill>
@@ -20013,7 +19397,7 @@
                     <a:lstStyle/>
                     <a:p>
                       <a:r>
-                        <a:rPr sz="1300" i="0" b="0">
+                        <a:rPr sz="1200" i="0" b="0">
                           <a:solidFill>
                             <a:srgbClr val="2B211C"/>
                           </a:solidFill>
@@ -20030,14 +19414,14 @@
                   </a:tcPr>
                 </a:tc>
               </a:tr>
-              <a:tr h="640080">
+              <a:tr h="477447">
                 <a:tc>
                   <a:txBody>
                     <a:bodyPr/>
                     <a:lstStyle/>
                     <a:p>
                       <a:r>
-                        <a:rPr sz="1300" i="0" b="1">
+                        <a:rPr sz="1200" i="0" b="1">
                           <a:solidFill>
                             <a:srgbClr val="2B211C"/>
                           </a:solidFill>
@@ -20059,7 +19443,7 @@
                     <a:lstStyle/>
                     <a:p>
                       <a:r>
-                        <a:rPr sz="1300" i="0" b="0">
+                        <a:rPr sz="1200" i="0" b="0">
                           <a:solidFill>
                             <a:srgbClr val="2B211C"/>
                           </a:solidFill>
@@ -20081,7 +19465,7 @@
                     <a:lstStyle/>
                     <a:p>
                       <a:r>
-                        <a:rPr sz="1300" i="0" b="0">
+                        <a:rPr sz="1200" i="0" b="0">
                           <a:solidFill>
                             <a:srgbClr val="2B211C"/>
                           </a:solidFill>
@@ -20103,7 +19487,7 @@
                     <a:lstStyle/>
                     <a:p>
                       <a:r>
-                        <a:rPr sz="1300" i="0" b="0">
+                        <a:rPr sz="1200" i="0" b="0">
                           <a:solidFill>
                             <a:srgbClr val="2B211C"/>
                           </a:solidFill>
@@ -20125,7 +19509,7 @@
                     <a:lstStyle/>
                     <a:p>
                       <a:r>
-                        <a:rPr sz="1300" i="0" b="0">
+                        <a:rPr sz="1200" i="0" b="0">
                           <a:solidFill>
                             <a:srgbClr val="2B211C"/>
                           </a:solidFill>
@@ -20142,14 +19526,14 @@
                   </a:tcPr>
                 </a:tc>
               </a:tr>
-              <a:tr h="640080">
+              <a:tr h="477447">
                 <a:tc>
                   <a:txBody>
                     <a:bodyPr/>
                     <a:lstStyle/>
                     <a:p>
                       <a:r>
-                        <a:rPr sz="1300" i="0" b="1">
+                        <a:rPr sz="1200" i="0" b="1">
                           <a:solidFill>
                             <a:srgbClr val="2B211C"/>
                           </a:solidFill>
@@ -20171,7 +19555,7 @@
                     <a:lstStyle/>
                     <a:p>
                       <a:r>
-                        <a:rPr sz="1300" i="0" b="0">
+                        <a:rPr sz="1200" i="0" b="0">
                           <a:solidFill>
                             <a:srgbClr val="2B211C"/>
                           </a:solidFill>
@@ -20193,7 +19577,7 @@
                     <a:lstStyle/>
                     <a:p>
                       <a:r>
-                        <a:rPr sz="1300" i="0" b="0">
+                        <a:rPr sz="1200" i="0" b="0">
                           <a:solidFill>
                             <a:srgbClr val="2B211C"/>
                           </a:solidFill>
@@ -20215,7 +19599,7 @@
                     <a:lstStyle/>
                     <a:p>
                       <a:r>
-                        <a:rPr sz="1300" i="0" b="0">
+                        <a:rPr sz="1200" i="0" b="0">
                           <a:solidFill>
                             <a:srgbClr val="2B211C"/>
                           </a:solidFill>
@@ -20237,7 +19621,7 @@
                     <a:lstStyle/>
                     <a:p>
                       <a:r>
-                        <a:rPr sz="1300" i="0" b="0">
+                        <a:rPr sz="1200" i="0" b="0">
                           <a:solidFill>
                             <a:srgbClr val="2B211C"/>
                           </a:solidFill>
@@ -20254,14 +19638,14 @@
                   </a:tcPr>
                 </a:tc>
               </a:tr>
-              <a:tr h="640080">
+              <a:tr h="477447">
                 <a:tc>
                   <a:txBody>
                     <a:bodyPr/>
                     <a:lstStyle/>
                     <a:p>
                       <a:r>
-                        <a:rPr sz="1300" i="0" b="1">
+                        <a:rPr sz="1200" i="0" b="1">
                           <a:solidFill>
                             <a:srgbClr val="2B211C"/>
                           </a:solidFill>
@@ -20283,7 +19667,7 @@
                     <a:lstStyle/>
                     <a:p>
                       <a:r>
-                        <a:rPr sz="1300" i="0" b="0">
+                        <a:rPr sz="1200" i="0" b="0">
                           <a:solidFill>
                             <a:srgbClr val="2B211C"/>
                           </a:solidFill>
@@ -20305,7 +19689,7 @@
                     <a:lstStyle/>
                     <a:p>
                       <a:r>
-                        <a:rPr sz="1300" i="0" b="0">
+                        <a:rPr sz="1200" i="0" b="0">
                           <a:solidFill>
                             <a:srgbClr val="2B211C"/>
                           </a:solidFill>
@@ -20327,7 +19711,7 @@
                     <a:lstStyle/>
                     <a:p>
                       <a:r>
-                        <a:rPr sz="1300" i="0" b="0">
+                        <a:rPr sz="1200" i="0" b="0">
                           <a:solidFill>
                             <a:srgbClr val="2B211C"/>
                           </a:solidFill>
@@ -20349,7 +19733,7 @@
                     <a:lstStyle/>
                     <a:p>
                       <a:r>
-                        <a:rPr sz="1300" i="0" b="0">
+                        <a:rPr sz="1200" i="0" b="0">
                           <a:solidFill>
                             <a:srgbClr val="2B211C"/>
                           </a:solidFill>
@@ -20366,14 +19750,14 @@
                   </a:tcPr>
                 </a:tc>
               </a:tr>
-              <a:tr h="640080">
+              <a:tr h="477447">
                 <a:tc>
                   <a:txBody>
                     <a:bodyPr/>
                     <a:lstStyle/>
                     <a:p>
                       <a:r>
-                        <a:rPr sz="1300" i="0" b="1">
+                        <a:rPr sz="1200" i="0" b="1">
                           <a:solidFill>
                             <a:srgbClr val="2B211C"/>
                           </a:solidFill>
@@ -20395,7 +19779,7 @@
                     <a:lstStyle/>
                     <a:p>
                       <a:r>
-                        <a:rPr sz="1300" i="0" b="0">
+                        <a:rPr sz="1200" i="0" b="0">
                           <a:solidFill>
                             <a:srgbClr val="2B211C"/>
                           </a:solidFill>
@@ -20417,7 +19801,7 @@
                     <a:lstStyle/>
                     <a:p>
                       <a:r>
-                        <a:rPr sz="1300" i="0" b="0">
+                        <a:rPr sz="1200" i="0" b="0">
                           <a:solidFill>
                             <a:srgbClr val="2B211C"/>
                           </a:solidFill>
@@ -20439,7 +19823,7 @@
                     <a:lstStyle/>
                     <a:p>
                       <a:r>
-                        <a:rPr sz="1300" i="0" b="0">
+                        <a:rPr sz="1200" i="0" b="0">
                           <a:solidFill>
                             <a:srgbClr val="2B211C"/>
                           </a:solidFill>
@@ -20461,7 +19845,7 @@
                     <a:lstStyle/>
                     <a:p>
                       <a:r>
-                        <a:rPr sz="1300" i="0" b="0">
+                        <a:rPr sz="1200" i="0" b="0">
                           <a:solidFill>
                             <a:srgbClr val="2B211C"/>
                           </a:solidFill>
@@ -20478,14 +19862,14 @@
                   </a:tcPr>
                 </a:tc>
               </a:tr>
-              <a:tr h="640080">
+              <a:tr h="477447">
                 <a:tc>
                   <a:txBody>
                     <a:bodyPr/>
                     <a:lstStyle/>
                     <a:p>
                       <a:r>
-                        <a:rPr sz="1300" i="0" b="1">
+                        <a:rPr sz="1200" i="0" b="1">
                           <a:solidFill>
                             <a:srgbClr val="2B211C"/>
                           </a:solidFill>
@@ -20507,7 +19891,7 @@
                     <a:lstStyle/>
                     <a:p>
                       <a:r>
-                        <a:rPr sz="1300" i="0" b="0">
+                        <a:rPr sz="1200" i="0" b="0">
                           <a:solidFill>
                             <a:srgbClr val="2B211C"/>
                           </a:solidFill>
@@ -20529,7 +19913,7 @@
                     <a:lstStyle/>
                     <a:p>
                       <a:r>
-                        <a:rPr sz="1300" i="0" b="0">
+                        <a:rPr sz="1200" i="0" b="0">
                           <a:solidFill>
                             <a:srgbClr val="2B211C"/>
                           </a:solidFill>
@@ -20551,7 +19935,7 @@
                     <a:lstStyle/>
                     <a:p>
                       <a:r>
-                        <a:rPr sz="1300" i="0" b="0">
+                        <a:rPr sz="1200" i="0" b="0">
                           <a:solidFill>
                             <a:srgbClr val="2B211C"/>
                           </a:solidFill>
@@ -20573,7 +19957,7 @@
                     <a:lstStyle/>
                     <a:p>
                       <a:r>
-                        <a:rPr sz="1300" i="0" b="0">
+                        <a:rPr sz="1200" i="0" b="0">
                           <a:solidFill>
                             <a:srgbClr val="2B211C"/>
                           </a:solidFill>
@@ -20602,6 +19986,417 @@
 </p:sld>
 </file>
 
+<file path=ppt/slides/slide6.xml><?xml version="1.0" encoding="utf-8"?>
+<p:sld xmlns:a="http://schemas.openxmlformats.org/drawingml/2006/main" xmlns:p="http://schemas.openxmlformats.org/presentationml/2006/main" xmlns:r="http://schemas.openxmlformats.org/officeDocument/2006/relationships">
+  <p:cSld>
+    <p:bg>
+      <p:bgPr>
+        <a:solidFill>
+          <a:srgbClr val="FFFFFF"/>
+        </a:solidFill>
+        <a:effectLst/>
+      </p:bgPr>
+    </p:bg>
+    <p:spTree>
+      <p:nvGrpSpPr>
+        <p:cNvPr id="1" name=""/>
+        <p:cNvGrpSpPr/>
+        <p:nvPr/>
+      </p:nvGrpSpPr>
+      <p:grpSpPr/>
+      <p:sp>
+        <p:nvSpPr>
+          <p:cNvPr id="2" name="Oval 1"/>
+          <p:cNvSpPr/>
+          <p:nvPr/>
+        </p:nvSpPr>
+        <p:spPr>
+          <a:xfrm>
+            <a:off x="548640" y="475488"/>
+            <a:ext cx="658368" cy="658368"/>
+          </a:xfrm>
+          <a:prstGeom prst="ellipse">
+            <a:avLst/>
+          </a:prstGeom>
+          <a:solidFill>
+            <a:srgbClr val="2F6F7A"/>
+          </a:solidFill>
+          <a:ln>
+            <a:noFill/>
+          </a:ln>
+          <a:effectLst/>
+        </p:spPr>
+        <p:style>
+          <a:lnRef idx="1">
+            <a:schemeClr val="accent1"/>
+          </a:lnRef>
+          <a:fillRef idx="3">
+            <a:schemeClr val="accent1"/>
+          </a:fillRef>
+          <a:effectRef idx="2">
+            <a:schemeClr val="accent1"/>
+          </a:effectRef>
+          <a:fontRef idx="minor">
+            <a:schemeClr val="lt1"/>
+          </a:fontRef>
+        </p:style>
+        <p:txBody>
+          <a:bodyPr rtlCol="0" anchor="ctr" lIns="0" rIns="0" tIns="0" bIns="0"/>
+          <a:lstStyle/>
+          <a:p>
+            <a:pPr algn="ctr"/>
+            <a:r>
+              <a:rPr sz="1800" i="0" b="1">
+                <a:solidFill>
+                  <a:srgbClr val="FFFFFF"/>
+                </a:solidFill>
+                <a:latin typeface="Cambria"/>
+              </a:rPr>
+              <a:t>03</a:t>
+            </a:r>
+          </a:p>
+        </p:txBody>
+      </p:sp>
+      <p:sp>
+        <p:nvSpPr>
+          <p:cNvPr id="3" name="TextBox 2"/>
+          <p:cNvSpPr txBox="1"/>
+          <p:nvPr/>
+        </p:nvSpPr>
+        <p:spPr>
+          <a:xfrm>
+            <a:off x="1417319" y="438912"/>
+            <a:ext cx="10180015" cy="292608"/>
+          </a:xfrm>
+          <a:prstGeom prst="rect">
+            <a:avLst/>
+          </a:prstGeom>
+          <a:noFill/>
+        </p:spPr>
+        <p:txBody>
+          <a:bodyPr wrap="square" anchor="t" lIns="0" rIns="0" tIns="0" bIns="0">
+            <a:spAutoFit/>
+          </a:bodyPr>
+          <a:lstStyle/>
+          <a:p>
+            <a:r>
+              <a:rPr sz="1200" i="0" b="1" spc="150">
+                <a:solidFill>
+                  <a:srgbClr val="2F6F7A"/>
+                </a:solidFill>
+                <a:latin typeface="Calibri"/>
+              </a:rPr>
+              <a:t>SECTION 3</a:t>
+            </a:r>
+          </a:p>
+        </p:txBody>
+      </p:sp>
+      <p:sp>
+        <p:nvSpPr>
+          <p:cNvPr id="4" name="TextBox 3"/>
+          <p:cNvSpPr txBox="1"/>
+          <p:nvPr/>
+        </p:nvSpPr>
+        <p:spPr>
+          <a:xfrm>
+            <a:off x="1417319" y="676656"/>
+            <a:ext cx="10180015" cy="640080"/>
+          </a:xfrm>
+          <a:prstGeom prst="rect">
+            <a:avLst/>
+          </a:prstGeom>
+          <a:noFill/>
+        </p:spPr>
+        <p:txBody>
+          <a:bodyPr wrap="square" anchor="t" lIns="0" rIns="0" tIns="0" bIns="0">
+            <a:spAutoFit/>
+          </a:bodyPr>
+          <a:lstStyle/>
+          <a:p>
+            <a:r>
+              <a:rPr sz="3200" i="0" b="1">
+                <a:solidFill>
+                  <a:srgbClr val="2B211C"/>
+                </a:solidFill>
+                <a:latin typeface="Cambria"/>
+              </a:rPr>
+              <a:t>The Main Designs</a:t>
+            </a:r>
+          </a:p>
+        </p:txBody>
+      </p:sp>
+      <p:sp>
+        <p:nvSpPr>
+          <p:cNvPr id="5" name="TextBox 4"/>
+          <p:cNvSpPr txBox="1"/>
+          <p:nvPr/>
+        </p:nvSpPr>
+        <p:spPr>
+          <a:xfrm>
+            <a:off x="548640" y="6419088"/>
+            <a:ext cx="8229600" cy="274320"/>
+          </a:xfrm>
+          <a:prstGeom prst="rect">
+            <a:avLst/>
+          </a:prstGeom>
+          <a:noFill/>
+        </p:spPr>
+        <p:txBody>
+          <a:bodyPr wrap="square" anchor="t" lIns="0" rIns="0" tIns="0" bIns="0">
+            <a:spAutoFit/>
+          </a:bodyPr>
+          <a:lstStyle/>
+          <a:p>
+            <a:r>
+              <a:rPr sz="1200" i="0" b="0">
+                <a:solidFill>
+                  <a:srgbClr val="6E625B"/>
+                </a:solidFill>
+                <a:latin typeface="Calibri"/>
+              </a:rPr>
+              <a:t>Drug Information  ·  Section 3  ·  Study Designs and Levels of Evidence</a:t>
+            </a:r>
+          </a:p>
+        </p:txBody>
+      </p:sp>
+      <p:sp>
+        <p:nvSpPr>
+          <p:cNvPr id="6" name="TextBox 5"/>
+          <p:cNvSpPr txBox="1"/>
+          <p:nvPr/>
+        </p:nvSpPr>
+        <p:spPr>
+          <a:xfrm>
+            <a:off x="10058400" y="6419088"/>
+            <a:ext cx="1097280" cy="274320"/>
+          </a:xfrm>
+          <a:prstGeom prst="rect">
+            <a:avLst/>
+          </a:prstGeom>
+          <a:noFill/>
+        </p:spPr>
+        <p:txBody>
+          <a:bodyPr wrap="square" anchor="t" lIns="0" rIns="0" tIns="0" bIns="0">
+            <a:spAutoFit/>
+          </a:bodyPr>
+          <a:lstStyle/>
+          <a:p>
+            <a:pPr algn="r"/>
+            <a:r>
+              <a:rPr sz="1200" i="0" b="1">
+                <a:solidFill>
+                  <a:srgbClr val="6E625B"/>
+                </a:solidFill>
+                <a:latin typeface="Calibri"/>
+              </a:rPr>
+              <a:t>06 / 25</a:t>
+            </a:r>
+          </a:p>
+        </p:txBody>
+      </p:sp>
+      <p:pic>
+        <p:nvPicPr>
+          <p:cNvPr id="7" name="Picture 6" descr="logo"/>
+          <p:cNvPicPr>
+            <a:picLocks noChangeAspect="1"/>
+          </p:cNvPicPr>
+          <p:nvPr/>
+        </p:nvPicPr>
+        <p:blipFill>
+          <a:blip r:embed="rId3"/>
+          <a:stretch>
+            <a:fillRect/>
+          </a:stretch>
+        </p:blipFill>
+        <p:spPr>
+          <a:xfrm>
+            <a:off x="11247120" y="6309360"/>
+            <a:ext cx="384048" cy="384048"/>
+          </a:xfrm>
+          <a:prstGeom prst="rect">
+            <a:avLst/>
+          </a:prstGeom>
+        </p:spPr>
+      </p:pic>
+      <p:sp>
+        <p:nvSpPr>
+          <p:cNvPr id="8" name="Rounded Rectangle 7"/>
+          <p:cNvSpPr/>
+          <p:nvPr/>
+        </p:nvSpPr>
+        <p:spPr>
+          <a:xfrm>
+            <a:off x="1645919" y="2103120"/>
+            <a:ext cx="8899855" cy="2377440"/>
+          </a:xfrm>
+          <a:prstGeom prst="roundRect">
+            <a:avLst>
+              <a:gd name="adj" fmla="val 6000"/>
+            </a:avLst>
+          </a:prstGeom>
+          <a:solidFill>
+            <a:srgbClr val="F6E5DE"/>
+          </a:solidFill>
+          <a:ln>
+            <a:noFill/>
+          </a:ln>
+          <a:effectLst/>
+        </p:spPr>
+        <p:style>
+          <a:lnRef idx="1">
+            <a:schemeClr val="accent1"/>
+          </a:lnRef>
+          <a:fillRef idx="3">
+            <a:schemeClr val="accent1"/>
+          </a:fillRef>
+          <a:effectRef idx="2">
+            <a:schemeClr val="accent1"/>
+          </a:effectRef>
+          <a:fontRef idx="minor">
+            <a:schemeClr val="lt1"/>
+          </a:fontRef>
+        </p:style>
+        <p:txBody>
+          <a:bodyPr rtlCol="0" anchor="ctr"/>
+          <a:lstStyle/>
+          <a:p>
+            <a:pPr algn="ctr"/>
+          </a:p>
+        </p:txBody>
+      </p:sp>
+      <p:sp>
+        <p:nvSpPr>
+          <p:cNvPr id="9" name="Rounded Rectangle 8"/>
+          <p:cNvSpPr/>
+          <p:nvPr/>
+        </p:nvSpPr>
+        <p:spPr>
+          <a:xfrm>
+            <a:off x="1920239" y="2331720"/>
+            <a:ext cx="1188720" cy="347472"/>
+          </a:xfrm>
+          <a:prstGeom prst="roundRect">
+            <a:avLst>
+              <a:gd name="adj" fmla="val 50000"/>
+            </a:avLst>
+          </a:prstGeom>
+          <a:solidFill>
+            <a:srgbClr val="A4472B"/>
+          </a:solidFill>
+          <a:ln>
+            <a:noFill/>
+          </a:ln>
+          <a:effectLst/>
+        </p:spPr>
+        <p:style>
+          <a:lnRef idx="1">
+            <a:schemeClr val="accent1"/>
+          </a:lnRef>
+          <a:fillRef idx="3">
+            <a:schemeClr val="accent1"/>
+          </a:fillRef>
+          <a:effectRef idx="2">
+            <a:schemeClr val="accent1"/>
+          </a:effectRef>
+          <a:fontRef idx="minor">
+            <a:schemeClr val="lt1"/>
+          </a:fontRef>
+        </p:style>
+        <p:txBody>
+          <a:bodyPr rtlCol="0" anchor="ctr" lIns="0" rIns="0" tIns="0" bIns="0"/>
+          <a:lstStyle/>
+          <a:p>
+            <a:pPr algn="ctr"/>
+            <a:r>
+              <a:rPr sz="1200" i="0" b="1">
+                <a:solidFill>
+                  <a:srgbClr val="FFFFFF"/>
+                </a:solidFill>
+                <a:latin typeface="Calibri"/>
+              </a:rPr>
+              <a:t>EXAM TIP</a:t>
+            </a:r>
+          </a:p>
+        </p:txBody>
+      </p:sp>
+      <p:sp>
+        <p:nvSpPr>
+          <p:cNvPr id="10" name="TextBox 9"/>
+          <p:cNvSpPr txBox="1"/>
+          <p:nvPr/>
+        </p:nvSpPr>
+        <p:spPr>
+          <a:xfrm>
+            <a:off x="1920239" y="2788920"/>
+            <a:ext cx="8351215" cy="1508760"/>
+          </a:xfrm>
+          <a:prstGeom prst="rect">
+            <a:avLst/>
+          </a:prstGeom>
+          <a:noFill/>
+        </p:spPr>
+        <p:txBody>
+          <a:bodyPr wrap="square" anchor="t" lIns="0" rIns="0" tIns="0" bIns="0">
+            <a:spAutoFit/>
+          </a:bodyPr>
+          <a:lstStyle/>
+          <a:p>
+            <a:r>
+              <a:rPr sz="2600" i="0" b="0">
+                <a:solidFill>
+                  <a:srgbClr val="2B211C"/>
+                </a:solidFill>
+                <a:latin typeface="Calibri"/>
+              </a:rPr>
+              <a:t>Case-control goes </a:t>
+            </a:r>
+            <a:r>
+              <a:rPr sz="2600" i="0" b="1">
+                <a:solidFill>
+                  <a:srgbClr val="2B211C"/>
+                </a:solidFill>
+                <a:latin typeface="Calibri"/>
+              </a:rPr>
+              <a:t>backwards</a:t>
+            </a:r>
+            <a:r>
+              <a:rPr sz="2600" i="0" b="0">
+                <a:solidFill>
+                  <a:srgbClr val="2B211C"/>
+                </a:solidFill>
+                <a:latin typeface="Calibri"/>
+              </a:rPr>
+              <a:t> from outcome to exposure. Cohort goes </a:t>
+            </a:r>
+            <a:r>
+              <a:rPr sz="2600" i="0" b="1">
+                <a:solidFill>
+                  <a:srgbClr val="2B211C"/>
+                </a:solidFill>
+                <a:latin typeface="Calibri"/>
+              </a:rPr>
+              <a:t>forwards</a:t>
+            </a:r>
+            <a:r>
+              <a:rPr sz="2600" i="0" b="0">
+                <a:solidFill>
+                  <a:srgbClr val="2B211C"/>
+                </a:solidFill>
+                <a:latin typeface="Calibri"/>
+              </a:rPr>
+              <a:t> from exposure to outcome.</a:t>
+            </a:r>
+          </a:p>
+        </p:txBody>
+      </p:sp>
+    </p:spTree>
+  </p:cSld>
+  <p:clrMapOvr>
+    <a:masterClrMapping/>
+  </p:clrMapOvr>
+</p:sld>
+</file>
+
 <file path=ppt/slides/slide7.xml><?xml version="1.0" encoding="utf-8"?>
 <p:sld xmlns:a="http://schemas.openxmlformats.org/drawingml/2006/main" xmlns:p="http://schemas.openxmlformats.org/presentationml/2006/main" xmlns:r="http://schemas.openxmlformats.org/officeDocument/2006/relationships">
   <p:cSld>
@@ -20736,7 +20531,7 @@
                 </a:solidFill>
                 <a:latin typeface="Cambria"/>
               </a:rPr>
-              <a:t>The Main Designs</a:t>
+              <a:t>Measures You Will Meet</a:t>
             </a:r>
           </a:p>
         </p:txBody>
@@ -20805,7 +20600,7 @@
                 </a:solidFill>
                 <a:latin typeface="Calibri"/>
               </a:rPr>
-              <a:t>07 / 26</a:t>
+              <a:t>07 / 25</a:t>
             </a:r>
           </a:p>
         </p:txBody>
@@ -20836,115 +20631,14 @@
       </p:pic>
       <p:sp>
         <p:nvSpPr>
-          <p:cNvPr id="8" name="Rounded Rectangle 7"/>
-          <p:cNvSpPr/>
-          <p:nvPr/>
-        </p:nvSpPr>
-        <p:spPr>
-          <a:xfrm>
-            <a:off x="1645919" y="2103120"/>
-            <a:ext cx="8899855" cy="2377440"/>
-          </a:xfrm>
-          <a:prstGeom prst="roundRect">
-            <a:avLst>
-              <a:gd name="adj" fmla="val 6000"/>
-            </a:avLst>
-          </a:prstGeom>
-          <a:solidFill>
-            <a:srgbClr val="F6E5DE"/>
-          </a:solidFill>
-          <a:ln>
-            <a:noFill/>
-          </a:ln>
-          <a:effectLst/>
-        </p:spPr>
-        <p:style>
-          <a:lnRef idx="1">
-            <a:schemeClr val="accent1"/>
-          </a:lnRef>
-          <a:fillRef idx="3">
-            <a:schemeClr val="accent1"/>
-          </a:fillRef>
-          <a:effectRef idx="2">
-            <a:schemeClr val="accent1"/>
-          </a:effectRef>
-          <a:fontRef idx="minor">
-            <a:schemeClr val="lt1"/>
-          </a:fontRef>
-        </p:style>
-        <p:txBody>
-          <a:bodyPr rtlCol="0" anchor="ctr"/>
-          <a:lstStyle/>
-          <a:p>
-            <a:pPr algn="ctr"/>
-          </a:p>
-        </p:txBody>
-      </p:sp>
-      <p:sp>
-        <p:nvSpPr>
-          <p:cNvPr id="9" name="Rounded Rectangle 8"/>
-          <p:cNvSpPr/>
-          <p:nvPr/>
-        </p:nvSpPr>
-        <p:spPr>
-          <a:xfrm>
-            <a:off x="1920239" y="2331720"/>
-            <a:ext cx="1188720" cy="347472"/>
-          </a:xfrm>
-          <a:prstGeom prst="roundRect">
-            <a:avLst>
-              <a:gd name="adj" fmla="val 50000"/>
-            </a:avLst>
-          </a:prstGeom>
-          <a:solidFill>
-            <a:srgbClr val="A4472B"/>
-          </a:solidFill>
-          <a:ln>
-            <a:noFill/>
-          </a:ln>
-          <a:effectLst/>
-        </p:spPr>
-        <p:style>
-          <a:lnRef idx="1">
-            <a:schemeClr val="accent1"/>
-          </a:lnRef>
-          <a:fillRef idx="3">
-            <a:schemeClr val="accent1"/>
-          </a:fillRef>
-          <a:effectRef idx="2">
-            <a:schemeClr val="accent1"/>
-          </a:effectRef>
-          <a:fontRef idx="minor">
-            <a:schemeClr val="lt1"/>
-          </a:fontRef>
-        </p:style>
-        <p:txBody>
-          <a:bodyPr rtlCol="0" anchor="ctr" lIns="0" rIns="0" tIns="0" bIns="0"/>
-          <a:lstStyle/>
-          <a:p>
-            <a:pPr algn="ctr"/>
-            <a:r>
-              <a:rPr sz="1200" i="0" b="1">
-                <a:solidFill>
-                  <a:srgbClr val="FFFFFF"/>
-                </a:solidFill>
-                <a:latin typeface="Calibri"/>
-              </a:rPr>
-              <a:t>EXAM TIP</a:t>
-            </a:r>
-          </a:p>
-        </p:txBody>
-      </p:sp>
-      <p:sp>
-        <p:nvSpPr>
-          <p:cNvPr id="10" name="TextBox 9"/>
+          <p:cNvPr id="8" name="TextBox 7"/>
           <p:cNvSpPr txBox="1"/>
           <p:nvPr/>
         </p:nvSpPr>
         <p:spPr>
           <a:xfrm>
-            <a:off x="1920239" y="2788920"/>
-            <a:ext cx="8351215" cy="1508760"/>
+            <a:off x="548640" y="1554480"/>
+            <a:ext cx="11094415" cy="4617720"/>
           </a:xfrm>
           <a:prstGeom prst="rect">
             <a:avLst/>
@@ -20957,50 +20651,53 @@
           </a:bodyPr>
           <a:lstStyle/>
           <a:p>
-            <a:r>
-              <a:rPr sz="2600" i="0" b="0">
+            <a:pPr>
+              <a:spcAft>
+                <a:spcPts val="800"/>
+              </a:spcAft>
+            </a:pPr>
+            <a:r>
+              <a:rPr sz="2100" i="0" b="0">
                 <a:solidFill>
                   <a:srgbClr val="2B211C"/>
                 </a:solidFill>
                 <a:latin typeface="Calibri"/>
               </a:rPr>
-              <a:t>Case-control goes </a:t>
-            </a:r>
-            <a:r>
-              <a:rPr sz="2600" i="0" b="1">
+              <a:t>A value of 1 for OR or RR means </a:t>
+            </a:r>
+            <a:r>
+              <a:rPr sz="2100" i="0" b="1">
                 <a:solidFill>
                   <a:srgbClr val="2B211C"/>
                 </a:solidFill>
                 <a:latin typeface="Calibri"/>
               </a:rPr>
-              <a:t>backwards</a:t>
-            </a:r>
-            <a:r>
-              <a:rPr sz="2600" i="0" b="0">
+              <a:t>no difference</a:t>
+            </a:r>
+            <a:r>
+              <a:rPr sz="2100" i="0" b="0">
                 <a:solidFill>
                   <a:srgbClr val="2B211C"/>
                 </a:solidFill>
                 <a:latin typeface="Calibri"/>
               </a:rPr>
-              <a:t> from outcome to exposure. Cohort goes </a:t>
-            </a:r>
-            <a:r>
-              <a:rPr sz="2600" i="0" b="1">
+              <a:t>. Values below 1 mean lower risk with the exposure.</a:t>
+            </a:r>
+          </a:p>
+          <a:p>
+            <a:pPr>
+              <a:spcAft>
+                <a:spcPts val="800"/>
+              </a:spcAft>
+            </a:pPr>
+            <a:r>
+              <a:rPr sz="2100" i="0" b="0">
                 <a:solidFill>
                   <a:srgbClr val="2B211C"/>
                 </a:solidFill>
                 <a:latin typeface="Calibri"/>
               </a:rPr>
-              <a:t>forwards</a:t>
-            </a:r>
-            <a:r>
-              <a:rPr sz="2600" i="0" b="0">
-                <a:solidFill>
-                  <a:srgbClr val="2B211C"/>
-                </a:solidFill>
-                <a:latin typeface="Calibri"/>
-              </a:rPr>
-              <a:t> from exposure to outcome.</a:t>
+              <a:t>Relative numbers can sound impressive when absolute numbers are small. A drug that cuts risk from 2% to 1% halves the risk (RR 0.5), but the ARR is only 1% and the NNT is 100. Always ask for the absolute numbers before you judge a benefit, and explain them to patients in the same plain way.</a:t>
             </a:r>
           </a:p>
         </p:txBody>
@@ -21216,320 +20913,7 @@
                 </a:solidFill>
                 <a:latin typeface="Calibri"/>
               </a:rPr>
-              <a:t>08 / 26</a:t>
-            </a:r>
-          </a:p>
-        </p:txBody>
-      </p:sp>
-      <p:pic>
-        <p:nvPicPr>
-          <p:cNvPr id="7" name="Picture 6" descr="logo"/>
-          <p:cNvPicPr>
-            <a:picLocks noChangeAspect="1"/>
-          </p:cNvPicPr>
-          <p:nvPr/>
-        </p:nvPicPr>
-        <p:blipFill>
-          <a:blip r:embed="rId3"/>
-          <a:stretch>
-            <a:fillRect/>
-          </a:stretch>
-        </p:blipFill>
-        <p:spPr>
-          <a:xfrm>
-            <a:off x="11247120" y="6309360"/>
-            <a:ext cx="384048" cy="384048"/>
-          </a:xfrm>
-          <a:prstGeom prst="rect">
-            <a:avLst/>
-          </a:prstGeom>
-        </p:spPr>
-      </p:pic>
-      <p:sp>
-        <p:nvSpPr>
-          <p:cNvPr id="8" name="TextBox 7"/>
-          <p:cNvSpPr txBox="1"/>
-          <p:nvPr/>
-        </p:nvSpPr>
-        <p:spPr>
-          <a:xfrm>
-            <a:off x="548640" y="1554480"/>
-            <a:ext cx="11094415" cy="4617720"/>
-          </a:xfrm>
-          <a:prstGeom prst="rect">
-            <a:avLst/>
-          </a:prstGeom>
-          <a:noFill/>
-        </p:spPr>
-        <p:txBody>
-          <a:bodyPr wrap="square" anchor="t" lIns="0" rIns="0" tIns="0" bIns="0">
-            <a:spAutoFit/>
-          </a:bodyPr>
-          <a:lstStyle/>
-          <a:p>
-            <a:pPr>
-              <a:spcAft>
-                <a:spcPts val="800"/>
-              </a:spcAft>
-            </a:pPr>
-            <a:r>
-              <a:rPr sz="2100" i="0" b="0">
-                <a:solidFill>
-                  <a:srgbClr val="2B211C"/>
-                </a:solidFill>
-                <a:latin typeface="Calibri"/>
-              </a:rPr>
-              <a:t>A value of 1 for OR or RR means </a:t>
-            </a:r>
-            <a:r>
-              <a:rPr sz="2100" i="0" b="1">
-                <a:solidFill>
-                  <a:srgbClr val="2B211C"/>
-                </a:solidFill>
-                <a:latin typeface="Calibri"/>
-              </a:rPr>
-              <a:t>no difference</a:t>
-            </a:r>
-            <a:r>
-              <a:rPr sz="2100" i="0" b="0">
-                <a:solidFill>
-                  <a:srgbClr val="2B211C"/>
-                </a:solidFill>
-                <a:latin typeface="Calibri"/>
-              </a:rPr>
-              <a:t>. Values below 1 mean lower risk with the exposure.</a:t>
-            </a:r>
-          </a:p>
-          <a:p>
-            <a:pPr>
-              <a:spcAft>
-                <a:spcPts val="800"/>
-              </a:spcAft>
-            </a:pPr>
-            <a:r>
-              <a:rPr sz="2100" i="0" b="0">
-                <a:solidFill>
-                  <a:srgbClr val="2B211C"/>
-                </a:solidFill>
-                <a:latin typeface="Calibri"/>
-              </a:rPr>
-              <a:t>Relative numbers can sound impressive when absolute numbers are small. A drug that cuts risk from 2% to 1% halves the risk (RR 0.5), but the ARR is only 1% and the NNT is 100. Always ask for the absolute numbers before you judge a benefit, and explain them to patients in the same plain way.</a:t>
-            </a:r>
-          </a:p>
-        </p:txBody>
-      </p:sp>
-    </p:spTree>
-  </p:cSld>
-  <p:clrMapOvr>
-    <a:masterClrMapping/>
-  </p:clrMapOvr>
-</p:sld>
-</file>
-
-<file path=ppt/slides/slide9.xml><?xml version="1.0" encoding="utf-8"?>
-<p:sld xmlns:a="http://schemas.openxmlformats.org/drawingml/2006/main" xmlns:p="http://schemas.openxmlformats.org/presentationml/2006/main" xmlns:r="http://schemas.openxmlformats.org/officeDocument/2006/relationships">
-  <p:cSld>
-    <p:bg>
-      <p:bgPr>
-        <a:solidFill>
-          <a:srgbClr val="FFFFFF"/>
-        </a:solidFill>
-        <a:effectLst/>
-      </p:bgPr>
-    </p:bg>
-    <p:spTree>
-      <p:nvGrpSpPr>
-        <p:cNvPr id="1" name=""/>
-        <p:cNvGrpSpPr/>
-        <p:nvPr/>
-      </p:nvGrpSpPr>
-      <p:grpSpPr/>
-      <p:sp>
-        <p:nvSpPr>
-          <p:cNvPr id="2" name="Oval 1"/>
-          <p:cNvSpPr/>
-          <p:nvPr/>
-        </p:nvSpPr>
-        <p:spPr>
-          <a:xfrm>
-            <a:off x="548640" y="475488"/>
-            <a:ext cx="658368" cy="658368"/>
-          </a:xfrm>
-          <a:prstGeom prst="ellipse">
-            <a:avLst/>
-          </a:prstGeom>
-          <a:solidFill>
-            <a:srgbClr val="2F6F7A"/>
-          </a:solidFill>
-          <a:ln>
-            <a:noFill/>
-          </a:ln>
-          <a:effectLst/>
-        </p:spPr>
-        <p:style>
-          <a:lnRef idx="1">
-            <a:schemeClr val="accent1"/>
-          </a:lnRef>
-          <a:fillRef idx="3">
-            <a:schemeClr val="accent1"/>
-          </a:fillRef>
-          <a:effectRef idx="2">
-            <a:schemeClr val="accent1"/>
-          </a:effectRef>
-          <a:fontRef idx="minor">
-            <a:schemeClr val="lt1"/>
-          </a:fontRef>
-        </p:style>
-        <p:txBody>
-          <a:bodyPr rtlCol="0" anchor="ctr" lIns="0" rIns="0" tIns="0" bIns="0"/>
-          <a:lstStyle/>
-          <a:p>
-            <a:pPr algn="ctr"/>
-            <a:r>
-              <a:rPr sz="1800" i="0" b="1">
-                <a:solidFill>
-                  <a:srgbClr val="FFFFFF"/>
-                </a:solidFill>
-                <a:latin typeface="Cambria"/>
-              </a:rPr>
-              <a:t>03</a:t>
-            </a:r>
-          </a:p>
-        </p:txBody>
-      </p:sp>
-      <p:sp>
-        <p:nvSpPr>
-          <p:cNvPr id="3" name="TextBox 2"/>
-          <p:cNvSpPr txBox="1"/>
-          <p:nvPr/>
-        </p:nvSpPr>
-        <p:spPr>
-          <a:xfrm>
-            <a:off x="1417319" y="438912"/>
-            <a:ext cx="10180015" cy="292608"/>
-          </a:xfrm>
-          <a:prstGeom prst="rect">
-            <a:avLst/>
-          </a:prstGeom>
-          <a:noFill/>
-        </p:spPr>
-        <p:txBody>
-          <a:bodyPr wrap="square" anchor="t" lIns="0" rIns="0" tIns="0" bIns="0">
-            <a:spAutoFit/>
-          </a:bodyPr>
-          <a:lstStyle/>
-          <a:p>
-            <a:r>
-              <a:rPr sz="1200" i="0" b="1" spc="150">
-                <a:solidFill>
-                  <a:srgbClr val="2F6F7A"/>
-                </a:solidFill>
-                <a:latin typeface="Calibri"/>
-              </a:rPr>
-              <a:t>SECTION 3</a:t>
-            </a:r>
-          </a:p>
-        </p:txBody>
-      </p:sp>
-      <p:sp>
-        <p:nvSpPr>
-          <p:cNvPr id="4" name="TextBox 3"/>
-          <p:cNvSpPr txBox="1"/>
-          <p:nvPr/>
-        </p:nvSpPr>
-        <p:spPr>
-          <a:xfrm>
-            <a:off x="1417319" y="676656"/>
-            <a:ext cx="10180015" cy="640080"/>
-          </a:xfrm>
-          <a:prstGeom prst="rect">
-            <a:avLst/>
-          </a:prstGeom>
-          <a:noFill/>
-        </p:spPr>
-        <p:txBody>
-          <a:bodyPr wrap="square" anchor="t" lIns="0" rIns="0" tIns="0" bIns="0">
-            <a:spAutoFit/>
-          </a:bodyPr>
-          <a:lstStyle/>
-          <a:p>
-            <a:r>
-              <a:rPr sz="3200" i="0" b="1">
-                <a:solidFill>
-                  <a:srgbClr val="2B211C"/>
-                </a:solidFill>
-                <a:latin typeface="Cambria"/>
-              </a:rPr>
-              <a:t>Measures You Will Meet</a:t>
-            </a:r>
-          </a:p>
-        </p:txBody>
-      </p:sp>
-      <p:sp>
-        <p:nvSpPr>
-          <p:cNvPr id="5" name="TextBox 4"/>
-          <p:cNvSpPr txBox="1"/>
-          <p:nvPr/>
-        </p:nvSpPr>
-        <p:spPr>
-          <a:xfrm>
-            <a:off x="548640" y="6419088"/>
-            <a:ext cx="8229600" cy="274320"/>
-          </a:xfrm>
-          <a:prstGeom prst="rect">
-            <a:avLst/>
-          </a:prstGeom>
-          <a:noFill/>
-        </p:spPr>
-        <p:txBody>
-          <a:bodyPr wrap="square" anchor="t" lIns="0" rIns="0" tIns="0" bIns="0">
-            <a:spAutoFit/>
-          </a:bodyPr>
-          <a:lstStyle/>
-          <a:p>
-            <a:r>
-              <a:rPr sz="1200" i="0" b="0">
-                <a:solidFill>
-                  <a:srgbClr val="6E625B"/>
-                </a:solidFill>
-                <a:latin typeface="Calibri"/>
-              </a:rPr>
-              <a:t>Drug Information  ·  Section 3  ·  Study Designs and Levels of Evidence</a:t>
-            </a:r>
-          </a:p>
-        </p:txBody>
-      </p:sp>
-      <p:sp>
-        <p:nvSpPr>
-          <p:cNvPr id="6" name="TextBox 5"/>
-          <p:cNvSpPr txBox="1"/>
-          <p:nvPr/>
-        </p:nvSpPr>
-        <p:spPr>
-          <a:xfrm>
-            <a:off x="10058400" y="6419088"/>
-            <a:ext cx="1097280" cy="274320"/>
-          </a:xfrm>
-          <a:prstGeom prst="rect">
-            <a:avLst/>
-          </a:prstGeom>
-          <a:noFill/>
-        </p:spPr>
-        <p:txBody>
-          <a:bodyPr wrap="square" anchor="t" lIns="0" rIns="0" tIns="0" bIns="0">
-            <a:spAutoFit/>
-          </a:bodyPr>
-          <a:lstStyle/>
-          <a:p>
-            <a:pPr algn="r"/>
-            <a:r>
-              <a:rPr sz="1200" i="0" b="1">
-                <a:solidFill>
-                  <a:srgbClr val="6E625B"/>
-                </a:solidFill>
-                <a:latin typeface="Calibri"/>
-              </a:rPr>
-              <a:t>09 / 26</a:t>
+              <a:t>08 / 25</a:t>
             </a:r>
           </a:p>
         </p:txBody>
@@ -21925,6 +21309,305 @@
           </a:graphicData>
         </a:graphic>
       </p:graphicFrame>
+    </p:spTree>
+  </p:cSld>
+  <p:clrMapOvr>
+    <a:masterClrMapping/>
+  </p:clrMapOvr>
+</p:sld>
+</file>
+
+<file path=ppt/slides/slide9.xml><?xml version="1.0" encoding="utf-8"?>
+<p:sld xmlns:a="http://schemas.openxmlformats.org/drawingml/2006/main" xmlns:p="http://schemas.openxmlformats.org/presentationml/2006/main" xmlns:r="http://schemas.openxmlformats.org/officeDocument/2006/relationships">
+  <p:cSld>
+    <p:bg>
+      <p:bgPr>
+        <a:solidFill>
+          <a:srgbClr val="FFFFFF"/>
+        </a:solidFill>
+        <a:effectLst/>
+      </p:bgPr>
+    </p:bg>
+    <p:spTree>
+      <p:nvGrpSpPr>
+        <p:cNvPr id="1" name=""/>
+        <p:cNvGrpSpPr/>
+        <p:nvPr/>
+      </p:nvGrpSpPr>
+      <p:grpSpPr/>
+      <p:sp>
+        <p:nvSpPr>
+          <p:cNvPr id="2" name="Oval 1"/>
+          <p:cNvSpPr/>
+          <p:nvPr/>
+        </p:nvSpPr>
+        <p:spPr>
+          <a:xfrm>
+            <a:off x="548640" y="475488"/>
+            <a:ext cx="658368" cy="658368"/>
+          </a:xfrm>
+          <a:prstGeom prst="ellipse">
+            <a:avLst/>
+          </a:prstGeom>
+          <a:solidFill>
+            <a:srgbClr val="2F6F7A"/>
+          </a:solidFill>
+          <a:ln>
+            <a:noFill/>
+          </a:ln>
+          <a:effectLst/>
+        </p:spPr>
+        <p:style>
+          <a:lnRef idx="1">
+            <a:schemeClr val="accent1"/>
+          </a:lnRef>
+          <a:fillRef idx="3">
+            <a:schemeClr val="accent1"/>
+          </a:fillRef>
+          <a:effectRef idx="2">
+            <a:schemeClr val="accent1"/>
+          </a:effectRef>
+          <a:fontRef idx="minor">
+            <a:schemeClr val="lt1"/>
+          </a:fontRef>
+        </p:style>
+        <p:txBody>
+          <a:bodyPr rtlCol="0" anchor="ctr" lIns="0" rIns="0" tIns="0" bIns="0"/>
+          <a:lstStyle/>
+          <a:p>
+            <a:pPr algn="ctr"/>
+            <a:r>
+              <a:rPr sz="1800" i="0" b="1">
+                <a:solidFill>
+                  <a:srgbClr val="FFFFFF"/>
+                </a:solidFill>
+                <a:latin typeface="Cambria"/>
+              </a:rPr>
+              <a:t>03</a:t>
+            </a:r>
+          </a:p>
+        </p:txBody>
+      </p:sp>
+      <p:sp>
+        <p:nvSpPr>
+          <p:cNvPr id="3" name="TextBox 2"/>
+          <p:cNvSpPr txBox="1"/>
+          <p:nvPr/>
+        </p:nvSpPr>
+        <p:spPr>
+          <a:xfrm>
+            <a:off x="1417319" y="438912"/>
+            <a:ext cx="10180015" cy="292608"/>
+          </a:xfrm>
+          <a:prstGeom prst="rect">
+            <a:avLst/>
+          </a:prstGeom>
+          <a:noFill/>
+        </p:spPr>
+        <p:txBody>
+          <a:bodyPr wrap="square" anchor="t" lIns="0" rIns="0" tIns="0" bIns="0">
+            <a:spAutoFit/>
+          </a:bodyPr>
+          <a:lstStyle/>
+          <a:p>
+            <a:r>
+              <a:rPr sz="1200" i="0" b="1" spc="150">
+                <a:solidFill>
+                  <a:srgbClr val="2F6F7A"/>
+                </a:solidFill>
+                <a:latin typeface="Calibri"/>
+              </a:rPr>
+              <a:t>SECTION 3</a:t>
+            </a:r>
+          </a:p>
+        </p:txBody>
+      </p:sp>
+      <p:sp>
+        <p:nvSpPr>
+          <p:cNvPr id="4" name="TextBox 3"/>
+          <p:cNvSpPr txBox="1"/>
+          <p:nvPr/>
+        </p:nvSpPr>
+        <p:spPr>
+          <a:xfrm>
+            <a:off x="1417319" y="676656"/>
+            <a:ext cx="10180015" cy="640080"/>
+          </a:xfrm>
+          <a:prstGeom prst="rect">
+            <a:avLst/>
+          </a:prstGeom>
+          <a:noFill/>
+        </p:spPr>
+        <p:txBody>
+          <a:bodyPr wrap="square" anchor="t" lIns="0" rIns="0" tIns="0" bIns="0">
+            <a:spAutoFit/>
+          </a:bodyPr>
+          <a:lstStyle/>
+          <a:p>
+            <a:r>
+              <a:rPr sz="3200" i="0" b="1">
+                <a:solidFill>
+                  <a:srgbClr val="2B211C"/>
+                </a:solidFill>
+                <a:latin typeface="Cambria"/>
+              </a:rPr>
+              <a:t>The Levels of Evidence</a:t>
+            </a:r>
+          </a:p>
+        </p:txBody>
+      </p:sp>
+      <p:sp>
+        <p:nvSpPr>
+          <p:cNvPr id="5" name="TextBox 4"/>
+          <p:cNvSpPr txBox="1"/>
+          <p:nvPr/>
+        </p:nvSpPr>
+        <p:spPr>
+          <a:xfrm>
+            <a:off x="548640" y="6419088"/>
+            <a:ext cx="8229600" cy="274320"/>
+          </a:xfrm>
+          <a:prstGeom prst="rect">
+            <a:avLst/>
+          </a:prstGeom>
+          <a:noFill/>
+        </p:spPr>
+        <p:txBody>
+          <a:bodyPr wrap="square" anchor="t" lIns="0" rIns="0" tIns="0" bIns="0">
+            <a:spAutoFit/>
+          </a:bodyPr>
+          <a:lstStyle/>
+          <a:p>
+            <a:r>
+              <a:rPr sz="1200" i="0" b="0">
+                <a:solidFill>
+                  <a:srgbClr val="6E625B"/>
+                </a:solidFill>
+                <a:latin typeface="Calibri"/>
+              </a:rPr>
+              <a:t>Drug Information  ·  Section 3  ·  Study Designs and Levels of Evidence</a:t>
+            </a:r>
+          </a:p>
+        </p:txBody>
+      </p:sp>
+      <p:sp>
+        <p:nvSpPr>
+          <p:cNvPr id="6" name="TextBox 5"/>
+          <p:cNvSpPr txBox="1"/>
+          <p:nvPr/>
+        </p:nvSpPr>
+        <p:spPr>
+          <a:xfrm>
+            <a:off x="10058400" y="6419088"/>
+            <a:ext cx="1097280" cy="274320"/>
+          </a:xfrm>
+          <a:prstGeom prst="rect">
+            <a:avLst/>
+          </a:prstGeom>
+          <a:noFill/>
+        </p:spPr>
+        <p:txBody>
+          <a:bodyPr wrap="square" anchor="t" lIns="0" rIns="0" tIns="0" bIns="0">
+            <a:spAutoFit/>
+          </a:bodyPr>
+          <a:lstStyle/>
+          <a:p>
+            <a:pPr algn="r"/>
+            <a:r>
+              <a:rPr sz="1200" i="0" b="1">
+                <a:solidFill>
+                  <a:srgbClr val="6E625B"/>
+                </a:solidFill>
+                <a:latin typeface="Calibri"/>
+              </a:rPr>
+              <a:t>09 / 25</a:t>
+            </a:r>
+          </a:p>
+        </p:txBody>
+      </p:sp>
+      <p:pic>
+        <p:nvPicPr>
+          <p:cNvPr id="7" name="Picture 6" descr="logo"/>
+          <p:cNvPicPr>
+            <a:picLocks noChangeAspect="1"/>
+          </p:cNvPicPr>
+          <p:nvPr/>
+        </p:nvPicPr>
+        <p:blipFill>
+          <a:blip r:embed="rId3"/>
+          <a:stretch>
+            <a:fillRect/>
+          </a:stretch>
+        </p:blipFill>
+        <p:spPr>
+          <a:xfrm>
+            <a:off x="11247120" y="6309360"/>
+            <a:ext cx="384048" cy="384048"/>
+          </a:xfrm>
+          <a:prstGeom prst="rect">
+            <a:avLst/>
+          </a:prstGeom>
+        </p:spPr>
+      </p:pic>
+      <p:pic>
+        <p:nvPicPr>
+          <p:cNvPr id="8" name="Picture 7" descr="A six-level pyramid. From the base upward: case reports and expert opinion; case series and cross-sectional studies; case-control studies; cohort studies; randomised controlled trials; systematic reviews and meta-analyses at the top."/>
+          <p:cNvPicPr>
+            <a:picLocks noChangeAspect="1"/>
+          </p:cNvPicPr>
+          <p:nvPr/>
+        </p:nvPicPr>
+        <p:blipFill>
+          <a:blip r:embed="rId4"/>
+          <a:stretch>
+            <a:fillRect/>
+          </a:stretch>
+        </p:blipFill>
+        <p:spPr>
+          <a:xfrm>
+            <a:off x="1363112" y="1554480"/>
+            <a:ext cx="9465470" cy="4206240"/>
+          </a:xfrm>
+          <a:prstGeom prst="rect">
+            <a:avLst/>
+          </a:prstGeom>
+        </p:spPr>
+      </p:pic>
+      <p:sp>
+        <p:nvSpPr>
+          <p:cNvPr id="9" name="TextBox 8"/>
+          <p:cNvSpPr txBox="1"/>
+          <p:nvPr/>
+        </p:nvSpPr>
+        <p:spPr>
+          <a:xfrm>
+            <a:off x="548640" y="5852159"/>
+            <a:ext cx="11094415" cy="365760"/>
+          </a:xfrm>
+          <a:prstGeom prst="rect">
+            <a:avLst/>
+          </a:prstGeom>
+          <a:noFill/>
+        </p:spPr>
+        <p:txBody>
+          <a:bodyPr wrap="square" anchor="t" lIns="0" rIns="0" tIns="0" bIns="0">
+            <a:spAutoFit/>
+          </a:bodyPr>
+          <a:lstStyle/>
+          <a:p>
+            <a:pPr algn="ctr"/>
+            <a:r>
+              <a:rPr sz="1300" i="1" b="0">
+                <a:solidFill>
+                  <a:srgbClr val="6E625B"/>
+                </a:solidFill>
+                <a:latin typeface="Calibri"/>
+              </a:rPr>
+              <a:t>The evidence pyramid: stronger designs control bias better.</a:t>
+            </a:r>
+          </a:p>
+        </p:txBody>
+      </p:sp>
     </p:spTree>
   </p:cSld>
   <p:clrMapOvr>

--- a/projects/drug-information-practical/slides/ch03-study-designs.pptx
+++ b/projects/drug-information-practical/slides/ch03-study-designs.pptx
@@ -5564,7 +5564,7 @@
     <p:bg>
       <p:bgPr>
         <a:solidFill>
-          <a:srgbClr val="FFFFFF"/>
+          <a:srgbClr val="F5EDE3"/>
         </a:solidFill>
         <a:effectLst/>
       </p:bgPr>
@@ -6365,7 +6365,7 @@
     <p:bg>
       <p:bgPr>
         <a:solidFill>
-          <a:srgbClr val="FFFFFF"/>
+          <a:srgbClr val="F5EDE3"/>
         </a:solidFill>
         <a:effectLst/>
       </p:bgPr>
@@ -6973,7 +6973,7 @@
     <p:bg>
       <p:bgPr>
         <a:solidFill>
-          <a:srgbClr val="FFFFFF"/>
+          <a:srgbClr val="F5EDE3"/>
         </a:solidFill>
         <a:effectLst/>
       </p:bgPr>
@@ -7515,7 +7515,7 @@
     <p:bg>
       <p:bgPr>
         <a:solidFill>
-          <a:srgbClr val="FFFFFF"/>
+          <a:srgbClr val="F5EDE3"/>
         </a:solidFill>
         <a:effectLst/>
       </p:bgPr>
@@ -7827,7 +7827,7 @@
     <p:bg>
       <p:bgPr>
         <a:solidFill>
-          <a:srgbClr val="FFFFFF"/>
+          <a:srgbClr val="F5EDE3"/>
         </a:solidFill>
         <a:effectLst/>
       </p:bgPr>
@@ -8633,7 +8633,7 @@
     <p:bg>
       <p:bgPr>
         <a:solidFill>
-          <a:srgbClr val="FFFFFF"/>
+          <a:srgbClr val="F5EDE3"/>
         </a:solidFill>
         <a:effectLst/>
       </p:bgPr>
@@ -9482,7 +9482,7 @@
     <p:bg>
       <p:bgPr>
         <a:solidFill>
-          <a:srgbClr val="FFFFFF"/>
+          <a:srgbClr val="F5EDE3"/>
         </a:solidFill>
         <a:effectLst/>
       </p:bgPr>
@@ -10288,7 +10288,7 @@
     <p:bg>
       <p:bgPr>
         <a:solidFill>
-          <a:srgbClr val="FFFFFF"/>
+          <a:srgbClr val="F5EDE3"/>
         </a:solidFill>
         <a:effectLst/>
       </p:bgPr>
@@ -11137,7 +11137,7 @@
     <p:bg>
       <p:bgPr>
         <a:solidFill>
-          <a:srgbClr val="FFFFFF"/>
+          <a:srgbClr val="F5EDE3"/>
         </a:solidFill>
         <a:effectLst/>
       </p:bgPr>
@@ -11943,7 +11943,7 @@
     <p:bg>
       <p:bgPr>
         <a:solidFill>
-          <a:srgbClr val="FFFFFF"/>
+          <a:srgbClr val="F5EDE3"/>
         </a:solidFill>
         <a:effectLst/>
       </p:bgPr>
@@ -12792,7 +12792,7 @@
     <p:bg>
       <p:bgPr>
         <a:solidFill>
-          <a:srgbClr val="FFFFFF"/>
+          <a:srgbClr val="F5EDE3"/>
         </a:solidFill>
         <a:effectLst/>
       </p:bgPr>
@@ -13530,7 +13530,7 @@
     <p:bg>
       <p:bgPr>
         <a:solidFill>
-          <a:srgbClr val="FFFFFF"/>
+          <a:srgbClr val="F5EDE3"/>
         </a:solidFill>
         <a:effectLst/>
       </p:bgPr>
@@ -14336,7 +14336,7 @@
     <p:bg>
       <p:bgPr>
         <a:solidFill>
-          <a:srgbClr val="FFFFFF"/>
+          <a:srgbClr val="F5EDE3"/>
         </a:solidFill>
         <a:effectLst/>
       </p:bgPr>
@@ -15185,7 +15185,7 @@
     <p:bg>
       <p:bgPr>
         <a:solidFill>
-          <a:srgbClr val="FFFFFF"/>
+          <a:srgbClr val="F5EDE3"/>
         </a:solidFill>
         <a:effectLst/>
       </p:bgPr>
@@ -15991,7 +15991,7 @@
     <p:bg>
       <p:bgPr>
         <a:solidFill>
-          <a:srgbClr val="FFFFFF"/>
+          <a:srgbClr val="F5EDE3"/>
         </a:solidFill>
         <a:effectLst/>
       </p:bgPr>
@@ -16840,7 +16840,7 @@
     <p:bg>
       <p:bgPr>
         <a:solidFill>
-          <a:srgbClr val="FFFFFF"/>
+          <a:srgbClr val="F5EDE3"/>
         </a:solidFill>
         <a:effectLst/>
       </p:bgPr>
@@ -17693,7 +17693,7 @@
     <p:bg>
       <p:bgPr>
         <a:solidFill>
-          <a:srgbClr val="FFFFFF"/>
+          <a:srgbClr val="F5EDE3"/>
         </a:solidFill>
         <a:effectLst/>
       </p:bgPr>
@@ -18368,7 +18368,7 @@
     <p:bg>
       <p:bgPr>
         <a:solidFill>
-          <a:srgbClr val="FFFFFF"/>
+          <a:srgbClr val="F5EDE3"/>
         </a:solidFill>
         <a:effectLst/>
       </p:bgPr>
@@ -18891,7 +18891,7 @@
     <p:bg>
       <p:bgPr>
         <a:solidFill>
-          <a:srgbClr val="FFFFFF"/>
+          <a:srgbClr val="F5EDE3"/>
         </a:solidFill>
         <a:effectLst/>
       </p:bgPr>
@@ -19992,7 +19992,7 @@
     <p:bg>
       <p:bgPr>
         <a:solidFill>
-          <a:srgbClr val="FFFFFF"/>
+          <a:srgbClr val="F5EDE3"/>
         </a:solidFill>
         <a:effectLst/>
       </p:bgPr>
@@ -20403,7 +20403,7 @@
     <p:bg>
       <p:bgPr>
         <a:solidFill>
-          <a:srgbClr val="FFFFFF"/>
+          <a:srgbClr val="F5EDE3"/>
         </a:solidFill>
         <a:effectLst/>
       </p:bgPr>
@@ -20716,7 +20716,7 @@
     <p:bg>
       <p:bgPr>
         <a:solidFill>
-          <a:srgbClr val="FFFFFF"/>
+          <a:srgbClr val="F5EDE3"/>
         </a:solidFill>
         <a:effectLst/>
       </p:bgPr>
@@ -21323,7 +21323,7 @@
     <p:bg>
       <p:bgPr>
         <a:solidFill>
-          <a:srgbClr val="FFFFFF"/>
+          <a:srgbClr val="F5EDE3"/>
         </a:solidFill>
         <a:effectLst/>
       </p:bgPr>
